--- a/wla-vip-121-deck.pptx
+++ b/wla-vip-121-deck.pptx
@@ -3394,7 +3394,7 @@
               </a:lnSpc>
             </a:pPr>
             <a:r>
-              <a:rPr sz="1900" b="0" i="1">
+              <a:rPr sz="2000" b="0" i="1">
                 <a:solidFill>
                   <a:srgbClr val="5A6478"/>
                 </a:solidFill>
@@ -3677,7 +3677,7 @@
               </a:spcAft>
             </a:pPr>
             <a:r>
-              <a:rPr sz="1900" b="0" i="0">
+              <a:rPr sz="2100" b="0" i="0">
                 <a:solidFill>
                   <a:srgbClr val="F4EBDC"/>
                 </a:solidFill>
@@ -3700,84 +3700,6 @@
                 <a:latin typeface="Libre Baskerville"/>
               </a:rPr>
               <a:t>It’s not the plan. It’s the support, accountability and feedback.</a:t>
-            </a:r>
-          </a:p>
-        </p:txBody>
-      </p:sp>
-      <p:sp>
-        <p:nvSpPr>
-          <p:cNvPr id="7" name="TextBox 6"/>
-          <p:cNvSpPr txBox="1"/>
-          <p:nvPr/>
-        </p:nvSpPr>
-        <p:spPr>
-          <a:xfrm>
-            <a:off x="640080" y="6382512"/>
-            <a:ext cx="7315200" cy="365760"/>
-          </a:xfrm>
-          <a:prstGeom prst="rect">
-            <a:avLst/>
-          </a:prstGeom>
-          <a:noFill/>
-        </p:spPr>
-        <p:txBody>
-          <a:bodyPr wrap="square" lIns="0" rIns="0" tIns="0" bIns="0" anchor="t">
-            <a:spAutoFit/>
-          </a:bodyPr>
-          <a:lstStyle/>
-          <a:p>
-            <a:pPr algn="l">
-              <a:lnSpc>
-                <a:spcPct val="120000"/>
-              </a:lnSpc>
-            </a:pPr>
-            <a:r>
-              <a:rPr sz="1250" b="0" i="1">
-                <a:solidFill>
-                  <a:srgbClr val="F4EBDC"/>
-                </a:solidFill>
-                <a:latin typeface="Libre Baskerville"/>
-              </a:rPr>
-              <a:t>The Weight Loss Academy</a:t>
-            </a:r>
-          </a:p>
-        </p:txBody>
-      </p:sp>
-      <p:sp>
-        <p:nvSpPr>
-          <p:cNvPr id="8" name="TextBox 7"/>
-          <p:cNvSpPr txBox="1"/>
-          <p:nvPr/>
-        </p:nvSpPr>
-        <p:spPr>
-          <a:xfrm>
-            <a:off x="6949440" y="6382512"/>
-            <a:ext cx="4572000" cy="365760"/>
-          </a:xfrm>
-          <a:prstGeom prst="rect">
-            <a:avLst/>
-          </a:prstGeom>
-          <a:noFill/>
-        </p:spPr>
-        <p:txBody>
-          <a:bodyPr wrap="square" lIns="0" rIns="0" tIns="0" bIns="0" anchor="t">
-            <a:spAutoFit/>
-          </a:bodyPr>
-          <a:lstStyle/>
-          <a:p>
-            <a:pPr algn="r">
-              <a:lnSpc>
-                <a:spcPct val="120000"/>
-              </a:lnSpc>
-            </a:pPr>
-            <a:r>
-              <a:rPr sz="1100" b="1" i="0" spc="200">
-                <a:solidFill>
-                  <a:srgbClr val="F4EBDC"/>
-                </a:solidFill>
-                <a:latin typeface="Alegreya Sans"/>
-              </a:rPr>
-              <a:t>VIP 1-2-1 PERSONAL COACHING</a:t>
             </a:r>
           </a:p>
         </p:txBody>
@@ -4006,7 +3928,7 @@
               </a:spcAft>
             </a:pPr>
             <a:r>
-              <a:rPr sz="1900" b="0" i="0">
+              <a:rPr sz="2100" b="0" i="0">
                 <a:solidFill>
                   <a:srgbClr val="333333"/>
                 </a:solidFill>
@@ -4029,84 +3951,6 @@
                 <a:latin typeface="Libre Baskerville"/>
               </a:rPr>
               <a:t>Not because they don’t care — because they’re trying to do it alone. That’s exactly why VIP works.</a:t>
-            </a:r>
-          </a:p>
-        </p:txBody>
-      </p:sp>
-      <p:sp>
-        <p:nvSpPr>
-          <p:cNvPr id="7" name="TextBox 6"/>
-          <p:cNvSpPr txBox="1"/>
-          <p:nvPr/>
-        </p:nvSpPr>
-        <p:spPr>
-          <a:xfrm>
-            <a:off x="640080" y="6382512"/>
-            <a:ext cx="7315200" cy="365760"/>
-          </a:xfrm>
-          <a:prstGeom prst="rect">
-            <a:avLst/>
-          </a:prstGeom>
-          <a:noFill/>
-        </p:spPr>
-        <p:txBody>
-          <a:bodyPr wrap="square" lIns="0" rIns="0" tIns="0" bIns="0" anchor="t">
-            <a:spAutoFit/>
-          </a:bodyPr>
-          <a:lstStyle/>
-          <a:p>
-            <a:pPr algn="l">
-              <a:lnSpc>
-                <a:spcPct val="120000"/>
-              </a:lnSpc>
-            </a:pPr>
-            <a:r>
-              <a:rPr sz="1250" b="0" i="1">
-                <a:solidFill>
-                  <a:srgbClr val="5A6478"/>
-                </a:solidFill>
-                <a:latin typeface="Libre Baskerville"/>
-              </a:rPr>
-              <a:t>The Weight Loss Academy</a:t>
-            </a:r>
-          </a:p>
-        </p:txBody>
-      </p:sp>
-      <p:sp>
-        <p:nvSpPr>
-          <p:cNvPr id="8" name="TextBox 7"/>
-          <p:cNvSpPr txBox="1"/>
-          <p:nvPr/>
-        </p:nvSpPr>
-        <p:spPr>
-          <a:xfrm>
-            <a:off x="6949440" y="6382512"/>
-            <a:ext cx="4572000" cy="365760"/>
-          </a:xfrm>
-          <a:prstGeom prst="rect">
-            <a:avLst/>
-          </a:prstGeom>
-          <a:noFill/>
-        </p:spPr>
-        <p:txBody>
-          <a:bodyPr wrap="square" lIns="0" rIns="0" tIns="0" bIns="0" anchor="t">
-            <a:spAutoFit/>
-          </a:bodyPr>
-          <a:lstStyle/>
-          <a:p>
-            <a:pPr algn="r">
-              <a:lnSpc>
-                <a:spcPct val="120000"/>
-              </a:lnSpc>
-            </a:pPr>
-            <a:r>
-              <a:rPr sz="1100" b="1" i="0" spc="200">
-                <a:solidFill>
-                  <a:srgbClr val="5A6478"/>
-                </a:solidFill>
-                <a:latin typeface="Alegreya Sans"/>
-              </a:rPr>
-              <a:t>VIP 1-2-1 PERSONAL COACHING</a:t>
             </a:r>
           </a:p>
         </p:txBody>
@@ -4321,7 +4165,7 @@
         </p:nvSpPr>
         <p:spPr>
           <a:xfrm>
-            <a:off x="868680" y="3157537"/>
+            <a:off x="868680" y="3171825"/>
             <a:ext cx="118872" cy="118872"/>
           </a:xfrm>
           <a:prstGeom prst="ellipse">
@@ -4385,7 +4229,7 @@
               </a:lnSpc>
             </a:pPr>
             <a:r>
-              <a:rPr sz="1650" b="0" i="0">
+              <a:rPr sz="1900" b="0" i="0">
                 <a:solidFill>
                   <a:srgbClr val="333333"/>
                 </a:solidFill>
@@ -4404,7 +4248,7 @@
         </p:nvSpPr>
         <p:spPr>
           <a:xfrm>
-            <a:off x="6263640" y="3157537"/>
+            <a:off x="6263640" y="3171825"/>
             <a:ext cx="118872" cy="118872"/>
           </a:xfrm>
           <a:prstGeom prst="ellipse">
@@ -4468,7 +4312,7 @@
               </a:lnSpc>
             </a:pPr>
             <a:r>
-              <a:rPr sz="1650" b="0" i="0">
+              <a:rPr sz="1900" b="0" i="0">
                 <a:solidFill>
                   <a:srgbClr val="333333"/>
                 </a:solidFill>
@@ -4487,7 +4331,7 @@
         </p:nvSpPr>
         <p:spPr>
           <a:xfrm>
-            <a:off x="868680" y="3907345"/>
+            <a:off x="868680" y="3921633"/>
             <a:ext cx="118872" cy="118872"/>
           </a:xfrm>
           <a:prstGeom prst="ellipse">
@@ -4551,7 +4395,7 @@
               </a:lnSpc>
             </a:pPr>
             <a:r>
-              <a:rPr sz="1650" b="0" i="0">
+              <a:rPr sz="1900" b="0" i="0">
                 <a:solidFill>
                   <a:srgbClr val="333333"/>
                 </a:solidFill>
@@ -4570,7 +4414,7 @@
         </p:nvSpPr>
         <p:spPr>
           <a:xfrm>
-            <a:off x="6263640" y="3907345"/>
+            <a:off x="6263640" y="3921633"/>
             <a:ext cx="118872" cy="118872"/>
           </a:xfrm>
           <a:prstGeom prst="ellipse">
@@ -4634,7 +4478,7 @@
               </a:lnSpc>
             </a:pPr>
             <a:r>
-              <a:rPr sz="1650" b="0" i="0">
+              <a:rPr sz="1900" b="0" i="0">
                 <a:solidFill>
                   <a:srgbClr val="333333"/>
                 </a:solidFill>
@@ -4653,7 +4497,7 @@
         </p:nvSpPr>
         <p:spPr>
           <a:xfrm>
-            <a:off x="868680" y="4657153"/>
+            <a:off x="868680" y="4671441"/>
             <a:ext cx="118872" cy="118872"/>
           </a:xfrm>
           <a:prstGeom prst="ellipse">
@@ -4717,7 +4561,7 @@
               </a:lnSpc>
             </a:pPr>
             <a:r>
-              <a:rPr sz="1650" b="0" i="0">
+              <a:rPr sz="1900" b="0" i="0">
                 <a:solidFill>
                   <a:srgbClr val="333333"/>
                 </a:solidFill>
@@ -4736,7 +4580,7 @@
         </p:nvSpPr>
         <p:spPr>
           <a:xfrm>
-            <a:off x="6263640" y="4657153"/>
+            <a:off x="6263640" y="4671441"/>
             <a:ext cx="118872" cy="118872"/>
           </a:xfrm>
           <a:prstGeom prst="ellipse">
@@ -4800,91 +4644,13 @@
               </a:lnSpc>
             </a:pPr>
             <a:r>
-              <a:rPr sz="1650" b="0" i="0">
+              <a:rPr sz="1900" b="0" i="0">
                 <a:solidFill>
                   <a:srgbClr val="333333"/>
                 </a:solidFill>
                 <a:latin typeface="Alegreya Sans"/>
               </a:rPr>
               <a:t>Knowing exactly how to eat to lose weight and keep it off</a:t>
-            </a:r>
-          </a:p>
-        </p:txBody>
-      </p:sp>
-      <p:sp>
-        <p:nvSpPr>
-          <p:cNvPr id="18" name="TextBox 17"/>
-          <p:cNvSpPr txBox="1"/>
-          <p:nvPr/>
-        </p:nvSpPr>
-        <p:spPr>
-          <a:xfrm>
-            <a:off x="640080" y="6382512"/>
-            <a:ext cx="7315200" cy="365760"/>
-          </a:xfrm>
-          <a:prstGeom prst="rect">
-            <a:avLst/>
-          </a:prstGeom>
-          <a:noFill/>
-        </p:spPr>
-        <p:txBody>
-          <a:bodyPr wrap="square" lIns="0" rIns="0" tIns="0" bIns="0" anchor="t">
-            <a:spAutoFit/>
-          </a:bodyPr>
-          <a:lstStyle/>
-          <a:p>
-            <a:pPr algn="l">
-              <a:lnSpc>
-                <a:spcPct val="120000"/>
-              </a:lnSpc>
-            </a:pPr>
-            <a:r>
-              <a:rPr sz="1250" b="0" i="1">
-                <a:solidFill>
-                  <a:srgbClr val="5A6478"/>
-                </a:solidFill>
-                <a:latin typeface="Libre Baskerville"/>
-              </a:rPr>
-              <a:t>The Weight Loss Academy</a:t>
-            </a:r>
-          </a:p>
-        </p:txBody>
-      </p:sp>
-      <p:sp>
-        <p:nvSpPr>
-          <p:cNvPr id="19" name="TextBox 18"/>
-          <p:cNvSpPr txBox="1"/>
-          <p:nvPr/>
-        </p:nvSpPr>
-        <p:spPr>
-          <a:xfrm>
-            <a:off x="6949440" y="6382512"/>
-            <a:ext cx="4572000" cy="365760"/>
-          </a:xfrm>
-          <a:prstGeom prst="rect">
-            <a:avLst/>
-          </a:prstGeom>
-          <a:noFill/>
-        </p:spPr>
-        <p:txBody>
-          <a:bodyPr wrap="square" lIns="0" rIns="0" tIns="0" bIns="0" anchor="t">
-            <a:spAutoFit/>
-          </a:bodyPr>
-          <a:lstStyle/>
-          <a:p>
-            <a:pPr algn="r">
-              <a:lnSpc>
-                <a:spcPct val="120000"/>
-              </a:lnSpc>
-            </a:pPr>
-            <a:r>
-              <a:rPr sz="1100" b="1" i="0" spc="200">
-                <a:solidFill>
-                  <a:srgbClr val="5A6478"/>
-                </a:solidFill>
-                <a:latin typeface="Alegreya Sans"/>
-              </a:rPr>
-              <a:t>VIP 1-2-1 PERSONAL COACHING</a:t>
             </a:r>
           </a:p>
         </p:txBody>
@@ -5167,7 +4933,7 @@
               </a:lnSpc>
             </a:pPr>
             <a:r>
-              <a:rPr sz="1300" b="1" i="0" spc="150">
+              <a:rPr sz="1400" b="1" i="0" spc="150">
                 <a:solidFill>
                   <a:srgbClr val="D97757"/>
                 </a:solidFill>
@@ -5206,7 +4972,7 @@
               </a:lnSpc>
             </a:pPr>
             <a:r>
-              <a:rPr sz="1350" b="0" i="0">
+              <a:rPr sz="1500" b="0" i="0">
                 <a:solidFill>
                   <a:srgbClr val="333333"/>
                 </a:solidFill>
@@ -5293,7 +5059,7 @@
               </a:lnSpc>
             </a:pPr>
             <a:r>
-              <a:rPr sz="1300" b="1" i="0" spc="150">
+              <a:rPr sz="1400" b="1" i="0" spc="150">
                 <a:solidFill>
                   <a:srgbClr val="D97757"/>
                 </a:solidFill>
@@ -5332,7 +5098,7 @@
               </a:lnSpc>
             </a:pPr>
             <a:r>
-              <a:rPr sz="1350" b="0" i="0">
+              <a:rPr sz="1500" b="0" i="0">
                 <a:solidFill>
                   <a:srgbClr val="333333"/>
                 </a:solidFill>
@@ -5419,7 +5185,7 @@
               </a:lnSpc>
             </a:pPr>
             <a:r>
-              <a:rPr sz="1300" b="1" i="0" spc="150">
+              <a:rPr sz="1400" b="1" i="0" spc="150">
                 <a:solidFill>
                   <a:srgbClr val="D97757"/>
                 </a:solidFill>
@@ -5458,7 +5224,7 @@
               </a:lnSpc>
             </a:pPr>
             <a:r>
-              <a:rPr sz="1350" b="0" i="0">
+              <a:rPr sz="1500" b="0" i="0">
                 <a:solidFill>
                   <a:srgbClr val="333333"/>
                 </a:solidFill>
@@ -5545,7 +5311,7 @@
               </a:lnSpc>
             </a:pPr>
             <a:r>
-              <a:rPr sz="1300" b="1" i="0" spc="150">
+              <a:rPr sz="1400" b="1" i="0" spc="150">
                 <a:solidFill>
                   <a:srgbClr val="D97757"/>
                 </a:solidFill>
@@ -5584,7 +5350,7 @@
               </a:lnSpc>
             </a:pPr>
             <a:r>
-              <a:rPr sz="1350" b="0" i="0">
+              <a:rPr sz="1500" b="0" i="0">
                 <a:solidFill>
                   <a:srgbClr val="333333"/>
                 </a:solidFill>
@@ -5671,7 +5437,7 @@
               </a:lnSpc>
             </a:pPr>
             <a:r>
-              <a:rPr sz="1300" b="1" i="0" spc="150">
+              <a:rPr sz="1400" b="1" i="0" spc="150">
                 <a:solidFill>
                   <a:srgbClr val="D97757"/>
                 </a:solidFill>
@@ -5710,7 +5476,7 @@
               </a:lnSpc>
             </a:pPr>
             <a:r>
-              <a:rPr sz="1350" b="0" i="0">
+              <a:rPr sz="1500" b="0" i="0">
                 <a:solidFill>
                   <a:srgbClr val="333333"/>
                 </a:solidFill>
@@ -5797,7 +5563,7 @@
               </a:lnSpc>
             </a:pPr>
             <a:r>
-              <a:rPr sz="1300" b="1" i="0" spc="150">
+              <a:rPr sz="1400" b="1" i="0" spc="150">
                 <a:solidFill>
                   <a:srgbClr val="D97757"/>
                 </a:solidFill>
@@ -5836,91 +5602,13 @@
               </a:lnSpc>
             </a:pPr>
             <a:r>
-              <a:rPr sz="1350" b="0" i="0">
+              <a:rPr sz="1500" b="0" i="0">
                 <a:solidFill>
                   <a:srgbClr val="333333"/>
                 </a:solidFill>
                 <a:latin typeface="Alegreya Sans"/>
               </a:rPr>
               <a:t>Want weekend handholding so you don’t undo your hard work?</a:t>
-            </a:r>
-          </a:p>
-        </p:txBody>
-      </p:sp>
-      <p:sp>
-        <p:nvSpPr>
-          <p:cNvPr id="24" name="TextBox 23"/>
-          <p:cNvSpPr txBox="1"/>
-          <p:nvPr/>
-        </p:nvSpPr>
-        <p:spPr>
-          <a:xfrm>
-            <a:off x="640080" y="6382512"/>
-            <a:ext cx="7315200" cy="365760"/>
-          </a:xfrm>
-          <a:prstGeom prst="rect">
-            <a:avLst/>
-          </a:prstGeom>
-          <a:noFill/>
-        </p:spPr>
-        <p:txBody>
-          <a:bodyPr wrap="square" lIns="0" rIns="0" tIns="0" bIns="0" anchor="t">
-            <a:spAutoFit/>
-          </a:bodyPr>
-          <a:lstStyle/>
-          <a:p>
-            <a:pPr algn="l">
-              <a:lnSpc>
-                <a:spcPct val="120000"/>
-              </a:lnSpc>
-            </a:pPr>
-            <a:r>
-              <a:rPr sz="1250" b="0" i="1">
-                <a:solidFill>
-                  <a:srgbClr val="5A6478"/>
-                </a:solidFill>
-                <a:latin typeface="Libre Baskerville"/>
-              </a:rPr>
-              <a:t>The Weight Loss Academy</a:t>
-            </a:r>
-          </a:p>
-        </p:txBody>
-      </p:sp>
-      <p:sp>
-        <p:nvSpPr>
-          <p:cNvPr id="25" name="TextBox 24"/>
-          <p:cNvSpPr txBox="1"/>
-          <p:nvPr/>
-        </p:nvSpPr>
-        <p:spPr>
-          <a:xfrm>
-            <a:off x="6949440" y="6382512"/>
-            <a:ext cx="4572000" cy="365760"/>
-          </a:xfrm>
-          <a:prstGeom prst="rect">
-            <a:avLst/>
-          </a:prstGeom>
-          <a:noFill/>
-        </p:spPr>
-        <p:txBody>
-          <a:bodyPr wrap="square" lIns="0" rIns="0" tIns="0" bIns="0" anchor="t">
-            <a:spAutoFit/>
-          </a:bodyPr>
-          <a:lstStyle/>
-          <a:p>
-            <a:pPr algn="r">
-              <a:lnSpc>
-                <a:spcPct val="120000"/>
-              </a:lnSpc>
-            </a:pPr>
-            <a:r>
-              <a:rPr sz="1100" b="1" i="0" spc="200">
-                <a:solidFill>
-                  <a:srgbClr val="5A6478"/>
-                </a:solidFill>
-                <a:latin typeface="Alegreya Sans"/>
-              </a:rPr>
-              <a:t>VIP 1-2-1 PERSONAL COACHING</a:t>
             </a:r>
           </a:p>
         </p:txBody>
@@ -6203,91 +5891,13 @@
               </a:lnSpc>
             </a:pPr>
             <a:r>
-              <a:rPr sz="1800" b="0" i="1">
+              <a:rPr sz="2000" b="0" i="1">
                 <a:solidFill>
                   <a:srgbClr val="5A6478"/>
                 </a:solidFill>
                 <a:latin typeface="Libre Baskerville"/>
               </a:rPr>
               <a:t>“VIP has changed my life. I did WLA resets and group for 2 years and didn’t achieve half of what I have in VIP. It’s just so different.”</a:t>
-            </a:r>
-          </a:p>
-        </p:txBody>
-      </p:sp>
-      <p:sp>
-        <p:nvSpPr>
-          <p:cNvPr id="8" name="TextBox 7"/>
-          <p:cNvSpPr txBox="1"/>
-          <p:nvPr/>
-        </p:nvSpPr>
-        <p:spPr>
-          <a:xfrm>
-            <a:off x="640080" y="6382512"/>
-            <a:ext cx="7315200" cy="365760"/>
-          </a:xfrm>
-          <a:prstGeom prst="rect">
-            <a:avLst/>
-          </a:prstGeom>
-          <a:noFill/>
-        </p:spPr>
-        <p:txBody>
-          <a:bodyPr wrap="square" lIns="0" rIns="0" tIns="0" bIns="0" anchor="t">
-            <a:spAutoFit/>
-          </a:bodyPr>
-          <a:lstStyle/>
-          <a:p>
-            <a:pPr algn="l">
-              <a:lnSpc>
-                <a:spcPct val="120000"/>
-              </a:lnSpc>
-            </a:pPr>
-            <a:r>
-              <a:rPr sz="1250" b="0" i="1">
-                <a:solidFill>
-                  <a:srgbClr val="5A6478"/>
-                </a:solidFill>
-                <a:latin typeface="Libre Baskerville"/>
-              </a:rPr>
-              <a:t>The Weight Loss Academy</a:t>
-            </a:r>
-          </a:p>
-        </p:txBody>
-      </p:sp>
-      <p:sp>
-        <p:nvSpPr>
-          <p:cNvPr id="9" name="TextBox 8"/>
-          <p:cNvSpPr txBox="1"/>
-          <p:nvPr/>
-        </p:nvSpPr>
-        <p:spPr>
-          <a:xfrm>
-            <a:off x="6949440" y="6382512"/>
-            <a:ext cx="4572000" cy="365760"/>
-          </a:xfrm>
-          <a:prstGeom prst="rect">
-            <a:avLst/>
-          </a:prstGeom>
-          <a:noFill/>
-        </p:spPr>
-        <p:txBody>
-          <a:bodyPr wrap="square" lIns="0" rIns="0" tIns="0" bIns="0" anchor="t">
-            <a:spAutoFit/>
-          </a:bodyPr>
-          <a:lstStyle/>
-          <a:p>
-            <a:pPr algn="r">
-              <a:lnSpc>
-                <a:spcPct val="120000"/>
-              </a:lnSpc>
-            </a:pPr>
-            <a:r>
-              <a:rPr sz="1100" b="1" i="0" spc="200">
-                <a:solidFill>
-                  <a:srgbClr val="5A6478"/>
-                </a:solidFill>
-                <a:latin typeface="Alegreya Sans"/>
-              </a:rPr>
-              <a:t>VIP 1-2-1 PERSONAL COACHING</a:t>
             </a:r>
           </a:p>
         </p:txBody>
@@ -6622,91 +6232,13 @@
               </a:lnSpc>
             </a:pPr>
             <a:r>
-              <a:rPr sz="1700" b="0" i="1">
+              <a:rPr sz="1900" b="0" i="1">
                 <a:solidFill>
                   <a:srgbClr val="F4EBDC"/>
                 </a:solidFill>
                 <a:latin typeface="Libre Baskerville"/>
               </a:rPr>
               <a:t>From 1 to 4 stone down — in 1-2-1 VIP coaching with Anna.</a:t>
-            </a:r>
-          </a:p>
-        </p:txBody>
-      </p:sp>
-      <p:sp>
-        <p:nvSpPr>
-          <p:cNvPr id="11" name="TextBox 10"/>
-          <p:cNvSpPr txBox="1"/>
-          <p:nvPr/>
-        </p:nvSpPr>
-        <p:spPr>
-          <a:xfrm>
-            <a:off x="640080" y="6382512"/>
-            <a:ext cx="7315200" cy="365760"/>
-          </a:xfrm>
-          <a:prstGeom prst="rect">
-            <a:avLst/>
-          </a:prstGeom>
-          <a:noFill/>
-        </p:spPr>
-        <p:txBody>
-          <a:bodyPr wrap="square" lIns="0" rIns="0" tIns="0" bIns="0" anchor="t">
-            <a:spAutoFit/>
-          </a:bodyPr>
-          <a:lstStyle/>
-          <a:p>
-            <a:pPr algn="l">
-              <a:lnSpc>
-                <a:spcPct val="120000"/>
-              </a:lnSpc>
-            </a:pPr>
-            <a:r>
-              <a:rPr sz="1250" b="0" i="1">
-                <a:solidFill>
-                  <a:srgbClr val="F4EBDC"/>
-                </a:solidFill>
-                <a:latin typeface="Libre Baskerville"/>
-              </a:rPr>
-              <a:t>The Weight Loss Academy</a:t>
-            </a:r>
-          </a:p>
-        </p:txBody>
-      </p:sp>
-      <p:sp>
-        <p:nvSpPr>
-          <p:cNvPr id="12" name="TextBox 11"/>
-          <p:cNvSpPr txBox="1"/>
-          <p:nvPr/>
-        </p:nvSpPr>
-        <p:spPr>
-          <a:xfrm>
-            <a:off x="6949440" y="6382512"/>
-            <a:ext cx="4572000" cy="365760"/>
-          </a:xfrm>
-          <a:prstGeom prst="rect">
-            <a:avLst/>
-          </a:prstGeom>
-          <a:noFill/>
-        </p:spPr>
-        <p:txBody>
-          <a:bodyPr wrap="square" lIns="0" rIns="0" tIns="0" bIns="0" anchor="t">
-            <a:spAutoFit/>
-          </a:bodyPr>
-          <a:lstStyle/>
-          <a:p>
-            <a:pPr algn="r">
-              <a:lnSpc>
-                <a:spcPct val="120000"/>
-              </a:lnSpc>
-            </a:pPr>
-            <a:r>
-              <a:rPr sz="1100" b="1" i="0" spc="200">
-                <a:solidFill>
-                  <a:srgbClr val="F4EBDC"/>
-                </a:solidFill>
-                <a:latin typeface="Alegreya Sans"/>
-              </a:rPr>
-              <a:t>VIP 1-2-1 PERSONAL COACHING</a:t>
             </a:r>
           </a:p>
         </p:txBody>
@@ -6988,7 +6520,7 @@
               </a:spcAft>
             </a:pPr>
             <a:r>
-              <a:rPr sz="1600" b="1" i="0">
+              <a:rPr sz="1800" b="1" i="0">
                 <a:solidFill>
                   <a:srgbClr val="0E2746"/>
                 </a:solidFill>
@@ -7004,7 +6536,7 @@
               </a:lnSpc>
             </a:pPr>
             <a:r>
-              <a:rPr sz="1300" b="0" i="0">
+              <a:rPr sz="1500" b="0" i="0">
                 <a:solidFill>
                   <a:srgbClr val="5A6478"/>
                 </a:solidFill>
@@ -7099,7 +6631,7 @@
               </a:spcAft>
             </a:pPr>
             <a:r>
-              <a:rPr sz="1600" b="1" i="0">
+              <a:rPr sz="1800" b="1" i="0">
                 <a:solidFill>
                   <a:srgbClr val="0E2746"/>
                 </a:solidFill>
@@ -7115,7 +6647,7 @@
               </a:lnSpc>
             </a:pPr>
             <a:r>
-              <a:rPr sz="1300" b="0" i="0">
+              <a:rPr sz="1500" b="0" i="0">
                 <a:solidFill>
                   <a:srgbClr val="5A6478"/>
                 </a:solidFill>
@@ -7210,7 +6742,7 @@
               </a:spcAft>
             </a:pPr>
             <a:r>
-              <a:rPr sz="1600" b="1" i="0">
+              <a:rPr sz="1800" b="1" i="0">
                 <a:solidFill>
                   <a:srgbClr val="0E2746"/>
                 </a:solidFill>
@@ -7226,7 +6758,7 @@
               </a:lnSpc>
             </a:pPr>
             <a:r>
-              <a:rPr sz="1300" b="0" i="0">
+              <a:rPr sz="1500" b="0" i="0">
                 <a:solidFill>
                   <a:srgbClr val="5A6478"/>
                 </a:solidFill>
@@ -7321,7 +6853,7 @@
               </a:spcAft>
             </a:pPr>
             <a:r>
-              <a:rPr sz="1600" b="1" i="0">
+              <a:rPr sz="1800" b="1" i="0">
                 <a:solidFill>
                   <a:srgbClr val="0E2746"/>
                 </a:solidFill>
@@ -7337,7 +6869,7 @@
               </a:lnSpc>
             </a:pPr>
             <a:r>
-              <a:rPr sz="1300" b="0" i="0">
+              <a:rPr sz="1500" b="0" i="0">
                 <a:solidFill>
                   <a:srgbClr val="5A6478"/>
                 </a:solidFill>
@@ -7432,7 +6964,7 @@
               </a:spcAft>
             </a:pPr>
             <a:r>
-              <a:rPr sz="1600" b="1" i="0">
+              <a:rPr sz="1800" b="1" i="0">
                 <a:solidFill>
                   <a:srgbClr val="0E2746"/>
                 </a:solidFill>
@@ -7448,7 +6980,7 @@
               </a:lnSpc>
             </a:pPr>
             <a:r>
-              <a:rPr sz="1300" b="0" i="0">
+              <a:rPr sz="1500" b="0" i="0">
                 <a:solidFill>
                   <a:srgbClr val="5A6478"/>
                 </a:solidFill>
@@ -7543,7 +7075,7 @@
               </a:spcAft>
             </a:pPr>
             <a:r>
-              <a:rPr sz="1600" b="1" i="0">
+              <a:rPr sz="1800" b="1" i="0">
                 <a:solidFill>
                   <a:srgbClr val="0E2746"/>
                 </a:solidFill>
@@ -7559,7 +7091,7 @@
               </a:lnSpc>
             </a:pPr>
             <a:r>
-              <a:rPr sz="1300" b="0" i="0">
+              <a:rPr sz="1500" b="0" i="0">
                 <a:solidFill>
                   <a:srgbClr val="5A6478"/>
                 </a:solidFill>
@@ -7654,7 +7186,7 @@
               </a:spcAft>
             </a:pPr>
             <a:r>
-              <a:rPr sz="1600" b="1" i="0">
+              <a:rPr sz="1800" b="1" i="0">
                 <a:solidFill>
                   <a:srgbClr val="0E2746"/>
                 </a:solidFill>
@@ -7670,7 +7202,7 @@
               </a:lnSpc>
             </a:pPr>
             <a:r>
-              <a:rPr sz="1300" b="0" i="0">
+              <a:rPr sz="1500" b="0" i="0">
                 <a:solidFill>
                   <a:srgbClr val="5A6478"/>
                 </a:solidFill>
@@ -7765,7 +7297,7 @@
               </a:spcAft>
             </a:pPr>
             <a:r>
-              <a:rPr sz="1600" b="1" i="0">
+              <a:rPr sz="1800" b="1" i="0">
                 <a:solidFill>
                   <a:srgbClr val="0E2746"/>
                 </a:solidFill>
@@ -7781,91 +7313,13 @@
               </a:lnSpc>
             </a:pPr>
             <a:r>
-              <a:rPr sz="1300" b="0" i="0">
+              <a:rPr sz="1500" b="0" i="0">
                 <a:solidFill>
                   <a:srgbClr val="5A6478"/>
                 </a:solidFill>
                 <a:latin typeface="Alegreya Sans"/>
               </a:rPr>
               <a:t>No guesswork, no extremes — just a clear plan that fits your life.</a:t>
-            </a:r>
-          </a:p>
-        </p:txBody>
-      </p:sp>
-      <p:sp>
-        <p:nvSpPr>
-          <p:cNvPr id="22" name="TextBox 21"/>
-          <p:cNvSpPr txBox="1"/>
-          <p:nvPr/>
-        </p:nvSpPr>
-        <p:spPr>
-          <a:xfrm>
-            <a:off x="640080" y="6382512"/>
-            <a:ext cx="7315200" cy="365760"/>
-          </a:xfrm>
-          <a:prstGeom prst="rect">
-            <a:avLst/>
-          </a:prstGeom>
-          <a:noFill/>
-        </p:spPr>
-        <p:txBody>
-          <a:bodyPr wrap="square" lIns="0" rIns="0" tIns="0" bIns="0" anchor="t">
-            <a:spAutoFit/>
-          </a:bodyPr>
-          <a:lstStyle/>
-          <a:p>
-            <a:pPr algn="l">
-              <a:lnSpc>
-                <a:spcPct val="120000"/>
-              </a:lnSpc>
-            </a:pPr>
-            <a:r>
-              <a:rPr sz="1250" b="0" i="1">
-                <a:solidFill>
-                  <a:srgbClr val="5A6478"/>
-                </a:solidFill>
-                <a:latin typeface="Libre Baskerville"/>
-              </a:rPr>
-              <a:t>The Weight Loss Academy</a:t>
-            </a:r>
-          </a:p>
-        </p:txBody>
-      </p:sp>
-      <p:sp>
-        <p:nvSpPr>
-          <p:cNvPr id="23" name="TextBox 22"/>
-          <p:cNvSpPr txBox="1"/>
-          <p:nvPr/>
-        </p:nvSpPr>
-        <p:spPr>
-          <a:xfrm>
-            <a:off x="6949440" y="6382512"/>
-            <a:ext cx="4572000" cy="365760"/>
-          </a:xfrm>
-          <a:prstGeom prst="rect">
-            <a:avLst/>
-          </a:prstGeom>
-          <a:noFill/>
-        </p:spPr>
-        <p:txBody>
-          <a:bodyPr wrap="square" lIns="0" rIns="0" tIns="0" bIns="0" anchor="t">
-            <a:spAutoFit/>
-          </a:bodyPr>
-          <a:lstStyle/>
-          <a:p>
-            <a:pPr algn="r">
-              <a:lnSpc>
-                <a:spcPct val="120000"/>
-              </a:lnSpc>
-            </a:pPr>
-            <a:r>
-              <a:rPr sz="1100" b="1" i="0" spc="200">
-                <a:solidFill>
-                  <a:srgbClr val="5A6478"/>
-                </a:solidFill>
-                <a:latin typeface="Alegreya Sans"/>
-              </a:rPr>
-              <a:t>VIP 1-2-1 PERSONAL COACHING</a:t>
             </a:r>
           </a:p>
         </p:txBody>
@@ -8103,7 +7557,7 @@
               </a:spcAft>
             </a:pPr>
             <a:r>
-              <a:rPr sz="1900" b="0" i="0">
+              <a:rPr sz="2100" b="0" i="0">
                 <a:solidFill>
                   <a:srgbClr val="333333"/>
                 </a:solidFill>
@@ -8122,7 +7576,7 @@
               </a:spcAft>
             </a:pPr>
             <a:r>
-              <a:rPr sz="1900" b="0" i="0">
+              <a:rPr sz="2100" b="0" i="0">
                 <a:solidFill>
                   <a:srgbClr val="333333"/>
                 </a:solidFill>
@@ -8145,84 +7599,6 @@
                 <a:latin typeface="Libre Baskerville"/>
               </a:rPr>
               <a:t>For this round, I’ve made it far more accessible.</a:t>
-            </a:r>
-          </a:p>
-        </p:txBody>
-      </p:sp>
-      <p:sp>
-        <p:nvSpPr>
-          <p:cNvPr id="7" name="TextBox 6"/>
-          <p:cNvSpPr txBox="1"/>
-          <p:nvPr/>
-        </p:nvSpPr>
-        <p:spPr>
-          <a:xfrm>
-            <a:off x="640080" y="6382512"/>
-            <a:ext cx="7315200" cy="365760"/>
-          </a:xfrm>
-          <a:prstGeom prst="rect">
-            <a:avLst/>
-          </a:prstGeom>
-          <a:noFill/>
-        </p:spPr>
-        <p:txBody>
-          <a:bodyPr wrap="square" lIns="0" rIns="0" tIns="0" bIns="0" anchor="t">
-            <a:spAutoFit/>
-          </a:bodyPr>
-          <a:lstStyle/>
-          <a:p>
-            <a:pPr algn="l">
-              <a:lnSpc>
-                <a:spcPct val="120000"/>
-              </a:lnSpc>
-            </a:pPr>
-            <a:r>
-              <a:rPr sz="1250" b="0" i="1">
-                <a:solidFill>
-                  <a:srgbClr val="5A6478"/>
-                </a:solidFill>
-                <a:latin typeface="Libre Baskerville"/>
-              </a:rPr>
-              <a:t>The Weight Loss Academy</a:t>
-            </a:r>
-          </a:p>
-        </p:txBody>
-      </p:sp>
-      <p:sp>
-        <p:nvSpPr>
-          <p:cNvPr id="8" name="TextBox 7"/>
-          <p:cNvSpPr txBox="1"/>
-          <p:nvPr/>
-        </p:nvSpPr>
-        <p:spPr>
-          <a:xfrm>
-            <a:off x="6949440" y="6382512"/>
-            <a:ext cx="4572000" cy="365760"/>
-          </a:xfrm>
-          <a:prstGeom prst="rect">
-            <a:avLst/>
-          </a:prstGeom>
-          <a:noFill/>
-        </p:spPr>
-        <p:txBody>
-          <a:bodyPr wrap="square" lIns="0" rIns="0" tIns="0" bIns="0" anchor="t">
-            <a:spAutoFit/>
-          </a:bodyPr>
-          <a:lstStyle/>
-          <a:p>
-            <a:pPr algn="r">
-              <a:lnSpc>
-                <a:spcPct val="120000"/>
-              </a:lnSpc>
-            </a:pPr>
-            <a:r>
-              <a:rPr sz="1100" b="1" i="0" spc="200">
-                <a:solidFill>
-                  <a:srgbClr val="5A6478"/>
-                </a:solidFill>
-                <a:latin typeface="Alegreya Sans"/>
-              </a:rPr>
-              <a:t>VIP 1-2-1 PERSONAL COACHING</a:t>
             </a:r>
           </a:p>
         </p:txBody>
@@ -8521,7 +7897,7 @@
               </a:lnSpc>
             </a:pPr>
             <a:r>
-              <a:rPr sz="1500" b="0" i="0">
+              <a:rPr sz="1700" b="0" i="0">
                 <a:solidFill>
                   <a:srgbClr val="333333"/>
                 </a:solidFill>
@@ -8560,7 +7936,7 @@
               </a:lnSpc>
             </a:pPr>
             <a:r>
-              <a:rPr sz="1600" b="0" i="1">
+              <a:rPr sz="1700" b="0" i="1">
                 <a:solidFill>
                   <a:srgbClr val="0E2746"/>
                 </a:solidFill>
@@ -8778,7 +8154,7 @@
               </a:lnSpc>
             </a:pPr>
             <a:r>
-              <a:rPr sz="1500" b="0" i="0">
+              <a:rPr sz="1700" b="0" i="0">
                 <a:solidFill>
                   <a:srgbClr val="F4EBDC"/>
                 </a:solidFill>
@@ -8817,7 +8193,7 @@
               </a:lnSpc>
             </a:pPr>
             <a:r>
-              <a:rPr sz="1600" b="0" i="1">
+              <a:rPr sz="1700" b="0" i="1">
                 <a:solidFill>
                   <a:srgbClr val="FFFFFF"/>
                 </a:solidFill>
@@ -8856,7 +8232,7 @@
               </a:lnSpc>
             </a:pPr>
             <a:r>
-              <a:rPr sz="1300" b="1" i="0" spc="100">
+              <a:rPr sz="1400" b="1" i="0" spc="100">
                 <a:solidFill>
                   <a:srgbClr val="5A6478"/>
                 </a:solidFill>
@@ -9068,7 +8444,7 @@
         </p:nvSpPr>
         <p:spPr>
           <a:xfrm>
-            <a:off x="868680" y="2566035"/>
+            <a:off x="868680" y="2577465"/>
             <a:ext cx="118872" cy="118872"/>
           </a:xfrm>
           <a:prstGeom prst="ellipse">
@@ -9132,7 +8508,7 @@
               </a:lnSpc>
             </a:pPr>
             <a:r>
-              <a:rPr sz="1700" b="0" i="0">
+              <a:rPr sz="1900" b="0" i="0">
                 <a:solidFill>
                   <a:srgbClr val="333333"/>
                 </a:solidFill>
@@ -9151,7 +8527,7 @@
         </p:nvSpPr>
         <p:spPr>
           <a:xfrm>
-            <a:off x="868680" y="3169539"/>
+            <a:off x="868680" y="3180969"/>
             <a:ext cx="118872" cy="118872"/>
           </a:xfrm>
           <a:prstGeom prst="ellipse">
@@ -9215,7 +8591,7 @@
               </a:lnSpc>
             </a:pPr>
             <a:r>
-              <a:rPr sz="1700" b="0" i="0">
+              <a:rPr sz="1900" b="0" i="0">
                 <a:solidFill>
                   <a:srgbClr val="333333"/>
                 </a:solidFill>
@@ -9234,7 +8610,7 @@
         </p:nvSpPr>
         <p:spPr>
           <a:xfrm>
-            <a:off x="868680" y="3773043"/>
+            <a:off x="868680" y="3784473"/>
             <a:ext cx="118872" cy="118872"/>
           </a:xfrm>
           <a:prstGeom prst="ellipse">
@@ -9298,7 +8674,7 @@
               </a:lnSpc>
             </a:pPr>
             <a:r>
-              <a:rPr sz="1700" b="0" i="0">
+              <a:rPr sz="1900" b="0" i="0">
                 <a:solidFill>
                   <a:srgbClr val="333333"/>
                 </a:solidFill>
@@ -9317,7 +8693,7 @@
         </p:nvSpPr>
         <p:spPr>
           <a:xfrm>
-            <a:off x="868680" y="4376547"/>
+            <a:off x="868680" y="4387977"/>
             <a:ext cx="118872" cy="118872"/>
           </a:xfrm>
           <a:prstGeom prst="ellipse">
@@ -9381,7 +8757,7 @@
               </a:lnSpc>
             </a:pPr>
             <a:r>
-              <a:rPr sz="1700" b="0" i="0">
+              <a:rPr sz="1900" b="0" i="0">
                 <a:solidFill>
                   <a:srgbClr val="333333"/>
                 </a:solidFill>
@@ -9400,7 +8776,7 @@
         </p:nvSpPr>
         <p:spPr>
           <a:xfrm>
-            <a:off x="868680" y="4980051"/>
+            <a:off x="868680" y="4991481"/>
             <a:ext cx="118872" cy="118872"/>
           </a:xfrm>
           <a:prstGeom prst="ellipse">
@@ -9464,7 +8840,7 @@
               </a:lnSpc>
             </a:pPr>
             <a:r>
-              <a:rPr sz="1700" b="0" i="0">
+              <a:rPr sz="1900" b="0" i="0">
                 <a:solidFill>
                   <a:srgbClr val="333333"/>
                 </a:solidFill>
@@ -9483,7 +8859,7 @@
         </p:nvSpPr>
         <p:spPr>
           <a:xfrm>
-            <a:off x="868680" y="5583555"/>
+            <a:off x="868680" y="5594985"/>
             <a:ext cx="118872" cy="118872"/>
           </a:xfrm>
           <a:prstGeom prst="ellipse">
@@ -9547,91 +8923,13 @@
               </a:lnSpc>
             </a:pPr>
             <a:r>
-              <a:rPr sz="1700" b="0" i="0">
+              <a:rPr sz="1900" b="0" i="0">
                 <a:solidFill>
                   <a:srgbClr val="333333"/>
                 </a:solidFill>
                 <a:latin typeface="Alegreya Sans"/>
               </a:rPr>
               <a:t>You want to lose up to 3 stone — sustainably, for good</a:t>
-            </a:r>
-          </a:p>
-        </p:txBody>
-      </p:sp>
-      <p:sp>
-        <p:nvSpPr>
-          <p:cNvPr id="18" name="TextBox 17"/>
-          <p:cNvSpPr txBox="1"/>
-          <p:nvPr/>
-        </p:nvSpPr>
-        <p:spPr>
-          <a:xfrm>
-            <a:off x="640080" y="6382512"/>
-            <a:ext cx="7315200" cy="365760"/>
-          </a:xfrm>
-          <a:prstGeom prst="rect">
-            <a:avLst/>
-          </a:prstGeom>
-          <a:noFill/>
-        </p:spPr>
-        <p:txBody>
-          <a:bodyPr wrap="square" lIns="0" rIns="0" tIns="0" bIns="0" anchor="t">
-            <a:spAutoFit/>
-          </a:bodyPr>
-          <a:lstStyle/>
-          <a:p>
-            <a:pPr algn="l">
-              <a:lnSpc>
-                <a:spcPct val="120000"/>
-              </a:lnSpc>
-            </a:pPr>
-            <a:r>
-              <a:rPr sz="1250" b="0" i="1">
-                <a:solidFill>
-                  <a:srgbClr val="5A6478"/>
-                </a:solidFill>
-                <a:latin typeface="Libre Baskerville"/>
-              </a:rPr>
-              <a:t>The Weight Loss Academy</a:t>
-            </a:r>
-          </a:p>
-        </p:txBody>
-      </p:sp>
-      <p:sp>
-        <p:nvSpPr>
-          <p:cNvPr id="19" name="TextBox 18"/>
-          <p:cNvSpPr txBox="1"/>
-          <p:nvPr/>
-        </p:nvSpPr>
-        <p:spPr>
-          <a:xfrm>
-            <a:off x="6949440" y="6382512"/>
-            <a:ext cx="4572000" cy="365760"/>
-          </a:xfrm>
-          <a:prstGeom prst="rect">
-            <a:avLst/>
-          </a:prstGeom>
-          <a:noFill/>
-        </p:spPr>
-        <p:txBody>
-          <a:bodyPr wrap="square" lIns="0" rIns="0" tIns="0" bIns="0" anchor="t">
-            <a:spAutoFit/>
-          </a:bodyPr>
-          <a:lstStyle/>
-          <a:p>
-            <a:pPr algn="r">
-              <a:lnSpc>
-                <a:spcPct val="120000"/>
-              </a:lnSpc>
-            </a:pPr>
-            <a:r>
-              <a:rPr sz="1100" b="1" i="0" spc="200">
-                <a:solidFill>
-                  <a:srgbClr val="5A6478"/>
-                </a:solidFill>
-                <a:latin typeface="Alegreya Sans"/>
-              </a:rPr>
-              <a:t>VIP 1-2-1 PERSONAL COACHING</a:t>
             </a:r>
           </a:p>
         </p:txBody>
@@ -9914,84 +9212,6 @@
           </a:p>
         </p:txBody>
       </p:sp>
-      <p:sp>
-        <p:nvSpPr>
-          <p:cNvPr id="7" name="TextBox 6"/>
-          <p:cNvSpPr txBox="1"/>
-          <p:nvPr/>
-        </p:nvSpPr>
-        <p:spPr>
-          <a:xfrm>
-            <a:off x="640080" y="6382512"/>
-            <a:ext cx="7315200" cy="365760"/>
-          </a:xfrm>
-          <a:prstGeom prst="rect">
-            <a:avLst/>
-          </a:prstGeom>
-          <a:noFill/>
-        </p:spPr>
-        <p:txBody>
-          <a:bodyPr wrap="square" lIns="0" rIns="0" tIns="0" bIns="0" anchor="t">
-            <a:spAutoFit/>
-          </a:bodyPr>
-          <a:lstStyle/>
-          <a:p>
-            <a:pPr algn="l">
-              <a:lnSpc>
-                <a:spcPct val="120000"/>
-              </a:lnSpc>
-            </a:pPr>
-            <a:r>
-              <a:rPr sz="1250" b="0" i="1">
-                <a:solidFill>
-                  <a:srgbClr val="5A6478"/>
-                </a:solidFill>
-                <a:latin typeface="Libre Baskerville"/>
-              </a:rPr>
-              <a:t>The Weight Loss Academy</a:t>
-            </a:r>
-          </a:p>
-        </p:txBody>
-      </p:sp>
-      <p:sp>
-        <p:nvSpPr>
-          <p:cNvPr id="8" name="TextBox 7"/>
-          <p:cNvSpPr txBox="1"/>
-          <p:nvPr/>
-        </p:nvSpPr>
-        <p:spPr>
-          <a:xfrm>
-            <a:off x="6949440" y="6382512"/>
-            <a:ext cx="4572000" cy="365760"/>
-          </a:xfrm>
-          <a:prstGeom prst="rect">
-            <a:avLst/>
-          </a:prstGeom>
-          <a:noFill/>
-        </p:spPr>
-        <p:txBody>
-          <a:bodyPr wrap="square" lIns="0" rIns="0" tIns="0" bIns="0" anchor="t">
-            <a:spAutoFit/>
-          </a:bodyPr>
-          <a:lstStyle/>
-          <a:p>
-            <a:pPr algn="r">
-              <a:lnSpc>
-                <a:spcPct val="120000"/>
-              </a:lnSpc>
-            </a:pPr>
-            <a:r>
-              <a:rPr sz="1100" b="1" i="0" spc="200">
-                <a:solidFill>
-                  <a:srgbClr val="5A6478"/>
-                </a:solidFill>
-                <a:latin typeface="Alegreya Sans"/>
-              </a:rPr>
-              <a:t>VIP 1-2-1 PERSONAL COACHING</a:t>
-            </a:r>
-          </a:p>
-        </p:txBody>
-      </p:sp>
     </p:spTree>
   </p:cSld>
   <p:clrMapOvr>
@@ -10202,7 +9422,7 @@
         </p:nvSpPr>
         <p:spPr>
           <a:xfrm>
-            <a:off x="868680" y="2566035"/>
+            <a:off x="868680" y="2577465"/>
             <a:ext cx="118872" cy="118872"/>
           </a:xfrm>
           <a:prstGeom prst="ellipse">
@@ -10266,7 +9486,7 @@
               </a:lnSpc>
             </a:pPr>
             <a:r>
-              <a:rPr sz="1700" b="0" i="0">
+              <a:rPr sz="1900" b="0" i="0">
                 <a:solidFill>
                   <a:srgbClr val="5A6478"/>
                 </a:solidFill>
@@ -10285,7 +9505,7 @@
         </p:nvSpPr>
         <p:spPr>
           <a:xfrm>
-            <a:off x="868680" y="3169539"/>
+            <a:off x="868680" y="3180969"/>
             <a:ext cx="118872" cy="118872"/>
           </a:xfrm>
           <a:prstGeom prst="ellipse">
@@ -10349,7 +9569,7 @@
               </a:lnSpc>
             </a:pPr>
             <a:r>
-              <a:rPr sz="1700" b="0" i="0">
+              <a:rPr sz="1900" b="0" i="0">
                 <a:solidFill>
                   <a:srgbClr val="5A6478"/>
                 </a:solidFill>
@@ -10368,7 +9588,7 @@
         </p:nvSpPr>
         <p:spPr>
           <a:xfrm>
-            <a:off x="868680" y="3773043"/>
+            <a:off x="868680" y="3784473"/>
             <a:ext cx="118872" cy="118872"/>
           </a:xfrm>
           <a:prstGeom prst="ellipse">
@@ -10432,7 +9652,7 @@
               </a:lnSpc>
             </a:pPr>
             <a:r>
-              <a:rPr sz="1700" b="0" i="0">
+              <a:rPr sz="1900" b="0" i="0">
                 <a:solidFill>
                   <a:srgbClr val="5A6478"/>
                 </a:solidFill>
@@ -10451,7 +9671,7 @@
         </p:nvSpPr>
         <p:spPr>
           <a:xfrm>
-            <a:off x="868680" y="4376547"/>
+            <a:off x="868680" y="4387977"/>
             <a:ext cx="118872" cy="118872"/>
           </a:xfrm>
           <a:prstGeom prst="ellipse">
@@ -10515,7 +9735,7 @@
               </a:lnSpc>
             </a:pPr>
             <a:r>
-              <a:rPr sz="1700" b="0" i="0">
+              <a:rPr sz="1900" b="0" i="0">
                 <a:solidFill>
                   <a:srgbClr val="5A6478"/>
                 </a:solidFill>
@@ -10534,7 +9754,7 @@
         </p:nvSpPr>
         <p:spPr>
           <a:xfrm>
-            <a:off x="868680" y="4980051"/>
+            <a:off x="868680" y="4991481"/>
             <a:ext cx="118872" cy="118872"/>
           </a:xfrm>
           <a:prstGeom prst="ellipse">
@@ -10598,7 +9818,7 @@
               </a:lnSpc>
             </a:pPr>
             <a:r>
-              <a:rPr sz="1700" b="0" i="0">
+              <a:rPr sz="1900" b="0" i="0">
                 <a:solidFill>
                   <a:srgbClr val="5A6478"/>
                 </a:solidFill>
@@ -10617,7 +9837,7 @@
         </p:nvSpPr>
         <p:spPr>
           <a:xfrm>
-            <a:off x="868680" y="5583555"/>
+            <a:off x="868680" y="5594985"/>
             <a:ext cx="118872" cy="118872"/>
           </a:xfrm>
           <a:prstGeom prst="ellipse">
@@ -10681,91 +9901,13 @@
               </a:lnSpc>
             </a:pPr>
             <a:r>
-              <a:rPr sz="1700" b="0" i="0">
+              <a:rPr sz="1900" b="0" i="0">
                 <a:solidFill>
                   <a:srgbClr val="5A6478"/>
                 </a:solidFill>
                 <a:latin typeface="Alegreya Sans"/>
               </a:rPr>
               <a:t>You’re not ready to commit right now</a:t>
-            </a:r>
-          </a:p>
-        </p:txBody>
-      </p:sp>
-      <p:sp>
-        <p:nvSpPr>
-          <p:cNvPr id="18" name="TextBox 17"/>
-          <p:cNvSpPr txBox="1"/>
-          <p:nvPr/>
-        </p:nvSpPr>
-        <p:spPr>
-          <a:xfrm>
-            <a:off x="640080" y="6382512"/>
-            <a:ext cx="7315200" cy="365760"/>
-          </a:xfrm>
-          <a:prstGeom prst="rect">
-            <a:avLst/>
-          </a:prstGeom>
-          <a:noFill/>
-        </p:spPr>
-        <p:txBody>
-          <a:bodyPr wrap="square" lIns="0" rIns="0" tIns="0" bIns="0" anchor="t">
-            <a:spAutoFit/>
-          </a:bodyPr>
-          <a:lstStyle/>
-          <a:p>
-            <a:pPr algn="l">
-              <a:lnSpc>
-                <a:spcPct val="120000"/>
-              </a:lnSpc>
-            </a:pPr>
-            <a:r>
-              <a:rPr sz="1250" b="0" i="1">
-                <a:solidFill>
-                  <a:srgbClr val="5A6478"/>
-                </a:solidFill>
-                <a:latin typeface="Libre Baskerville"/>
-              </a:rPr>
-              <a:t>The Weight Loss Academy</a:t>
-            </a:r>
-          </a:p>
-        </p:txBody>
-      </p:sp>
-      <p:sp>
-        <p:nvSpPr>
-          <p:cNvPr id="19" name="TextBox 18"/>
-          <p:cNvSpPr txBox="1"/>
-          <p:nvPr/>
-        </p:nvSpPr>
-        <p:spPr>
-          <a:xfrm>
-            <a:off x="6949440" y="6382512"/>
-            <a:ext cx="4572000" cy="365760"/>
-          </a:xfrm>
-          <a:prstGeom prst="rect">
-            <a:avLst/>
-          </a:prstGeom>
-          <a:noFill/>
-        </p:spPr>
-        <p:txBody>
-          <a:bodyPr wrap="square" lIns="0" rIns="0" tIns="0" bIns="0" anchor="t">
-            <a:spAutoFit/>
-          </a:bodyPr>
-          <a:lstStyle/>
-          <a:p>
-            <a:pPr algn="r">
-              <a:lnSpc>
-                <a:spcPct val="120000"/>
-              </a:lnSpc>
-            </a:pPr>
-            <a:r>
-              <a:rPr sz="1100" b="1" i="0" spc="200">
-                <a:solidFill>
-                  <a:srgbClr val="5A6478"/>
-                </a:solidFill>
-                <a:latin typeface="Alegreya Sans"/>
-              </a:rPr>
-              <a:t>VIP 1-2-1 PERSONAL COACHING</a:t>
             </a:r>
           </a:p>
         </p:txBody>
@@ -10981,84 +10123,6 @@
           </a:p>
         </p:txBody>
       </p:sp>
-      <p:sp>
-        <p:nvSpPr>
-          <p:cNvPr id="5" name="TextBox 4"/>
-          <p:cNvSpPr txBox="1"/>
-          <p:nvPr/>
-        </p:nvSpPr>
-        <p:spPr>
-          <a:xfrm>
-            <a:off x="640080" y="6382512"/>
-            <a:ext cx="7315200" cy="365760"/>
-          </a:xfrm>
-          <a:prstGeom prst="rect">
-            <a:avLst/>
-          </a:prstGeom>
-          <a:noFill/>
-        </p:spPr>
-        <p:txBody>
-          <a:bodyPr wrap="square" lIns="0" rIns="0" tIns="0" bIns="0" anchor="t">
-            <a:spAutoFit/>
-          </a:bodyPr>
-          <a:lstStyle/>
-          <a:p>
-            <a:pPr algn="l">
-              <a:lnSpc>
-                <a:spcPct val="120000"/>
-              </a:lnSpc>
-            </a:pPr>
-            <a:r>
-              <a:rPr sz="1250" b="0" i="1">
-                <a:solidFill>
-                  <a:srgbClr val="F4EBDC"/>
-                </a:solidFill>
-                <a:latin typeface="Libre Baskerville"/>
-              </a:rPr>
-              <a:t>The Weight Loss Academy</a:t>
-            </a:r>
-          </a:p>
-        </p:txBody>
-      </p:sp>
-      <p:sp>
-        <p:nvSpPr>
-          <p:cNvPr id="6" name="TextBox 5"/>
-          <p:cNvSpPr txBox="1"/>
-          <p:nvPr/>
-        </p:nvSpPr>
-        <p:spPr>
-          <a:xfrm>
-            <a:off x="6949440" y="6382512"/>
-            <a:ext cx="4572000" cy="365760"/>
-          </a:xfrm>
-          <a:prstGeom prst="rect">
-            <a:avLst/>
-          </a:prstGeom>
-          <a:noFill/>
-        </p:spPr>
-        <p:txBody>
-          <a:bodyPr wrap="square" lIns="0" rIns="0" tIns="0" bIns="0" anchor="t">
-            <a:spAutoFit/>
-          </a:bodyPr>
-          <a:lstStyle/>
-          <a:p>
-            <a:pPr algn="r">
-              <a:lnSpc>
-                <a:spcPct val="120000"/>
-              </a:lnSpc>
-            </a:pPr>
-            <a:r>
-              <a:rPr sz="1100" b="1" i="0" spc="200">
-                <a:solidFill>
-                  <a:srgbClr val="F4EBDC"/>
-                </a:solidFill>
-                <a:latin typeface="Alegreya Sans"/>
-              </a:rPr>
-              <a:t>VIP 1-2-1 PERSONAL COACHING</a:t>
-            </a:r>
-          </a:p>
-        </p:txBody>
-      </p:sp>
     </p:spTree>
   </p:cSld>
   <p:clrMapOvr>
@@ -11252,7 +10316,7 @@
               </a:lnSpc>
             </a:pPr>
             <a:r>
-              <a:rPr sz="1800" b="0" i="0">
+              <a:rPr sz="2000" b="0" i="0">
                 <a:solidFill>
                   <a:srgbClr val="F4EBDC"/>
                 </a:solidFill>
@@ -11291,7 +10355,7 @@
               </a:lnSpc>
             </a:pPr>
             <a:r>
-              <a:rPr sz="1900" b="1" i="0">
+              <a:rPr sz="2000" b="1" i="0">
                 <a:solidFill>
                   <a:srgbClr val="FFFFFF"/>
                 </a:solidFill>
@@ -11300,7 +10364,7 @@
               <a:t>Email me: </a:t>
             </a:r>
             <a:r>
-              <a:rPr sz="1900" b="1" i="0">
+              <a:rPr sz="2000" b="1" i="0">
                 <a:solidFill>
                   <a:srgbClr val="E5917A"/>
                 </a:solidFill>
@@ -11339,7 +10403,7 @@
               </a:lnSpc>
             </a:pPr>
             <a:r>
-              <a:rPr sz="1800" b="0" i="1">
+              <a:rPr sz="1900" b="0" i="1">
                 <a:solidFill>
                   <a:srgbClr val="FFFFFF"/>
                 </a:solidFill>
@@ -11348,7 +10412,7 @@
               <a:t>Anna Wallace</a:t>
             </a:r>
             <a:r>
-              <a:rPr sz="1400" b="0" i="0">
+              <a:rPr sz="1500" b="0" i="0">
                 <a:solidFill>
                   <a:srgbClr val="F4EBDC"/>
                 </a:solidFill>
@@ -11552,84 +10616,6 @@
           </a:p>
         </p:txBody>
       </p:sp>
-      <p:sp>
-        <p:nvSpPr>
-          <p:cNvPr id="5" name="TextBox 4"/>
-          <p:cNvSpPr txBox="1"/>
-          <p:nvPr/>
-        </p:nvSpPr>
-        <p:spPr>
-          <a:xfrm>
-            <a:off x="640080" y="6382512"/>
-            <a:ext cx="7315200" cy="365760"/>
-          </a:xfrm>
-          <a:prstGeom prst="rect">
-            <a:avLst/>
-          </a:prstGeom>
-          <a:noFill/>
-        </p:spPr>
-        <p:txBody>
-          <a:bodyPr wrap="square" lIns="0" rIns="0" tIns="0" bIns="0" anchor="t">
-            <a:spAutoFit/>
-          </a:bodyPr>
-          <a:lstStyle/>
-          <a:p>
-            <a:pPr algn="l">
-              <a:lnSpc>
-                <a:spcPct val="120000"/>
-              </a:lnSpc>
-            </a:pPr>
-            <a:r>
-              <a:rPr sz="1250" b="0" i="1">
-                <a:solidFill>
-                  <a:srgbClr val="F4EBDC"/>
-                </a:solidFill>
-                <a:latin typeface="Libre Baskerville"/>
-              </a:rPr>
-              <a:t>The Weight Loss Academy</a:t>
-            </a:r>
-          </a:p>
-        </p:txBody>
-      </p:sp>
-      <p:sp>
-        <p:nvSpPr>
-          <p:cNvPr id="6" name="TextBox 5"/>
-          <p:cNvSpPr txBox="1"/>
-          <p:nvPr/>
-        </p:nvSpPr>
-        <p:spPr>
-          <a:xfrm>
-            <a:off x="6949440" y="6382512"/>
-            <a:ext cx="4572000" cy="365760"/>
-          </a:xfrm>
-          <a:prstGeom prst="rect">
-            <a:avLst/>
-          </a:prstGeom>
-          <a:noFill/>
-        </p:spPr>
-        <p:txBody>
-          <a:bodyPr wrap="square" lIns="0" rIns="0" tIns="0" bIns="0" anchor="t">
-            <a:spAutoFit/>
-          </a:bodyPr>
-          <a:lstStyle/>
-          <a:p>
-            <a:pPr algn="r">
-              <a:lnSpc>
-                <a:spcPct val="120000"/>
-              </a:lnSpc>
-            </a:pPr>
-            <a:r>
-              <a:rPr sz="1100" b="1" i="0" spc="200">
-                <a:solidFill>
-                  <a:srgbClr val="F4EBDC"/>
-                </a:solidFill>
-                <a:latin typeface="Alegreya Sans"/>
-              </a:rPr>
-              <a:t>VIP 1-2-1 PERSONAL COACHING</a:t>
-            </a:r>
-          </a:p>
-        </p:txBody>
-      </p:sp>
     </p:spTree>
   </p:cSld>
   <p:clrMapOvr>
@@ -12330,84 +11316,6 @@
           </a:p>
         </p:txBody>
       </p:sp>
-      <p:sp>
-        <p:nvSpPr>
-          <p:cNvPr id="18" name="TextBox 17"/>
-          <p:cNvSpPr txBox="1"/>
-          <p:nvPr/>
-        </p:nvSpPr>
-        <p:spPr>
-          <a:xfrm>
-            <a:off x="640080" y="6382512"/>
-            <a:ext cx="7315200" cy="365760"/>
-          </a:xfrm>
-          <a:prstGeom prst="rect">
-            <a:avLst/>
-          </a:prstGeom>
-          <a:noFill/>
-        </p:spPr>
-        <p:txBody>
-          <a:bodyPr wrap="square" lIns="0" rIns="0" tIns="0" bIns="0" anchor="t">
-            <a:spAutoFit/>
-          </a:bodyPr>
-          <a:lstStyle/>
-          <a:p>
-            <a:pPr algn="l">
-              <a:lnSpc>
-                <a:spcPct val="120000"/>
-              </a:lnSpc>
-            </a:pPr>
-            <a:r>
-              <a:rPr sz="1250" b="0" i="1">
-                <a:solidFill>
-                  <a:srgbClr val="5A6478"/>
-                </a:solidFill>
-                <a:latin typeface="Libre Baskerville"/>
-              </a:rPr>
-              <a:t>The Weight Loss Academy</a:t>
-            </a:r>
-          </a:p>
-        </p:txBody>
-      </p:sp>
-      <p:sp>
-        <p:nvSpPr>
-          <p:cNvPr id="19" name="TextBox 18"/>
-          <p:cNvSpPr txBox="1"/>
-          <p:nvPr/>
-        </p:nvSpPr>
-        <p:spPr>
-          <a:xfrm>
-            <a:off x="6949440" y="6382512"/>
-            <a:ext cx="4572000" cy="365760"/>
-          </a:xfrm>
-          <a:prstGeom prst="rect">
-            <a:avLst/>
-          </a:prstGeom>
-          <a:noFill/>
-        </p:spPr>
-        <p:txBody>
-          <a:bodyPr wrap="square" lIns="0" rIns="0" tIns="0" bIns="0" anchor="t">
-            <a:spAutoFit/>
-          </a:bodyPr>
-          <a:lstStyle/>
-          <a:p>
-            <a:pPr algn="r">
-              <a:lnSpc>
-                <a:spcPct val="120000"/>
-              </a:lnSpc>
-            </a:pPr>
-            <a:r>
-              <a:rPr sz="1100" b="1" i="0" spc="200">
-                <a:solidFill>
-                  <a:srgbClr val="5A6478"/>
-                </a:solidFill>
-                <a:latin typeface="Alegreya Sans"/>
-              </a:rPr>
-              <a:t>VIP 1-2-1 PERSONAL COACHING</a:t>
-            </a:r>
-          </a:p>
-        </p:txBody>
-      </p:sp>
     </p:spTree>
   </p:cSld>
   <p:clrMapOvr>
@@ -12641,7 +11549,7 @@
               </a:spcAft>
             </a:pPr>
             <a:r>
-              <a:rPr sz="1900" b="0" i="0">
+              <a:rPr sz="2100" b="0" i="0">
                 <a:solidFill>
                   <a:srgbClr val="333333"/>
                 </a:solidFill>
@@ -12657,7 +11565,7 @@
               </a:lnSpc>
             </a:pPr>
             <a:r>
-              <a:rPr sz="1900" b="0" i="0">
+              <a:rPr sz="2100" b="0" i="0">
                 <a:solidFill>
                   <a:srgbClr val="333333"/>
                 </a:solidFill>
@@ -12673,84 +11581,6 @@
                 <a:latin typeface="Libre Baskerville"/>
               </a:rPr>
               <a:t>nothing comes close to personal 1-2-1 coaching.</a:t>
-            </a:r>
-          </a:p>
-        </p:txBody>
-      </p:sp>
-      <p:sp>
-        <p:nvSpPr>
-          <p:cNvPr id="7" name="TextBox 6"/>
-          <p:cNvSpPr txBox="1"/>
-          <p:nvPr/>
-        </p:nvSpPr>
-        <p:spPr>
-          <a:xfrm>
-            <a:off x="640080" y="6382512"/>
-            <a:ext cx="7315200" cy="365760"/>
-          </a:xfrm>
-          <a:prstGeom prst="rect">
-            <a:avLst/>
-          </a:prstGeom>
-          <a:noFill/>
-        </p:spPr>
-        <p:txBody>
-          <a:bodyPr wrap="square" lIns="0" rIns="0" tIns="0" bIns="0" anchor="t">
-            <a:spAutoFit/>
-          </a:bodyPr>
-          <a:lstStyle/>
-          <a:p>
-            <a:pPr algn="l">
-              <a:lnSpc>
-                <a:spcPct val="120000"/>
-              </a:lnSpc>
-            </a:pPr>
-            <a:r>
-              <a:rPr sz="1250" b="0" i="1">
-                <a:solidFill>
-                  <a:srgbClr val="5A6478"/>
-                </a:solidFill>
-                <a:latin typeface="Libre Baskerville"/>
-              </a:rPr>
-              <a:t>The Weight Loss Academy</a:t>
-            </a:r>
-          </a:p>
-        </p:txBody>
-      </p:sp>
-      <p:sp>
-        <p:nvSpPr>
-          <p:cNvPr id="8" name="TextBox 7"/>
-          <p:cNvSpPr txBox="1"/>
-          <p:nvPr/>
-        </p:nvSpPr>
-        <p:spPr>
-          <a:xfrm>
-            <a:off x="6949440" y="6382512"/>
-            <a:ext cx="4572000" cy="365760"/>
-          </a:xfrm>
-          <a:prstGeom prst="rect">
-            <a:avLst/>
-          </a:prstGeom>
-          <a:noFill/>
-        </p:spPr>
-        <p:txBody>
-          <a:bodyPr wrap="square" lIns="0" rIns="0" tIns="0" bIns="0" anchor="t">
-            <a:spAutoFit/>
-          </a:bodyPr>
-          <a:lstStyle/>
-          <a:p>
-            <a:pPr algn="r">
-              <a:lnSpc>
-                <a:spcPct val="120000"/>
-              </a:lnSpc>
-            </a:pPr>
-            <a:r>
-              <a:rPr sz="1100" b="1" i="0" spc="200">
-                <a:solidFill>
-                  <a:srgbClr val="5A6478"/>
-                </a:solidFill>
-                <a:latin typeface="Alegreya Sans"/>
-              </a:rPr>
-              <a:t>VIP 1-2-1 PERSONAL COACHING</a:t>
             </a:r>
           </a:p>
         </p:txBody>
@@ -13044,7 +11874,7 @@
               </a:lnSpc>
             </a:pPr>
             <a:r>
-              <a:rPr sz="1800" b="0" i="1">
+              <a:rPr sz="2000" b="0" i="1">
                 <a:solidFill>
                   <a:srgbClr val="FFFFFF"/>
                 </a:solidFill>
@@ -13170,7 +12000,7 @@
               </a:lnSpc>
             </a:pPr>
             <a:r>
-              <a:rPr sz="1800" b="0" i="1">
+              <a:rPr sz="2000" b="0" i="1">
                 <a:solidFill>
                   <a:srgbClr val="FFFFFF"/>
                 </a:solidFill>
@@ -13296,91 +12126,13 @@
               </a:lnSpc>
             </a:pPr>
             <a:r>
-              <a:rPr sz="1800" b="0" i="1">
+              <a:rPr sz="2000" b="0" i="1">
                 <a:solidFill>
                   <a:srgbClr val="FFFFFF"/>
                 </a:solidFill>
                 <a:latin typeface="Libre Baskerville"/>
               </a:rPr>
               <a:t>Results Tracking</a:t>
-            </a:r>
-          </a:p>
-        </p:txBody>
-      </p:sp>
-      <p:sp>
-        <p:nvSpPr>
-          <p:cNvPr id="14" name="TextBox 13"/>
-          <p:cNvSpPr txBox="1"/>
-          <p:nvPr/>
-        </p:nvSpPr>
-        <p:spPr>
-          <a:xfrm>
-            <a:off x="640080" y="6382512"/>
-            <a:ext cx="7315200" cy="365760"/>
-          </a:xfrm>
-          <a:prstGeom prst="rect">
-            <a:avLst/>
-          </a:prstGeom>
-          <a:noFill/>
-        </p:spPr>
-        <p:txBody>
-          <a:bodyPr wrap="square" lIns="0" rIns="0" tIns="0" bIns="0" anchor="t">
-            <a:spAutoFit/>
-          </a:bodyPr>
-          <a:lstStyle/>
-          <a:p>
-            <a:pPr algn="l">
-              <a:lnSpc>
-                <a:spcPct val="120000"/>
-              </a:lnSpc>
-            </a:pPr>
-            <a:r>
-              <a:rPr sz="1250" b="0" i="1">
-                <a:solidFill>
-                  <a:srgbClr val="F4EBDC"/>
-                </a:solidFill>
-                <a:latin typeface="Libre Baskerville"/>
-              </a:rPr>
-              <a:t>The Weight Loss Academy</a:t>
-            </a:r>
-          </a:p>
-        </p:txBody>
-      </p:sp>
-      <p:sp>
-        <p:nvSpPr>
-          <p:cNvPr id="15" name="TextBox 14"/>
-          <p:cNvSpPr txBox="1"/>
-          <p:nvPr/>
-        </p:nvSpPr>
-        <p:spPr>
-          <a:xfrm>
-            <a:off x="6949440" y="6382512"/>
-            <a:ext cx="4572000" cy="365760"/>
-          </a:xfrm>
-          <a:prstGeom prst="rect">
-            <a:avLst/>
-          </a:prstGeom>
-          <a:noFill/>
-        </p:spPr>
-        <p:txBody>
-          <a:bodyPr wrap="square" lIns="0" rIns="0" tIns="0" bIns="0" anchor="t">
-            <a:spAutoFit/>
-          </a:bodyPr>
-          <a:lstStyle/>
-          <a:p>
-            <a:pPr algn="r">
-              <a:lnSpc>
-                <a:spcPct val="120000"/>
-              </a:lnSpc>
-            </a:pPr>
-            <a:r>
-              <a:rPr sz="1100" b="1" i="0" spc="200">
-                <a:solidFill>
-                  <a:srgbClr val="F4EBDC"/>
-                </a:solidFill>
-                <a:latin typeface="Alegreya Sans"/>
-              </a:rPr>
-              <a:t>VIP 1-2-1 PERSONAL COACHING</a:t>
             </a:r>
           </a:p>
         </p:txBody>
@@ -13678,7 +12430,7 @@
               </a:spcAft>
             </a:pPr>
             <a:r>
-              <a:rPr sz="1800" b="0" i="0">
+              <a:rPr sz="2000" b="0" i="0">
                 <a:solidFill>
                   <a:srgbClr val="333333"/>
                 </a:solidFill>
@@ -13697,91 +12449,13 @@
               </a:spcAft>
             </a:pPr>
             <a:r>
-              <a:rPr sz="1800" b="0" i="0">
+              <a:rPr sz="2000" b="0" i="0">
                 <a:solidFill>
                   <a:srgbClr val="333333"/>
                 </a:solidFill>
                 <a:latin typeface="Alegreya Sans"/>
               </a:rPr>
               <a:t>No guesswork. No extremes. No starting again every Monday — just a clear structure that reduces cravings and gets results sooner.</a:t>
-            </a:r>
-          </a:p>
-        </p:txBody>
-      </p:sp>
-      <p:sp>
-        <p:nvSpPr>
-          <p:cNvPr id="9" name="TextBox 8"/>
-          <p:cNvSpPr txBox="1"/>
-          <p:nvPr/>
-        </p:nvSpPr>
-        <p:spPr>
-          <a:xfrm>
-            <a:off x="640080" y="6382512"/>
-            <a:ext cx="7315200" cy="365760"/>
-          </a:xfrm>
-          <a:prstGeom prst="rect">
-            <a:avLst/>
-          </a:prstGeom>
-          <a:noFill/>
-        </p:spPr>
-        <p:txBody>
-          <a:bodyPr wrap="square" lIns="0" rIns="0" tIns="0" bIns="0" anchor="t">
-            <a:spAutoFit/>
-          </a:bodyPr>
-          <a:lstStyle/>
-          <a:p>
-            <a:pPr algn="l">
-              <a:lnSpc>
-                <a:spcPct val="120000"/>
-              </a:lnSpc>
-            </a:pPr>
-            <a:r>
-              <a:rPr sz="1250" b="0" i="1">
-                <a:solidFill>
-                  <a:srgbClr val="5A6478"/>
-                </a:solidFill>
-                <a:latin typeface="Libre Baskerville"/>
-              </a:rPr>
-              <a:t>The Weight Loss Academy</a:t>
-            </a:r>
-          </a:p>
-        </p:txBody>
-      </p:sp>
-      <p:sp>
-        <p:nvSpPr>
-          <p:cNvPr id="10" name="TextBox 9"/>
-          <p:cNvSpPr txBox="1"/>
-          <p:nvPr/>
-        </p:nvSpPr>
-        <p:spPr>
-          <a:xfrm>
-            <a:off x="6949440" y="6382512"/>
-            <a:ext cx="4572000" cy="365760"/>
-          </a:xfrm>
-          <a:prstGeom prst="rect">
-            <a:avLst/>
-          </a:prstGeom>
-          <a:noFill/>
-        </p:spPr>
-        <p:txBody>
-          <a:bodyPr wrap="square" lIns="0" rIns="0" tIns="0" bIns="0" anchor="t">
-            <a:spAutoFit/>
-          </a:bodyPr>
-          <a:lstStyle/>
-          <a:p>
-            <a:pPr algn="r">
-              <a:lnSpc>
-                <a:spcPct val="120000"/>
-              </a:lnSpc>
-            </a:pPr>
-            <a:r>
-              <a:rPr sz="1100" b="1" i="0" spc="200">
-                <a:solidFill>
-                  <a:srgbClr val="5A6478"/>
-                </a:solidFill>
-                <a:latin typeface="Alegreya Sans"/>
-              </a:rPr>
-              <a:t>VIP 1-2-1 PERSONAL COACHING</a:t>
             </a:r>
           </a:p>
         </p:txBody>
@@ -14079,7 +12753,7 @@
               </a:spcAft>
             </a:pPr>
             <a:r>
-              <a:rPr sz="1800" b="0" i="0">
+              <a:rPr sz="2000" b="0" i="0">
                 <a:solidFill>
                   <a:srgbClr val="333333"/>
                 </a:solidFill>
@@ -14098,91 +12772,13 @@
               </a:spcAft>
             </a:pPr>
             <a:r>
-              <a:rPr sz="1800" b="0" i="0">
+              <a:rPr sz="2000" b="0" i="0">
                 <a:solidFill>
                   <a:srgbClr val="333333"/>
                 </a:solidFill>
                 <a:latin typeface="Alegreya Sans"/>
               </a:rPr>
               <a:t>With regular check-ins, coaching and daily support, you stay on track — even on the days you don’t feel like it.</a:t>
-            </a:r>
-          </a:p>
-        </p:txBody>
-      </p:sp>
-      <p:sp>
-        <p:nvSpPr>
-          <p:cNvPr id="9" name="TextBox 8"/>
-          <p:cNvSpPr txBox="1"/>
-          <p:nvPr/>
-        </p:nvSpPr>
-        <p:spPr>
-          <a:xfrm>
-            <a:off x="640080" y="6382512"/>
-            <a:ext cx="7315200" cy="365760"/>
-          </a:xfrm>
-          <a:prstGeom prst="rect">
-            <a:avLst/>
-          </a:prstGeom>
-          <a:noFill/>
-        </p:spPr>
-        <p:txBody>
-          <a:bodyPr wrap="square" lIns="0" rIns="0" tIns="0" bIns="0" anchor="t">
-            <a:spAutoFit/>
-          </a:bodyPr>
-          <a:lstStyle/>
-          <a:p>
-            <a:pPr algn="l">
-              <a:lnSpc>
-                <a:spcPct val="120000"/>
-              </a:lnSpc>
-            </a:pPr>
-            <a:r>
-              <a:rPr sz="1250" b="0" i="1">
-                <a:solidFill>
-                  <a:srgbClr val="5A6478"/>
-                </a:solidFill>
-                <a:latin typeface="Libre Baskerville"/>
-              </a:rPr>
-              <a:t>The Weight Loss Academy</a:t>
-            </a:r>
-          </a:p>
-        </p:txBody>
-      </p:sp>
-      <p:sp>
-        <p:nvSpPr>
-          <p:cNvPr id="10" name="TextBox 9"/>
-          <p:cNvSpPr txBox="1"/>
-          <p:nvPr/>
-        </p:nvSpPr>
-        <p:spPr>
-          <a:xfrm>
-            <a:off x="6949440" y="6382512"/>
-            <a:ext cx="4572000" cy="365760"/>
-          </a:xfrm>
-          <a:prstGeom prst="rect">
-            <a:avLst/>
-          </a:prstGeom>
-          <a:noFill/>
-        </p:spPr>
-        <p:txBody>
-          <a:bodyPr wrap="square" lIns="0" rIns="0" tIns="0" bIns="0" anchor="t">
-            <a:spAutoFit/>
-          </a:bodyPr>
-          <a:lstStyle/>
-          <a:p>
-            <a:pPr algn="r">
-              <a:lnSpc>
-                <a:spcPct val="120000"/>
-              </a:lnSpc>
-            </a:pPr>
-            <a:r>
-              <a:rPr sz="1100" b="1" i="0" spc="200">
-                <a:solidFill>
-                  <a:srgbClr val="5A6478"/>
-                </a:solidFill>
-                <a:latin typeface="Alegreya Sans"/>
-              </a:rPr>
-              <a:t>VIP 1-2-1 PERSONAL COACHING</a:t>
             </a:r>
           </a:p>
         </p:txBody>
@@ -14480,7 +13076,7 @@
               </a:spcAft>
             </a:pPr>
             <a:r>
-              <a:rPr sz="1800" b="0" i="0">
+              <a:rPr sz="2000" b="0" i="0">
                 <a:solidFill>
                   <a:srgbClr val="333333"/>
                 </a:solidFill>
@@ -14499,91 +13095,13 @@
               </a:spcAft>
             </a:pPr>
             <a:r>
-              <a:rPr sz="1800" b="0" i="0">
+              <a:rPr sz="2000" b="0" i="0">
                 <a:solidFill>
                   <a:srgbClr val="333333"/>
                 </a:solidFill>
                 <a:latin typeface="Alegreya Sans"/>
               </a:rPr>
               <a:t>We review everything and make the right adjustments along the way, so your results keep progressing.</a:t>
-            </a:r>
-          </a:p>
-        </p:txBody>
-      </p:sp>
-      <p:sp>
-        <p:nvSpPr>
-          <p:cNvPr id="9" name="TextBox 8"/>
-          <p:cNvSpPr txBox="1"/>
-          <p:nvPr/>
-        </p:nvSpPr>
-        <p:spPr>
-          <a:xfrm>
-            <a:off x="640080" y="6382512"/>
-            <a:ext cx="7315200" cy="365760"/>
-          </a:xfrm>
-          <a:prstGeom prst="rect">
-            <a:avLst/>
-          </a:prstGeom>
-          <a:noFill/>
-        </p:spPr>
-        <p:txBody>
-          <a:bodyPr wrap="square" lIns="0" rIns="0" tIns="0" bIns="0" anchor="t">
-            <a:spAutoFit/>
-          </a:bodyPr>
-          <a:lstStyle/>
-          <a:p>
-            <a:pPr algn="l">
-              <a:lnSpc>
-                <a:spcPct val="120000"/>
-              </a:lnSpc>
-            </a:pPr>
-            <a:r>
-              <a:rPr sz="1250" b="0" i="1">
-                <a:solidFill>
-                  <a:srgbClr val="5A6478"/>
-                </a:solidFill>
-                <a:latin typeface="Libre Baskerville"/>
-              </a:rPr>
-              <a:t>The Weight Loss Academy</a:t>
-            </a:r>
-          </a:p>
-        </p:txBody>
-      </p:sp>
-      <p:sp>
-        <p:nvSpPr>
-          <p:cNvPr id="10" name="TextBox 9"/>
-          <p:cNvSpPr txBox="1"/>
-          <p:nvPr/>
-        </p:nvSpPr>
-        <p:spPr>
-          <a:xfrm>
-            <a:off x="6949440" y="6382512"/>
-            <a:ext cx="4572000" cy="365760"/>
-          </a:xfrm>
-          <a:prstGeom prst="rect">
-            <a:avLst/>
-          </a:prstGeom>
-          <a:noFill/>
-        </p:spPr>
-        <p:txBody>
-          <a:bodyPr wrap="square" lIns="0" rIns="0" tIns="0" bIns="0" anchor="t">
-            <a:spAutoFit/>
-          </a:bodyPr>
-          <a:lstStyle/>
-          <a:p>
-            <a:pPr algn="r">
-              <a:lnSpc>
-                <a:spcPct val="120000"/>
-              </a:lnSpc>
-            </a:pPr>
-            <a:r>
-              <a:rPr sz="1100" b="1" i="0" spc="200">
-                <a:solidFill>
-                  <a:srgbClr val="5A6478"/>
-                </a:solidFill>
-                <a:latin typeface="Alegreya Sans"/>
-              </a:rPr>
-              <a:t>VIP 1-2-1 PERSONAL COACHING</a:t>
             </a:r>
           </a:p>
         </p:txBody>

--- a/wla-vip-121-deck.pptx
+++ b/wla-vip-121-deck.pptx
@@ -3534,7 +3534,7 @@
               </a:lnSpc>
             </a:pPr>
             <a:r>
-              <a:rPr sz="1600" b="1" i="0" spc="240">
+              <a:rPr sz="1800" b="1" i="0" spc="240">
                 <a:solidFill>
                   <a:srgbClr val="E5917A"/>
                 </a:solidFill>
@@ -3794,7 +3794,7 @@
               </a:lnSpc>
             </a:pPr>
             <a:r>
-              <a:rPr sz="1600" b="1" i="0" spc="240">
+              <a:rPr sz="1800" b="1" i="0" spc="240">
                 <a:solidFill>
                   <a:srgbClr val="D97757"/>
                 </a:solidFill>
@@ -4045,7 +4045,7 @@
               </a:lnSpc>
             </a:pPr>
             <a:r>
-              <a:rPr sz="1600" b="1" i="0" spc="240">
+              <a:rPr sz="1800" b="1" i="0" spc="240">
                 <a:solidFill>
                   <a:srgbClr val="D97757"/>
                 </a:solidFill>
@@ -4745,7 +4745,7 @@
               </a:lnSpc>
             </a:pPr>
             <a:r>
-              <a:rPr sz="1600" b="1" i="0" spc="240">
+              <a:rPr sz="1800" b="1" i="0" spc="240">
                 <a:solidFill>
                   <a:srgbClr val="D97757"/>
                 </a:solidFill>
@@ -5992,7 +5992,7 @@
               </a:lnSpc>
             </a:pPr>
             <a:r>
-              <a:rPr sz="1600" b="1" i="0" spc="240">
+              <a:rPr sz="1800" b="1" i="0" spc="240">
                 <a:solidFill>
                   <a:srgbClr val="E5917A"/>
                 </a:solidFill>
@@ -6333,7 +6333,7 @@
               </a:lnSpc>
             </a:pPr>
             <a:r>
-              <a:rPr sz="1600" b="1" i="0" spc="240">
+              <a:rPr sz="1800" b="1" i="0" spc="240">
                 <a:solidFill>
                   <a:srgbClr val="D97757"/>
                 </a:solidFill>
@@ -7414,7 +7414,7 @@
               </a:lnSpc>
             </a:pPr>
             <a:r>
-              <a:rPr sz="1600" b="1" i="0" spc="240">
+              <a:rPr sz="1800" b="1" i="0" spc="240">
                 <a:solidFill>
                   <a:srgbClr val="D97757"/>
                 </a:solidFill>
@@ -7673,7 +7673,7 @@
         </p:nvSpPr>
         <p:spPr>
           <a:xfrm>
-            <a:off x="822960" y="640080"/>
+            <a:off x="822960" y="566928"/>
             <a:ext cx="10515600" cy="457200"/>
           </a:xfrm>
           <a:prstGeom prst="rect">
@@ -7693,7 +7693,7 @@
               </a:lnSpc>
             </a:pPr>
             <a:r>
-              <a:rPr sz="1500" b="1" i="0" spc="240">
+              <a:rPr sz="1800" b="1" i="0" spc="240">
                 <a:solidFill>
                   <a:srgbClr val="D97757"/>
                 </a:solidFill>
@@ -8212,8 +8212,8 @@
         </p:nvSpPr>
         <p:spPr>
           <a:xfrm>
-            <a:off x="822960" y="5806440"/>
-            <a:ext cx="10515600" cy="457200"/>
+            <a:off x="548640" y="5650992"/>
+            <a:ext cx="11091672" cy="1005840"/>
           </a:xfrm>
           <a:prstGeom prst="rect">
             <a:avLst/>
@@ -8228,13 +8228,13 @@
           <a:p>
             <a:pPr algn="ctr">
               <a:lnSpc>
-                <a:spcPct val="120000"/>
-              </a:lnSpc>
-            </a:pPr>
-            <a:r>
-              <a:rPr sz="1400" b="1" i="0" spc="100">
-                <a:solidFill>
-                  <a:srgbClr val="5A6478"/>
+                <a:spcPct val="125000"/>
+              </a:lnSpc>
+            </a:pPr>
+            <a:r>
+              <a:rPr sz="2400" b="1" i="0" spc="20">
+                <a:solidFill>
+                  <a:srgbClr val="0E2746"/>
                 </a:solidFill>
                 <a:latin typeface="Alegreya Sans"/>
               </a:rPr>
@@ -8333,7 +8333,7 @@
               </a:lnSpc>
             </a:pPr>
             <a:r>
-              <a:rPr sz="1600" b="1" i="0" spc="240">
+              <a:rPr sz="1800" b="1" i="0" spc="240">
                 <a:solidFill>
                   <a:srgbClr val="D97757"/>
                 </a:solidFill>
@@ -9024,13 +9024,13 @@
               </a:lnSpc>
             </a:pPr>
             <a:r>
-              <a:rPr sz="1600" b="1" i="0" spc="240">
+              <a:rPr sz="1800" b="1" i="0" spc="240">
                 <a:solidFill>
                   <a:srgbClr val="D97757"/>
                 </a:solidFill>
                 <a:latin typeface="Alegreya Sans"/>
               </a:rPr>
-              <a:t>BACK BY POPULAR DEMAND</a:t>
+              <a:t>A FEW VIP SPOTS HAVE OPENED</a:t>
             </a:r>
           </a:p>
         </p:txBody>
@@ -9087,7 +9087,7 @@
         </p:nvSpPr>
         <p:spPr>
           <a:xfrm>
-            <a:off x="822960" y="1325880"/>
+            <a:off x="822960" y="1417320"/>
             <a:ext cx="10515600" cy="1828800"/>
           </a:xfrm>
           <a:prstGeom prst="rect">
@@ -9107,31 +9107,49 @@
               </a:lnSpc>
             </a:pPr>
             <a:r>
-              <a:rPr sz="4600" b="1" i="0">
+              <a:rPr sz="3600" b="1" i="0">
                 <a:solidFill>
                   <a:srgbClr val="0E2746"/>
                 </a:solidFill>
                 <a:latin typeface="Libre Baskerville"/>
               </a:rPr>
-              <a:t>VIP is </a:t>
-            </a:r>
-            <a:r>
-              <a:rPr sz="4600" b="1" i="1">
+              <a:t>I only coach a handful of women </a:t>
+            </a:r>
+            <a:r>
+              <a:rPr sz="3600" b="1" i="1">
                 <a:solidFill>
                   <a:srgbClr val="D97757"/>
                 </a:solidFill>
                 <a:latin typeface="Libre Baskerville"/>
               </a:rPr>
-              <a:t>back</a:t>
-            </a:r>
-            <a:r>
-              <a:rPr sz="4600" b="1" i="0">
+              <a:t>1-2-1</a:t>
+            </a:r>
+            <a:r>
+              <a:rPr sz="3600" b="1" i="0">
                 <a:solidFill>
                   <a:srgbClr val="0E2746"/>
                 </a:solidFill>
                 <a:latin typeface="Libre Baskerville"/>
               </a:rPr>
-              <a:t> — and this round, I want to coach you.</a:t>
+              <a:t> at a time — and a few spots have </a:t>
+            </a:r>
+            <a:r>
+              <a:rPr sz="3600" b="1" i="1">
+                <a:solidFill>
+                  <a:srgbClr val="D97757"/>
+                </a:solidFill>
+                <a:latin typeface="Libre Baskerville"/>
+              </a:rPr>
+              <a:t>just opened</a:t>
+            </a:r>
+            <a:r>
+              <a:rPr sz="3600" b="1" i="0">
+                <a:solidFill>
+                  <a:srgbClr val="0E2746"/>
+                </a:solidFill>
+                <a:latin typeface="Libre Baskerville"/>
+              </a:rPr>
+              <a:t>.</a:t>
             </a:r>
           </a:p>
         </p:txBody>
@@ -9144,7 +9162,7 @@
         </p:nvSpPr>
         <p:spPr>
           <a:xfrm>
-            <a:off x="822960" y="3246120"/>
+            <a:off x="822960" y="3383280"/>
             <a:ext cx="10058400" cy="2743200"/>
           </a:xfrm>
           <a:prstGeom prst="rect">
@@ -9167,31 +9185,22 @@
               </a:spcAft>
             </a:pPr>
             <a:r>
-              <a:rPr sz="2000" b="0" i="0">
+              <a:rPr sz="2100" b="0" i="0">
                 <a:solidFill>
                   <a:srgbClr val="333333"/>
                 </a:solidFill>
                 <a:latin typeface="Alegreya Sans"/>
               </a:rPr>
-              <a:t>This round I’m looking for </a:t>
-            </a:r>
-            <a:r>
-              <a:rPr sz="2000" b="1" i="0">
+              <a:t>If you’ve been thinking about going all-in with personal coaching, </a:t>
+            </a:r>
+            <a:r>
+              <a:rPr sz="2100" b="1" i="0">
                 <a:solidFill>
                   <a:srgbClr val="0E2746"/>
                 </a:solidFill>
                 <a:latin typeface="Alegreya Sans"/>
               </a:rPr>
-              <a:t>30 women</a:t>
-            </a:r>
-            <a:r>
-              <a:rPr sz="2000" b="0" i="0">
-                <a:solidFill>
-                  <a:srgbClr val="333333"/>
-                </a:solidFill>
-                <a:latin typeface="Alegreya Sans"/>
-              </a:rPr>
-              <a:t> to coach 1-2-1 — and to create as many success stories as possible.</a:t>
+              <a:t>this is your moment to grab one.</a:t>
             </a:r>
           </a:p>
           <a:p>
@@ -9207,7 +9216,7 @@
                 </a:solidFill>
                 <a:latin typeface="Libre Baskerville"/>
               </a:rPr>
-              <a:t>A brand new round. Risk-free. Built entirely around you.</a:t>
+              <a:t>My full attention, daily support, and a plan built entirely around you.</a:t>
             </a:r>
           </a:p>
         </p:txBody>
@@ -9302,7 +9311,7 @@
               </a:lnSpc>
             </a:pPr>
             <a:r>
-              <a:rPr sz="1600" b="1" i="0" spc="240">
+              <a:rPr sz="1800" b="1" i="0" spc="240">
                 <a:solidFill>
                   <a:srgbClr val="D97757"/>
                 </a:solidFill>
@@ -9982,8 +9991,8 @@
         </p:nvSpPr>
         <p:spPr>
           <a:xfrm>
-            <a:off x="4937760" y="1188720"/>
-            <a:ext cx="2286000" cy="457200"/>
+            <a:off x="4727448" y="1188720"/>
+            <a:ext cx="2743200" cy="457200"/>
           </a:xfrm>
           <a:prstGeom prst="roundRect">
             <a:avLst>
@@ -10018,7 +10027,7 @@
           <a:p>
             <a:pPr algn="ctr"/>
             <a:r>
-              <a:rPr sz="1300" b="1" spc="260">
+              <a:rPr sz="1800" b="1" spc="200">
                 <a:solidFill>
                   <a:srgbClr val="FFFFFF"/>
                 </a:solidFill>
@@ -10193,8 +10202,8 @@
         </p:nvSpPr>
         <p:spPr>
           <a:xfrm>
-            <a:off x="5074920" y="868680"/>
-            <a:ext cx="2011680" cy="457200"/>
+            <a:off x="5047488" y="868680"/>
+            <a:ext cx="2103120" cy="457200"/>
           </a:xfrm>
           <a:prstGeom prst="roundRect">
             <a:avLst>
@@ -10229,7 +10238,7 @@
           <a:p>
             <a:pPr algn="ctr"/>
             <a:r>
-              <a:rPr sz="1300" b="1" spc="300">
+              <a:rPr sz="1800" b="1" spc="250">
                 <a:solidFill>
                   <a:srgbClr val="FFFFFF"/>
                 </a:solidFill>
@@ -10493,8 +10502,8 @@
         </p:nvSpPr>
         <p:spPr>
           <a:xfrm>
-            <a:off x="4178808" y="1371600"/>
-            <a:ext cx="3840480" cy="457200"/>
+            <a:off x="4407408" y="1325880"/>
+            <a:ext cx="3383280" cy="457200"/>
           </a:xfrm>
           <a:prstGeom prst="roundRect">
             <a:avLst>
@@ -10529,13 +10538,13 @@
           <a:p>
             <a:pPr algn="ctr"/>
             <a:r>
-              <a:rPr sz="1300" b="1" spc="160">
+              <a:rPr sz="1800" b="1" spc="200">
                 <a:solidFill>
                   <a:srgbClr val="FFFFFF"/>
                 </a:solidFill>
                 <a:latin typeface="Alegreya Sans"/>
               </a:rPr>
-              <a:t>THE QUESTION I HEAR MOST</a:t>
+              <a:t>WHY VIP WORKS</a:t>
             </a:r>
           </a:p>
         </p:txBody>
@@ -10548,8 +10557,8 @@
         </p:nvSpPr>
         <p:spPr>
           <a:xfrm>
-            <a:off x="1097280" y="2377440"/>
-            <a:ext cx="9966960" cy="2926080"/>
+            <a:off x="1097280" y="2331720"/>
+            <a:ext cx="9966960" cy="2743200"/>
           </a:xfrm>
           <a:prstGeom prst="rect">
             <a:avLst/>
@@ -10564,44 +10573,101 @@
           <a:p>
             <a:pPr algn="ctr">
               <a:lnSpc>
-                <a:spcPct val="112000"/>
+                <a:spcPct val="115000"/>
               </a:lnSpc>
               <a:spcAft>
-                <a:spcPts val="2200"/>
+                <a:spcPts val="1400"/>
               </a:spcAft>
             </a:pPr>
             <a:r>
-              <a:rPr sz="5800" b="0" i="1">
+              <a:rPr sz="4600" b="0" i="1">
                 <a:solidFill>
                   <a:srgbClr val="FFFFFF"/>
                 </a:solidFill>
                 <a:latin typeface="Libre Baskerville"/>
               </a:rPr>
-              <a:t>“When is VIP </a:t>
-            </a:r>
-            <a:r>
-              <a:rPr sz="5800" b="1" i="1">
+              <a:t>The difference isn’t the </a:t>
+            </a:r>
+            <a:r>
+              <a:rPr sz="4600" b="1" i="1">
                 <a:solidFill>
                   <a:srgbClr val="E5917A"/>
                 </a:solidFill>
                 <a:latin typeface="Libre Baskerville"/>
               </a:rPr>
-              <a:t>coming back</a:t>
-            </a:r>
-            <a:r>
-              <a:rPr sz="5800" b="0" i="1">
+              <a:t>plan</a:t>
+            </a:r>
+            <a:r>
+              <a:rPr sz="4600" b="0" i="1">
                 <a:solidFill>
                   <a:srgbClr val="FFFFFF"/>
                 </a:solidFill>
                 <a:latin typeface="Libre Baskerville"/>
               </a:rPr>
-              <a:t>?”</a:t>
+              <a:t>.</a:t>
             </a:r>
           </a:p>
           <a:p>
             <a:pPr algn="ctr">
               <a:lnSpc>
-                <a:spcPct val="140000"/>
+                <a:spcPct val="115000"/>
+              </a:lnSpc>
+            </a:pPr>
+            <a:r>
+              <a:rPr sz="4600" b="0" i="1">
+                <a:solidFill>
+                  <a:srgbClr val="FFFFFF"/>
+                </a:solidFill>
+                <a:latin typeface="Libre Baskerville"/>
+              </a:rPr>
+              <a:t>It’s having </a:t>
+            </a:r>
+            <a:r>
+              <a:rPr sz="4600" b="1" i="1">
+                <a:solidFill>
+                  <a:srgbClr val="E5917A"/>
+                </a:solidFill>
+                <a:latin typeface="Libre Baskerville"/>
+              </a:rPr>
+              <a:t>me in your corner</a:t>
+            </a:r>
+            <a:r>
+              <a:rPr sz="4600" b="0" i="1">
+                <a:solidFill>
+                  <a:srgbClr val="FFFFFF"/>
+                </a:solidFill>
+                <a:latin typeface="Libre Baskerville"/>
+              </a:rPr>
+              <a:t> — every single day.</a:t>
+            </a:r>
+          </a:p>
+        </p:txBody>
+      </p:sp>
+      <p:sp>
+        <p:nvSpPr>
+          <p:cNvPr id="5" name="TextBox 4"/>
+          <p:cNvSpPr txBox="1"/>
+          <p:nvPr/>
+        </p:nvSpPr>
+        <p:spPr>
+          <a:xfrm>
+            <a:off x="1097280" y="5074920"/>
+            <a:ext cx="9966960" cy="640080"/>
+          </a:xfrm>
+          <a:prstGeom prst="rect">
+            <a:avLst/>
+          </a:prstGeom>
+          <a:noFill/>
+        </p:spPr>
+        <p:txBody>
+          <a:bodyPr wrap="square" lIns="0" rIns="0" tIns="0" bIns="0" anchor="t">
+            <a:spAutoFit/>
+          </a:bodyPr>
+          <a:lstStyle/>
+          <a:p>
+            <a:pPr algn="ctr">
+              <a:lnSpc>
+                <a:spcPct val="120000"/>
               </a:lnSpc>
             </a:pPr>
             <a:r>
@@ -10611,7 +10677,7 @@
                 </a:solidFill>
                 <a:latin typeface="Alegreya Sans"/>
               </a:rPr>
-              <a:t>It’s been closed for over a year. So we’re opening one brand new round of 1-2-1 VIP coaching.</a:t>
+              <a:t>Personalised strategy. Daily support. Real accountability.</a:t>
             </a:r>
           </a:p>
         </p:txBody>
@@ -10706,7 +10772,7 @@
               </a:lnSpc>
             </a:pPr>
             <a:r>
-              <a:rPr sz="1600" b="1" i="0" spc="240">
+              <a:rPr sz="1800" b="1" i="0" spc="240">
                 <a:solidFill>
                   <a:srgbClr val="D97757"/>
                 </a:solidFill>
@@ -11406,7 +11472,7 @@
               </a:lnSpc>
             </a:pPr>
             <a:r>
-              <a:rPr sz="1600" b="1" i="0" spc="240">
+              <a:rPr sz="1800" b="1" i="0" spc="240">
                 <a:solidFill>
                   <a:srgbClr val="D97757"/>
                 </a:solidFill>
@@ -11655,8 +11721,8 @@
         </p:nvSpPr>
         <p:spPr>
           <a:xfrm>
-            <a:off x="4709160" y="1280160"/>
-            <a:ext cx="2743200" cy="457200"/>
+            <a:off x="4498848" y="1280160"/>
+            <a:ext cx="3200400" cy="457200"/>
           </a:xfrm>
           <a:prstGeom prst="roundRect">
             <a:avLst>
@@ -11691,7 +11757,7 @@
           <a:p>
             <a:pPr algn="ctr"/>
             <a:r>
-              <a:rPr sz="1300" b="1" spc="260">
+              <a:rPr sz="1800" b="1" spc="200">
                 <a:solidFill>
                   <a:srgbClr val="FFFFFF"/>
                 </a:solidFill>
@@ -12266,7 +12332,7 @@
               </a:lnSpc>
             </a:pPr>
             <a:r>
-              <a:rPr sz="1600" b="1" i="0" spc="240">
+              <a:rPr sz="1800" b="1" i="0" spc="240">
                 <a:solidFill>
                   <a:srgbClr val="D97757"/>
                 </a:solidFill>
@@ -12589,7 +12655,7 @@
               </a:lnSpc>
             </a:pPr>
             <a:r>
-              <a:rPr sz="1600" b="1" i="0" spc="240">
+              <a:rPr sz="1800" b="1" i="0" spc="240">
                 <a:solidFill>
                   <a:srgbClr val="D97757"/>
                 </a:solidFill>
@@ -12912,7 +12978,7 @@
               </a:lnSpc>
             </a:pPr>
             <a:r>
-              <a:rPr sz="1600" b="1" i="0" spc="240">
+              <a:rPr sz="1800" b="1" i="0" spc="240">
                 <a:solidFill>
                   <a:srgbClr val="D97757"/>
                 </a:solidFill>

--- a/wla-vip-121-deck.pptx
+++ b/wla-vip-121-deck.pptx
@@ -27,6 +27,13 @@
     <p:sldId id="275" r:id="rId26"/>
     <p:sldId id="276" r:id="rId27"/>
     <p:sldId id="277" r:id="rId28"/>
+    <p:sldId id="278" r:id="rId29"/>
+    <p:sldId id="279" r:id="rId30"/>
+    <p:sldId id="280" r:id="rId31"/>
+    <p:sldId id="281" r:id="rId32"/>
+    <p:sldId id="282" r:id="rId33"/>
+    <p:sldId id="283" r:id="rId34"/>
+    <p:sldId id="284" r:id="rId35"/>
   </p:sldIdLst>
   <p:sldSz cx="12191695" cy="6858000" type="screen4x3"/>
   <p:notesSz cx="6858000" cy="9144000"/>
@@ -3547,51 +3554,7 @@
       </p:sp>
       <p:sp>
         <p:nvSpPr>
-          <p:cNvPr id="4" name="Rectangle 3"/>
-          <p:cNvSpPr/>
-          <p:nvPr/>
-        </p:nvSpPr>
-        <p:spPr>
-          <a:xfrm>
-            <a:off x="822960" y="1207008"/>
-            <a:ext cx="1463040" cy="50292"/>
-          </a:xfrm>
-          <a:prstGeom prst="rect">
-            <a:avLst/>
-          </a:prstGeom>
-          <a:solidFill>
-            <a:srgbClr val="D97757"/>
-          </a:solidFill>
-          <a:ln>
-            <a:noFill/>
-          </a:ln>
-          <a:effectLst/>
-        </p:spPr>
-        <p:style>
-          <a:lnRef idx="1">
-            <a:schemeClr val="accent1"/>
-          </a:lnRef>
-          <a:fillRef idx="3">
-            <a:schemeClr val="accent1"/>
-          </a:fillRef>
-          <a:effectRef idx="2">
-            <a:schemeClr val="accent1"/>
-          </a:effectRef>
-          <a:fontRef idx="minor">
-            <a:schemeClr val="lt1"/>
-          </a:fontRef>
-        </p:style>
-        <p:txBody>
-          <a:bodyPr rtlCol="0" anchor="ctr"/>
-          <a:lstStyle/>
-          <a:p>
-            <a:pPr algn="ctr"/>
-          </a:p>
-        </p:txBody>
-      </p:sp>
-      <p:sp>
-        <p:nvSpPr>
-          <p:cNvPr id="5" name="TextBox 4"/>
+          <p:cNvPr id="4" name="TextBox 3"/>
           <p:cNvSpPr txBox="1"/>
           <p:nvPr/>
         </p:nvSpPr>
@@ -3648,7 +3611,7 @@
       </p:sp>
       <p:sp>
         <p:nvSpPr>
-          <p:cNvPr id="6" name="TextBox 5"/>
+          <p:cNvPr id="5" name="TextBox 4"/>
           <p:cNvSpPr txBox="1"/>
           <p:nvPr/>
         </p:nvSpPr>
@@ -3807,51 +3770,7 @@
       </p:sp>
       <p:sp>
         <p:nvSpPr>
-          <p:cNvPr id="4" name="Rectangle 3"/>
-          <p:cNvSpPr/>
-          <p:nvPr/>
-        </p:nvSpPr>
-        <p:spPr>
-          <a:xfrm>
-            <a:off x="822960" y="1207008"/>
-            <a:ext cx="1463040" cy="50292"/>
-          </a:xfrm>
-          <a:prstGeom prst="rect">
-            <a:avLst/>
-          </a:prstGeom>
-          <a:solidFill>
-            <a:srgbClr val="D97757"/>
-          </a:solidFill>
-          <a:ln>
-            <a:noFill/>
-          </a:ln>
-          <a:effectLst/>
-        </p:spPr>
-        <p:style>
-          <a:lnRef idx="1">
-            <a:schemeClr val="accent1"/>
-          </a:lnRef>
-          <a:fillRef idx="3">
-            <a:schemeClr val="accent1"/>
-          </a:fillRef>
-          <a:effectRef idx="2">
-            <a:schemeClr val="accent1"/>
-          </a:effectRef>
-          <a:fontRef idx="minor">
-            <a:schemeClr val="lt1"/>
-          </a:fontRef>
-        </p:style>
-        <p:txBody>
-          <a:bodyPr rtlCol="0" anchor="ctr"/>
-          <a:lstStyle/>
-          <a:p>
-            <a:pPr algn="ctr"/>
-          </a:p>
-        </p:txBody>
-      </p:sp>
-      <p:sp>
-        <p:nvSpPr>
-          <p:cNvPr id="5" name="TextBox 4"/>
+          <p:cNvPr id="4" name="TextBox 3"/>
           <p:cNvSpPr txBox="1"/>
           <p:nvPr/>
         </p:nvSpPr>
@@ -3899,7 +3818,7 @@
       </p:sp>
       <p:sp>
         <p:nvSpPr>
-          <p:cNvPr id="6" name="TextBox 5"/>
+          <p:cNvPr id="5" name="TextBox 4"/>
           <p:cNvSpPr txBox="1"/>
           <p:nvPr/>
         </p:nvSpPr>
@@ -4058,16 +3977,73 @@
       </p:sp>
       <p:sp>
         <p:nvSpPr>
-          <p:cNvPr id="4" name="Rectangle 3"/>
+          <p:cNvPr id="4" name="TextBox 3"/>
+          <p:cNvSpPr txBox="1"/>
+          <p:nvPr/>
+        </p:nvSpPr>
+        <p:spPr>
+          <a:xfrm>
+            <a:off x="822960" y="1325880"/>
+            <a:ext cx="10515600" cy="1828800"/>
+          </a:xfrm>
+          <a:prstGeom prst="rect">
+            <a:avLst/>
+          </a:prstGeom>
+          <a:noFill/>
+        </p:spPr>
+        <p:txBody>
+          <a:bodyPr wrap="square" lIns="0" rIns="0" tIns="0" bIns="0" anchor="t">
+            <a:spAutoFit/>
+          </a:bodyPr>
+          <a:lstStyle/>
+          <a:p>
+            <a:pPr algn="l">
+              <a:lnSpc>
+                <a:spcPct val="112000"/>
+              </a:lnSpc>
+            </a:pPr>
+            <a:r>
+              <a:rPr sz="4000" b="1" i="0">
+                <a:solidFill>
+                  <a:srgbClr val="0E2746"/>
+                </a:solidFill>
+                <a:latin typeface="Libre Baskerville"/>
+              </a:rPr>
+              <a:t>Picture this version of </a:t>
+            </a:r>
+            <a:r>
+              <a:rPr sz="4000" b="1" i="1">
+                <a:solidFill>
+                  <a:srgbClr val="D97757"/>
+                </a:solidFill>
+                <a:latin typeface="Libre Baskerville"/>
+              </a:rPr>
+              <a:t>you</a:t>
+            </a:r>
+            <a:r>
+              <a:rPr sz="4000" b="1" i="0">
+                <a:solidFill>
+                  <a:srgbClr val="0E2746"/>
+                </a:solidFill>
+                <a:latin typeface="Libre Baskerville"/>
+              </a:rPr>
+              <a:t>…</a:t>
+            </a:r>
+          </a:p>
+        </p:txBody>
+      </p:sp>
+      <p:sp>
+        <p:nvSpPr>
+          <p:cNvPr id="5" name="Oval 4"/>
           <p:cNvSpPr/>
           <p:nvPr/>
         </p:nvSpPr>
         <p:spPr>
           <a:xfrm>
-            <a:off x="822960" y="1207008"/>
-            <a:ext cx="1463040" cy="50292"/>
-          </a:xfrm>
-          <a:prstGeom prst="rect">
+            <a:off x="868680" y="3171825"/>
+            <a:ext cx="118872" cy="118872"/>
+          </a:xfrm>
+          <a:prstGeom prst="ellipse">
             <a:avLst/>
           </a:prstGeom>
           <a:solidFill>
@@ -4102,14 +4078,14 @@
       </p:sp>
       <p:sp>
         <p:nvSpPr>
-          <p:cNvPr id="5" name="TextBox 4"/>
+          <p:cNvPr id="6" name="TextBox 5"/>
           <p:cNvSpPr txBox="1"/>
           <p:nvPr/>
         </p:nvSpPr>
         <p:spPr>
           <a:xfrm>
-            <a:off x="822960" y="1325880"/>
-            <a:ext cx="10515600" cy="1828800"/>
+            <a:off x="1179576" y="3063240"/>
+            <a:ext cx="5212080" cy="548640"/>
           </a:xfrm>
           <a:prstGeom prst="rect">
             <a:avLst/>
@@ -4124,48 +4100,30 @@
           <a:p>
             <a:pPr algn="l">
               <a:lnSpc>
-                <a:spcPct val="112000"/>
-              </a:lnSpc>
-            </a:pPr>
-            <a:r>
-              <a:rPr sz="4000" b="1" i="0">
-                <a:solidFill>
-                  <a:srgbClr val="0E2746"/>
-                </a:solidFill>
-                <a:latin typeface="Libre Baskerville"/>
-              </a:rPr>
-              <a:t>Picture this version of </a:t>
-            </a:r>
-            <a:r>
-              <a:rPr sz="4000" b="1" i="1">
-                <a:solidFill>
-                  <a:srgbClr val="D97757"/>
-                </a:solidFill>
-                <a:latin typeface="Libre Baskerville"/>
-              </a:rPr>
-              <a:t>you</a:t>
-            </a:r>
-            <a:r>
-              <a:rPr sz="4000" b="1" i="0">
-                <a:solidFill>
-                  <a:srgbClr val="0E2746"/>
-                </a:solidFill>
-                <a:latin typeface="Libre Baskerville"/>
-              </a:rPr>
-              <a:t>…</a:t>
-            </a:r>
-          </a:p>
-        </p:txBody>
-      </p:sp>
-      <p:sp>
-        <p:nvSpPr>
-          <p:cNvPr id="6" name="Oval 5"/>
+                <a:spcPct val="120000"/>
+              </a:lnSpc>
+            </a:pPr>
+            <a:r>
+              <a:rPr sz="1900" b="0" i="0">
+                <a:solidFill>
+                  <a:srgbClr val="333333"/>
+                </a:solidFill>
+                <a:latin typeface="Alegreya Sans"/>
+              </a:rPr>
+              <a:t>Putting on your favourite clothes and loving how you look</a:t>
+            </a:r>
+          </a:p>
+        </p:txBody>
+      </p:sp>
+      <p:sp>
+        <p:nvSpPr>
+          <p:cNvPr id="7" name="Oval 6"/>
           <p:cNvSpPr/>
           <p:nvPr/>
         </p:nvSpPr>
         <p:spPr>
           <a:xfrm>
-            <a:off x="868680" y="3171825"/>
+            <a:off x="6263640" y="3171825"/>
             <a:ext cx="118872" cy="118872"/>
           </a:xfrm>
           <a:prstGeom prst="ellipse">
@@ -4203,13 +4161,13 @@
       </p:sp>
       <p:sp>
         <p:nvSpPr>
-          <p:cNvPr id="7" name="TextBox 6"/>
+          <p:cNvPr id="8" name="TextBox 7"/>
           <p:cNvSpPr txBox="1"/>
           <p:nvPr/>
         </p:nvSpPr>
         <p:spPr>
           <a:xfrm>
-            <a:off x="1179576" y="3063240"/>
+            <a:off x="6574536" y="3063240"/>
             <a:ext cx="5212080" cy="548640"/>
           </a:xfrm>
           <a:prstGeom prst="rect">
@@ -4235,20 +4193,20 @@
                 </a:solidFill>
                 <a:latin typeface="Alegreya Sans"/>
               </a:rPr>
-              <a:t>Putting on your favourite clothes and loving how you look</a:t>
-            </a:r>
-          </a:p>
-        </p:txBody>
-      </p:sp>
-      <p:sp>
-        <p:nvSpPr>
-          <p:cNvPr id="8" name="Oval 7"/>
+              <a:t>Waking up lighter, energised and comfortable</a:t>
+            </a:r>
+          </a:p>
+        </p:txBody>
+      </p:sp>
+      <p:sp>
+        <p:nvSpPr>
+          <p:cNvPr id="9" name="Oval 8"/>
           <p:cNvSpPr/>
           <p:nvPr/>
         </p:nvSpPr>
         <p:spPr>
           <a:xfrm>
-            <a:off x="6263640" y="3171825"/>
+            <a:off x="868680" y="3921633"/>
             <a:ext cx="118872" cy="118872"/>
           </a:xfrm>
           <a:prstGeom prst="ellipse">
@@ -4286,13 +4244,13 @@
       </p:sp>
       <p:sp>
         <p:nvSpPr>
-          <p:cNvPr id="9" name="TextBox 8"/>
+          <p:cNvPr id="10" name="TextBox 9"/>
           <p:cNvSpPr txBox="1"/>
           <p:nvPr/>
         </p:nvSpPr>
         <p:spPr>
           <a:xfrm>
-            <a:off x="6574536" y="3063240"/>
+            <a:off x="1179576" y="3813048"/>
             <a:ext cx="5212080" cy="548640"/>
           </a:xfrm>
           <a:prstGeom prst="rect">
@@ -4318,20 +4276,20 @@
                 </a:solidFill>
                 <a:latin typeface="Alegreya Sans"/>
               </a:rPr>
-              <a:t>Waking up lighter, energised and comfortable</a:t>
-            </a:r>
-          </a:p>
-        </p:txBody>
-      </p:sp>
-      <p:sp>
-        <p:nvSpPr>
-          <p:cNvPr id="10" name="Oval 9"/>
+              <a:t>No more constant cravings or evening snacking</a:t>
+            </a:r>
+          </a:p>
+        </p:txBody>
+      </p:sp>
+      <p:sp>
+        <p:nvSpPr>
+          <p:cNvPr id="11" name="Oval 10"/>
           <p:cNvSpPr/>
           <p:nvPr/>
         </p:nvSpPr>
         <p:spPr>
           <a:xfrm>
-            <a:off x="868680" y="3921633"/>
+            <a:off x="6263640" y="3921633"/>
             <a:ext cx="118872" cy="118872"/>
           </a:xfrm>
           <a:prstGeom prst="ellipse">
@@ -4369,13 +4327,13 @@
       </p:sp>
       <p:sp>
         <p:nvSpPr>
-          <p:cNvPr id="11" name="TextBox 10"/>
+          <p:cNvPr id="12" name="TextBox 11"/>
           <p:cNvSpPr txBox="1"/>
           <p:nvPr/>
         </p:nvSpPr>
         <p:spPr>
           <a:xfrm>
-            <a:off x="1179576" y="3813048"/>
+            <a:off x="6574536" y="3813048"/>
             <a:ext cx="5212080" cy="548640"/>
           </a:xfrm>
           <a:prstGeom prst="rect">
@@ -4401,20 +4359,20 @@
                 </a:solidFill>
                 <a:latin typeface="Alegreya Sans"/>
               </a:rPr>
-              <a:t>No more constant cravings or evening snacking</a:t>
-            </a:r>
-          </a:p>
-        </p:txBody>
-      </p:sp>
-      <p:sp>
-        <p:nvSpPr>
-          <p:cNvPr id="12" name="Oval 11"/>
+              <a:t>Feeling proud of the woman in the mirror</a:t>
+            </a:r>
+          </a:p>
+        </p:txBody>
+      </p:sp>
+      <p:sp>
+        <p:nvSpPr>
+          <p:cNvPr id="13" name="Oval 12"/>
           <p:cNvSpPr/>
           <p:nvPr/>
         </p:nvSpPr>
         <p:spPr>
           <a:xfrm>
-            <a:off x="6263640" y="3921633"/>
+            <a:off x="868680" y="4671441"/>
             <a:ext cx="118872" cy="118872"/>
           </a:xfrm>
           <a:prstGeom prst="ellipse">
@@ -4452,13 +4410,13 @@
       </p:sp>
       <p:sp>
         <p:nvSpPr>
-          <p:cNvPr id="13" name="TextBox 12"/>
+          <p:cNvPr id="14" name="TextBox 13"/>
           <p:cNvSpPr txBox="1"/>
           <p:nvPr/>
         </p:nvSpPr>
         <p:spPr>
           <a:xfrm>
-            <a:off x="6574536" y="3813048"/>
+            <a:off x="1179576" y="4562856"/>
             <a:ext cx="5212080" cy="548640"/>
           </a:xfrm>
           <a:prstGeom prst="rect">
@@ -4484,20 +4442,20 @@
                 </a:solidFill>
                 <a:latin typeface="Alegreya Sans"/>
               </a:rPr>
-              <a:t>Feeling proud of the woman in the mirror</a:t>
-            </a:r>
-          </a:p>
-        </p:txBody>
-      </p:sp>
-      <p:sp>
-        <p:nvSpPr>
-          <p:cNvPr id="14" name="Oval 13"/>
+              <a:t>Enjoying holidays and BBQs without worrying about your weight</a:t>
+            </a:r>
+          </a:p>
+        </p:txBody>
+      </p:sp>
+      <p:sp>
+        <p:nvSpPr>
+          <p:cNvPr id="15" name="Oval 14"/>
           <p:cNvSpPr/>
           <p:nvPr/>
         </p:nvSpPr>
         <p:spPr>
           <a:xfrm>
-            <a:off x="868680" y="4671441"/>
+            <a:off x="6263640" y="4671441"/>
             <a:ext cx="118872" cy="118872"/>
           </a:xfrm>
           <a:prstGeom prst="ellipse">
@@ -4535,90 +4493,7 @@
       </p:sp>
       <p:sp>
         <p:nvSpPr>
-          <p:cNvPr id="15" name="TextBox 14"/>
-          <p:cNvSpPr txBox="1"/>
-          <p:nvPr/>
-        </p:nvSpPr>
-        <p:spPr>
-          <a:xfrm>
-            <a:off x="1179576" y="4562856"/>
-            <a:ext cx="5212080" cy="548640"/>
-          </a:xfrm>
-          <a:prstGeom prst="rect">
-            <a:avLst/>
-          </a:prstGeom>
-          <a:noFill/>
-        </p:spPr>
-        <p:txBody>
-          <a:bodyPr wrap="square" lIns="0" rIns="0" tIns="0" bIns="0" anchor="t">
-            <a:spAutoFit/>
-          </a:bodyPr>
-          <a:lstStyle/>
-          <a:p>
-            <a:pPr algn="l">
-              <a:lnSpc>
-                <a:spcPct val="120000"/>
-              </a:lnSpc>
-            </a:pPr>
-            <a:r>
-              <a:rPr sz="1900" b="0" i="0">
-                <a:solidFill>
-                  <a:srgbClr val="333333"/>
-                </a:solidFill>
-                <a:latin typeface="Alegreya Sans"/>
-              </a:rPr>
-              <a:t>Enjoying holidays and BBQs without worrying about your weight</a:t>
-            </a:r>
-          </a:p>
-        </p:txBody>
-      </p:sp>
-      <p:sp>
-        <p:nvSpPr>
-          <p:cNvPr id="16" name="Oval 15"/>
-          <p:cNvSpPr/>
-          <p:nvPr/>
-        </p:nvSpPr>
-        <p:spPr>
-          <a:xfrm>
-            <a:off x="6263640" y="4671441"/>
-            <a:ext cx="118872" cy="118872"/>
-          </a:xfrm>
-          <a:prstGeom prst="ellipse">
-            <a:avLst/>
-          </a:prstGeom>
-          <a:solidFill>
-            <a:srgbClr val="D97757"/>
-          </a:solidFill>
-          <a:ln>
-            <a:noFill/>
-          </a:ln>
-          <a:effectLst/>
-        </p:spPr>
-        <p:style>
-          <a:lnRef idx="1">
-            <a:schemeClr val="accent1"/>
-          </a:lnRef>
-          <a:fillRef idx="3">
-            <a:schemeClr val="accent1"/>
-          </a:fillRef>
-          <a:effectRef idx="2">
-            <a:schemeClr val="accent1"/>
-          </a:effectRef>
-          <a:fontRef idx="minor">
-            <a:schemeClr val="lt1"/>
-          </a:fontRef>
-        </p:style>
-        <p:txBody>
-          <a:bodyPr rtlCol="0" anchor="ctr"/>
-          <a:lstStyle/>
-          <a:p>
-            <a:pPr algn="ctr"/>
-          </a:p>
-        </p:txBody>
-      </p:sp>
-      <p:sp>
-        <p:nvSpPr>
-          <p:cNvPr id="17" name="TextBox 16"/>
+          <p:cNvPr id="16" name="TextBox 15"/>
           <p:cNvSpPr txBox="1"/>
           <p:nvPr/>
         </p:nvSpPr>
@@ -4758,51 +4633,7 @@
       </p:sp>
       <p:sp>
         <p:nvSpPr>
-          <p:cNvPr id="4" name="Rectangle 3"/>
-          <p:cNvSpPr/>
-          <p:nvPr/>
-        </p:nvSpPr>
-        <p:spPr>
-          <a:xfrm>
-            <a:off x="822960" y="1207008"/>
-            <a:ext cx="1463040" cy="50292"/>
-          </a:xfrm>
-          <a:prstGeom prst="rect">
-            <a:avLst/>
-          </a:prstGeom>
-          <a:solidFill>
-            <a:srgbClr val="D97757"/>
-          </a:solidFill>
-          <a:ln>
-            <a:noFill/>
-          </a:ln>
-          <a:effectLst/>
-        </p:spPr>
-        <p:style>
-          <a:lnRef idx="1">
-            <a:schemeClr val="accent1"/>
-          </a:lnRef>
-          <a:fillRef idx="3">
-            <a:schemeClr val="accent1"/>
-          </a:fillRef>
-          <a:effectRef idx="2">
-            <a:schemeClr val="accent1"/>
-          </a:effectRef>
-          <a:fontRef idx="minor">
-            <a:schemeClr val="lt1"/>
-          </a:fontRef>
-        </p:style>
-        <p:txBody>
-          <a:bodyPr rtlCol="0" anchor="ctr"/>
-          <a:lstStyle/>
-          <a:p>
-            <a:pPr algn="ctr"/>
-          </a:p>
-        </p:txBody>
-      </p:sp>
-      <p:sp>
-        <p:nvSpPr>
-          <p:cNvPr id="5" name="TextBox 4"/>
+          <p:cNvPr id="4" name="TextBox 3"/>
           <p:cNvSpPr txBox="1"/>
           <p:nvPr/>
         </p:nvSpPr>
@@ -4859,7 +4690,7 @@
       </p:sp>
       <p:sp>
         <p:nvSpPr>
-          <p:cNvPr id="6" name="Rounded Rectangle 5"/>
+          <p:cNvPr id="5" name="Rounded Rectangle 4"/>
           <p:cNvSpPr/>
           <p:nvPr/>
         </p:nvSpPr>
@@ -4907,7 +4738,7 @@
       </p:sp>
       <p:sp>
         <p:nvSpPr>
-          <p:cNvPr id="7" name="TextBox 6"/>
+          <p:cNvPr id="6" name="TextBox 5"/>
           <p:cNvSpPr txBox="1"/>
           <p:nvPr/>
         </p:nvSpPr>
@@ -4946,7 +4777,7 @@
       </p:sp>
       <p:sp>
         <p:nvSpPr>
-          <p:cNvPr id="8" name="TextBox 7"/>
+          <p:cNvPr id="7" name="TextBox 6"/>
           <p:cNvSpPr txBox="1"/>
           <p:nvPr/>
         </p:nvSpPr>
@@ -4985,7 +4816,7 @@
       </p:sp>
       <p:sp>
         <p:nvSpPr>
-          <p:cNvPr id="9" name="Rounded Rectangle 8"/>
+          <p:cNvPr id="8" name="Rounded Rectangle 7"/>
           <p:cNvSpPr/>
           <p:nvPr/>
         </p:nvSpPr>
@@ -5033,7 +4864,7 @@
       </p:sp>
       <p:sp>
         <p:nvSpPr>
-          <p:cNvPr id="10" name="TextBox 9"/>
+          <p:cNvPr id="9" name="TextBox 8"/>
           <p:cNvSpPr txBox="1"/>
           <p:nvPr/>
         </p:nvSpPr>
@@ -5072,7 +4903,7 @@
       </p:sp>
       <p:sp>
         <p:nvSpPr>
-          <p:cNvPr id="11" name="TextBox 10"/>
+          <p:cNvPr id="10" name="TextBox 9"/>
           <p:cNvSpPr txBox="1"/>
           <p:nvPr/>
         </p:nvSpPr>
@@ -5111,7 +4942,7 @@
       </p:sp>
       <p:sp>
         <p:nvSpPr>
-          <p:cNvPr id="12" name="Rounded Rectangle 11"/>
+          <p:cNvPr id="11" name="Rounded Rectangle 10"/>
           <p:cNvSpPr/>
           <p:nvPr/>
         </p:nvSpPr>
@@ -5159,7 +4990,7 @@
       </p:sp>
       <p:sp>
         <p:nvSpPr>
-          <p:cNvPr id="13" name="TextBox 12"/>
+          <p:cNvPr id="12" name="TextBox 11"/>
           <p:cNvSpPr txBox="1"/>
           <p:nvPr/>
         </p:nvSpPr>
@@ -5198,7 +5029,7 @@
       </p:sp>
       <p:sp>
         <p:nvSpPr>
-          <p:cNvPr id="14" name="TextBox 13"/>
+          <p:cNvPr id="13" name="TextBox 12"/>
           <p:cNvSpPr txBox="1"/>
           <p:nvPr/>
         </p:nvSpPr>
@@ -5237,7 +5068,7 @@
       </p:sp>
       <p:sp>
         <p:nvSpPr>
-          <p:cNvPr id="15" name="Rounded Rectangle 14"/>
+          <p:cNvPr id="14" name="Rounded Rectangle 13"/>
           <p:cNvSpPr/>
           <p:nvPr/>
         </p:nvSpPr>
@@ -5285,7 +5116,7 @@
       </p:sp>
       <p:sp>
         <p:nvSpPr>
-          <p:cNvPr id="16" name="TextBox 15"/>
+          <p:cNvPr id="15" name="TextBox 14"/>
           <p:cNvSpPr txBox="1"/>
           <p:nvPr/>
         </p:nvSpPr>
@@ -5324,7 +5155,7 @@
       </p:sp>
       <p:sp>
         <p:nvSpPr>
-          <p:cNvPr id="17" name="TextBox 16"/>
+          <p:cNvPr id="16" name="TextBox 15"/>
           <p:cNvSpPr txBox="1"/>
           <p:nvPr/>
         </p:nvSpPr>
@@ -5363,7 +5194,7 @@
       </p:sp>
       <p:sp>
         <p:nvSpPr>
-          <p:cNvPr id="18" name="Rounded Rectangle 17"/>
+          <p:cNvPr id="17" name="Rounded Rectangle 16"/>
           <p:cNvSpPr/>
           <p:nvPr/>
         </p:nvSpPr>
@@ -5411,7 +5242,7 @@
       </p:sp>
       <p:sp>
         <p:nvSpPr>
-          <p:cNvPr id="19" name="TextBox 18"/>
+          <p:cNvPr id="18" name="TextBox 17"/>
           <p:cNvSpPr txBox="1"/>
           <p:nvPr/>
         </p:nvSpPr>
@@ -5450,7 +5281,7 @@
       </p:sp>
       <p:sp>
         <p:nvSpPr>
-          <p:cNvPr id="20" name="TextBox 19"/>
+          <p:cNvPr id="19" name="TextBox 18"/>
           <p:cNvSpPr txBox="1"/>
           <p:nvPr/>
         </p:nvSpPr>
@@ -5489,7 +5320,7 @@
       </p:sp>
       <p:sp>
         <p:nvSpPr>
-          <p:cNvPr id="21" name="Rounded Rectangle 20"/>
+          <p:cNvPr id="20" name="Rounded Rectangle 19"/>
           <p:cNvSpPr/>
           <p:nvPr/>
         </p:nvSpPr>
@@ -5537,7 +5368,7 @@
       </p:sp>
       <p:sp>
         <p:nvSpPr>
-          <p:cNvPr id="22" name="TextBox 21"/>
+          <p:cNvPr id="21" name="TextBox 20"/>
           <p:cNvSpPr txBox="1"/>
           <p:nvPr/>
         </p:nvSpPr>
@@ -5576,7 +5407,7 @@
       </p:sp>
       <p:sp>
         <p:nvSpPr>
-          <p:cNvPr id="23" name="TextBox 22"/>
+          <p:cNvPr id="22" name="TextBox 21"/>
           <p:cNvSpPr txBox="1"/>
           <p:nvPr/>
         </p:nvSpPr>
@@ -5675,41 +5506,16 @@
           </a:p>
         </p:txBody>
       </p:sp>
-      <p:pic>
-        <p:nvPicPr>
-          <p:cNvPr id="3" name="Picture 2" descr="jill-before-after.jpg"/>
-          <p:cNvPicPr>
-            <a:picLocks noChangeAspect="1"/>
-          </p:cNvPicPr>
-          <p:nvPr/>
-        </p:nvPicPr>
-        <p:blipFill>
-          <a:blip r:embed="rId2"/>
-          <a:srcRect l="14000" r="14000"/>
-          <a:stretch>
-            <a:fillRect/>
-          </a:stretch>
-        </p:blipFill>
-        <p:spPr>
-          <a:xfrm>
-            <a:off x="0" y="0"/>
-            <a:ext cx="4937760" cy="6858000"/>
-          </a:xfrm>
-          <a:prstGeom prst="rect">
-            <a:avLst/>
-          </a:prstGeom>
-        </p:spPr>
-      </p:pic>
-      <p:sp>
-        <p:nvSpPr>
-          <p:cNvPr id="4" name="Rectangle 3"/>
+      <p:sp>
+        <p:nvSpPr>
+          <p:cNvPr id="3" name="Rectangle 2"/>
           <p:cNvSpPr/>
           <p:nvPr/>
         </p:nvSpPr>
         <p:spPr>
           <a:xfrm>
-            <a:off x="4937760" y="0"/>
-            <a:ext cx="54864" cy="6858000"/>
+            <a:off x="621792" y="1033272"/>
+            <a:ext cx="4791456" cy="4791456"/>
           </a:xfrm>
           <a:prstGeom prst="rect">
             <a:avLst/>
@@ -5744,6 +5550,31 @@
           </a:p>
         </p:txBody>
       </p:sp>
+      <p:pic>
+        <p:nvPicPr>
+          <p:cNvPr id="4" name="Picture 3" descr="jill-before-after.jpg"/>
+          <p:cNvPicPr>
+            <a:picLocks noChangeAspect="1"/>
+          </p:cNvPicPr>
+          <p:nvPr/>
+        </p:nvPicPr>
+        <p:blipFill>
+          <a:blip r:embed="rId2"/>
+          <a:srcRect/>
+          <a:stretch>
+            <a:fillRect/>
+          </a:stretch>
+        </p:blipFill>
+        <p:spPr>
+          <a:xfrm>
+            <a:off x="685800" y="1097280"/>
+            <a:ext cx="4663440" cy="4663440"/>
+          </a:xfrm>
+          <a:prstGeom prst="rect">
+            <a:avLst/>
+          </a:prstGeom>
+        </p:spPr>
+      </p:pic>
       <p:sp>
         <p:nvSpPr>
           <p:cNvPr id="5" name="Rounded Rectangle 4"/>
@@ -5752,8 +5583,8 @@
         </p:nvSpPr>
         <p:spPr>
           <a:xfrm>
-            <a:off x="5486400" y="1097280"/>
-            <a:ext cx="2468880" cy="457200"/>
+            <a:off x="5989320" y="2011680"/>
+            <a:ext cx="3383280" cy="502920"/>
           </a:xfrm>
           <a:prstGeom prst="roundRect">
             <a:avLst>
@@ -5788,7 +5619,7 @@
           <a:p>
             <a:pPr algn="ctr"/>
             <a:r>
-              <a:rPr sz="1200" b="1" spc="200">
+              <a:rPr sz="1400" b="1" spc="160">
                 <a:solidFill>
                   <a:srgbClr val="F4EBDC"/>
                 </a:solidFill>
@@ -5807,8 +5638,8 @@
         </p:nvSpPr>
         <p:spPr>
           <a:xfrm>
-            <a:off x="5486400" y="1920240"/>
-            <a:ext cx="6035040" cy="2377440"/>
+            <a:off x="5989320" y="2788920"/>
+            <a:ext cx="5577840" cy="2011680"/>
           </a:xfrm>
           <a:prstGeom prst="rect">
             <a:avLst/>
@@ -5823,11 +5654,11 @@
           <a:p>
             <a:pPr algn="l">
               <a:lnSpc>
-                <a:spcPct val="110000"/>
-              </a:lnSpc>
-            </a:pPr>
-            <a:r>
-              <a:rPr sz="4400" b="1" i="0">
+                <a:spcPct val="112000"/>
+              </a:lnSpc>
+            </a:pPr>
+            <a:r>
+              <a:rPr sz="3800" b="1" i="0">
                 <a:solidFill>
                   <a:srgbClr val="0E2746"/>
                 </a:solidFill>
@@ -5836,29 +5667,13 @@
               <a:t>Jill lost </a:t>
             </a:r>
             <a:r>
-              <a:rPr sz="4400" b="1" i="1">
+              <a:rPr sz="3800" b="1" i="1">
                 <a:solidFill>
                   <a:srgbClr val="D97757"/>
                 </a:solidFill>
                 <a:latin typeface="Libre Baskerville"/>
               </a:rPr>
               <a:t>4 stone</a:t>
-            </a:r>
-          </a:p>
-          <a:p>
-            <a:pPr algn="l">
-              <a:lnSpc>
-                <a:spcPct val="110000"/>
-              </a:lnSpc>
-            </a:pPr>
-            <a:r>
-              <a:rPr sz="4400" b="1" i="0">
-                <a:solidFill>
-                  <a:srgbClr val="0E2746"/>
-                </a:solidFill>
-                <a:latin typeface="Libre Baskerville"/>
-              </a:rPr>
-              <a:t>in 6 months in VIP.</a:t>
             </a:r>
           </a:p>
         </p:txBody>
@@ -5871,8 +5686,8 @@
         </p:nvSpPr>
         <p:spPr>
           <a:xfrm>
-            <a:off x="5486400" y="4114800"/>
-            <a:ext cx="5943600" cy="1828800"/>
+            <a:off x="5989320" y="4709160"/>
+            <a:ext cx="5577840" cy="640080"/>
           </a:xfrm>
           <a:prstGeom prst="rect">
             <a:avLst/>
@@ -5887,17 +5702,17 @@
           <a:p>
             <a:pPr algn="l">
               <a:lnSpc>
-                <a:spcPct val="145000"/>
-              </a:lnSpc>
-            </a:pPr>
-            <a:r>
-              <a:rPr sz="2000" b="0" i="1">
+                <a:spcPct val="135000"/>
+              </a:lnSpc>
+            </a:pPr>
+            <a:r>
+              <a:rPr sz="1800" b="0" i="1">
                 <a:solidFill>
                   <a:srgbClr val="5A6478"/>
                 </a:solidFill>
                 <a:latin typeface="Libre Baskerville"/>
               </a:rPr>
-              <a:t>“VIP has changed my life. I did WLA resets and group for 2 years and didn’t achieve half of what I have in VIP. It’s just so different.”</a:t>
+              <a:t>In 6 months of 1-2-1 VIP coaching.</a:t>
             </a:r>
           </a:p>
         </p:txBody>
@@ -5935,7 +5750,7 @@
             <a:avLst/>
           </a:prstGeom>
           <a:solidFill>
-            <a:srgbClr val="0E2746"/>
+            <a:srgbClr val="F9F7F4"/>
           </a:solidFill>
           <a:ln>
             <a:noFill/>
@@ -5966,53 +5781,14 @@
       </p:sp>
       <p:sp>
         <p:nvSpPr>
-          <p:cNvPr id="3" name="TextBox 2"/>
-          <p:cNvSpPr txBox="1"/>
-          <p:nvPr/>
-        </p:nvSpPr>
-        <p:spPr>
-          <a:xfrm>
-            <a:off x="822960" y="749808"/>
-            <a:ext cx="10515600" cy="457200"/>
-          </a:xfrm>
-          <a:prstGeom prst="rect">
-            <a:avLst/>
-          </a:prstGeom>
-          <a:noFill/>
-        </p:spPr>
-        <p:txBody>
-          <a:bodyPr wrap="square" lIns="0" rIns="0" tIns="0" bIns="0" anchor="t">
-            <a:spAutoFit/>
-          </a:bodyPr>
-          <a:lstStyle/>
-          <a:p>
-            <a:pPr algn="l">
-              <a:lnSpc>
-                <a:spcPct val="120000"/>
-              </a:lnSpc>
-            </a:pPr>
-            <a:r>
-              <a:rPr sz="1800" b="1" i="0" spc="240">
-                <a:solidFill>
-                  <a:srgbClr val="E5917A"/>
-                </a:solidFill>
-                <a:latin typeface="Alegreya Sans"/>
-              </a:rPr>
-              <a:t>REAL WOMEN, REAL RESULTS</a:t>
-            </a:r>
-          </a:p>
-        </p:txBody>
-      </p:sp>
-      <p:sp>
-        <p:nvSpPr>
-          <p:cNvPr id="4" name="Rectangle 3"/>
+          <p:cNvPr id="3" name="Rectangle 2"/>
           <p:cNvSpPr/>
           <p:nvPr/>
         </p:nvSpPr>
         <p:spPr>
           <a:xfrm>
-            <a:off x="822960" y="1207008"/>
-            <a:ext cx="1463040" cy="50292"/>
+            <a:off x="621792" y="1033272"/>
+            <a:ext cx="4791456" cy="4791456"/>
           </a:xfrm>
           <a:prstGeom prst="rect">
             <a:avLst/>
@@ -6047,66 +5823,9 @@
           </a:p>
         </p:txBody>
       </p:sp>
-      <p:sp>
-        <p:nvSpPr>
-          <p:cNvPr id="5" name="TextBox 4"/>
-          <p:cNvSpPr txBox="1"/>
-          <p:nvPr/>
-        </p:nvSpPr>
-        <p:spPr>
-          <a:xfrm>
-            <a:off x="822960" y="1371600"/>
-            <a:ext cx="10424160" cy="1097280"/>
-          </a:xfrm>
-          <a:prstGeom prst="rect">
-            <a:avLst/>
-          </a:prstGeom>
-          <a:noFill/>
-        </p:spPr>
-        <p:txBody>
-          <a:bodyPr wrap="square" lIns="0" rIns="0" tIns="0" bIns="0" anchor="t">
-            <a:spAutoFit/>
-          </a:bodyPr>
-          <a:lstStyle/>
-          <a:p>
-            <a:pPr algn="l">
-              <a:lnSpc>
-                <a:spcPct val="110000"/>
-              </a:lnSpc>
-            </a:pPr>
-            <a:r>
-              <a:rPr sz="3600" b="1" i="0">
-                <a:solidFill>
-                  <a:srgbClr val="FFFFFF"/>
-                </a:solidFill>
-                <a:latin typeface="Libre Baskerville"/>
-              </a:rPr>
-              <a:t>The transformations speak for </a:t>
-            </a:r>
-            <a:r>
-              <a:rPr sz="3600" b="1" i="1">
-                <a:solidFill>
-                  <a:srgbClr val="E5917A"/>
-                </a:solidFill>
-                <a:latin typeface="Libre Baskerville"/>
-              </a:rPr>
-              <a:t>themselves</a:t>
-            </a:r>
-            <a:r>
-              <a:rPr sz="3600" b="1" i="0">
-                <a:solidFill>
-                  <a:srgbClr val="FFFFFF"/>
-                </a:solidFill>
-                <a:latin typeface="Libre Baskerville"/>
-              </a:rPr>
-              <a:t>.</a:t>
-            </a:r>
-          </a:p>
-        </p:txBody>
-      </p:sp>
       <p:pic>
         <p:nvPicPr>
-          <p:cNvPr id="6" name="Picture 5" descr="ruth-before-after.jpg"/>
+          <p:cNvPr id="4" name="Picture 3" descr="carly-before-after.jpg"/>
           <p:cNvPicPr>
             <a:picLocks noChangeAspect="1"/>
           </p:cNvPicPr>
@@ -6121,99 +5840,79 @@
         </p:blipFill>
         <p:spPr>
           <a:xfrm>
-            <a:off x="668883" y="2743200"/>
-            <a:ext cx="2542032" cy="2542032"/>
+            <a:off x="685800" y="1097280"/>
+            <a:ext cx="4663440" cy="4663440"/>
           </a:xfrm>
           <a:prstGeom prst="rect">
             <a:avLst/>
           </a:prstGeom>
         </p:spPr>
       </p:pic>
-      <p:pic>
-        <p:nvPicPr>
-          <p:cNvPr id="7" name="Picture 6" descr="jill-before-after.jpg"/>
-          <p:cNvPicPr>
-            <a:picLocks noChangeAspect="1"/>
-          </p:cNvPicPr>
-          <p:nvPr/>
-        </p:nvPicPr>
-        <p:blipFill>
-          <a:blip r:embed="rId3"/>
-          <a:srcRect/>
-          <a:stretch>
-            <a:fillRect/>
-          </a:stretch>
-        </p:blipFill>
-        <p:spPr>
-          <a:xfrm>
-            <a:off x="3439515" y="2743200"/>
-            <a:ext cx="2542032" cy="2542032"/>
-          </a:xfrm>
-          <a:prstGeom prst="rect">
-            <a:avLst/>
-          </a:prstGeom>
-        </p:spPr>
-      </p:pic>
-      <p:pic>
-        <p:nvPicPr>
-          <p:cNvPr id="8" name="Picture 7" descr="vicky-before-after.png"/>
-          <p:cNvPicPr>
-            <a:picLocks noChangeAspect="1"/>
-          </p:cNvPicPr>
-          <p:nvPr/>
-        </p:nvPicPr>
-        <p:blipFill>
-          <a:blip r:embed="rId4"/>
-          <a:srcRect/>
-          <a:stretch>
-            <a:fillRect/>
-          </a:stretch>
-        </p:blipFill>
-        <p:spPr>
-          <a:xfrm>
-            <a:off x="6210147" y="2743200"/>
-            <a:ext cx="2542032" cy="2542032"/>
-          </a:xfrm>
-          <a:prstGeom prst="rect">
-            <a:avLst/>
-          </a:prstGeom>
-        </p:spPr>
-      </p:pic>
-      <p:pic>
-        <p:nvPicPr>
-          <p:cNvPr id="9" name="Picture 8" descr="barbara-before-after.png"/>
-          <p:cNvPicPr>
-            <a:picLocks noChangeAspect="1"/>
-          </p:cNvPicPr>
-          <p:nvPr/>
-        </p:nvPicPr>
-        <p:blipFill>
-          <a:blip r:embed="rId5"/>
-          <a:srcRect/>
-          <a:stretch>
-            <a:fillRect/>
-          </a:stretch>
-        </p:blipFill>
-        <p:spPr>
-          <a:xfrm>
-            <a:off x="8980779" y="2743200"/>
-            <a:ext cx="2542032" cy="2542032"/>
-          </a:xfrm>
-          <a:prstGeom prst="rect">
-            <a:avLst/>
-          </a:prstGeom>
-        </p:spPr>
-      </p:pic>
-      <p:sp>
-        <p:nvSpPr>
-          <p:cNvPr id="10" name="TextBox 9"/>
+      <p:sp>
+        <p:nvSpPr>
+          <p:cNvPr id="5" name="Rounded Rectangle 4"/>
+          <p:cNvSpPr/>
+          <p:nvPr/>
+        </p:nvSpPr>
+        <p:spPr>
+          <a:xfrm>
+            <a:off x="5989320" y="2011680"/>
+            <a:ext cx="3383280" cy="502920"/>
+          </a:xfrm>
+          <a:prstGeom prst="roundRect">
+            <a:avLst>
+              <a:gd name="adj" fmla="val 50000"/>
+            </a:avLst>
+          </a:prstGeom>
+          <a:solidFill>
+            <a:srgbClr val="0E2746"/>
+          </a:solidFill>
+          <a:ln>
+            <a:noFill/>
+          </a:ln>
+          <a:effectLst/>
+        </p:spPr>
+        <p:style>
+          <a:lnRef idx="1">
+            <a:schemeClr val="accent1"/>
+          </a:lnRef>
+          <a:fillRef idx="3">
+            <a:schemeClr val="accent1"/>
+          </a:fillRef>
+          <a:effectRef idx="2">
+            <a:schemeClr val="accent1"/>
+          </a:effectRef>
+          <a:fontRef idx="minor">
+            <a:schemeClr val="lt1"/>
+          </a:fontRef>
+        </p:style>
+        <p:txBody>
+          <a:bodyPr rtlCol="0" anchor="ctr" lIns="164592" rIns="164592" tIns="36576" bIns="36576"/>
+          <a:lstStyle/>
+          <a:p>
+            <a:pPr algn="ctr"/>
+            <a:r>
+              <a:rPr sz="1400" b="1" spc="160">
+                <a:solidFill>
+                  <a:srgbClr val="F4EBDC"/>
+                </a:solidFill>
+                <a:latin typeface="Alegreya Sans"/>
+              </a:rPr>
+              <a:t>VIP SUCCESS STORY</a:t>
+            </a:r>
+          </a:p>
+        </p:txBody>
+      </p:sp>
+      <p:sp>
+        <p:nvSpPr>
+          <p:cNvPr id="6" name="TextBox 5"/>
           <p:cNvSpPr txBox="1"/>
           <p:nvPr/>
         </p:nvSpPr>
         <p:spPr>
           <a:xfrm>
-            <a:off x="822960" y="5577840"/>
-            <a:ext cx="10515600" cy="457200"/>
+            <a:off x="5989320" y="2788920"/>
+            <a:ext cx="5577840" cy="2011680"/>
           </a:xfrm>
           <a:prstGeom prst="rect">
             <a:avLst/>
@@ -6226,19 +5925,67 @@
           </a:bodyPr>
           <a:lstStyle/>
           <a:p>
-            <a:pPr algn="ctr">
-              <a:lnSpc>
-                <a:spcPct val="120000"/>
-              </a:lnSpc>
-            </a:pPr>
-            <a:r>
-              <a:rPr sz="1900" b="0" i="1">
-                <a:solidFill>
-                  <a:srgbClr val="F4EBDC"/>
+            <a:pPr algn="l">
+              <a:lnSpc>
+                <a:spcPct val="112000"/>
+              </a:lnSpc>
+            </a:pPr>
+            <a:r>
+              <a:rPr sz="3800" b="1" i="0">
+                <a:solidFill>
+                  <a:srgbClr val="0E2746"/>
                 </a:solidFill>
                 <a:latin typeface="Libre Baskerville"/>
               </a:rPr>
-              <a:t>From 1 to 4 stone down — in 1-2-1 VIP coaching with Anna.</a:t>
+              <a:t>Carly lost </a:t>
+            </a:r>
+            <a:r>
+              <a:rPr sz="3800" b="1" i="1">
+                <a:solidFill>
+                  <a:srgbClr val="D97757"/>
+                </a:solidFill>
+                <a:latin typeface="Libre Baskerville"/>
+              </a:rPr>
+              <a:t>one stone</a:t>
+            </a:r>
+          </a:p>
+        </p:txBody>
+      </p:sp>
+      <p:sp>
+        <p:nvSpPr>
+          <p:cNvPr id="7" name="TextBox 6"/>
+          <p:cNvSpPr txBox="1"/>
+          <p:nvPr/>
+        </p:nvSpPr>
+        <p:spPr>
+          <a:xfrm>
+            <a:off x="5989320" y="4709160"/>
+            <a:ext cx="5577840" cy="640080"/>
+          </a:xfrm>
+          <a:prstGeom prst="rect">
+            <a:avLst/>
+          </a:prstGeom>
+          <a:noFill/>
+        </p:spPr>
+        <p:txBody>
+          <a:bodyPr wrap="square" lIns="0" rIns="0" tIns="0" bIns="0" anchor="t">
+            <a:spAutoFit/>
+          </a:bodyPr>
+          <a:lstStyle/>
+          <a:p>
+            <a:pPr algn="l">
+              <a:lnSpc>
+                <a:spcPct val="135000"/>
+              </a:lnSpc>
+            </a:pPr>
+            <a:r>
+              <a:rPr sz="1800" b="0" i="1">
+                <a:solidFill>
+                  <a:srgbClr val="5A6478"/>
+                </a:solidFill>
+                <a:latin typeface="Libre Baskerville"/>
+              </a:rPr>
+              <a:t>In her very first month of VIP.</a:t>
             </a:r>
           </a:p>
         </p:txBody>
@@ -6307,53 +6054,14 @@
       </p:sp>
       <p:sp>
         <p:nvSpPr>
-          <p:cNvPr id="3" name="TextBox 2"/>
-          <p:cNvSpPr txBox="1"/>
-          <p:nvPr/>
-        </p:nvSpPr>
-        <p:spPr>
-          <a:xfrm>
-            <a:off x="822960" y="749808"/>
-            <a:ext cx="10515600" cy="457200"/>
-          </a:xfrm>
-          <a:prstGeom prst="rect">
-            <a:avLst/>
-          </a:prstGeom>
-          <a:noFill/>
-        </p:spPr>
-        <p:txBody>
-          <a:bodyPr wrap="square" lIns="0" rIns="0" tIns="0" bIns="0" anchor="t">
-            <a:spAutoFit/>
-          </a:bodyPr>
-          <a:lstStyle/>
-          <a:p>
-            <a:pPr algn="l">
-              <a:lnSpc>
-                <a:spcPct val="120000"/>
-              </a:lnSpc>
-            </a:pPr>
-            <a:r>
-              <a:rPr sz="1800" b="1" i="0" spc="240">
-                <a:solidFill>
-                  <a:srgbClr val="D97757"/>
-                </a:solidFill>
-                <a:latin typeface="Alegreya Sans"/>
-              </a:rPr>
-              <a:t>EVERYTHING YOU GET</a:t>
-            </a:r>
-          </a:p>
-        </p:txBody>
-      </p:sp>
-      <p:sp>
-        <p:nvSpPr>
-          <p:cNvPr id="4" name="Rectangle 3"/>
+          <p:cNvPr id="3" name="Rectangle 2"/>
           <p:cNvSpPr/>
           <p:nvPr/>
         </p:nvSpPr>
         <p:spPr>
           <a:xfrm>
-            <a:off x="822960" y="1207008"/>
-            <a:ext cx="1463040" cy="50292"/>
+            <a:off x="621792" y="1033272"/>
+            <a:ext cx="4791456" cy="4791456"/>
           </a:xfrm>
           <a:prstGeom prst="rect">
             <a:avLst/>
@@ -6388,70 +6096,49 @@
           </a:p>
         </p:txBody>
       </p:sp>
-      <p:sp>
-        <p:nvSpPr>
-          <p:cNvPr id="5" name="TextBox 4"/>
-          <p:cNvSpPr txBox="1"/>
-          <p:nvPr/>
-        </p:nvSpPr>
-        <p:spPr>
-          <a:xfrm>
-            <a:off x="822960" y="1298448"/>
-            <a:ext cx="10515600" cy="1828800"/>
-          </a:xfrm>
-          <a:prstGeom prst="rect">
-            <a:avLst/>
-          </a:prstGeom>
-          <a:noFill/>
-        </p:spPr>
-        <p:txBody>
-          <a:bodyPr wrap="square" lIns="0" rIns="0" tIns="0" bIns="0" anchor="t">
-            <a:spAutoFit/>
-          </a:bodyPr>
-          <a:lstStyle/>
-          <a:p>
-            <a:pPr algn="l">
-              <a:lnSpc>
-                <a:spcPct val="112000"/>
-              </a:lnSpc>
-            </a:pPr>
-            <a:r>
-              <a:rPr sz="3800" b="1" i="0">
-                <a:solidFill>
-                  <a:srgbClr val="0E2746"/>
-                </a:solidFill>
-                <a:latin typeface="Libre Baskerville"/>
-              </a:rPr>
-              <a:t>What’s </a:t>
-            </a:r>
-            <a:r>
-              <a:rPr sz="3800" b="1" i="1">
-                <a:solidFill>
-                  <a:srgbClr val="D97757"/>
-                </a:solidFill>
-                <a:latin typeface="Libre Baskerville"/>
-              </a:rPr>
-              <a:t>included</a:t>
-            </a:r>
-          </a:p>
-        </p:txBody>
-      </p:sp>
-      <p:sp>
-        <p:nvSpPr>
-          <p:cNvPr id="6" name="Oval 5"/>
+      <p:pic>
+        <p:nvPicPr>
+          <p:cNvPr id="4" name="Picture 3" descr="moira-before-after.jpg"/>
+          <p:cNvPicPr>
+            <a:picLocks noChangeAspect="1"/>
+          </p:cNvPicPr>
+          <p:nvPr/>
+        </p:nvPicPr>
+        <p:blipFill>
+          <a:blip r:embed="rId2"/>
+          <a:srcRect/>
+          <a:stretch>
+            <a:fillRect/>
+          </a:stretch>
+        </p:blipFill>
+        <p:spPr>
+          <a:xfrm>
+            <a:off x="685800" y="1097280"/>
+            <a:ext cx="4663440" cy="4663440"/>
+          </a:xfrm>
+          <a:prstGeom prst="rect">
+            <a:avLst/>
+          </a:prstGeom>
+        </p:spPr>
+      </p:pic>
+      <p:sp>
+        <p:nvSpPr>
+          <p:cNvPr id="5" name="Rounded Rectangle 4"/>
           <p:cNvSpPr/>
           <p:nvPr/>
         </p:nvSpPr>
         <p:spPr>
           <a:xfrm>
-            <a:off x="822960" y="2504440"/>
-            <a:ext cx="237744" cy="237744"/>
-          </a:xfrm>
-          <a:prstGeom prst="ellipse">
-            <a:avLst/>
+            <a:off x="5989320" y="2011680"/>
+            <a:ext cx="3383280" cy="502920"/>
+          </a:xfrm>
+          <a:prstGeom prst="roundRect">
+            <a:avLst>
+              <a:gd name="adj" fmla="val 50000"/>
+            </a:avLst>
           </a:prstGeom>
           <a:solidFill>
-            <a:srgbClr val="D97757"/>
+            <a:srgbClr val="0E2746"/>
           </a:solidFill>
           <a:ln>
             <a:noFill/>
@@ -6473,32 +6160,32 @@
           </a:fontRef>
         </p:style>
         <p:txBody>
-          <a:bodyPr rtlCol="0" anchor="ctr" lIns="0" rIns="0" tIns="0" bIns="0"/>
+          <a:bodyPr rtlCol="0" anchor="ctr" lIns="164592" rIns="164592" tIns="36576" bIns="36576"/>
           <a:lstStyle/>
           <a:p>
             <a:pPr algn="ctr"/>
             <a:r>
-              <a:rPr sz="1100" b="1">
-                <a:solidFill>
-                  <a:srgbClr val="FFFFFF"/>
+              <a:rPr sz="1400" b="1" spc="160">
+                <a:solidFill>
+                  <a:srgbClr val="F4EBDC"/>
                 </a:solidFill>
                 <a:latin typeface="Alegreya Sans"/>
               </a:rPr>
-              <a:t>✓</a:t>
-            </a:r>
-          </a:p>
-        </p:txBody>
-      </p:sp>
-      <p:sp>
-        <p:nvSpPr>
-          <p:cNvPr id="7" name="TextBox 6"/>
+              <a:t>VIP SUCCESS STORY</a:t>
+            </a:r>
+          </a:p>
+        </p:txBody>
+      </p:sp>
+      <p:sp>
+        <p:nvSpPr>
+          <p:cNvPr id="6" name="TextBox 5"/>
           <p:cNvSpPr txBox="1"/>
           <p:nvPr/>
         </p:nvSpPr>
         <p:spPr>
           <a:xfrm>
-            <a:off x="1225296" y="2450592"/>
-            <a:ext cx="4846320" cy="1005840"/>
+            <a:off x="5989320" y="2788920"/>
+            <a:ext cx="5577840" cy="2011680"/>
           </a:xfrm>
           <a:prstGeom prst="rect">
             <a:avLst/>
@@ -6513,103 +6200,40 @@
           <a:p>
             <a:pPr algn="l">
               <a:lnSpc>
-                <a:spcPct val="115000"/>
-              </a:lnSpc>
-              <a:spcAft>
-                <a:spcPts val="200"/>
-              </a:spcAft>
-            </a:pPr>
-            <a:r>
-              <a:rPr sz="1800" b="1" i="0">
+                <a:spcPct val="112000"/>
+              </a:lnSpc>
+            </a:pPr>
+            <a:r>
+              <a:rPr sz="3800" b="1" i="0">
                 <a:solidFill>
                   <a:srgbClr val="0E2746"/>
                 </a:solidFill>
                 <a:latin typeface="Libre Baskerville"/>
               </a:rPr>
-              <a:t>Monthly 1-2-1 Coaching Sessions</a:t>
-            </a:r>
-          </a:p>
-          <a:p>
-            <a:pPr algn="l">
-              <a:lnSpc>
-                <a:spcPct val="122000"/>
-              </a:lnSpc>
-            </a:pPr>
-            <a:r>
-              <a:rPr sz="1500" b="0" i="0">
-                <a:solidFill>
-                  <a:srgbClr val="5A6478"/>
-                </a:solidFill>
-                <a:latin typeface="Alegreya Sans"/>
-              </a:rPr>
-              <a:t>A dedicated session each month to review progress and refine your plan.</a:t>
-            </a:r>
-          </a:p>
-        </p:txBody>
-      </p:sp>
-      <p:sp>
-        <p:nvSpPr>
-          <p:cNvPr id="8" name="Oval 7"/>
-          <p:cNvSpPr/>
-          <p:nvPr/>
-        </p:nvSpPr>
-        <p:spPr>
-          <a:xfrm>
-            <a:off x="6309360" y="2504440"/>
-            <a:ext cx="237744" cy="237744"/>
-          </a:xfrm>
-          <a:prstGeom prst="ellipse">
-            <a:avLst/>
-          </a:prstGeom>
-          <a:solidFill>
-            <a:srgbClr val="D97757"/>
-          </a:solidFill>
-          <a:ln>
-            <a:noFill/>
-          </a:ln>
-          <a:effectLst/>
-        </p:spPr>
-        <p:style>
-          <a:lnRef idx="1">
-            <a:schemeClr val="accent1"/>
-          </a:lnRef>
-          <a:fillRef idx="3">
-            <a:schemeClr val="accent1"/>
-          </a:fillRef>
-          <a:effectRef idx="2">
-            <a:schemeClr val="accent1"/>
-          </a:effectRef>
-          <a:fontRef idx="minor">
-            <a:schemeClr val="lt1"/>
-          </a:fontRef>
-        </p:style>
-        <p:txBody>
-          <a:bodyPr rtlCol="0" anchor="ctr" lIns="0" rIns="0" tIns="0" bIns="0"/>
-          <a:lstStyle/>
-          <a:p>
-            <a:pPr algn="ctr"/>
-            <a:r>
-              <a:rPr sz="1100" b="1">
-                <a:solidFill>
-                  <a:srgbClr val="FFFFFF"/>
-                </a:solidFill>
-                <a:latin typeface="Alegreya Sans"/>
-              </a:rPr>
-              <a:t>✓</a:t>
-            </a:r>
-          </a:p>
-        </p:txBody>
-      </p:sp>
-      <p:sp>
-        <p:nvSpPr>
-          <p:cNvPr id="9" name="TextBox 8"/>
+              <a:t>Moira: </a:t>
+            </a:r>
+            <a:r>
+              <a:rPr sz="3800" b="1" i="1">
+                <a:solidFill>
+                  <a:srgbClr val="D97757"/>
+                </a:solidFill>
+                <a:latin typeface="Libre Baskerville"/>
+              </a:rPr>
+              <a:t>size 14 to a 10</a:t>
+            </a:r>
+          </a:p>
+        </p:txBody>
+      </p:sp>
+      <p:sp>
+        <p:nvSpPr>
+          <p:cNvPr id="7" name="TextBox 6"/>
           <p:cNvSpPr txBox="1"/>
           <p:nvPr/>
         </p:nvSpPr>
         <p:spPr>
           <a:xfrm>
-            <a:off x="6711696" y="2450592"/>
-            <a:ext cx="4846320" cy="1005840"/>
+            <a:off x="5989320" y="4709160"/>
+            <a:ext cx="5577840" cy="640080"/>
           </a:xfrm>
           <a:prstGeom prst="rect">
             <a:avLst/>
@@ -6624,702 +6248,17 @@
           <a:p>
             <a:pPr algn="l">
               <a:lnSpc>
-                <a:spcPct val="115000"/>
-              </a:lnSpc>
-              <a:spcAft>
-                <a:spcPts val="200"/>
-              </a:spcAft>
-            </a:pPr>
-            <a:r>
-              <a:rPr sz="1800" b="1" i="0">
-                <a:solidFill>
-                  <a:srgbClr val="0E2746"/>
+                <a:spcPct val="135000"/>
+              </a:lnSpc>
+            </a:pPr>
+            <a:r>
+              <a:rPr sz="1800" b="0" i="1">
+                <a:solidFill>
+                  <a:srgbClr val="5A6478"/>
                 </a:solidFill>
                 <a:latin typeface="Libre Baskerville"/>
               </a:rPr>
-              <a:t>Daily WhatsApp / Messenger Support</a:t>
-            </a:r>
-          </a:p>
-          <a:p>
-            <a:pPr algn="l">
-              <a:lnSpc>
-                <a:spcPct val="122000"/>
-              </a:lnSpc>
-            </a:pPr>
-            <a:r>
-              <a:rPr sz="1500" b="0" i="0">
-                <a:solidFill>
-                  <a:srgbClr val="5A6478"/>
-                </a:solidFill>
-                <a:latin typeface="Alegreya Sans"/>
-              </a:rPr>
-              <a:t>Your coach in your pocket for guidance and encouragement every day.</a:t>
-            </a:r>
-          </a:p>
-        </p:txBody>
-      </p:sp>
-      <p:sp>
-        <p:nvSpPr>
-          <p:cNvPr id="10" name="Oval 9"/>
-          <p:cNvSpPr/>
-          <p:nvPr/>
-        </p:nvSpPr>
-        <p:spPr>
-          <a:xfrm>
-            <a:off x="822960" y="3464560"/>
-            <a:ext cx="237744" cy="237744"/>
-          </a:xfrm>
-          <a:prstGeom prst="ellipse">
-            <a:avLst/>
-          </a:prstGeom>
-          <a:solidFill>
-            <a:srgbClr val="D97757"/>
-          </a:solidFill>
-          <a:ln>
-            <a:noFill/>
-          </a:ln>
-          <a:effectLst/>
-        </p:spPr>
-        <p:style>
-          <a:lnRef idx="1">
-            <a:schemeClr val="accent1"/>
-          </a:lnRef>
-          <a:fillRef idx="3">
-            <a:schemeClr val="accent1"/>
-          </a:fillRef>
-          <a:effectRef idx="2">
-            <a:schemeClr val="accent1"/>
-          </a:effectRef>
-          <a:fontRef idx="minor">
-            <a:schemeClr val="lt1"/>
-          </a:fontRef>
-        </p:style>
-        <p:txBody>
-          <a:bodyPr rtlCol="0" anchor="ctr" lIns="0" rIns="0" tIns="0" bIns="0"/>
-          <a:lstStyle/>
-          <a:p>
-            <a:pPr algn="ctr"/>
-            <a:r>
-              <a:rPr sz="1100" b="1">
-                <a:solidFill>
-                  <a:srgbClr val="FFFFFF"/>
-                </a:solidFill>
-                <a:latin typeface="Alegreya Sans"/>
-              </a:rPr>
-              <a:t>✓</a:t>
-            </a:r>
-          </a:p>
-        </p:txBody>
-      </p:sp>
-      <p:sp>
-        <p:nvSpPr>
-          <p:cNvPr id="11" name="TextBox 10"/>
-          <p:cNvSpPr txBox="1"/>
-          <p:nvPr/>
-        </p:nvSpPr>
-        <p:spPr>
-          <a:xfrm>
-            <a:off x="1225296" y="3410712"/>
-            <a:ext cx="4846320" cy="1005840"/>
-          </a:xfrm>
-          <a:prstGeom prst="rect">
-            <a:avLst/>
-          </a:prstGeom>
-          <a:noFill/>
-        </p:spPr>
-        <p:txBody>
-          <a:bodyPr wrap="square" lIns="0" rIns="0" tIns="0" bIns="0" anchor="t">
-            <a:spAutoFit/>
-          </a:bodyPr>
-          <a:lstStyle/>
-          <a:p>
-            <a:pPr algn="l">
-              <a:lnSpc>
-                <a:spcPct val="115000"/>
-              </a:lnSpc>
-              <a:spcAft>
-                <a:spcPts val="200"/>
-              </a:spcAft>
-            </a:pPr>
-            <a:r>
-              <a:rPr sz="1800" b="1" i="0">
-                <a:solidFill>
-                  <a:srgbClr val="0E2746"/>
-                </a:solidFill>
-                <a:latin typeface="Libre Baskerville"/>
-              </a:rPr>
-              <a:t>Weekly Food Diary Review</a:t>
-            </a:r>
-          </a:p>
-          <a:p>
-            <a:pPr algn="l">
-              <a:lnSpc>
-                <a:spcPct val="122000"/>
-              </a:lnSpc>
-            </a:pPr>
-            <a:r>
-              <a:rPr sz="1500" b="0" i="0">
-                <a:solidFill>
-                  <a:srgbClr val="5A6478"/>
-                </a:solidFill>
-                <a:latin typeface="Alegreya Sans"/>
-              </a:rPr>
-              <a:t>We review your nutrition each week and adjust what’s working.</a:t>
-            </a:r>
-          </a:p>
-        </p:txBody>
-      </p:sp>
-      <p:sp>
-        <p:nvSpPr>
-          <p:cNvPr id="12" name="Oval 11"/>
-          <p:cNvSpPr/>
-          <p:nvPr/>
-        </p:nvSpPr>
-        <p:spPr>
-          <a:xfrm>
-            <a:off x="6309360" y="3464560"/>
-            <a:ext cx="237744" cy="237744"/>
-          </a:xfrm>
-          <a:prstGeom prst="ellipse">
-            <a:avLst/>
-          </a:prstGeom>
-          <a:solidFill>
-            <a:srgbClr val="D97757"/>
-          </a:solidFill>
-          <a:ln>
-            <a:noFill/>
-          </a:ln>
-          <a:effectLst/>
-        </p:spPr>
-        <p:style>
-          <a:lnRef idx="1">
-            <a:schemeClr val="accent1"/>
-          </a:lnRef>
-          <a:fillRef idx="3">
-            <a:schemeClr val="accent1"/>
-          </a:fillRef>
-          <a:effectRef idx="2">
-            <a:schemeClr val="accent1"/>
-          </a:effectRef>
-          <a:fontRef idx="minor">
-            <a:schemeClr val="lt1"/>
-          </a:fontRef>
-        </p:style>
-        <p:txBody>
-          <a:bodyPr rtlCol="0" anchor="ctr" lIns="0" rIns="0" tIns="0" bIns="0"/>
-          <a:lstStyle/>
-          <a:p>
-            <a:pPr algn="ctr"/>
-            <a:r>
-              <a:rPr sz="1100" b="1">
-                <a:solidFill>
-                  <a:srgbClr val="FFFFFF"/>
-                </a:solidFill>
-                <a:latin typeface="Alegreya Sans"/>
-              </a:rPr>
-              <a:t>✓</a:t>
-            </a:r>
-          </a:p>
-        </p:txBody>
-      </p:sp>
-      <p:sp>
-        <p:nvSpPr>
-          <p:cNvPr id="13" name="TextBox 12"/>
-          <p:cNvSpPr txBox="1"/>
-          <p:nvPr/>
-        </p:nvSpPr>
-        <p:spPr>
-          <a:xfrm>
-            <a:off x="6711696" y="3410712"/>
-            <a:ext cx="4846320" cy="1005840"/>
-          </a:xfrm>
-          <a:prstGeom prst="rect">
-            <a:avLst/>
-          </a:prstGeom>
-          <a:noFill/>
-        </p:spPr>
-        <p:txBody>
-          <a:bodyPr wrap="square" lIns="0" rIns="0" tIns="0" bIns="0" anchor="t">
-            <a:spAutoFit/>
-          </a:bodyPr>
-          <a:lstStyle/>
-          <a:p>
-            <a:pPr algn="l">
-              <a:lnSpc>
-                <a:spcPct val="115000"/>
-              </a:lnSpc>
-              <a:spcAft>
-                <a:spcPts val="200"/>
-              </a:spcAft>
-            </a:pPr>
-            <a:r>
-              <a:rPr sz="1800" b="1" i="0">
-                <a:solidFill>
-                  <a:srgbClr val="0E2746"/>
-                </a:solidFill>
-                <a:latin typeface="Libre Baskerville"/>
-              </a:rPr>
-              <a:t>Weekly Nutrition Strategy</a:t>
-            </a:r>
-          </a:p>
-          <a:p>
-            <a:pPr algn="l">
-              <a:lnSpc>
-                <a:spcPct val="122000"/>
-              </a:lnSpc>
-            </a:pPr>
-            <a:r>
-              <a:rPr sz="1500" b="0" i="0">
-                <a:solidFill>
-                  <a:srgbClr val="5A6478"/>
-                </a:solidFill>
-                <a:latin typeface="Alegreya Sans"/>
-              </a:rPr>
-              <a:t>Your plan evolves with your progress, lifestyle and goals.</a:t>
-            </a:r>
-          </a:p>
-        </p:txBody>
-      </p:sp>
-      <p:sp>
-        <p:nvSpPr>
-          <p:cNvPr id="14" name="Oval 13"/>
-          <p:cNvSpPr/>
-          <p:nvPr/>
-        </p:nvSpPr>
-        <p:spPr>
-          <a:xfrm>
-            <a:off x="822960" y="4424680"/>
-            <a:ext cx="237744" cy="237744"/>
-          </a:xfrm>
-          <a:prstGeom prst="ellipse">
-            <a:avLst/>
-          </a:prstGeom>
-          <a:solidFill>
-            <a:srgbClr val="D97757"/>
-          </a:solidFill>
-          <a:ln>
-            <a:noFill/>
-          </a:ln>
-          <a:effectLst/>
-        </p:spPr>
-        <p:style>
-          <a:lnRef idx="1">
-            <a:schemeClr val="accent1"/>
-          </a:lnRef>
-          <a:fillRef idx="3">
-            <a:schemeClr val="accent1"/>
-          </a:fillRef>
-          <a:effectRef idx="2">
-            <a:schemeClr val="accent1"/>
-          </a:effectRef>
-          <a:fontRef idx="minor">
-            <a:schemeClr val="lt1"/>
-          </a:fontRef>
-        </p:style>
-        <p:txBody>
-          <a:bodyPr rtlCol="0" anchor="ctr" lIns="0" rIns="0" tIns="0" bIns="0"/>
-          <a:lstStyle/>
-          <a:p>
-            <a:pPr algn="ctr"/>
-            <a:r>
-              <a:rPr sz="1100" b="1">
-                <a:solidFill>
-                  <a:srgbClr val="FFFFFF"/>
-                </a:solidFill>
-                <a:latin typeface="Alegreya Sans"/>
-              </a:rPr>
-              <a:t>✓</a:t>
-            </a:r>
-          </a:p>
-        </p:txBody>
-      </p:sp>
-      <p:sp>
-        <p:nvSpPr>
-          <p:cNvPr id="15" name="TextBox 14"/>
-          <p:cNvSpPr txBox="1"/>
-          <p:nvPr/>
-        </p:nvSpPr>
-        <p:spPr>
-          <a:xfrm>
-            <a:off x="1225296" y="4370832"/>
-            <a:ext cx="4846320" cy="1005840"/>
-          </a:xfrm>
-          <a:prstGeom prst="rect">
-            <a:avLst/>
-          </a:prstGeom>
-          <a:noFill/>
-        </p:spPr>
-        <p:txBody>
-          <a:bodyPr wrap="square" lIns="0" rIns="0" tIns="0" bIns="0" anchor="t">
-            <a:spAutoFit/>
-          </a:bodyPr>
-          <a:lstStyle/>
-          <a:p>
-            <a:pPr algn="l">
-              <a:lnSpc>
-                <a:spcPct val="115000"/>
-              </a:lnSpc>
-              <a:spcAft>
-                <a:spcPts val="200"/>
-              </a:spcAft>
-            </a:pPr>
-            <a:r>
-              <a:rPr sz="1800" b="1" i="0">
-                <a:solidFill>
-                  <a:srgbClr val="0E2746"/>
-                </a:solidFill>
-                <a:latin typeface="Libre Baskerville"/>
-              </a:rPr>
-              <a:t>Laser-Focused Weekly Actions</a:t>
-            </a:r>
-          </a:p>
-          <a:p>
-            <a:pPr algn="l">
-              <a:lnSpc>
-                <a:spcPct val="122000"/>
-              </a:lnSpc>
-            </a:pPr>
-            <a:r>
-              <a:rPr sz="1500" b="0" i="0">
-                <a:solidFill>
-                  <a:srgbClr val="5A6478"/>
-                </a:solidFill>
-                <a:latin typeface="Alegreya Sans"/>
-              </a:rPr>
-              <a:t>Clear priorities each week so you always know your next step.</a:t>
-            </a:r>
-          </a:p>
-        </p:txBody>
-      </p:sp>
-      <p:sp>
-        <p:nvSpPr>
-          <p:cNvPr id="16" name="Oval 15"/>
-          <p:cNvSpPr/>
-          <p:nvPr/>
-        </p:nvSpPr>
-        <p:spPr>
-          <a:xfrm>
-            <a:off x="6309360" y="4424680"/>
-            <a:ext cx="237744" cy="237744"/>
-          </a:xfrm>
-          <a:prstGeom prst="ellipse">
-            <a:avLst/>
-          </a:prstGeom>
-          <a:solidFill>
-            <a:srgbClr val="D97757"/>
-          </a:solidFill>
-          <a:ln>
-            <a:noFill/>
-          </a:ln>
-          <a:effectLst/>
-        </p:spPr>
-        <p:style>
-          <a:lnRef idx="1">
-            <a:schemeClr val="accent1"/>
-          </a:lnRef>
-          <a:fillRef idx="3">
-            <a:schemeClr val="accent1"/>
-          </a:fillRef>
-          <a:effectRef idx="2">
-            <a:schemeClr val="accent1"/>
-          </a:effectRef>
-          <a:fontRef idx="minor">
-            <a:schemeClr val="lt1"/>
-          </a:fontRef>
-        </p:style>
-        <p:txBody>
-          <a:bodyPr rtlCol="0" anchor="ctr" lIns="0" rIns="0" tIns="0" bIns="0"/>
-          <a:lstStyle/>
-          <a:p>
-            <a:pPr algn="ctr"/>
-            <a:r>
-              <a:rPr sz="1100" b="1">
-                <a:solidFill>
-                  <a:srgbClr val="FFFFFF"/>
-                </a:solidFill>
-                <a:latin typeface="Alegreya Sans"/>
-              </a:rPr>
-              <a:t>✓</a:t>
-            </a:r>
-          </a:p>
-        </p:txBody>
-      </p:sp>
-      <p:sp>
-        <p:nvSpPr>
-          <p:cNvPr id="17" name="TextBox 16"/>
-          <p:cNvSpPr txBox="1"/>
-          <p:nvPr/>
-        </p:nvSpPr>
-        <p:spPr>
-          <a:xfrm>
-            <a:off x="6711696" y="4370832"/>
-            <a:ext cx="4846320" cy="1005840"/>
-          </a:xfrm>
-          <a:prstGeom prst="rect">
-            <a:avLst/>
-          </a:prstGeom>
-          <a:noFill/>
-        </p:spPr>
-        <p:txBody>
-          <a:bodyPr wrap="square" lIns="0" rIns="0" tIns="0" bIns="0" anchor="t">
-            <a:spAutoFit/>
-          </a:bodyPr>
-          <a:lstStyle/>
-          <a:p>
-            <a:pPr algn="l">
-              <a:lnSpc>
-                <a:spcPct val="115000"/>
-              </a:lnSpc>
-              <a:spcAft>
-                <a:spcPts val="200"/>
-              </a:spcAft>
-            </a:pPr>
-            <a:r>
-              <a:rPr sz="1800" b="1" i="0">
-                <a:solidFill>
-                  <a:srgbClr val="0E2746"/>
-                </a:solidFill>
-                <a:latin typeface="Libre Baskerville"/>
-              </a:rPr>
-              <a:t>Monthly Progress Tracking &amp; Review</a:t>
-            </a:r>
-          </a:p>
-          <a:p>
-            <a:pPr algn="l">
-              <a:lnSpc>
-                <a:spcPct val="122000"/>
-              </a:lnSpc>
-            </a:pPr>
-            <a:r>
-              <a:rPr sz="1500" b="0" i="0">
-                <a:solidFill>
-                  <a:srgbClr val="5A6478"/>
-                </a:solidFill>
-                <a:latin typeface="Alegreya Sans"/>
-              </a:rPr>
-              <a:t>Structured check-ins to keep you accountable and moving forward.</a:t>
-            </a:r>
-          </a:p>
-        </p:txBody>
-      </p:sp>
-      <p:sp>
-        <p:nvSpPr>
-          <p:cNvPr id="18" name="Oval 17"/>
-          <p:cNvSpPr/>
-          <p:nvPr/>
-        </p:nvSpPr>
-        <p:spPr>
-          <a:xfrm>
-            <a:off x="822960" y="5384800"/>
-            <a:ext cx="237744" cy="237744"/>
-          </a:xfrm>
-          <a:prstGeom prst="ellipse">
-            <a:avLst/>
-          </a:prstGeom>
-          <a:solidFill>
-            <a:srgbClr val="D97757"/>
-          </a:solidFill>
-          <a:ln>
-            <a:noFill/>
-          </a:ln>
-          <a:effectLst/>
-        </p:spPr>
-        <p:style>
-          <a:lnRef idx="1">
-            <a:schemeClr val="accent1"/>
-          </a:lnRef>
-          <a:fillRef idx="3">
-            <a:schemeClr val="accent1"/>
-          </a:fillRef>
-          <a:effectRef idx="2">
-            <a:schemeClr val="accent1"/>
-          </a:effectRef>
-          <a:fontRef idx="minor">
-            <a:schemeClr val="lt1"/>
-          </a:fontRef>
-        </p:style>
-        <p:txBody>
-          <a:bodyPr rtlCol="0" anchor="ctr" lIns="0" rIns="0" tIns="0" bIns="0"/>
-          <a:lstStyle/>
-          <a:p>
-            <a:pPr algn="ctr"/>
-            <a:r>
-              <a:rPr sz="1100" b="1">
-                <a:solidFill>
-                  <a:srgbClr val="FFFFFF"/>
-                </a:solidFill>
-                <a:latin typeface="Alegreya Sans"/>
-              </a:rPr>
-              <a:t>✓</a:t>
-            </a:r>
-          </a:p>
-        </p:txBody>
-      </p:sp>
-      <p:sp>
-        <p:nvSpPr>
-          <p:cNvPr id="19" name="TextBox 18"/>
-          <p:cNvSpPr txBox="1"/>
-          <p:nvPr/>
-        </p:nvSpPr>
-        <p:spPr>
-          <a:xfrm>
-            <a:off x="1225296" y="5330952"/>
-            <a:ext cx="4846320" cy="1005840"/>
-          </a:xfrm>
-          <a:prstGeom prst="rect">
-            <a:avLst/>
-          </a:prstGeom>
-          <a:noFill/>
-        </p:spPr>
-        <p:txBody>
-          <a:bodyPr wrap="square" lIns="0" rIns="0" tIns="0" bIns="0" anchor="t">
-            <a:spAutoFit/>
-          </a:bodyPr>
-          <a:lstStyle/>
-          <a:p>
-            <a:pPr algn="l">
-              <a:lnSpc>
-                <a:spcPct val="115000"/>
-              </a:lnSpc>
-              <a:spcAft>
-                <a:spcPts val="200"/>
-              </a:spcAft>
-            </a:pPr>
-            <a:r>
-              <a:rPr sz="1800" b="1" i="0">
-                <a:solidFill>
-                  <a:srgbClr val="0E2746"/>
-                </a:solidFill>
-                <a:latin typeface="Libre Baskerville"/>
-              </a:rPr>
-              <a:t>Shift &amp; Sustain Members Area</a:t>
-            </a:r>
-          </a:p>
-          <a:p>
-            <a:pPr algn="l">
-              <a:lnSpc>
-                <a:spcPct val="122000"/>
-              </a:lnSpc>
-            </a:pPr>
-            <a:r>
-              <a:rPr sz="1500" b="0" i="0">
-                <a:solidFill>
-                  <a:srgbClr val="5A6478"/>
-                </a:solidFill>
-                <a:latin typeface="Alegreya Sans"/>
-              </a:rPr>
-              <a:t>Full access to meal guides, recipes and the WLA framework.</a:t>
-            </a:r>
-          </a:p>
-        </p:txBody>
-      </p:sp>
-      <p:sp>
-        <p:nvSpPr>
-          <p:cNvPr id="20" name="Oval 19"/>
-          <p:cNvSpPr/>
-          <p:nvPr/>
-        </p:nvSpPr>
-        <p:spPr>
-          <a:xfrm>
-            <a:off x="6309360" y="5384800"/>
-            <a:ext cx="237744" cy="237744"/>
-          </a:xfrm>
-          <a:prstGeom prst="ellipse">
-            <a:avLst/>
-          </a:prstGeom>
-          <a:solidFill>
-            <a:srgbClr val="D97757"/>
-          </a:solidFill>
-          <a:ln>
-            <a:noFill/>
-          </a:ln>
-          <a:effectLst/>
-        </p:spPr>
-        <p:style>
-          <a:lnRef idx="1">
-            <a:schemeClr val="accent1"/>
-          </a:lnRef>
-          <a:fillRef idx="3">
-            <a:schemeClr val="accent1"/>
-          </a:fillRef>
-          <a:effectRef idx="2">
-            <a:schemeClr val="accent1"/>
-          </a:effectRef>
-          <a:fontRef idx="minor">
-            <a:schemeClr val="lt1"/>
-          </a:fontRef>
-        </p:style>
-        <p:txBody>
-          <a:bodyPr rtlCol="0" anchor="ctr" lIns="0" rIns="0" tIns="0" bIns="0"/>
-          <a:lstStyle/>
-          <a:p>
-            <a:pPr algn="ctr"/>
-            <a:r>
-              <a:rPr sz="1100" b="1">
-                <a:solidFill>
-                  <a:srgbClr val="FFFFFF"/>
-                </a:solidFill>
-                <a:latin typeface="Alegreya Sans"/>
-              </a:rPr>
-              <a:t>✓</a:t>
-            </a:r>
-          </a:p>
-        </p:txBody>
-      </p:sp>
-      <p:sp>
-        <p:nvSpPr>
-          <p:cNvPr id="21" name="TextBox 20"/>
-          <p:cNvSpPr txBox="1"/>
-          <p:nvPr/>
-        </p:nvSpPr>
-        <p:spPr>
-          <a:xfrm>
-            <a:off x="6711696" y="5330952"/>
-            <a:ext cx="4846320" cy="1005840"/>
-          </a:xfrm>
-          <a:prstGeom prst="rect">
-            <a:avLst/>
-          </a:prstGeom>
-          <a:noFill/>
-        </p:spPr>
-        <p:txBody>
-          <a:bodyPr wrap="square" lIns="0" rIns="0" tIns="0" bIns="0" anchor="t">
-            <a:spAutoFit/>
-          </a:bodyPr>
-          <a:lstStyle/>
-          <a:p>
-            <a:pPr algn="l">
-              <a:lnSpc>
-                <a:spcPct val="115000"/>
-              </a:lnSpc>
-              <a:spcAft>
-                <a:spcPts val="200"/>
-              </a:spcAft>
-            </a:pPr>
-            <a:r>
-              <a:rPr sz="1800" b="1" i="0">
-                <a:solidFill>
-                  <a:srgbClr val="0E2746"/>
-                </a:solidFill>
-                <a:latin typeface="Libre Baskerville"/>
-              </a:rPr>
-              <a:t>A Strategy Built Around You</a:t>
-            </a:r>
-          </a:p>
-          <a:p>
-            <a:pPr algn="l">
-              <a:lnSpc>
-                <a:spcPct val="122000"/>
-              </a:lnSpc>
-            </a:pPr>
-            <a:r>
-              <a:rPr sz="1500" b="0" i="0">
-                <a:solidFill>
-                  <a:srgbClr val="5A6478"/>
-                </a:solidFill>
-                <a:latin typeface="Alegreya Sans"/>
-              </a:rPr>
-              <a:t>No guesswork, no extremes — just a clear plan that fits your life.</a:t>
+              <a:t>A stunning drop in just 5 months.</a:t>
             </a:r>
           </a:p>
         </p:txBody>
@@ -7388,53 +6327,14 @@
       </p:sp>
       <p:sp>
         <p:nvSpPr>
-          <p:cNvPr id="3" name="TextBox 2"/>
-          <p:cNvSpPr txBox="1"/>
-          <p:nvPr/>
-        </p:nvSpPr>
-        <p:spPr>
-          <a:xfrm>
-            <a:off x="822960" y="749808"/>
-            <a:ext cx="10515600" cy="457200"/>
-          </a:xfrm>
-          <a:prstGeom prst="rect">
-            <a:avLst/>
-          </a:prstGeom>
-          <a:noFill/>
-        </p:spPr>
-        <p:txBody>
-          <a:bodyPr wrap="square" lIns="0" rIns="0" tIns="0" bIns="0" anchor="t">
-            <a:spAutoFit/>
-          </a:bodyPr>
-          <a:lstStyle/>
-          <a:p>
-            <a:pPr algn="l">
-              <a:lnSpc>
-                <a:spcPct val="120000"/>
-              </a:lnSpc>
-            </a:pPr>
-            <a:r>
-              <a:rPr sz="1800" b="1" i="0" spc="240">
-                <a:solidFill>
-                  <a:srgbClr val="D97757"/>
-                </a:solidFill>
-                <a:latin typeface="Alegreya Sans"/>
-              </a:rPr>
-              <a:t>INVESTMENT VS REALITY</a:t>
-            </a:r>
-          </a:p>
-        </p:txBody>
-      </p:sp>
-      <p:sp>
-        <p:nvSpPr>
-          <p:cNvPr id="4" name="Rectangle 3"/>
+          <p:cNvPr id="3" name="Rectangle 2"/>
           <p:cNvSpPr/>
           <p:nvPr/>
         </p:nvSpPr>
         <p:spPr>
           <a:xfrm>
-            <a:off x="822960" y="1207008"/>
-            <a:ext cx="1463040" cy="50292"/>
+            <a:off x="621792" y="1033272"/>
+            <a:ext cx="4791456" cy="4791456"/>
           </a:xfrm>
           <a:prstGeom prst="rect">
             <a:avLst/>
@@ -7469,16 +6369,96 @@
           </a:p>
         </p:txBody>
       </p:sp>
-      <p:sp>
-        <p:nvSpPr>
-          <p:cNvPr id="5" name="TextBox 4"/>
+      <p:pic>
+        <p:nvPicPr>
+          <p:cNvPr id="4" name="Picture 3" descr="denise-before-after.jpg"/>
+          <p:cNvPicPr>
+            <a:picLocks noChangeAspect="1"/>
+          </p:cNvPicPr>
+          <p:nvPr/>
+        </p:nvPicPr>
+        <p:blipFill>
+          <a:blip r:embed="rId2"/>
+          <a:srcRect/>
+          <a:stretch>
+            <a:fillRect/>
+          </a:stretch>
+        </p:blipFill>
+        <p:spPr>
+          <a:xfrm>
+            <a:off x="685800" y="1097280"/>
+            <a:ext cx="4663440" cy="4663440"/>
+          </a:xfrm>
+          <a:prstGeom prst="rect">
+            <a:avLst/>
+          </a:prstGeom>
+        </p:spPr>
+      </p:pic>
+      <p:sp>
+        <p:nvSpPr>
+          <p:cNvPr id="5" name="Rounded Rectangle 4"/>
+          <p:cNvSpPr/>
+          <p:nvPr/>
+        </p:nvSpPr>
+        <p:spPr>
+          <a:xfrm>
+            <a:off x="5989320" y="2011680"/>
+            <a:ext cx="3383280" cy="502920"/>
+          </a:xfrm>
+          <a:prstGeom prst="roundRect">
+            <a:avLst>
+              <a:gd name="adj" fmla="val 50000"/>
+            </a:avLst>
+          </a:prstGeom>
+          <a:solidFill>
+            <a:srgbClr val="0E2746"/>
+          </a:solidFill>
+          <a:ln>
+            <a:noFill/>
+          </a:ln>
+          <a:effectLst/>
+        </p:spPr>
+        <p:style>
+          <a:lnRef idx="1">
+            <a:schemeClr val="accent1"/>
+          </a:lnRef>
+          <a:fillRef idx="3">
+            <a:schemeClr val="accent1"/>
+          </a:fillRef>
+          <a:effectRef idx="2">
+            <a:schemeClr val="accent1"/>
+          </a:effectRef>
+          <a:fontRef idx="minor">
+            <a:schemeClr val="lt1"/>
+          </a:fontRef>
+        </p:style>
+        <p:txBody>
+          <a:bodyPr rtlCol="0" anchor="ctr" lIns="164592" rIns="164592" tIns="36576" bIns="36576"/>
+          <a:lstStyle/>
+          <a:p>
+            <a:pPr algn="ctr"/>
+            <a:r>
+              <a:rPr sz="1400" b="1" spc="160">
+                <a:solidFill>
+                  <a:srgbClr val="F4EBDC"/>
+                </a:solidFill>
+                <a:latin typeface="Alegreya Sans"/>
+              </a:rPr>
+              <a:t>VIP SUCCESS STORY</a:t>
+            </a:r>
+          </a:p>
+        </p:txBody>
+      </p:sp>
+      <p:sp>
+        <p:nvSpPr>
+          <p:cNvPr id="6" name="TextBox 5"/>
           <p:cNvSpPr txBox="1"/>
           <p:nvPr/>
         </p:nvSpPr>
         <p:spPr>
           <a:xfrm>
-            <a:off x="822960" y="1325880"/>
-            <a:ext cx="10515600" cy="1828800"/>
+            <a:off x="5989320" y="2788920"/>
+            <a:ext cx="5577840" cy="2011680"/>
           </a:xfrm>
           <a:prstGeom prst="rect">
             <a:avLst/>
@@ -7497,45 +6477,36 @@
               </a:lnSpc>
             </a:pPr>
             <a:r>
-              <a:rPr sz="3600" b="1" i="0">
+              <a:rPr sz="3800" b="1" i="0">
                 <a:solidFill>
                   <a:srgbClr val="0E2746"/>
                 </a:solidFill>
                 <a:latin typeface="Libre Baskerville"/>
               </a:rPr>
-              <a:t>This level of support usually costs </a:t>
-            </a:r>
-            <a:r>
-              <a:rPr sz="3600" b="1" i="1">
+              <a:t>Denise lost </a:t>
+            </a:r>
+            <a:r>
+              <a:rPr sz="3800" b="1" i="1">
                 <a:solidFill>
                   <a:srgbClr val="D97757"/>
                 </a:solidFill>
                 <a:latin typeface="Libre Baskerville"/>
               </a:rPr>
-              <a:t>thousands</a:t>
-            </a:r>
-            <a:r>
-              <a:rPr sz="3600" b="1" i="0">
-                <a:solidFill>
-                  <a:srgbClr val="0E2746"/>
-                </a:solidFill>
-                <a:latin typeface="Libre Baskerville"/>
-              </a:rPr>
-              <a:t>.</a:t>
-            </a:r>
-          </a:p>
-        </p:txBody>
-      </p:sp>
-      <p:sp>
-        <p:nvSpPr>
-          <p:cNvPr id="6" name="TextBox 5"/>
+              <a:t>a stone</a:t>
+            </a:r>
+          </a:p>
+        </p:txBody>
+      </p:sp>
+      <p:sp>
+        <p:nvSpPr>
+          <p:cNvPr id="7" name="TextBox 6"/>
           <p:cNvSpPr txBox="1"/>
           <p:nvPr/>
         </p:nvSpPr>
         <p:spPr>
           <a:xfrm>
-            <a:off x="822960" y="3108960"/>
-            <a:ext cx="10241280" cy="2743200"/>
+            <a:off x="5989320" y="4709160"/>
+            <a:ext cx="5577840" cy="640080"/>
           </a:xfrm>
           <a:prstGeom prst="rect">
             <a:avLst/>
@@ -7550,55 +6521,17 @@
           <a:p>
             <a:pPr algn="l">
               <a:lnSpc>
-                <a:spcPct val="150000"/>
-              </a:lnSpc>
-              <a:spcAft>
-                <a:spcPts val="1000"/>
-              </a:spcAft>
-            </a:pPr>
-            <a:r>
-              <a:rPr sz="2100" b="0" i="0">
-                <a:solidFill>
-                  <a:srgbClr val="333333"/>
-                </a:solidFill>
-                <a:latin typeface="Alegreya Sans"/>
-              </a:rPr>
-              <a:t>Most degree-qualified Registered Associate Nutritionists charge £300–£700 for consultations and ongoing monthly support.</a:t>
-            </a:r>
-          </a:p>
-          <a:p>
-            <a:pPr algn="l">
-              <a:lnSpc>
-                <a:spcPct val="150000"/>
-              </a:lnSpc>
-              <a:spcAft>
-                <a:spcPts val="1000"/>
-              </a:spcAft>
-            </a:pPr>
-            <a:r>
-              <a:rPr sz="2100" b="0" i="0">
-                <a:solidFill>
-                  <a:srgbClr val="333333"/>
-                </a:solidFill>
-                <a:latin typeface="Alegreya Sans"/>
-              </a:rPr>
-              <a:t>True 1-2-1 coaching — daily support, weekly reviews, a personalised strategy — typically runs £2,000–£5,000+ (take a look around Harley Street).</a:t>
-            </a:r>
-          </a:p>
-          <a:p>
-            <a:pPr algn="l">
-              <a:lnSpc>
-                <a:spcPct val="140000"/>
-              </a:lnSpc>
-            </a:pPr>
-            <a:r>
-              <a:rPr sz="2100" b="0" i="1">
-                <a:solidFill>
-                  <a:srgbClr val="0E2746"/>
+                <a:spcPct val="135000"/>
+              </a:lnSpc>
+            </a:pPr>
+            <a:r>
+              <a:rPr sz="1800" b="0" i="1">
+                <a:solidFill>
+                  <a:srgbClr val="5A6478"/>
                 </a:solidFill>
                 <a:latin typeface="Libre Baskerville"/>
               </a:rPr>
-              <a:t>For this round, I’ve made it far more accessible.</a:t>
+              <a:t>And reached her happy place in VIP.</a:t>
             </a:r>
           </a:p>
         </p:txBody>
@@ -7667,105 +6600,23 @@
       </p:sp>
       <p:sp>
         <p:nvSpPr>
-          <p:cNvPr id="3" name="TextBox 2"/>
-          <p:cNvSpPr txBox="1"/>
-          <p:nvPr/>
-        </p:nvSpPr>
-        <p:spPr>
-          <a:xfrm>
-            <a:off x="822960" y="566928"/>
-            <a:ext cx="10515600" cy="457200"/>
-          </a:xfrm>
-          <a:prstGeom prst="rect">
-            <a:avLst/>
-          </a:prstGeom>
-          <a:noFill/>
-        </p:spPr>
-        <p:txBody>
-          <a:bodyPr wrap="square" lIns="0" rIns="0" tIns="0" bIns="0" anchor="t">
-            <a:spAutoFit/>
-          </a:bodyPr>
-          <a:lstStyle/>
-          <a:p>
-            <a:pPr algn="ctr">
-              <a:lnSpc>
-                <a:spcPct val="120000"/>
-              </a:lnSpc>
-            </a:pPr>
-            <a:r>
-              <a:rPr sz="1800" b="1" i="0" spc="240">
-                <a:solidFill>
-                  <a:srgbClr val="D97757"/>
-                </a:solidFill>
-                <a:latin typeface="Alegreya Sans"/>
-              </a:rPr>
-              <a:t>CHOOSE YOUR VIP JOURNEY</a:t>
-            </a:r>
-          </a:p>
-        </p:txBody>
-      </p:sp>
-      <p:sp>
-        <p:nvSpPr>
-          <p:cNvPr id="4" name="TextBox 3"/>
-          <p:cNvSpPr txBox="1"/>
-          <p:nvPr/>
-        </p:nvSpPr>
-        <p:spPr>
-          <a:xfrm>
-            <a:off x="822960" y="1143000"/>
-            <a:ext cx="10515600" cy="731520"/>
-          </a:xfrm>
-          <a:prstGeom prst="rect">
-            <a:avLst/>
-          </a:prstGeom>
-          <a:noFill/>
-        </p:spPr>
-        <p:txBody>
-          <a:bodyPr wrap="square" lIns="0" rIns="0" tIns="0" bIns="0" anchor="t">
-            <a:spAutoFit/>
-          </a:bodyPr>
-          <a:lstStyle/>
-          <a:p>
-            <a:pPr algn="ctr">
-              <a:lnSpc>
-                <a:spcPct val="120000"/>
-              </a:lnSpc>
-            </a:pPr>
-            <a:r>
-              <a:rPr sz="3000" b="1" i="0">
-                <a:solidFill>
-                  <a:srgbClr val="0E2746"/>
-                </a:solidFill>
-                <a:latin typeface="Libre Baskerville"/>
-              </a:rPr>
-              <a:t>Personal 1-2-1 coaching, built around you.</a:t>
-            </a:r>
-          </a:p>
-        </p:txBody>
-      </p:sp>
-      <p:sp>
-        <p:nvSpPr>
-          <p:cNvPr id="5" name="Rounded Rectangle 4"/>
+          <p:cNvPr id="3" name="Rectangle 2"/>
           <p:cNvSpPr/>
           <p:nvPr/>
         </p:nvSpPr>
         <p:spPr>
           <a:xfrm>
-            <a:off x="975207" y="2286000"/>
-            <a:ext cx="4846320" cy="3246120"/>
-          </a:xfrm>
-          <a:prstGeom prst="roundRect">
-            <a:avLst>
-              <a:gd name="adj" fmla="val 5000"/>
-            </a:avLst>
+            <a:off x="621792" y="1033272"/>
+            <a:ext cx="4791456" cy="4791456"/>
+          </a:xfrm>
+          <a:prstGeom prst="rect">
+            <a:avLst/>
           </a:prstGeom>
           <a:solidFill>
-            <a:srgbClr val="FFFFFF"/>
+            <a:srgbClr val="D97757"/>
           </a:solidFill>
-          <a:ln w="15875">
-            <a:solidFill>
-              <a:srgbClr val="E9DFD3"/>
-            </a:solidFill>
+          <a:ln>
+            <a:noFill/>
           </a:ln>
           <a:effectLst/>
         </p:spPr>
@@ -7791,176 +6642,45 @@
           </a:p>
         </p:txBody>
       </p:sp>
-      <p:sp>
-        <p:nvSpPr>
-          <p:cNvPr id="6" name="TextBox 5"/>
-          <p:cNvSpPr txBox="1"/>
-          <p:nvPr/>
-        </p:nvSpPr>
-        <p:spPr>
-          <a:xfrm>
-            <a:off x="975207" y="2606040"/>
-            <a:ext cx="4846320" cy="457200"/>
-          </a:xfrm>
-          <a:prstGeom prst="rect">
-            <a:avLst/>
-          </a:prstGeom>
-          <a:noFill/>
-        </p:spPr>
-        <p:txBody>
-          <a:bodyPr wrap="square" lIns="0" rIns="0" tIns="0" bIns="0" anchor="t">
-            <a:spAutoFit/>
-          </a:bodyPr>
-          <a:lstStyle/>
-          <a:p>
-            <a:pPr algn="ctr">
-              <a:lnSpc>
-                <a:spcPct val="120000"/>
-              </a:lnSpc>
-            </a:pPr>
-            <a:r>
-              <a:rPr sz="1400" b="1" i="0" spc="200">
-                <a:solidFill>
-                  <a:srgbClr val="0E2746"/>
-                </a:solidFill>
-                <a:latin typeface="Alegreya Sans"/>
-              </a:rPr>
-              <a:t>VIP · 3 MONTHS</a:t>
-            </a:r>
-          </a:p>
-        </p:txBody>
-      </p:sp>
-      <p:sp>
-        <p:nvSpPr>
-          <p:cNvPr id="7" name="TextBox 6"/>
-          <p:cNvSpPr txBox="1"/>
-          <p:nvPr/>
-        </p:nvSpPr>
-        <p:spPr>
-          <a:xfrm>
-            <a:off x="975207" y="3108960"/>
-            <a:ext cx="4846320" cy="1097280"/>
-          </a:xfrm>
-          <a:prstGeom prst="rect">
-            <a:avLst/>
-          </a:prstGeom>
-          <a:noFill/>
-        </p:spPr>
-        <p:txBody>
-          <a:bodyPr wrap="square" lIns="0" rIns="0" tIns="0" bIns="0" anchor="t">
-            <a:spAutoFit/>
-          </a:bodyPr>
-          <a:lstStyle/>
-          <a:p>
-            <a:pPr algn="ctr">
-              <a:lnSpc>
-                <a:spcPct val="120000"/>
-              </a:lnSpc>
-            </a:pPr>
-            <a:r>
-              <a:rPr sz="6400" b="1" i="0">
-                <a:solidFill>
-                  <a:srgbClr val="D97757"/>
-                </a:solidFill>
-                <a:latin typeface="Libre Baskerville"/>
-              </a:rPr>
-              <a:t>£597</a:t>
-            </a:r>
-          </a:p>
-        </p:txBody>
-      </p:sp>
-      <p:sp>
-        <p:nvSpPr>
-          <p:cNvPr id="8" name="TextBox 7"/>
-          <p:cNvSpPr txBox="1"/>
-          <p:nvPr/>
-        </p:nvSpPr>
-        <p:spPr>
-          <a:xfrm>
-            <a:off x="1432407" y="4251960"/>
-            <a:ext cx="3931920" cy="640080"/>
-          </a:xfrm>
-          <a:prstGeom prst="rect">
-            <a:avLst/>
-          </a:prstGeom>
-          <a:noFill/>
-        </p:spPr>
-        <p:txBody>
-          <a:bodyPr wrap="square" lIns="0" rIns="0" tIns="0" bIns="0" anchor="t">
-            <a:spAutoFit/>
-          </a:bodyPr>
-          <a:lstStyle/>
-          <a:p>
-            <a:pPr algn="ctr">
-              <a:lnSpc>
-                <a:spcPct val="130000"/>
-              </a:lnSpc>
-            </a:pPr>
-            <a:r>
-              <a:rPr sz="1700" b="0" i="0">
-                <a:solidFill>
-                  <a:srgbClr val="333333"/>
-                </a:solidFill>
-                <a:latin typeface="Alegreya Sans"/>
-              </a:rPr>
-              <a:t>3 months of personalised 1-2-1 coaching</a:t>
-            </a:r>
-          </a:p>
-        </p:txBody>
-      </p:sp>
-      <p:sp>
-        <p:nvSpPr>
-          <p:cNvPr id="9" name="TextBox 8"/>
-          <p:cNvSpPr txBox="1"/>
-          <p:nvPr/>
-        </p:nvSpPr>
-        <p:spPr>
-          <a:xfrm>
-            <a:off x="1432407" y="4983480"/>
-            <a:ext cx="3931920" cy="457200"/>
-          </a:xfrm>
-          <a:prstGeom prst="rect">
-            <a:avLst/>
-          </a:prstGeom>
-          <a:noFill/>
-        </p:spPr>
-        <p:txBody>
-          <a:bodyPr wrap="square" lIns="0" rIns="0" tIns="0" bIns="0" anchor="t">
-            <a:spAutoFit/>
-          </a:bodyPr>
-          <a:lstStyle/>
-          <a:p>
-            <a:pPr algn="ctr">
-              <a:lnSpc>
-                <a:spcPct val="120000"/>
-              </a:lnSpc>
-            </a:pPr>
-            <a:r>
-              <a:rPr sz="1700" b="0" i="1">
-                <a:solidFill>
-                  <a:srgbClr val="0E2746"/>
-                </a:solidFill>
-                <a:latin typeface="Libre Baskerville"/>
-              </a:rPr>
-              <a:t>Monthly plans from £199</a:t>
-            </a:r>
-          </a:p>
-        </p:txBody>
-      </p:sp>
-      <p:sp>
-        <p:nvSpPr>
-          <p:cNvPr id="10" name="Rounded Rectangle 9"/>
+      <p:pic>
+        <p:nvPicPr>
+          <p:cNvPr id="4" name="Picture 3" descr="sally-before-after.jpg"/>
+          <p:cNvPicPr>
+            <a:picLocks noChangeAspect="1"/>
+          </p:cNvPicPr>
+          <p:nvPr/>
+        </p:nvPicPr>
+        <p:blipFill>
+          <a:blip r:embed="rId2"/>
+          <a:srcRect/>
+          <a:stretch>
+            <a:fillRect/>
+          </a:stretch>
+        </p:blipFill>
+        <p:spPr>
+          <a:xfrm>
+            <a:off x="685800" y="1097280"/>
+            <a:ext cx="4663440" cy="4663440"/>
+          </a:xfrm>
+          <a:prstGeom prst="rect">
+            <a:avLst/>
+          </a:prstGeom>
+        </p:spPr>
+      </p:pic>
+      <p:sp>
+        <p:nvSpPr>
+          <p:cNvPr id="5" name="Rounded Rectangle 4"/>
           <p:cNvSpPr/>
           <p:nvPr/>
         </p:nvSpPr>
         <p:spPr>
           <a:xfrm>
-            <a:off x="6370167" y="2286000"/>
-            <a:ext cx="4846320" cy="3246120"/>
+            <a:off x="5989320" y="2011680"/>
+            <a:ext cx="3383280" cy="502920"/>
           </a:xfrm>
           <a:prstGeom prst="roundRect">
             <a:avLst>
-              <a:gd name="adj" fmla="val 5000"/>
+              <a:gd name="adj" fmla="val 50000"/>
             </a:avLst>
           </a:prstGeom>
           <a:solidFill>
@@ -7986,78 +6706,32 @@
           </a:fontRef>
         </p:style>
         <p:txBody>
-          <a:bodyPr rtlCol="0" anchor="ctr"/>
+          <a:bodyPr rtlCol="0" anchor="ctr" lIns="164592" rIns="164592" tIns="36576" bIns="36576"/>
           <a:lstStyle/>
           <a:p>
             <a:pPr algn="ctr"/>
-          </a:p>
-        </p:txBody>
-      </p:sp>
-      <p:sp>
-        <p:nvSpPr>
-          <p:cNvPr id="11" name="Rounded Rectangle 10"/>
-          <p:cNvSpPr/>
-          <p:nvPr/>
-        </p:nvSpPr>
-        <p:spPr>
-          <a:xfrm>
-            <a:off x="7787487" y="2029968"/>
-            <a:ext cx="2011680" cy="457200"/>
-          </a:xfrm>
-          <a:prstGeom prst="roundRect">
-            <a:avLst>
-              <a:gd name="adj" fmla="val 50000"/>
-            </a:avLst>
-          </a:prstGeom>
-          <a:solidFill>
-            <a:srgbClr val="D97757"/>
-          </a:solidFill>
-          <a:ln>
-            <a:noFill/>
-          </a:ln>
-          <a:effectLst/>
-        </p:spPr>
-        <p:style>
-          <a:lnRef idx="1">
-            <a:schemeClr val="accent1"/>
-          </a:lnRef>
-          <a:fillRef idx="3">
-            <a:schemeClr val="accent1"/>
-          </a:fillRef>
-          <a:effectRef idx="2">
-            <a:schemeClr val="accent1"/>
-          </a:effectRef>
-          <a:fontRef idx="minor">
-            <a:schemeClr val="lt1"/>
-          </a:fontRef>
-        </p:style>
-        <p:txBody>
-          <a:bodyPr rtlCol="0" anchor="ctr" lIns="164592" rIns="164592" tIns="36576" bIns="36576"/>
-          <a:lstStyle/>
-          <a:p>
-            <a:pPr algn="ctr"/>
-            <a:r>
-              <a:rPr sz="1200" b="1" spc="200">
-                <a:solidFill>
-                  <a:srgbClr val="FFFFFF"/>
+            <a:r>
+              <a:rPr sz="1400" b="1" spc="160">
+                <a:solidFill>
+                  <a:srgbClr val="F4EBDC"/>
                 </a:solidFill>
                 <a:latin typeface="Alegreya Sans"/>
               </a:rPr>
-              <a:t>BEST VALUE</a:t>
-            </a:r>
-          </a:p>
-        </p:txBody>
-      </p:sp>
-      <p:sp>
-        <p:nvSpPr>
-          <p:cNvPr id="12" name="TextBox 11"/>
+              <a:t>VIP SUCCESS STORY</a:t>
+            </a:r>
+          </a:p>
+        </p:txBody>
+      </p:sp>
+      <p:sp>
+        <p:nvSpPr>
+          <p:cNvPr id="6" name="TextBox 5"/>
           <p:cNvSpPr txBox="1"/>
           <p:nvPr/>
         </p:nvSpPr>
         <p:spPr>
           <a:xfrm>
-            <a:off x="6370167" y="2606040"/>
-            <a:ext cx="4846320" cy="457200"/>
+            <a:off x="5989320" y="2788920"/>
+            <a:ext cx="5577840" cy="2011680"/>
           </a:xfrm>
           <a:prstGeom prst="rect">
             <a:avLst/>
@@ -8070,33 +6744,42 @@
           </a:bodyPr>
           <a:lstStyle/>
           <a:p>
-            <a:pPr algn="ctr">
-              <a:lnSpc>
-                <a:spcPct val="120000"/>
-              </a:lnSpc>
-            </a:pPr>
-            <a:r>
-              <a:rPr sz="1400" b="1" i="0" spc="200">
-                <a:solidFill>
-                  <a:srgbClr val="F4EBDC"/>
-                </a:solidFill>
-                <a:latin typeface="Alegreya Sans"/>
-              </a:rPr>
-              <a:t>VIP · 6 MONTHS</a:t>
-            </a:r>
-          </a:p>
-        </p:txBody>
-      </p:sp>
-      <p:sp>
-        <p:nvSpPr>
-          <p:cNvPr id="13" name="TextBox 12"/>
+            <a:pPr algn="l">
+              <a:lnSpc>
+                <a:spcPct val="112000"/>
+              </a:lnSpc>
+            </a:pPr>
+            <a:r>
+              <a:rPr sz="3800" b="1" i="0">
+                <a:solidFill>
+                  <a:srgbClr val="0E2746"/>
+                </a:solidFill>
+                <a:latin typeface="Libre Baskerville"/>
+              </a:rPr>
+              <a:t>Sally lost </a:t>
+            </a:r>
+            <a:r>
+              <a:rPr sz="3800" b="1" i="1">
+                <a:solidFill>
+                  <a:srgbClr val="D97757"/>
+                </a:solidFill>
+                <a:latin typeface="Libre Baskerville"/>
+              </a:rPr>
+              <a:t>a stone</a:t>
+            </a:r>
+          </a:p>
+        </p:txBody>
+      </p:sp>
+      <p:sp>
+        <p:nvSpPr>
+          <p:cNvPr id="7" name="TextBox 6"/>
           <p:cNvSpPr txBox="1"/>
           <p:nvPr/>
         </p:nvSpPr>
         <p:spPr>
           <a:xfrm>
-            <a:off x="6370167" y="3108960"/>
-            <a:ext cx="4846320" cy="1097280"/>
+            <a:off x="5989320" y="4709160"/>
+            <a:ext cx="5577840" cy="640080"/>
           </a:xfrm>
           <a:prstGeom prst="rect">
             <a:avLst/>
@@ -8109,136 +6792,19 @@
           </a:bodyPr>
           <a:lstStyle/>
           <a:p>
-            <a:pPr algn="ctr">
-              <a:lnSpc>
-                <a:spcPct val="120000"/>
-              </a:lnSpc>
-            </a:pPr>
-            <a:r>
-              <a:rPr sz="6400" b="1" i="0">
-                <a:solidFill>
-                  <a:srgbClr val="E5917A"/>
+            <a:pPr algn="l">
+              <a:lnSpc>
+                <a:spcPct val="135000"/>
+              </a:lnSpc>
+            </a:pPr>
+            <a:r>
+              <a:rPr sz="1800" b="0" i="1">
+                <a:solidFill>
+                  <a:srgbClr val="5A6478"/>
                 </a:solidFill>
                 <a:latin typeface="Libre Baskerville"/>
               </a:rPr>
-              <a:t>£1197</a:t>
-            </a:r>
-          </a:p>
-        </p:txBody>
-      </p:sp>
-      <p:sp>
-        <p:nvSpPr>
-          <p:cNvPr id="14" name="TextBox 13"/>
-          <p:cNvSpPr txBox="1"/>
-          <p:nvPr/>
-        </p:nvSpPr>
-        <p:spPr>
-          <a:xfrm>
-            <a:off x="6827367" y="4251960"/>
-            <a:ext cx="3931920" cy="640080"/>
-          </a:xfrm>
-          <a:prstGeom prst="rect">
-            <a:avLst/>
-          </a:prstGeom>
-          <a:noFill/>
-        </p:spPr>
-        <p:txBody>
-          <a:bodyPr wrap="square" lIns="0" rIns="0" tIns="0" bIns="0" anchor="t">
-            <a:spAutoFit/>
-          </a:bodyPr>
-          <a:lstStyle/>
-          <a:p>
-            <a:pPr algn="ctr">
-              <a:lnSpc>
-                <a:spcPct val="130000"/>
-              </a:lnSpc>
-            </a:pPr>
-            <a:r>
-              <a:rPr sz="1700" b="0" i="0">
-                <a:solidFill>
-                  <a:srgbClr val="F4EBDC"/>
-                </a:solidFill>
-                <a:latin typeface="Alegreya Sans"/>
-              </a:rPr>
-              <a:t>The time to lose it AND keep it off for good</a:t>
-            </a:r>
-          </a:p>
-        </p:txBody>
-      </p:sp>
-      <p:sp>
-        <p:nvSpPr>
-          <p:cNvPr id="15" name="TextBox 14"/>
-          <p:cNvSpPr txBox="1"/>
-          <p:nvPr/>
-        </p:nvSpPr>
-        <p:spPr>
-          <a:xfrm>
-            <a:off x="6827367" y="4983480"/>
-            <a:ext cx="3931920" cy="457200"/>
-          </a:xfrm>
-          <a:prstGeom prst="rect">
-            <a:avLst/>
-          </a:prstGeom>
-          <a:noFill/>
-        </p:spPr>
-        <p:txBody>
-          <a:bodyPr wrap="square" lIns="0" rIns="0" tIns="0" bIns="0" anchor="t">
-            <a:spAutoFit/>
-          </a:bodyPr>
-          <a:lstStyle/>
-          <a:p>
-            <a:pPr algn="ctr">
-              <a:lnSpc>
-                <a:spcPct val="120000"/>
-              </a:lnSpc>
-            </a:pPr>
-            <a:r>
-              <a:rPr sz="1700" b="0" i="1">
-                <a:solidFill>
-                  <a:srgbClr val="FFFFFF"/>
-                </a:solidFill>
-                <a:latin typeface="Libre Baskerville"/>
-              </a:rPr>
-              <a:t>Most of my biggest transformations</a:t>
-            </a:r>
-          </a:p>
-        </p:txBody>
-      </p:sp>
-      <p:sp>
-        <p:nvSpPr>
-          <p:cNvPr id="16" name="TextBox 15"/>
-          <p:cNvSpPr txBox="1"/>
-          <p:nvPr/>
-        </p:nvSpPr>
-        <p:spPr>
-          <a:xfrm>
-            <a:off x="548640" y="5650992"/>
-            <a:ext cx="11091672" cy="1005840"/>
-          </a:xfrm>
-          <a:prstGeom prst="rect">
-            <a:avLst/>
-          </a:prstGeom>
-          <a:noFill/>
-        </p:spPr>
-        <p:txBody>
-          <a:bodyPr wrap="square" lIns="0" rIns="0" tIns="0" bIns="0" anchor="t">
-            <a:spAutoFit/>
-          </a:bodyPr>
-          <a:lstStyle/>
-          <a:p>
-            <a:pPr algn="ctr">
-              <a:lnSpc>
-                <a:spcPct val="125000"/>
-              </a:lnSpc>
-            </a:pPr>
-            <a:r>
-              <a:rPr sz="2400" b="1" i="0" spc="20">
-                <a:solidFill>
-                  <a:srgbClr val="0E2746"/>
-                </a:solidFill>
-                <a:latin typeface="Alegreya Sans"/>
-              </a:rPr>
-              <a:t>Pay with PayPal, Klarna or Clearpay  ·  Limited to 30 women  ·  Doors open [START DATE]</a:t>
+              <a:t>In just 2 months of VIP coaching.</a:t>
             </a:r>
           </a:p>
         </p:txBody>
@@ -8307,53 +6873,14 @@
       </p:sp>
       <p:sp>
         <p:nvSpPr>
-          <p:cNvPr id="3" name="TextBox 2"/>
-          <p:cNvSpPr txBox="1"/>
-          <p:nvPr/>
-        </p:nvSpPr>
-        <p:spPr>
-          <a:xfrm>
-            <a:off x="822960" y="749808"/>
-            <a:ext cx="10515600" cy="457200"/>
-          </a:xfrm>
-          <a:prstGeom prst="rect">
-            <a:avLst/>
-          </a:prstGeom>
-          <a:noFill/>
-        </p:spPr>
-        <p:txBody>
-          <a:bodyPr wrap="square" lIns="0" rIns="0" tIns="0" bIns="0" anchor="t">
-            <a:spAutoFit/>
-          </a:bodyPr>
-          <a:lstStyle/>
-          <a:p>
-            <a:pPr algn="l">
-              <a:lnSpc>
-                <a:spcPct val="120000"/>
-              </a:lnSpc>
-            </a:pPr>
-            <a:r>
-              <a:rPr sz="1800" b="1" i="0" spc="240">
-                <a:solidFill>
-                  <a:srgbClr val="D97757"/>
-                </a:solidFill>
-                <a:latin typeface="Alegreya Sans"/>
-              </a:rPr>
-              <a:t>IS THIS YOU?</a:t>
-            </a:r>
-          </a:p>
-        </p:txBody>
-      </p:sp>
-      <p:sp>
-        <p:nvSpPr>
-          <p:cNvPr id="4" name="Rectangle 3"/>
+          <p:cNvPr id="3" name="Rectangle 2"/>
           <p:cNvSpPr/>
           <p:nvPr/>
         </p:nvSpPr>
         <p:spPr>
           <a:xfrm>
-            <a:off x="822960" y="1207008"/>
-            <a:ext cx="1463040" cy="50292"/>
+            <a:off x="621792" y="1033272"/>
+            <a:ext cx="4791456" cy="4791456"/>
           </a:xfrm>
           <a:prstGeom prst="rect">
             <a:avLst/>
@@ -8388,70 +6915,49 @@
           </a:p>
         </p:txBody>
       </p:sp>
-      <p:sp>
-        <p:nvSpPr>
-          <p:cNvPr id="5" name="TextBox 4"/>
-          <p:cNvSpPr txBox="1"/>
-          <p:nvPr/>
-        </p:nvSpPr>
-        <p:spPr>
-          <a:xfrm>
-            <a:off x="822960" y="1298448"/>
-            <a:ext cx="10515600" cy="1828800"/>
-          </a:xfrm>
-          <a:prstGeom prst="rect">
-            <a:avLst/>
-          </a:prstGeom>
-          <a:noFill/>
-        </p:spPr>
-        <p:txBody>
-          <a:bodyPr wrap="square" lIns="0" rIns="0" tIns="0" bIns="0" anchor="t">
-            <a:spAutoFit/>
-          </a:bodyPr>
-          <a:lstStyle/>
-          <a:p>
-            <a:pPr algn="l">
-              <a:lnSpc>
-                <a:spcPct val="112000"/>
-              </a:lnSpc>
-            </a:pPr>
-            <a:r>
-              <a:rPr sz="3800" b="1" i="0">
-                <a:solidFill>
-                  <a:srgbClr val="0E2746"/>
-                </a:solidFill>
-                <a:latin typeface="Libre Baskerville"/>
-              </a:rPr>
-              <a:t>Who VIP is </a:t>
-            </a:r>
-            <a:r>
-              <a:rPr sz="3800" b="1" i="1">
-                <a:solidFill>
-                  <a:srgbClr val="D97757"/>
-                </a:solidFill>
-                <a:latin typeface="Libre Baskerville"/>
-              </a:rPr>
-              <a:t>for</a:t>
-            </a:r>
-          </a:p>
-        </p:txBody>
-      </p:sp>
-      <p:sp>
-        <p:nvSpPr>
-          <p:cNvPr id="6" name="Oval 5"/>
+      <p:pic>
+        <p:nvPicPr>
+          <p:cNvPr id="4" name="Picture 3" descr="sam-before-after.jpg"/>
+          <p:cNvPicPr>
+            <a:picLocks noChangeAspect="1"/>
+          </p:cNvPicPr>
+          <p:nvPr/>
+        </p:nvPicPr>
+        <p:blipFill>
+          <a:blip r:embed="rId2"/>
+          <a:srcRect/>
+          <a:stretch>
+            <a:fillRect/>
+          </a:stretch>
+        </p:blipFill>
+        <p:spPr>
+          <a:xfrm>
+            <a:off x="685800" y="1097280"/>
+            <a:ext cx="4663440" cy="4663440"/>
+          </a:xfrm>
+          <a:prstGeom prst="rect">
+            <a:avLst/>
+          </a:prstGeom>
+        </p:spPr>
+      </p:pic>
+      <p:sp>
+        <p:nvSpPr>
+          <p:cNvPr id="5" name="Rounded Rectangle 4"/>
           <p:cNvSpPr/>
           <p:nvPr/>
         </p:nvSpPr>
         <p:spPr>
           <a:xfrm>
-            <a:off x="868680" y="2577465"/>
-            <a:ext cx="118872" cy="118872"/>
-          </a:xfrm>
-          <a:prstGeom prst="ellipse">
-            <a:avLst/>
+            <a:off x="5989320" y="2011680"/>
+            <a:ext cx="3383280" cy="502920"/>
+          </a:xfrm>
+          <a:prstGeom prst="roundRect">
+            <a:avLst>
+              <a:gd name="adj" fmla="val 50000"/>
+            </a:avLst>
           </a:prstGeom>
           <a:solidFill>
-            <a:srgbClr val="D97757"/>
+            <a:srgbClr val="0E2746"/>
           </a:solidFill>
           <a:ln>
             <a:noFill/>
@@ -8473,23 +6979,32 @@
           </a:fontRef>
         </p:style>
         <p:txBody>
-          <a:bodyPr rtlCol="0" anchor="ctr"/>
+          <a:bodyPr rtlCol="0" anchor="ctr" lIns="164592" rIns="164592" tIns="36576" bIns="36576"/>
           <a:lstStyle/>
           <a:p>
             <a:pPr algn="ctr"/>
-          </a:p>
-        </p:txBody>
-      </p:sp>
-      <p:sp>
-        <p:nvSpPr>
-          <p:cNvPr id="7" name="TextBox 6"/>
+            <a:r>
+              <a:rPr sz="1400" b="1" spc="160">
+                <a:solidFill>
+                  <a:srgbClr val="F4EBDC"/>
+                </a:solidFill>
+                <a:latin typeface="Alegreya Sans"/>
+              </a:rPr>
+              <a:t>VIP SUCCESS STORY</a:t>
+            </a:r>
+          </a:p>
+        </p:txBody>
+      </p:sp>
+      <p:sp>
+        <p:nvSpPr>
+          <p:cNvPr id="6" name="TextBox 5"/>
           <p:cNvSpPr txBox="1"/>
           <p:nvPr/>
         </p:nvSpPr>
         <p:spPr>
           <a:xfrm>
-            <a:off x="1179576" y="2468880"/>
-            <a:ext cx="10332720" cy="548640"/>
+            <a:off x="5989320" y="2788920"/>
+            <a:ext cx="5577840" cy="2011680"/>
           </a:xfrm>
           <a:prstGeom prst="rect">
             <a:avLst/>
@@ -8504,75 +7019,40 @@
           <a:p>
             <a:pPr algn="l">
               <a:lnSpc>
-                <a:spcPct val="120000"/>
-              </a:lnSpc>
-            </a:pPr>
-            <a:r>
-              <a:rPr sz="1900" b="0" i="0">
-                <a:solidFill>
-                  <a:srgbClr val="333333"/>
-                </a:solidFill>
-                <a:latin typeface="Alegreya Sans"/>
-              </a:rPr>
-              <a:t>You know you need support and accountability to stay consistent</a:t>
-            </a:r>
-          </a:p>
-        </p:txBody>
-      </p:sp>
-      <p:sp>
-        <p:nvSpPr>
-          <p:cNvPr id="8" name="Oval 7"/>
-          <p:cNvSpPr/>
-          <p:nvPr/>
-        </p:nvSpPr>
-        <p:spPr>
-          <a:xfrm>
-            <a:off x="868680" y="3180969"/>
-            <a:ext cx="118872" cy="118872"/>
-          </a:xfrm>
-          <a:prstGeom prst="ellipse">
-            <a:avLst/>
-          </a:prstGeom>
-          <a:solidFill>
-            <a:srgbClr val="D97757"/>
-          </a:solidFill>
-          <a:ln>
-            <a:noFill/>
-          </a:ln>
-          <a:effectLst/>
-        </p:spPr>
-        <p:style>
-          <a:lnRef idx="1">
-            <a:schemeClr val="accent1"/>
-          </a:lnRef>
-          <a:fillRef idx="3">
-            <a:schemeClr val="accent1"/>
-          </a:fillRef>
-          <a:effectRef idx="2">
-            <a:schemeClr val="accent1"/>
-          </a:effectRef>
-          <a:fontRef idx="minor">
-            <a:schemeClr val="lt1"/>
-          </a:fontRef>
-        </p:style>
-        <p:txBody>
-          <a:bodyPr rtlCol="0" anchor="ctr"/>
-          <a:lstStyle/>
-          <a:p>
-            <a:pPr algn="ctr"/>
-          </a:p>
-        </p:txBody>
-      </p:sp>
-      <p:sp>
-        <p:nvSpPr>
-          <p:cNvPr id="9" name="TextBox 8"/>
+                <a:spcPct val="112000"/>
+              </a:lnSpc>
+            </a:pPr>
+            <a:r>
+              <a:rPr sz="3800" b="1" i="0">
+                <a:solidFill>
+                  <a:srgbClr val="0E2746"/>
+                </a:solidFill>
+                <a:latin typeface="Libre Baskerville"/>
+              </a:rPr>
+              <a:t>Sam </a:t>
+            </a:r>
+            <a:r>
+              <a:rPr sz="3800" b="1" i="1">
+                <a:solidFill>
+                  <a:srgbClr val="D97757"/>
+                </a:solidFill>
+                <a:latin typeface="Libre Baskerville"/>
+              </a:rPr>
+              <a:t>completely transformed</a:t>
+            </a:r>
+          </a:p>
+        </p:txBody>
+      </p:sp>
+      <p:sp>
+        <p:nvSpPr>
+          <p:cNvPr id="7" name="TextBox 6"/>
           <p:cNvSpPr txBox="1"/>
           <p:nvPr/>
         </p:nvSpPr>
         <p:spPr>
           <a:xfrm>
-            <a:off x="1179576" y="3072384"/>
-            <a:ext cx="10332720" cy="548640"/>
+            <a:off x="5989320" y="4709160"/>
+            <a:ext cx="5577840" cy="640080"/>
           </a:xfrm>
           <a:prstGeom prst="rect">
             <a:avLst/>
@@ -8587,349 +7067,17 @@
           <a:p>
             <a:pPr algn="l">
               <a:lnSpc>
-                <a:spcPct val="120000"/>
-              </a:lnSpc>
-            </a:pPr>
-            <a:r>
-              <a:rPr sz="1900" b="0" i="0">
-                <a:solidFill>
-                  <a:srgbClr val="333333"/>
-                </a:solidFill>
-                <a:latin typeface="Alegreya Sans"/>
-              </a:rPr>
-              <a:t>You’re tired of figuring it all out alone</a:t>
-            </a:r>
-          </a:p>
-        </p:txBody>
-      </p:sp>
-      <p:sp>
-        <p:nvSpPr>
-          <p:cNvPr id="10" name="Oval 9"/>
-          <p:cNvSpPr/>
-          <p:nvPr/>
-        </p:nvSpPr>
-        <p:spPr>
-          <a:xfrm>
-            <a:off x="868680" y="3784473"/>
-            <a:ext cx="118872" cy="118872"/>
-          </a:xfrm>
-          <a:prstGeom prst="ellipse">
-            <a:avLst/>
-          </a:prstGeom>
-          <a:solidFill>
-            <a:srgbClr val="D97757"/>
-          </a:solidFill>
-          <a:ln>
-            <a:noFill/>
-          </a:ln>
-          <a:effectLst/>
-        </p:spPr>
-        <p:style>
-          <a:lnRef idx="1">
-            <a:schemeClr val="accent1"/>
-          </a:lnRef>
-          <a:fillRef idx="3">
-            <a:schemeClr val="accent1"/>
-          </a:fillRef>
-          <a:effectRef idx="2">
-            <a:schemeClr val="accent1"/>
-          </a:effectRef>
-          <a:fontRef idx="minor">
-            <a:schemeClr val="lt1"/>
-          </a:fontRef>
-        </p:style>
-        <p:txBody>
-          <a:bodyPr rtlCol="0" anchor="ctr"/>
-          <a:lstStyle/>
-          <a:p>
-            <a:pPr algn="ctr"/>
-          </a:p>
-        </p:txBody>
-      </p:sp>
-      <p:sp>
-        <p:nvSpPr>
-          <p:cNvPr id="11" name="TextBox 10"/>
-          <p:cNvSpPr txBox="1"/>
-          <p:nvPr/>
-        </p:nvSpPr>
-        <p:spPr>
-          <a:xfrm>
-            <a:off x="1179576" y="3675888"/>
-            <a:ext cx="10332720" cy="548640"/>
-          </a:xfrm>
-          <a:prstGeom prst="rect">
-            <a:avLst/>
-          </a:prstGeom>
-          <a:noFill/>
-        </p:spPr>
-        <p:txBody>
-          <a:bodyPr wrap="square" lIns="0" rIns="0" tIns="0" bIns="0" anchor="t">
-            <a:spAutoFit/>
-          </a:bodyPr>
-          <a:lstStyle/>
-          <a:p>
-            <a:pPr algn="l">
-              <a:lnSpc>
-                <a:spcPct val="120000"/>
-              </a:lnSpc>
-            </a:pPr>
-            <a:r>
-              <a:rPr sz="1900" b="0" i="0">
-                <a:solidFill>
-                  <a:srgbClr val="333333"/>
-                </a:solidFill>
-                <a:latin typeface="Alegreya Sans"/>
-              </a:rPr>
-              <a:t>You take action when someone’s holding you to it</a:t>
-            </a:r>
-          </a:p>
-        </p:txBody>
-      </p:sp>
-      <p:sp>
-        <p:nvSpPr>
-          <p:cNvPr id="12" name="Oval 11"/>
-          <p:cNvSpPr/>
-          <p:nvPr/>
-        </p:nvSpPr>
-        <p:spPr>
-          <a:xfrm>
-            <a:off x="868680" y="4387977"/>
-            <a:ext cx="118872" cy="118872"/>
-          </a:xfrm>
-          <a:prstGeom prst="ellipse">
-            <a:avLst/>
-          </a:prstGeom>
-          <a:solidFill>
-            <a:srgbClr val="D97757"/>
-          </a:solidFill>
-          <a:ln>
-            <a:noFill/>
-          </a:ln>
-          <a:effectLst/>
-        </p:spPr>
-        <p:style>
-          <a:lnRef idx="1">
-            <a:schemeClr val="accent1"/>
-          </a:lnRef>
-          <a:fillRef idx="3">
-            <a:schemeClr val="accent1"/>
-          </a:fillRef>
-          <a:effectRef idx="2">
-            <a:schemeClr val="accent1"/>
-          </a:effectRef>
-          <a:fontRef idx="minor">
-            <a:schemeClr val="lt1"/>
-          </a:fontRef>
-        </p:style>
-        <p:txBody>
-          <a:bodyPr rtlCol="0" anchor="ctr"/>
-          <a:lstStyle/>
-          <a:p>
-            <a:pPr algn="ctr"/>
-          </a:p>
-        </p:txBody>
-      </p:sp>
-      <p:sp>
-        <p:nvSpPr>
-          <p:cNvPr id="13" name="TextBox 12"/>
-          <p:cNvSpPr txBox="1"/>
-          <p:nvPr/>
-        </p:nvSpPr>
-        <p:spPr>
-          <a:xfrm>
-            <a:off x="1179576" y="4279392"/>
-            <a:ext cx="10332720" cy="548640"/>
-          </a:xfrm>
-          <a:prstGeom prst="rect">
-            <a:avLst/>
-          </a:prstGeom>
-          <a:noFill/>
-        </p:spPr>
-        <p:txBody>
-          <a:bodyPr wrap="square" lIns="0" rIns="0" tIns="0" bIns="0" anchor="t">
-            <a:spAutoFit/>
-          </a:bodyPr>
-          <a:lstStyle/>
-          <a:p>
-            <a:pPr algn="l">
-              <a:lnSpc>
-                <a:spcPct val="120000"/>
-              </a:lnSpc>
-            </a:pPr>
-            <a:r>
-              <a:rPr sz="1900" b="0" i="0">
-                <a:solidFill>
-                  <a:srgbClr val="333333"/>
-                </a:solidFill>
-                <a:latin typeface="Alegreya Sans"/>
-              </a:rPr>
-              <a:t>You want a coach for when motivation dips or life gets busy</a:t>
-            </a:r>
-          </a:p>
-        </p:txBody>
-      </p:sp>
-      <p:sp>
-        <p:nvSpPr>
-          <p:cNvPr id="14" name="Oval 13"/>
-          <p:cNvSpPr/>
-          <p:nvPr/>
-        </p:nvSpPr>
-        <p:spPr>
-          <a:xfrm>
-            <a:off x="868680" y="4991481"/>
-            <a:ext cx="118872" cy="118872"/>
-          </a:xfrm>
-          <a:prstGeom prst="ellipse">
-            <a:avLst/>
-          </a:prstGeom>
-          <a:solidFill>
-            <a:srgbClr val="D97757"/>
-          </a:solidFill>
-          <a:ln>
-            <a:noFill/>
-          </a:ln>
-          <a:effectLst/>
-        </p:spPr>
-        <p:style>
-          <a:lnRef idx="1">
-            <a:schemeClr val="accent1"/>
-          </a:lnRef>
-          <a:fillRef idx="3">
-            <a:schemeClr val="accent1"/>
-          </a:fillRef>
-          <a:effectRef idx="2">
-            <a:schemeClr val="accent1"/>
-          </a:effectRef>
-          <a:fontRef idx="minor">
-            <a:schemeClr val="lt1"/>
-          </a:fontRef>
-        </p:style>
-        <p:txBody>
-          <a:bodyPr rtlCol="0" anchor="ctr"/>
-          <a:lstStyle/>
-          <a:p>
-            <a:pPr algn="ctr"/>
-          </a:p>
-        </p:txBody>
-      </p:sp>
-      <p:sp>
-        <p:nvSpPr>
-          <p:cNvPr id="15" name="TextBox 14"/>
-          <p:cNvSpPr txBox="1"/>
-          <p:nvPr/>
-        </p:nvSpPr>
-        <p:spPr>
-          <a:xfrm>
-            <a:off x="1179576" y="4882896"/>
-            <a:ext cx="10332720" cy="548640"/>
-          </a:xfrm>
-          <a:prstGeom prst="rect">
-            <a:avLst/>
-          </a:prstGeom>
-          <a:noFill/>
-        </p:spPr>
-        <p:txBody>
-          <a:bodyPr wrap="square" lIns="0" rIns="0" tIns="0" bIns="0" anchor="t">
-            <a:spAutoFit/>
-          </a:bodyPr>
-          <a:lstStyle/>
-          <a:p>
-            <a:pPr algn="l">
-              <a:lnSpc>
-                <a:spcPct val="120000"/>
-              </a:lnSpc>
-            </a:pPr>
-            <a:r>
-              <a:rPr sz="1900" b="0" i="0">
-                <a:solidFill>
-                  <a:srgbClr val="333333"/>
-                </a:solidFill>
-                <a:latin typeface="Alegreya Sans"/>
-              </a:rPr>
-              <a:t>You’re ready to follow through on your goals</a:t>
-            </a:r>
-          </a:p>
-        </p:txBody>
-      </p:sp>
-      <p:sp>
-        <p:nvSpPr>
-          <p:cNvPr id="16" name="Oval 15"/>
-          <p:cNvSpPr/>
-          <p:nvPr/>
-        </p:nvSpPr>
-        <p:spPr>
-          <a:xfrm>
-            <a:off x="868680" y="5594985"/>
-            <a:ext cx="118872" cy="118872"/>
-          </a:xfrm>
-          <a:prstGeom prst="ellipse">
-            <a:avLst/>
-          </a:prstGeom>
-          <a:solidFill>
-            <a:srgbClr val="D97757"/>
-          </a:solidFill>
-          <a:ln>
-            <a:noFill/>
-          </a:ln>
-          <a:effectLst/>
-        </p:spPr>
-        <p:style>
-          <a:lnRef idx="1">
-            <a:schemeClr val="accent1"/>
-          </a:lnRef>
-          <a:fillRef idx="3">
-            <a:schemeClr val="accent1"/>
-          </a:fillRef>
-          <a:effectRef idx="2">
-            <a:schemeClr val="accent1"/>
-          </a:effectRef>
-          <a:fontRef idx="minor">
-            <a:schemeClr val="lt1"/>
-          </a:fontRef>
-        </p:style>
-        <p:txBody>
-          <a:bodyPr rtlCol="0" anchor="ctr"/>
-          <a:lstStyle/>
-          <a:p>
-            <a:pPr algn="ctr"/>
-          </a:p>
-        </p:txBody>
-      </p:sp>
-      <p:sp>
-        <p:nvSpPr>
-          <p:cNvPr id="17" name="TextBox 16"/>
-          <p:cNvSpPr txBox="1"/>
-          <p:nvPr/>
-        </p:nvSpPr>
-        <p:spPr>
-          <a:xfrm>
-            <a:off x="1179576" y="5486400"/>
-            <a:ext cx="10332720" cy="548640"/>
-          </a:xfrm>
-          <a:prstGeom prst="rect">
-            <a:avLst/>
-          </a:prstGeom>
-          <a:noFill/>
-        </p:spPr>
-        <p:txBody>
-          <a:bodyPr wrap="square" lIns="0" rIns="0" tIns="0" bIns="0" anchor="t">
-            <a:spAutoFit/>
-          </a:bodyPr>
-          <a:lstStyle/>
-          <a:p>
-            <a:pPr algn="l">
-              <a:lnSpc>
-                <a:spcPct val="120000"/>
-              </a:lnSpc>
-            </a:pPr>
-            <a:r>
-              <a:rPr sz="1900" b="0" i="0">
-                <a:solidFill>
-                  <a:srgbClr val="333333"/>
-                </a:solidFill>
-                <a:latin typeface="Alegreya Sans"/>
-              </a:rPr>
-              <a:t>You want to lose up to 3 stone — sustainably, for good</a:t>
+                <a:spcPct val="135000"/>
+              </a:lnSpc>
+            </a:pPr>
+            <a:r>
+              <a:rPr sz="1800" b="0" i="1">
+                <a:solidFill>
+                  <a:srgbClr val="5A6478"/>
+                </a:solidFill>
+                <a:latin typeface="Libre Baskerville"/>
+              </a:rPr>
+              <a:t>A total transformation inside VIP.</a:t>
             </a:r>
           </a:p>
         </p:txBody>
@@ -9037,51 +7185,7 @@
       </p:sp>
       <p:sp>
         <p:nvSpPr>
-          <p:cNvPr id="4" name="Rectangle 3"/>
-          <p:cNvSpPr/>
-          <p:nvPr/>
-        </p:nvSpPr>
-        <p:spPr>
-          <a:xfrm>
-            <a:off x="822960" y="1207008"/>
-            <a:ext cx="1463040" cy="50292"/>
-          </a:xfrm>
-          <a:prstGeom prst="rect">
-            <a:avLst/>
-          </a:prstGeom>
-          <a:solidFill>
-            <a:srgbClr val="D97757"/>
-          </a:solidFill>
-          <a:ln>
-            <a:noFill/>
-          </a:ln>
-          <a:effectLst/>
-        </p:spPr>
-        <p:style>
-          <a:lnRef idx="1">
-            <a:schemeClr val="accent1"/>
-          </a:lnRef>
-          <a:fillRef idx="3">
-            <a:schemeClr val="accent1"/>
-          </a:fillRef>
-          <a:effectRef idx="2">
-            <a:schemeClr val="accent1"/>
-          </a:effectRef>
-          <a:fontRef idx="minor">
-            <a:schemeClr val="lt1"/>
-          </a:fontRef>
-        </p:style>
-        <p:txBody>
-          <a:bodyPr rtlCol="0" anchor="ctr"/>
-          <a:lstStyle/>
-          <a:p>
-            <a:pPr algn="ctr"/>
-          </a:p>
-        </p:txBody>
-      </p:sp>
-      <p:sp>
-        <p:nvSpPr>
-          <p:cNvPr id="5" name="TextBox 4"/>
+          <p:cNvPr id="4" name="TextBox 3"/>
           <p:cNvSpPr txBox="1"/>
           <p:nvPr/>
         </p:nvSpPr>
@@ -9156,7 +7260,7 @@
       </p:sp>
       <p:sp>
         <p:nvSpPr>
-          <p:cNvPr id="6" name="TextBox 5"/>
+          <p:cNvPr id="5" name="TextBox 4"/>
           <p:cNvSpPr txBox="1"/>
           <p:nvPr/>
         </p:nvSpPr>
@@ -9317,30 +7421,121 @@
                 </a:solidFill>
                 <a:latin typeface="Alegreya Sans"/>
               </a:rPr>
-              <a:t>HONESTY FIRST</a:t>
-            </a:r>
-          </a:p>
-        </p:txBody>
-      </p:sp>
-      <p:sp>
-        <p:nvSpPr>
-          <p:cNvPr id="4" name="Rectangle 3"/>
+              <a:t>IN THEIR WORDS</a:t>
+            </a:r>
+          </a:p>
+        </p:txBody>
+      </p:sp>
+      <p:sp>
+        <p:nvSpPr>
+          <p:cNvPr id="4" name="TextBox 3"/>
+          <p:cNvSpPr txBox="1"/>
+          <p:nvPr/>
+        </p:nvSpPr>
+        <p:spPr>
+          <a:xfrm>
+            <a:off x="822960" y="1417320"/>
+            <a:ext cx="4754880" cy="2377440"/>
+          </a:xfrm>
+          <a:prstGeom prst="rect">
+            <a:avLst/>
+          </a:prstGeom>
+          <a:noFill/>
+        </p:spPr>
+        <p:txBody>
+          <a:bodyPr wrap="square" lIns="0" rIns="0" tIns="0" bIns="0" anchor="t">
+            <a:spAutoFit/>
+          </a:bodyPr>
+          <a:lstStyle/>
+          <a:p>
+            <a:pPr algn="l">
+              <a:lnSpc>
+                <a:spcPct val="114000"/>
+              </a:lnSpc>
+            </a:pPr>
+            <a:r>
+              <a:rPr sz="3400" b="1" i="0">
+                <a:solidFill>
+                  <a:srgbClr val="0E2746"/>
+                </a:solidFill>
+                <a:latin typeface="Libre Baskerville"/>
+              </a:rPr>
+              <a:t>VIP is just </a:t>
+            </a:r>
+            <a:r>
+              <a:rPr sz="3400" b="1" i="1">
+                <a:solidFill>
+                  <a:srgbClr val="D97757"/>
+                </a:solidFill>
+                <a:latin typeface="Libre Baskerville"/>
+              </a:rPr>
+              <a:t>different.</a:t>
+            </a:r>
+          </a:p>
+        </p:txBody>
+      </p:sp>
+      <p:sp>
+        <p:nvSpPr>
+          <p:cNvPr id="5" name="TextBox 4"/>
+          <p:cNvSpPr txBox="1"/>
+          <p:nvPr/>
+        </p:nvSpPr>
+        <p:spPr>
+          <a:xfrm>
+            <a:off x="822960" y="3977639"/>
+            <a:ext cx="4526280" cy="2194560"/>
+          </a:xfrm>
+          <a:prstGeom prst="rect">
+            <a:avLst/>
+          </a:prstGeom>
+          <a:noFill/>
+        </p:spPr>
+        <p:txBody>
+          <a:bodyPr wrap="square" lIns="0" rIns="0" tIns="0" bIns="0" anchor="t">
+            <a:spAutoFit/>
+          </a:bodyPr>
+          <a:lstStyle/>
+          <a:p>
+            <a:pPr algn="l">
+              <a:lnSpc>
+                <a:spcPct val="150000"/>
+              </a:lnSpc>
+            </a:pPr>
+            <a:r>
+              <a:rPr sz="1900" b="0" i="0">
+                <a:solidFill>
+                  <a:srgbClr val="333333"/>
+                </a:solidFill>
+                <a:latin typeface="Alegreya Sans"/>
+              </a:rPr>
+              <a:t>She'd done resets and group coaching for two years. In her first 3 months of VIP, she dropped from a size 16 to a 14.</a:t>
+            </a:r>
+          </a:p>
+        </p:txBody>
+      </p:sp>
+      <p:sp>
+        <p:nvSpPr>
+          <p:cNvPr id="6" name="Rounded Rectangle 5"/>
           <p:cNvSpPr/>
           <p:nvPr/>
         </p:nvSpPr>
         <p:spPr>
           <a:xfrm>
-            <a:off x="822960" y="1207008"/>
-            <a:ext cx="1463040" cy="50292"/>
-          </a:xfrm>
-          <a:prstGeom prst="rect">
-            <a:avLst/>
+            <a:off x="6035040" y="1267956"/>
+            <a:ext cx="5486400" cy="4322088"/>
+          </a:xfrm>
+          <a:prstGeom prst="roundRect">
+            <a:avLst>
+              <a:gd name="adj" fmla="val 4000"/>
+            </a:avLst>
           </a:prstGeom>
           <a:solidFill>
-            <a:srgbClr val="D97757"/>
+            <a:srgbClr val="FFFFFF"/>
           </a:solidFill>
-          <a:ln>
-            <a:noFill/>
+          <a:ln w="12700">
+            <a:solidFill>
+              <a:srgbClr val="E9DFD3"/>
+            </a:solidFill>
           </a:ln>
           <a:effectLst/>
         </p:spPr>
@@ -9366,561 +7561,31 @@
           </a:p>
         </p:txBody>
       </p:sp>
-      <p:sp>
-        <p:nvSpPr>
-          <p:cNvPr id="5" name="TextBox 4"/>
-          <p:cNvSpPr txBox="1"/>
-          <p:nvPr/>
-        </p:nvSpPr>
-        <p:spPr>
-          <a:xfrm>
-            <a:off x="822960" y="1298448"/>
-            <a:ext cx="10515600" cy="1828800"/>
-          </a:xfrm>
-          <a:prstGeom prst="rect">
-            <a:avLst/>
-          </a:prstGeom>
-          <a:noFill/>
-        </p:spPr>
-        <p:txBody>
-          <a:bodyPr wrap="square" lIns="0" rIns="0" tIns="0" bIns="0" anchor="t">
-            <a:spAutoFit/>
-          </a:bodyPr>
-          <a:lstStyle/>
-          <a:p>
-            <a:pPr algn="l">
-              <a:lnSpc>
-                <a:spcPct val="112000"/>
-              </a:lnSpc>
-            </a:pPr>
-            <a:r>
-              <a:rPr sz="3800" b="1" i="0">
-                <a:solidFill>
-                  <a:srgbClr val="0E2746"/>
-                </a:solidFill>
-                <a:latin typeface="Libre Baskerville"/>
-              </a:rPr>
-              <a:t>Who VIP is </a:t>
-            </a:r>
-            <a:r>
-              <a:rPr sz="3800" b="1" i="1">
-                <a:solidFill>
-                  <a:srgbClr val="D97757"/>
-                </a:solidFill>
-                <a:latin typeface="Libre Baskerville"/>
-              </a:rPr>
-              <a:t>not</a:t>
-            </a:r>
-            <a:r>
-              <a:rPr sz="3800" b="1" i="0">
-                <a:solidFill>
-                  <a:srgbClr val="0E2746"/>
-                </a:solidFill>
-                <a:latin typeface="Libre Baskerville"/>
-              </a:rPr>
-              <a:t> for</a:t>
-            </a:r>
-          </a:p>
-        </p:txBody>
-      </p:sp>
-      <p:sp>
-        <p:nvSpPr>
-          <p:cNvPr id="6" name="Oval 5"/>
-          <p:cNvSpPr/>
-          <p:nvPr/>
-        </p:nvSpPr>
-        <p:spPr>
-          <a:xfrm>
-            <a:off x="868680" y="2577465"/>
-            <a:ext cx="118872" cy="118872"/>
-          </a:xfrm>
-          <a:prstGeom prst="ellipse">
-            <a:avLst/>
-          </a:prstGeom>
-          <a:solidFill>
-            <a:srgbClr val="E9DFD3"/>
-          </a:solidFill>
-          <a:ln>
-            <a:noFill/>
-          </a:ln>
-          <a:effectLst/>
-        </p:spPr>
-        <p:style>
-          <a:lnRef idx="1">
-            <a:schemeClr val="accent1"/>
-          </a:lnRef>
-          <a:fillRef idx="3">
-            <a:schemeClr val="accent1"/>
-          </a:fillRef>
-          <a:effectRef idx="2">
-            <a:schemeClr val="accent1"/>
-          </a:effectRef>
-          <a:fontRef idx="minor">
-            <a:schemeClr val="lt1"/>
-          </a:fontRef>
-        </p:style>
-        <p:txBody>
-          <a:bodyPr rtlCol="0" anchor="ctr"/>
-          <a:lstStyle/>
-          <a:p>
-            <a:pPr algn="ctr"/>
-          </a:p>
-        </p:txBody>
-      </p:sp>
-      <p:sp>
-        <p:nvSpPr>
-          <p:cNvPr id="7" name="TextBox 6"/>
-          <p:cNvSpPr txBox="1"/>
-          <p:nvPr/>
-        </p:nvSpPr>
-        <p:spPr>
-          <a:xfrm>
-            <a:off x="1179576" y="2468880"/>
-            <a:ext cx="10332720" cy="548640"/>
-          </a:xfrm>
-          <a:prstGeom prst="rect">
-            <a:avLst/>
-          </a:prstGeom>
-          <a:noFill/>
-        </p:spPr>
-        <p:txBody>
-          <a:bodyPr wrap="square" lIns="0" rIns="0" tIns="0" bIns="0" anchor="t">
-            <a:spAutoFit/>
-          </a:bodyPr>
-          <a:lstStyle/>
-          <a:p>
-            <a:pPr algn="l">
-              <a:lnSpc>
-                <a:spcPct val="120000"/>
-              </a:lnSpc>
-            </a:pPr>
-            <a:r>
-              <a:rPr sz="1900" b="0" i="0">
-                <a:solidFill>
-                  <a:srgbClr val="5A6478"/>
-                </a:solidFill>
-                <a:latin typeface="Alegreya Sans"/>
-              </a:rPr>
-              <a:t>You’re looking for a quick fix or crash diet</a:t>
-            </a:r>
-          </a:p>
-        </p:txBody>
-      </p:sp>
-      <p:sp>
-        <p:nvSpPr>
-          <p:cNvPr id="8" name="Oval 7"/>
-          <p:cNvSpPr/>
-          <p:nvPr/>
-        </p:nvSpPr>
-        <p:spPr>
-          <a:xfrm>
-            <a:off x="868680" y="3180969"/>
-            <a:ext cx="118872" cy="118872"/>
-          </a:xfrm>
-          <a:prstGeom prst="ellipse">
-            <a:avLst/>
-          </a:prstGeom>
-          <a:solidFill>
-            <a:srgbClr val="E9DFD3"/>
-          </a:solidFill>
-          <a:ln>
-            <a:noFill/>
-          </a:ln>
-          <a:effectLst/>
-        </p:spPr>
-        <p:style>
-          <a:lnRef idx="1">
-            <a:schemeClr val="accent1"/>
-          </a:lnRef>
-          <a:fillRef idx="3">
-            <a:schemeClr val="accent1"/>
-          </a:fillRef>
-          <a:effectRef idx="2">
-            <a:schemeClr val="accent1"/>
-          </a:effectRef>
-          <a:fontRef idx="minor">
-            <a:schemeClr val="lt1"/>
-          </a:fontRef>
-        </p:style>
-        <p:txBody>
-          <a:bodyPr rtlCol="0" anchor="ctr"/>
-          <a:lstStyle/>
-          <a:p>
-            <a:pPr algn="ctr"/>
-          </a:p>
-        </p:txBody>
-      </p:sp>
-      <p:sp>
-        <p:nvSpPr>
-          <p:cNvPr id="9" name="TextBox 8"/>
-          <p:cNvSpPr txBox="1"/>
-          <p:nvPr/>
-        </p:nvSpPr>
-        <p:spPr>
-          <a:xfrm>
-            <a:off x="1179576" y="3072384"/>
-            <a:ext cx="10332720" cy="548640"/>
-          </a:xfrm>
-          <a:prstGeom prst="rect">
-            <a:avLst/>
-          </a:prstGeom>
-          <a:noFill/>
-        </p:spPr>
-        <p:txBody>
-          <a:bodyPr wrap="square" lIns="0" rIns="0" tIns="0" bIns="0" anchor="t">
-            <a:spAutoFit/>
-          </a:bodyPr>
-          <a:lstStyle/>
-          <a:p>
-            <a:pPr algn="l">
-              <a:lnSpc>
-                <a:spcPct val="120000"/>
-              </a:lnSpc>
-            </a:pPr>
-            <a:r>
-              <a:rPr sz="1900" b="0" i="0">
-                <a:solidFill>
-                  <a:srgbClr val="5A6478"/>
-                </a:solidFill>
-                <a:latin typeface="Alegreya Sans"/>
-              </a:rPr>
-              <a:t>You’re not ready to take action or follow through</a:t>
-            </a:r>
-          </a:p>
-        </p:txBody>
-      </p:sp>
-      <p:sp>
-        <p:nvSpPr>
-          <p:cNvPr id="10" name="Oval 9"/>
-          <p:cNvSpPr/>
-          <p:nvPr/>
-        </p:nvSpPr>
-        <p:spPr>
-          <a:xfrm>
-            <a:off x="868680" y="3784473"/>
-            <a:ext cx="118872" cy="118872"/>
-          </a:xfrm>
-          <a:prstGeom prst="ellipse">
-            <a:avLst/>
-          </a:prstGeom>
-          <a:solidFill>
-            <a:srgbClr val="E9DFD3"/>
-          </a:solidFill>
-          <a:ln>
-            <a:noFill/>
-          </a:ln>
-          <a:effectLst/>
-        </p:spPr>
-        <p:style>
-          <a:lnRef idx="1">
-            <a:schemeClr val="accent1"/>
-          </a:lnRef>
-          <a:fillRef idx="3">
-            <a:schemeClr val="accent1"/>
-          </a:fillRef>
-          <a:effectRef idx="2">
-            <a:schemeClr val="accent1"/>
-          </a:effectRef>
-          <a:fontRef idx="minor">
-            <a:schemeClr val="lt1"/>
-          </a:fontRef>
-        </p:style>
-        <p:txBody>
-          <a:bodyPr rtlCol="0" anchor="ctr"/>
-          <a:lstStyle/>
-          <a:p>
-            <a:pPr algn="ctr"/>
-          </a:p>
-        </p:txBody>
-      </p:sp>
-      <p:sp>
-        <p:nvSpPr>
-          <p:cNvPr id="11" name="TextBox 10"/>
-          <p:cNvSpPr txBox="1"/>
-          <p:nvPr/>
-        </p:nvSpPr>
-        <p:spPr>
-          <a:xfrm>
-            <a:off x="1179576" y="3675888"/>
-            <a:ext cx="10332720" cy="548640"/>
-          </a:xfrm>
-          <a:prstGeom prst="rect">
-            <a:avLst/>
-          </a:prstGeom>
-          <a:noFill/>
-        </p:spPr>
-        <p:txBody>
-          <a:bodyPr wrap="square" lIns="0" rIns="0" tIns="0" bIns="0" anchor="t">
-            <a:spAutoFit/>
-          </a:bodyPr>
-          <a:lstStyle/>
-          <a:p>
-            <a:pPr algn="l">
-              <a:lnSpc>
-                <a:spcPct val="120000"/>
-              </a:lnSpc>
-            </a:pPr>
-            <a:r>
-              <a:rPr sz="1900" b="0" i="0">
-                <a:solidFill>
-                  <a:srgbClr val="5A6478"/>
-                </a:solidFill>
-                <a:latin typeface="Alegreya Sans"/>
-              </a:rPr>
-              <a:t>You want results without changing any habits</a:t>
-            </a:r>
-          </a:p>
-        </p:txBody>
-      </p:sp>
-      <p:sp>
-        <p:nvSpPr>
-          <p:cNvPr id="12" name="Oval 11"/>
-          <p:cNvSpPr/>
-          <p:nvPr/>
-        </p:nvSpPr>
-        <p:spPr>
-          <a:xfrm>
-            <a:off x="868680" y="4387977"/>
-            <a:ext cx="118872" cy="118872"/>
-          </a:xfrm>
-          <a:prstGeom prst="ellipse">
-            <a:avLst/>
-          </a:prstGeom>
-          <a:solidFill>
-            <a:srgbClr val="E9DFD3"/>
-          </a:solidFill>
-          <a:ln>
-            <a:noFill/>
-          </a:ln>
-          <a:effectLst/>
-        </p:spPr>
-        <p:style>
-          <a:lnRef idx="1">
-            <a:schemeClr val="accent1"/>
-          </a:lnRef>
-          <a:fillRef idx="3">
-            <a:schemeClr val="accent1"/>
-          </a:fillRef>
-          <a:effectRef idx="2">
-            <a:schemeClr val="accent1"/>
-          </a:effectRef>
-          <a:fontRef idx="minor">
-            <a:schemeClr val="lt1"/>
-          </a:fontRef>
-        </p:style>
-        <p:txBody>
-          <a:bodyPr rtlCol="0" anchor="ctr"/>
-          <a:lstStyle/>
-          <a:p>
-            <a:pPr algn="ctr"/>
-          </a:p>
-        </p:txBody>
-      </p:sp>
-      <p:sp>
-        <p:nvSpPr>
-          <p:cNvPr id="13" name="TextBox 12"/>
-          <p:cNvSpPr txBox="1"/>
-          <p:nvPr/>
-        </p:nvSpPr>
-        <p:spPr>
-          <a:xfrm>
-            <a:off x="1179576" y="4279392"/>
-            <a:ext cx="10332720" cy="548640"/>
-          </a:xfrm>
-          <a:prstGeom prst="rect">
-            <a:avLst/>
-          </a:prstGeom>
-          <a:noFill/>
-        </p:spPr>
-        <p:txBody>
-          <a:bodyPr wrap="square" lIns="0" rIns="0" tIns="0" bIns="0" anchor="t">
-            <a:spAutoFit/>
-          </a:bodyPr>
-          <a:lstStyle/>
-          <a:p>
-            <a:pPr algn="l">
-              <a:lnSpc>
-                <a:spcPct val="120000"/>
-              </a:lnSpc>
-            </a:pPr>
-            <a:r>
-              <a:rPr sz="1900" b="0" i="0">
-                <a:solidFill>
-                  <a:srgbClr val="5A6478"/>
-                </a:solidFill>
-                <a:latin typeface="Alegreya Sans"/>
-              </a:rPr>
-              <a:t>You’d rather do everything alone, without guidance</a:t>
-            </a:r>
-          </a:p>
-        </p:txBody>
-      </p:sp>
-      <p:sp>
-        <p:nvSpPr>
-          <p:cNvPr id="14" name="Oval 13"/>
-          <p:cNvSpPr/>
-          <p:nvPr/>
-        </p:nvSpPr>
-        <p:spPr>
-          <a:xfrm>
-            <a:off x="868680" y="4991481"/>
-            <a:ext cx="118872" cy="118872"/>
-          </a:xfrm>
-          <a:prstGeom prst="ellipse">
-            <a:avLst/>
-          </a:prstGeom>
-          <a:solidFill>
-            <a:srgbClr val="E9DFD3"/>
-          </a:solidFill>
-          <a:ln>
-            <a:noFill/>
-          </a:ln>
-          <a:effectLst/>
-        </p:spPr>
-        <p:style>
-          <a:lnRef idx="1">
-            <a:schemeClr val="accent1"/>
-          </a:lnRef>
-          <a:fillRef idx="3">
-            <a:schemeClr val="accent1"/>
-          </a:fillRef>
-          <a:effectRef idx="2">
-            <a:schemeClr val="accent1"/>
-          </a:effectRef>
-          <a:fontRef idx="minor">
-            <a:schemeClr val="lt1"/>
-          </a:fontRef>
-        </p:style>
-        <p:txBody>
-          <a:bodyPr rtlCol="0" anchor="ctr"/>
-          <a:lstStyle/>
-          <a:p>
-            <a:pPr algn="ctr"/>
-          </a:p>
-        </p:txBody>
-      </p:sp>
-      <p:sp>
-        <p:nvSpPr>
-          <p:cNvPr id="15" name="TextBox 14"/>
-          <p:cNvSpPr txBox="1"/>
-          <p:nvPr/>
-        </p:nvSpPr>
-        <p:spPr>
-          <a:xfrm>
-            <a:off x="1179576" y="4882896"/>
-            <a:ext cx="10332720" cy="548640"/>
-          </a:xfrm>
-          <a:prstGeom prst="rect">
-            <a:avLst/>
-          </a:prstGeom>
-          <a:noFill/>
-        </p:spPr>
-        <p:txBody>
-          <a:bodyPr wrap="square" lIns="0" rIns="0" tIns="0" bIns="0" anchor="t">
-            <a:spAutoFit/>
-          </a:bodyPr>
-          <a:lstStyle/>
-          <a:p>
-            <a:pPr algn="l">
-              <a:lnSpc>
-                <a:spcPct val="120000"/>
-              </a:lnSpc>
-            </a:pPr>
-            <a:r>
-              <a:rPr sz="1900" b="0" i="0">
-                <a:solidFill>
-                  <a:srgbClr val="5A6478"/>
-                </a:solidFill>
-                <a:latin typeface="Alegreya Sans"/>
-              </a:rPr>
-              <a:t>You’re not open to a sustainable approach to nutrition</a:t>
-            </a:r>
-          </a:p>
-        </p:txBody>
-      </p:sp>
-      <p:sp>
-        <p:nvSpPr>
-          <p:cNvPr id="16" name="Oval 15"/>
-          <p:cNvSpPr/>
-          <p:nvPr/>
-        </p:nvSpPr>
-        <p:spPr>
-          <a:xfrm>
-            <a:off x="868680" y="5594985"/>
-            <a:ext cx="118872" cy="118872"/>
-          </a:xfrm>
-          <a:prstGeom prst="ellipse">
-            <a:avLst/>
-          </a:prstGeom>
-          <a:solidFill>
-            <a:srgbClr val="E9DFD3"/>
-          </a:solidFill>
-          <a:ln>
-            <a:noFill/>
-          </a:ln>
-          <a:effectLst/>
-        </p:spPr>
-        <p:style>
-          <a:lnRef idx="1">
-            <a:schemeClr val="accent1"/>
-          </a:lnRef>
-          <a:fillRef idx="3">
-            <a:schemeClr val="accent1"/>
-          </a:fillRef>
-          <a:effectRef idx="2">
-            <a:schemeClr val="accent1"/>
-          </a:effectRef>
-          <a:fontRef idx="minor">
-            <a:schemeClr val="lt1"/>
-          </a:fontRef>
-        </p:style>
-        <p:txBody>
-          <a:bodyPr rtlCol="0" anchor="ctr"/>
-          <a:lstStyle/>
-          <a:p>
-            <a:pPr algn="ctr"/>
-          </a:p>
-        </p:txBody>
-      </p:sp>
-      <p:sp>
-        <p:nvSpPr>
-          <p:cNvPr id="17" name="TextBox 16"/>
-          <p:cNvSpPr txBox="1"/>
-          <p:nvPr/>
-        </p:nvSpPr>
-        <p:spPr>
-          <a:xfrm>
-            <a:off x="1179576" y="5486400"/>
-            <a:ext cx="10332720" cy="548640"/>
-          </a:xfrm>
-          <a:prstGeom prst="rect">
-            <a:avLst/>
-          </a:prstGeom>
-          <a:noFill/>
-        </p:spPr>
-        <p:txBody>
-          <a:bodyPr wrap="square" lIns="0" rIns="0" tIns="0" bIns="0" anchor="t">
-            <a:spAutoFit/>
-          </a:bodyPr>
-          <a:lstStyle/>
-          <a:p>
-            <a:pPr algn="l">
-              <a:lnSpc>
-                <a:spcPct val="120000"/>
-              </a:lnSpc>
-            </a:pPr>
-            <a:r>
-              <a:rPr sz="1900" b="0" i="0">
-                <a:solidFill>
-                  <a:srgbClr val="5A6478"/>
-                </a:solidFill>
-                <a:latin typeface="Alegreya Sans"/>
-              </a:rPr>
-              <a:t>You’re not ready to commit right now</a:t>
-            </a:r>
-          </a:p>
-        </p:txBody>
-      </p:sp>
+      <p:pic>
+        <p:nvPicPr>
+          <p:cNvPr id="7" name="Picture 6" descr="vip-testimonial-1.jpg"/>
+          <p:cNvPicPr>
+            <a:picLocks noChangeAspect="1"/>
+          </p:cNvPicPr>
+          <p:nvPr/>
+        </p:nvPicPr>
+        <p:blipFill>
+          <a:blip r:embed="rId2"/>
+          <a:srcRect t="0" b="0"/>
+          <a:stretch>
+            <a:fillRect/>
+          </a:stretch>
+        </p:blipFill>
+        <p:spPr>
+          <a:xfrm>
+            <a:off x="6291072" y="1523988"/>
+            <a:ext cx="4974336" cy="3810024"/>
+          </a:xfrm>
+          <a:prstGeom prst="rect">
+            <a:avLst/>
+          </a:prstGeom>
+        </p:spPr>
+      </p:pic>
     </p:spTree>
   </p:cSld>
   <p:clrMapOvr>
@@ -9954,7 +7619,7 @@
             <a:avLst/>
           </a:prstGeom>
           <a:solidFill>
-            <a:srgbClr val="0E2746"/>
+            <a:srgbClr val="F9F7F4"/>
           </a:solidFill>
           <a:ln>
             <a:noFill/>
@@ -9985,25 +7650,153 @@
       </p:sp>
       <p:sp>
         <p:nvSpPr>
-          <p:cNvPr id="3" name="Rounded Rectangle 2"/>
+          <p:cNvPr id="3" name="TextBox 2"/>
+          <p:cNvSpPr txBox="1"/>
+          <p:nvPr/>
+        </p:nvSpPr>
+        <p:spPr>
+          <a:xfrm>
+            <a:off x="822960" y="749808"/>
+            <a:ext cx="10515600" cy="457200"/>
+          </a:xfrm>
+          <a:prstGeom prst="rect">
+            <a:avLst/>
+          </a:prstGeom>
+          <a:noFill/>
+        </p:spPr>
+        <p:txBody>
+          <a:bodyPr wrap="square" lIns="0" rIns="0" tIns="0" bIns="0" anchor="t">
+            <a:spAutoFit/>
+          </a:bodyPr>
+          <a:lstStyle/>
+          <a:p>
+            <a:pPr algn="l">
+              <a:lnSpc>
+                <a:spcPct val="120000"/>
+              </a:lnSpc>
+            </a:pPr>
+            <a:r>
+              <a:rPr sz="1800" b="1" i="0" spc="240">
+                <a:solidFill>
+                  <a:srgbClr val="D97757"/>
+                </a:solidFill>
+                <a:latin typeface="Alegreya Sans"/>
+              </a:rPr>
+              <a:t>IN THEIR WORDS</a:t>
+            </a:r>
+          </a:p>
+        </p:txBody>
+      </p:sp>
+      <p:sp>
+        <p:nvSpPr>
+          <p:cNvPr id="4" name="TextBox 3"/>
+          <p:cNvSpPr txBox="1"/>
+          <p:nvPr/>
+        </p:nvSpPr>
+        <p:spPr>
+          <a:xfrm>
+            <a:off x="822960" y="1417320"/>
+            <a:ext cx="4754880" cy="2377440"/>
+          </a:xfrm>
+          <a:prstGeom prst="rect">
+            <a:avLst/>
+          </a:prstGeom>
+          <a:noFill/>
+        </p:spPr>
+        <p:txBody>
+          <a:bodyPr wrap="square" lIns="0" rIns="0" tIns="0" bIns="0" anchor="t">
+            <a:spAutoFit/>
+          </a:bodyPr>
+          <a:lstStyle/>
+          <a:p>
+            <a:pPr algn="l">
+              <a:lnSpc>
+                <a:spcPct val="114000"/>
+              </a:lnSpc>
+            </a:pPr>
+            <a:r>
+              <a:rPr sz="3400" b="1" i="0">
+                <a:solidFill>
+                  <a:srgbClr val="0E2746"/>
+                </a:solidFill>
+                <a:latin typeface="Libre Baskerville"/>
+              </a:rPr>
+              <a:t>Trying on dresses </a:t>
+            </a:r>
+            <a:r>
+              <a:rPr sz="3400" b="1" i="1">
+                <a:solidFill>
+                  <a:srgbClr val="D97757"/>
+                </a:solidFill>
+                <a:latin typeface="Libre Baskerville"/>
+              </a:rPr>
+              <a:t>with confidence.</a:t>
+            </a:r>
+          </a:p>
+        </p:txBody>
+      </p:sp>
+      <p:sp>
+        <p:nvSpPr>
+          <p:cNvPr id="5" name="TextBox 4"/>
+          <p:cNvSpPr txBox="1"/>
+          <p:nvPr/>
+        </p:nvSpPr>
+        <p:spPr>
+          <a:xfrm>
+            <a:off x="822960" y="3977639"/>
+            <a:ext cx="4526280" cy="2194560"/>
+          </a:xfrm>
+          <a:prstGeom prst="rect">
+            <a:avLst/>
+          </a:prstGeom>
+          <a:noFill/>
+        </p:spPr>
+        <p:txBody>
+          <a:bodyPr wrap="square" lIns="0" rIns="0" tIns="0" bIns="0" anchor="t">
+            <a:spAutoFit/>
+          </a:bodyPr>
+          <a:lstStyle/>
+          <a:p>
+            <a:pPr algn="l">
+              <a:lnSpc>
+                <a:spcPct val="150000"/>
+              </a:lnSpc>
+            </a:pPr>
+            <a:r>
+              <a:rPr sz="1900" b="0" i="0">
+                <a:solidFill>
+                  <a:srgbClr val="333333"/>
+                </a:solidFill>
+                <a:latin typeface="Alegreya Sans"/>
+              </a:rPr>
+              <a:t>It's the knowledge VIP has taught her, not just the number on the scales, that she values most.</a:t>
+            </a:r>
+          </a:p>
+        </p:txBody>
+      </p:sp>
+      <p:sp>
+        <p:nvSpPr>
+          <p:cNvPr id="6" name="Rounded Rectangle 5"/>
           <p:cNvSpPr/>
           <p:nvPr/>
         </p:nvSpPr>
         <p:spPr>
           <a:xfrm>
-            <a:off x="4727448" y="1188720"/>
-            <a:ext cx="2743200" cy="457200"/>
+            <a:off x="6035040" y="1152908"/>
+            <a:ext cx="5486400" cy="4552183"/>
           </a:xfrm>
           <a:prstGeom prst="roundRect">
             <a:avLst>
-              <a:gd name="adj" fmla="val 50000"/>
+              <a:gd name="adj" fmla="val 4000"/>
             </a:avLst>
           </a:prstGeom>
           <a:solidFill>
-            <a:srgbClr val="D97757"/>
+            <a:srgbClr val="FFFFFF"/>
           </a:solidFill>
-          <a:ln>
-            <a:noFill/>
+          <a:ln w="12700">
+            <a:solidFill>
+              <a:srgbClr val="E9DFD3"/>
+            </a:solidFill>
           </a:ln>
           <a:effectLst/>
         </p:spPr>
@@ -10022,116 +7815,38 @@
           </a:fontRef>
         </p:style>
         <p:txBody>
-          <a:bodyPr rtlCol="0" anchor="ctr" lIns="164592" rIns="164592" tIns="36576" bIns="36576"/>
+          <a:bodyPr rtlCol="0" anchor="ctr"/>
           <a:lstStyle/>
           <a:p>
             <a:pPr algn="ctr"/>
-            <a:r>
-              <a:rPr sz="1800" b="1" spc="200">
-                <a:solidFill>
-                  <a:srgbClr val="FFFFFF"/>
-                </a:solidFill>
-                <a:latin typeface="Alegreya Sans"/>
-              </a:rPr>
-              <a:t>TWO OPTIONS</a:t>
-            </a:r>
-          </a:p>
-        </p:txBody>
-      </p:sp>
-      <p:sp>
-        <p:nvSpPr>
-          <p:cNvPr id="4" name="TextBox 3"/>
-          <p:cNvSpPr txBox="1"/>
-          <p:nvPr/>
-        </p:nvSpPr>
-        <p:spPr>
-          <a:xfrm>
-            <a:off x="1005840" y="2194560"/>
-            <a:ext cx="10149840" cy="3657600"/>
-          </a:xfrm>
-          <a:prstGeom prst="rect">
-            <a:avLst/>
-          </a:prstGeom>
-          <a:noFill/>
-        </p:spPr>
-        <p:txBody>
-          <a:bodyPr wrap="square" lIns="0" rIns="0" tIns="0" bIns="0" anchor="t">
-            <a:spAutoFit/>
-          </a:bodyPr>
-          <a:lstStyle/>
-          <a:p>
-            <a:pPr algn="ctr">
-              <a:lnSpc>
-                <a:spcPct val="118000"/>
-              </a:lnSpc>
-              <a:spcAft>
-                <a:spcPts val="2400"/>
-              </a:spcAft>
-            </a:pPr>
-            <a:r>
-              <a:rPr sz="3800" b="1" i="0">
-                <a:solidFill>
-                  <a:srgbClr val="FFFFFF"/>
-                </a:solidFill>
-                <a:latin typeface="Libre Baskerville"/>
-              </a:rPr>
-              <a:t>You can keep doing this </a:t>
-            </a:r>
-            <a:r>
-              <a:rPr sz="3800" b="1" i="1">
-                <a:solidFill>
-                  <a:srgbClr val="E5917A"/>
-                </a:solidFill>
-                <a:latin typeface="Libre Baskerville"/>
-              </a:rPr>
-              <a:t>alone</a:t>
-            </a:r>
-            <a:r>
-              <a:rPr sz="3800" b="1" i="0">
-                <a:solidFill>
-                  <a:srgbClr val="FFFFFF"/>
-                </a:solidFill>
-                <a:latin typeface="Libre Baskerville"/>
-              </a:rPr>
-              <a:t> — and be in the same place in 3–6 months.</a:t>
-            </a:r>
-          </a:p>
-          <a:p>
-            <a:pPr algn="ctr">
-              <a:lnSpc>
-                <a:spcPct val="118000"/>
-              </a:lnSpc>
-            </a:pPr>
-            <a:r>
-              <a:rPr sz="3800" b="1" i="0">
-                <a:solidFill>
-                  <a:srgbClr val="FFFFFF"/>
-                </a:solidFill>
-                <a:latin typeface="Libre Baskerville"/>
-              </a:rPr>
-              <a:t>Or get the support, structure and accountability to </a:t>
-            </a:r>
-            <a:r>
-              <a:rPr sz="3800" b="1" i="1">
-                <a:solidFill>
-                  <a:srgbClr val="E5917A"/>
-                </a:solidFill>
-                <a:latin typeface="Libre Baskerville"/>
-              </a:rPr>
-              <a:t>finally follow through</a:t>
-            </a:r>
-            <a:r>
-              <a:rPr sz="3800" b="1" i="0">
-                <a:solidFill>
-                  <a:srgbClr val="FFFFFF"/>
-                </a:solidFill>
-                <a:latin typeface="Libre Baskerville"/>
-              </a:rPr>
-              <a:t>.</a:t>
-            </a:r>
-          </a:p>
-        </p:txBody>
-      </p:sp>
+          </a:p>
+        </p:txBody>
+      </p:sp>
+      <p:pic>
+        <p:nvPicPr>
+          <p:cNvPr id="7" name="Picture 6" descr="vip-testimonial-2.jpg"/>
+          <p:cNvPicPr>
+            <a:picLocks noChangeAspect="1"/>
+          </p:cNvPicPr>
+          <p:nvPr/>
+        </p:nvPicPr>
+        <p:blipFill>
+          <a:blip r:embed="rId2"/>
+          <a:srcRect t="0" b="0"/>
+          <a:stretch>
+            <a:fillRect/>
+          </a:stretch>
+        </p:blipFill>
+        <p:spPr>
+          <a:xfrm>
+            <a:off x="6291072" y="1408940"/>
+            <a:ext cx="4974336" cy="4040119"/>
+          </a:xfrm>
+          <a:prstGeom prst="rect">
+            <a:avLst/>
+          </a:prstGeom>
+        </p:spPr>
+      </p:pic>
     </p:spTree>
   </p:cSld>
   <p:clrMapOvr>
@@ -10196,6 +7911,3729 @@
       </p:sp>
       <p:sp>
         <p:nvSpPr>
+          <p:cNvPr id="3" name="TextBox 2"/>
+          <p:cNvSpPr txBox="1"/>
+          <p:nvPr/>
+        </p:nvSpPr>
+        <p:spPr>
+          <a:xfrm>
+            <a:off x="822960" y="749808"/>
+            <a:ext cx="10515600" cy="457200"/>
+          </a:xfrm>
+          <a:prstGeom prst="rect">
+            <a:avLst/>
+          </a:prstGeom>
+          <a:noFill/>
+        </p:spPr>
+        <p:txBody>
+          <a:bodyPr wrap="square" lIns="0" rIns="0" tIns="0" bIns="0" anchor="t">
+            <a:spAutoFit/>
+          </a:bodyPr>
+          <a:lstStyle/>
+          <a:p>
+            <a:pPr algn="l">
+              <a:lnSpc>
+                <a:spcPct val="120000"/>
+              </a:lnSpc>
+            </a:pPr>
+            <a:r>
+              <a:rPr sz="1800" b="1" i="0" spc="240">
+                <a:solidFill>
+                  <a:srgbClr val="E5917A"/>
+                </a:solidFill>
+                <a:latin typeface="Alegreya Sans"/>
+              </a:rPr>
+              <a:t>REAL WOMEN, REAL RESULTS</a:t>
+            </a:r>
+          </a:p>
+        </p:txBody>
+      </p:sp>
+      <p:sp>
+        <p:nvSpPr>
+          <p:cNvPr id="4" name="TextBox 3"/>
+          <p:cNvSpPr txBox="1"/>
+          <p:nvPr/>
+        </p:nvSpPr>
+        <p:spPr>
+          <a:xfrm>
+            <a:off x="822960" y="1371600"/>
+            <a:ext cx="10424160" cy="1097280"/>
+          </a:xfrm>
+          <a:prstGeom prst="rect">
+            <a:avLst/>
+          </a:prstGeom>
+          <a:noFill/>
+        </p:spPr>
+        <p:txBody>
+          <a:bodyPr wrap="square" lIns="0" rIns="0" tIns="0" bIns="0" anchor="t">
+            <a:spAutoFit/>
+          </a:bodyPr>
+          <a:lstStyle/>
+          <a:p>
+            <a:pPr algn="l">
+              <a:lnSpc>
+                <a:spcPct val="110000"/>
+              </a:lnSpc>
+            </a:pPr>
+            <a:r>
+              <a:rPr sz="3600" b="1" i="0">
+                <a:solidFill>
+                  <a:srgbClr val="FFFFFF"/>
+                </a:solidFill>
+                <a:latin typeface="Libre Baskerville"/>
+              </a:rPr>
+              <a:t>The transformations speak for </a:t>
+            </a:r>
+            <a:r>
+              <a:rPr sz="3600" b="1" i="1">
+                <a:solidFill>
+                  <a:srgbClr val="E5917A"/>
+                </a:solidFill>
+                <a:latin typeface="Libre Baskerville"/>
+              </a:rPr>
+              <a:t>themselves</a:t>
+            </a:r>
+            <a:r>
+              <a:rPr sz="3600" b="1" i="0">
+                <a:solidFill>
+                  <a:srgbClr val="FFFFFF"/>
+                </a:solidFill>
+                <a:latin typeface="Libre Baskerville"/>
+              </a:rPr>
+              <a:t>.</a:t>
+            </a:r>
+          </a:p>
+        </p:txBody>
+      </p:sp>
+      <p:pic>
+        <p:nvPicPr>
+          <p:cNvPr id="5" name="Picture 4" descr="ruth-before-after.jpg"/>
+          <p:cNvPicPr>
+            <a:picLocks noChangeAspect="1"/>
+          </p:cNvPicPr>
+          <p:nvPr/>
+        </p:nvPicPr>
+        <p:blipFill>
+          <a:blip r:embed="rId2"/>
+          <a:srcRect/>
+          <a:stretch>
+            <a:fillRect/>
+          </a:stretch>
+        </p:blipFill>
+        <p:spPr>
+          <a:xfrm>
+            <a:off x="668883" y="2743200"/>
+            <a:ext cx="2542032" cy="2542032"/>
+          </a:xfrm>
+          <a:prstGeom prst="rect">
+            <a:avLst/>
+          </a:prstGeom>
+        </p:spPr>
+      </p:pic>
+      <p:pic>
+        <p:nvPicPr>
+          <p:cNvPr id="6" name="Picture 5" descr="jill-before-after.jpg"/>
+          <p:cNvPicPr>
+            <a:picLocks noChangeAspect="1"/>
+          </p:cNvPicPr>
+          <p:nvPr/>
+        </p:nvPicPr>
+        <p:blipFill>
+          <a:blip r:embed="rId3"/>
+          <a:srcRect/>
+          <a:stretch>
+            <a:fillRect/>
+          </a:stretch>
+        </p:blipFill>
+        <p:spPr>
+          <a:xfrm>
+            <a:off x="3439515" y="2743200"/>
+            <a:ext cx="2542032" cy="2542032"/>
+          </a:xfrm>
+          <a:prstGeom prst="rect">
+            <a:avLst/>
+          </a:prstGeom>
+        </p:spPr>
+      </p:pic>
+      <p:pic>
+        <p:nvPicPr>
+          <p:cNvPr id="7" name="Picture 6" descr="vicky-before-after.png"/>
+          <p:cNvPicPr>
+            <a:picLocks noChangeAspect="1"/>
+          </p:cNvPicPr>
+          <p:nvPr/>
+        </p:nvPicPr>
+        <p:blipFill>
+          <a:blip r:embed="rId4"/>
+          <a:srcRect/>
+          <a:stretch>
+            <a:fillRect/>
+          </a:stretch>
+        </p:blipFill>
+        <p:spPr>
+          <a:xfrm>
+            <a:off x="6210147" y="2743200"/>
+            <a:ext cx="2542032" cy="2542032"/>
+          </a:xfrm>
+          <a:prstGeom prst="rect">
+            <a:avLst/>
+          </a:prstGeom>
+        </p:spPr>
+      </p:pic>
+      <p:pic>
+        <p:nvPicPr>
+          <p:cNvPr id="8" name="Picture 7" descr="barbara-before-after.png"/>
+          <p:cNvPicPr>
+            <a:picLocks noChangeAspect="1"/>
+          </p:cNvPicPr>
+          <p:nvPr/>
+        </p:nvPicPr>
+        <p:blipFill>
+          <a:blip r:embed="rId5"/>
+          <a:srcRect/>
+          <a:stretch>
+            <a:fillRect/>
+          </a:stretch>
+        </p:blipFill>
+        <p:spPr>
+          <a:xfrm>
+            <a:off x="8980779" y="2743200"/>
+            <a:ext cx="2542032" cy="2542032"/>
+          </a:xfrm>
+          <a:prstGeom prst="rect">
+            <a:avLst/>
+          </a:prstGeom>
+        </p:spPr>
+      </p:pic>
+      <p:sp>
+        <p:nvSpPr>
+          <p:cNvPr id="9" name="TextBox 8"/>
+          <p:cNvSpPr txBox="1"/>
+          <p:nvPr/>
+        </p:nvSpPr>
+        <p:spPr>
+          <a:xfrm>
+            <a:off x="822960" y="5577840"/>
+            <a:ext cx="10515600" cy="457200"/>
+          </a:xfrm>
+          <a:prstGeom prst="rect">
+            <a:avLst/>
+          </a:prstGeom>
+          <a:noFill/>
+        </p:spPr>
+        <p:txBody>
+          <a:bodyPr wrap="square" lIns="0" rIns="0" tIns="0" bIns="0" anchor="t">
+            <a:spAutoFit/>
+          </a:bodyPr>
+          <a:lstStyle/>
+          <a:p>
+            <a:pPr algn="ctr">
+              <a:lnSpc>
+                <a:spcPct val="120000"/>
+              </a:lnSpc>
+            </a:pPr>
+            <a:r>
+              <a:rPr sz="1900" b="0" i="1">
+                <a:solidFill>
+                  <a:srgbClr val="F4EBDC"/>
+                </a:solidFill>
+                <a:latin typeface="Libre Baskerville"/>
+              </a:rPr>
+              <a:t>From 1 to 4 stone down — in 1-2-1 VIP coaching with Anna.</a:t>
+            </a:r>
+          </a:p>
+        </p:txBody>
+      </p:sp>
+    </p:spTree>
+  </p:cSld>
+  <p:clrMapOvr>
+    <a:masterClrMapping/>
+  </p:clrMapOvr>
+</p:sld>
+</file>
+
+<file path=ppt/slides/slide23.xml><?xml version="1.0" encoding="utf-8"?>
+<p:sld xmlns:a="http://schemas.openxmlformats.org/drawingml/2006/main" xmlns:p="http://schemas.openxmlformats.org/presentationml/2006/main" xmlns:r="http://schemas.openxmlformats.org/officeDocument/2006/relationships">
+  <p:cSld>
+    <p:spTree>
+      <p:nvGrpSpPr>
+        <p:cNvPr id="1" name=""/>
+        <p:cNvGrpSpPr/>
+        <p:nvPr/>
+      </p:nvGrpSpPr>
+      <p:grpSpPr/>
+      <p:sp>
+        <p:nvSpPr>
+          <p:cNvPr id="2" name="Rectangle 1"/>
+          <p:cNvSpPr/>
+          <p:nvPr/>
+        </p:nvSpPr>
+        <p:spPr>
+          <a:xfrm>
+            <a:off x="0" y="0"/>
+            <a:ext cx="12191695" cy="6858000"/>
+          </a:xfrm>
+          <a:prstGeom prst="rect">
+            <a:avLst/>
+          </a:prstGeom>
+          <a:solidFill>
+            <a:srgbClr val="F9F7F4"/>
+          </a:solidFill>
+          <a:ln>
+            <a:noFill/>
+          </a:ln>
+          <a:effectLst/>
+        </p:spPr>
+        <p:style>
+          <a:lnRef idx="1">
+            <a:schemeClr val="accent1"/>
+          </a:lnRef>
+          <a:fillRef idx="3">
+            <a:schemeClr val="accent1"/>
+          </a:fillRef>
+          <a:effectRef idx="2">
+            <a:schemeClr val="accent1"/>
+          </a:effectRef>
+          <a:fontRef idx="minor">
+            <a:schemeClr val="lt1"/>
+          </a:fontRef>
+        </p:style>
+        <p:txBody>
+          <a:bodyPr rtlCol="0" anchor="ctr"/>
+          <a:lstStyle/>
+          <a:p>
+            <a:pPr algn="ctr"/>
+          </a:p>
+        </p:txBody>
+      </p:sp>
+      <p:sp>
+        <p:nvSpPr>
+          <p:cNvPr id="3" name="TextBox 2"/>
+          <p:cNvSpPr txBox="1"/>
+          <p:nvPr/>
+        </p:nvSpPr>
+        <p:spPr>
+          <a:xfrm>
+            <a:off x="822960" y="749808"/>
+            <a:ext cx="10515600" cy="457200"/>
+          </a:xfrm>
+          <a:prstGeom prst="rect">
+            <a:avLst/>
+          </a:prstGeom>
+          <a:noFill/>
+        </p:spPr>
+        <p:txBody>
+          <a:bodyPr wrap="square" lIns="0" rIns="0" tIns="0" bIns="0" anchor="t">
+            <a:spAutoFit/>
+          </a:bodyPr>
+          <a:lstStyle/>
+          <a:p>
+            <a:pPr algn="l">
+              <a:lnSpc>
+                <a:spcPct val="120000"/>
+              </a:lnSpc>
+            </a:pPr>
+            <a:r>
+              <a:rPr sz="1800" b="1" i="0" spc="240">
+                <a:solidFill>
+                  <a:srgbClr val="D97757"/>
+                </a:solidFill>
+                <a:latin typeface="Alegreya Sans"/>
+              </a:rPr>
+              <a:t>EVERYTHING YOU GET</a:t>
+            </a:r>
+          </a:p>
+        </p:txBody>
+      </p:sp>
+      <p:sp>
+        <p:nvSpPr>
+          <p:cNvPr id="4" name="TextBox 3"/>
+          <p:cNvSpPr txBox="1"/>
+          <p:nvPr/>
+        </p:nvSpPr>
+        <p:spPr>
+          <a:xfrm>
+            <a:off x="822960" y="1298448"/>
+            <a:ext cx="10515600" cy="1828800"/>
+          </a:xfrm>
+          <a:prstGeom prst="rect">
+            <a:avLst/>
+          </a:prstGeom>
+          <a:noFill/>
+        </p:spPr>
+        <p:txBody>
+          <a:bodyPr wrap="square" lIns="0" rIns="0" tIns="0" bIns="0" anchor="t">
+            <a:spAutoFit/>
+          </a:bodyPr>
+          <a:lstStyle/>
+          <a:p>
+            <a:pPr algn="l">
+              <a:lnSpc>
+                <a:spcPct val="112000"/>
+              </a:lnSpc>
+            </a:pPr>
+            <a:r>
+              <a:rPr sz="3800" b="1" i="0">
+                <a:solidFill>
+                  <a:srgbClr val="0E2746"/>
+                </a:solidFill>
+                <a:latin typeface="Libre Baskerville"/>
+              </a:rPr>
+              <a:t>What’s </a:t>
+            </a:r>
+            <a:r>
+              <a:rPr sz="3800" b="1" i="1">
+                <a:solidFill>
+                  <a:srgbClr val="D97757"/>
+                </a:solidFill>
+                <a:latin typeface="Libre Baskerville"/>
+              </a:rPr>
+              <a:t>included</a:t>
+            </a:r>
+          </a:p>
+        </p:txBody>
+      </p:sp>
+      <p:sp>
+        <p:nvSpPr>
+          <p:cNvPr id="5" name="Oval 4"/>
+          <p:cNvSpPr/>
+          <p:nvPr/>
+        </p:nvSpPr>
+        <p:spPr>
+          <a:xfrm>
+            <a:off x="822960" y="2504440"/>
+            <a:ext cx="237744" cy="237744"/>
+          </a:xfrm>
+          <a:prstGeom prst="ellipse">
+            <a:avLst/>
+          </a:prstGeom>
+          <a:solidFill>
+            <a:srgbClr val="D97757"/>
+          </a:solidFill>
+          <a:ln>
+            <a:noFill/>
+          </a:ln>
+          <a:effectLst/>
+        </p:spPr>
+        <p:style>
+          <a:lnRef idx="1">
+            <a:schemeClr val="accent1"/>
+          </a:lnRef>
+          <a:fillRef idx="3">
+            <a:schemeClr val="accent1"/>
+          </a:fillRef>
+          <a:effectRef idx="2">
+            <a:schemeClr val="accent1"/>
+          </a:effectRef>
+          <a:fontRef idx="minor">
+            <a:schemeClr val="lt1"/>
+          </a:fontRef>
+        </p:style>
+        <p:txBody>
+          <a:bodyPr rtlCol="0" anchor="ctr" lIns="0" rIns="0" tIns="0" bIns="0"/>
+          <a:lstStyle/>
+          <a:p>
+            <a:pPr algn="ctr"/>
+            <a:r>
+              <a:rPr sz="1100" b="1">
+                <a:solidFill>
+                  <a:srgbClr val="FFFFFF"/>
+                </a:solidFill>
+                <a:latin typeface="Alegreya Sans"/>
+              </a:rPr>
+              <a:t>✓</a:t>
+            </a:r>
+          </a:p>
+        </p:txBody>
+      </p:sp>
+      <p:sp>
+        <p:nvSpPr>
+          <p:cNvPr id="6" name="TextBox 5"/>
+          <p:cNvSpPr txBox="1"/>
+          <p:nvPr/>
+        </p:nvSpPr>
+        <p:spPr>
+          <a:xfrm>
+            <a:off x="1225296" y="2450592"/>
+            <a:ext cx="4846320" cy="1005840"/>
+          </a:xfrm>
+          <a:prstGeom prst="rect">
+            <a:avLst/>
+          </a:prstGeom>
+          <a:noFill/>
+        </p:spPr>
+        <p:txBody>
+          <a:bodyPr wrap="square" lIns="0" rIns="0" tIns="0" bIns="0" anchor="t">
+            <a:spAutoFit/>
+          </a:bodyPr>
+          <a:lstStyle/>
+          <a:p>
+            <a:pPr algn="l">
+              <a:lnSpc>
+                <a:spcPct val="115000"/>
+              </a:lnSpc>
+              <a:spcAft>
+                <a:spcPts val="200"/>
+              </a:spcAft>
+            </a:pPr>
+            <a:r>
+              <a:rPr sz="1800" b="1" i="0">
+                <a:solidFill>
+                  <a:srgbClr val="0E2746"/>
+                </a:solidFill>
+                <a:latin typeface="Libre Baskerville"/>
+              </a:rPr>
+              <a:t>Monthly 1-2-1 Coaching Sessions</a:t>
+            </a:r>
+          </a:p>
+          <a:p>
+            <a:pPr algn="l">
+              <a:lnSpc>
+                <a:spcPct val="122000"/>
+              </a:lnSpc>
+            </a:pPr>
+            <a:r>
+              <a:rPr sz="1500" b="0" i="0">
+                <a:solidFill>
+                  <a:srgbClr val="5A6478"/>
+                </a:solidFill>
+                <a:latin typeface="Alegreya Sans"/>
+              </a:rPr>
+              <a:t>A dedicated session each month to review progress and refine your plan.</a:t>
+            </a:r>
+          </a:p>
+        </p:txBody>
+      </p:sp>
+      <p:sp>
+        <p:nvSpPr>
+          <p:cNvPr id="7" name="Oval 6"/>
+          <p:cNvSpPr/>
+          <p:nvPr/>
+        </p:nvSpPr>
+        <p:spPr>
+          <a:xfrm>
+            <a:off x="6309360" y="2504440"/>
+            <a:ext cx="237744" cy="237744"/>
+          </a:xfrm>
+          <a:prstGeom prst="ellipse">
+            <a:avLst/>
+          </a:prstGeom>
+          <a:solidFill>
+            <a:srgbClr val="D97757"/>
+          </a:solidFill>
+          <a:ln>
+            <a:noFill/>
+          </a:ln>
+          <a:effectLst/>
+        </p:spPr>
+        <p:style>
+          <a:lnRef idx="1">
+            <a:schemeClr val="accent1"/>
+          </a:lnRef>
+          <a:fillRef idx="3">
+            <a:schemeClr val="accent1"/>
+          </a:fillRef>
+          <a:effectRef idx="2">
+            <a:schemeClr val="accent1"/>
+          </a:effectRef>
+          <a:fontRef idx="minor">
+            <a:schemeClr val="lt1"/>
+          </a:fontRef>
+        </p:style>
+        <p:txBody>
+          <a:bodyPr rtlCol="0" anchor="ctr" lIns="0" rIns="0" tIns="0" bIns="0"/>
+          <a:lstStyle/>
+          <a:p>
+            <a:pPr algn="ctr"/>
+            <a:r>
+              <a:rPr sz="1100" b="1">
+                <a:solidFill>
+                  <a:srgbClr val="FFFFFF"/>
+                </a:solidFill>
+                <a:latin typeface="Alegreya Sans"/>
+              </a:rPr>
+              <a:t>✓</a:t>
+            </a:r>
+          </a:p>
+        </p:txBody>
+      </p:sp>
+      <p:sp>
+        <p:nvSpPr>
+          <p:cNvPr id="8" name="TextBox 7"/>
+          <p:cNvSpPr txBox="1"/>
+          <p:nvPr/>
+        </p:nvSpPr>
+        <p:spPr>
+          <a:xfrm>
+            <a:off x="6711696" y="2450592"/>
+            <a:ext cx="4846320" cy="1005840"/>
+          </a:xfrm>
+          <a:prstGeom prst="rect">
+            <a:avLst/>
+          </a:prstGeom>
+          <a:noFill/>
+        </p:spPr>
+        <p:txBody>
+          <a:bodyPr wrap="square" lIns="0" rIns="0" tIns="0" bIns="0" anchor="t">
+            <a:spAutoFit/>
+          </a:bodyPr>
+          <a:lstStyle/>
+          <a:p>
+            <a:pPr algn="l">
+              <a:lnSpc>
+                <a:spcPct val="115000"/>
+              </a:lnSpc>
+              <a:spcAft>
+                <a:spcPts val="200"/>
+              </a:spcAft>
+            </a:pPr>
+            <a:r>
+              <a:rPr sz="1800" b="1" i="0">
+                <a:solidFill>
+                  <a:srgbClr val="0E2746"/>
+                </a:solidFill>
+                <a:latin typeface="Libre Baskerville"/>
+              </a:rPr>
+              <a:t>Daily WhatsApp / Messenger Support</a:t>
+            </a:r>
+          </a:p>
+          <a:p>
+            <a:pPr algn="l">
+              <a:lnSpc>
+                <a:spcPct val="122000"/>
+              </a:lnSpc>
+            </a:pPr>
+            <a:r>
+              <a:rPr sz="1500" b="0" i="0">
+                <a:solidFill>
+                  <a:srgbClr val="5A6478"/>
+                </a:solidFill>
+                <a:latin typeface="Alegreya Sans"/>
+              </a:rPr>
+              <a:t>Your coach in your pocket for guidance and encouragement every day.</a:t>
+            </a:r>
+          </a:p>
+        </p:txBody>
+      </p:sp>
+      <p:sp>
+        <p:nvSpPr>
+          <p:cNvPr id="9" name="Oval 8"/>
+          <p:cNvSpPr/>
+          <p:nvPr/>
+        </p:nvSpPr>
+        <p:spPr>
+          <a:xfrm>
+            <a:off x="822960" y="3464560"/>
+            <a:ext cx="237744" cy="237744"/>
+          </a:xfrm>
+          <a:prstGeom prst="ellipse">
+            <a:avLst/>
+          </a:prstGeom>
+          <a:solidFill>
+            <a:srgbClr val="D97757"/>
+          </a:solidFill>
+          <a:ln>
+            <a:noFill/>
+          </a:ln>
+          <a:effectLst/>
+        </p:spPr>
+        <p:style>
+          <a:lnRef idx="1">
+            <a:schemeClr val="accent1"/>
+          </a:lnRef>
+          <a:fillRef idx="3">
+            <a:schemeClr val="accent1"/>
+          </a:fillRef>
+          <a:effectRef idx="2">
+            <a:schemeClr val="accent1"/>
+          </a:effectRef>
+          <a:fontRef idx="minor">
+            <a:schemeClr val="lt1"/>
+          </a:fontRef>
+        </p:style>
+        <p:txBody>
+          <a:bodyPr rtlCol="0" anchor="ctr" lIns="0" rIns="0" tIns="0" bIns="0"/>
+          <a:lstStyle/>
+          <a:p>
+            <a:pPr algn="ctr"/>
+            <a:r>
+              <a:rPr sz="1100" b="1">
+                <a:solidFill>
+                  <a:srgbClr val="FFFFFF"/>
+                </a:solidFill>
+                <a:latin typeface="Alegreya Sans"/>
+              </a:rPr>
+              <a:t>✓</a:t>
+            </a:r>
+          </a:p>
+        </p:txBody>
+      </p:sp>
+      <p:sp>
+        <p:nvSpPr>
+          <p:cNvPr id="10" name="TextBox 9"/>
+          <p:cNvSpPr txBox="1"/>
+          <p:nvPr/>
+        </p:nvSpPr>
+        <p:spPr>
+          <a:xfrm>
+            <a:off x="1225296" y="3410712"/>
+            <a:ext cx="4846320" cy="1005840"/>
+          </a:xfrm>
+          <a:prstGeom prst="rect">
+            <a:avLst/>
+          </a:prstGeom>
+          <a:noFill/>
+        </p:spPr>
+        <p:txBody>
+          <a:bodyPr wrap="square" lIns="0" rIns="0" tIns="0" bIns="0" anchor="t">
+            <a:spAutoFit/>
+          </a:bodyPr>
+          <a:lstStyle/>
+          <a:p>
+            <a:pPr algn="l">
+              <a:lnSpc>
+                <a:spcPct val="115000"/>
+              </a:lnSpc>
+              <a:spcAft>
+                <a:spcPts val="200"/>
+              </a:spcAft>
+            </a:pPr>
+            <a:r>
+              <a:rPr sz="1800" b="1" i="0">
+                <a:solidFill>
+                  <a:srgbClr val="0E2746"/>
+                </a:solidFill>
+                <a:latin typeface="Libre Baskerville"/>
+              </a:rPr>
+              <a:t>Weekly Food Diary Review</a:t>
+            </a:r>
+          </a:p>
+          <a:p>
+            <a:pPr algn="l">
+              <a:lnSpc>
+                <a:spcPct val="122000"/>
+              </a:lnSpc>
+            </a:pPr>
+            <a:r>
+              <a:rPr sz="1500" b="0" i="0">
+                <a:solidFill>
+                  <a:srgbClr val="5A6478"/>
+                </a:solidFill>
+                <a:latin typeface="Alegreya Sans"/>
+              </a:rPr>
+              <a:t>We review your nutrition each week and adjust what’s working.</a:t>
+            </a:r>
+          </a:p>
+        </p:txBody>
+      </p:sp>
+      <p:sp>
+        <p:nvSpPr>
+          <p:cNvPr id="11" name="Oval 10"/>
+          <p:cNvSpPr/>
+          <p:nvPr/>
+        </p:nvSpPr>
+        <p:spPr>
+          <a:xfrm>
+            <a:off x="6309360" y="3464560"/>
+            <a:ext cx="237744" cy="237744"/>
+          </a:xfrm>
+          <a:prstGeom prst="ellipse">
+            <a:avLst/>
+          </a:prstGeom>
+          <a:solidFill>
+            <a:srgbClr val="D97757"/>
+          </a:solidFill>
+          <a:ln>
+            <a:noFill/>
+          </a:ln>
+          <a:effectLst/>
+        </p:spPr>
+        <p:style>
+          <a:lnRef idx="1">
+            <a:schemeClr val="accent1"/>
+          </a:lnRef>
+          <a:fillRef idx="3">
+            <a:schemeClr val="accent1"/>
+          </a:fillRef>
+          <a:effectRef idx="2">
+            <a:schemeClr val="accent1"/>
+          </a:effectRef>
+          <a:fontRef idx="minor">
+            <a:schemeClr val="lt1"/>
+          </a:fontRef>
+        </p:style>
+        <p:txBody>
+          <a:bodyPr rtlCol="0" anchor="ctr" lIns="0" rIns="0" tIns="0" bIns="0"/>
+          <a:lstStyle/>
+          <a:p>
+            <a:pPr algn="ctr"/>
+            <a:r>
+              <a:rPr sz="1100" b="1">
+                <a:solidFill>
+                  <a:srgbClr val="FFFFFF"/>
+                </a:solidFill>
+                <a:latin typeface="Alegreya Sans"/>
+              </a:rPr>
+              <a:t>✓</a:t>
+            </a:r>
+          </a:p>
+        </p:txBody>
+      </p:sp>
+      <p:sp>
+        <p:nvSpPr>
+          <p:cNvPr id="12" name="TextBox 11"/>
+          <p:cNvSpPr txBox="1"/>
+          <p:nvPr/>
+        </p:nvSpPr>
+        <p:spPr>
+          <a:xfrm>
+            <a:off x="6711696" y="3410712"/>
+            <a:ext cx="4846320" cy="1005840"/>
+          </a:xfrm>
+          <a:prstGeom prst="rect">
+            <a:avLst/>
+          </a:prstGeom>
+          <a:noFill/>
+        </p:spPr>
+        <p:txBody>
+          <a:bodyPr wrap="square" lIns="0" rIns="0" tIns="0" bIns="0" anchor="t">
+            <a:spAutoFit/>
+          </a:bodyPr>
+          <a:lstStyle/>
+          <a:p>
+            <a:pPr algn="l">
+              <a:lnSpc>
+                <a:spcPct val="115000"/>
+              </a:lnSpc>
+              <a:spcAft>
+                <a:spcPts val="200"/>
+              </a:spcAft>
+            </a:pPr>
+            <a:r>
+              <a:rPr sz="1800" b="1" i="0">
+                <a:solidFill>
+                  <a:srgbClr val="0E2746"/>
+                </a:solidFill>
+                <a:latin typeface="Libre Baskerville"/>
+              </a:rPr>
+              <a:t>Weekly Nutrition Strategy</a:t>
+            </a:r>
+          </a:p>
+          <a:p>
+            <a:pPr algn="l">
+              <a:lnSpc>
+                <a:spcPct val="122000"/>
+              </a:lnSpc>
+            </a:pPr>
+            <a:r>
+              <a:rPr sz="1500" b="0" i="0">
+                <a:solidFill>
+                  <a:srgbClr val="5A6478"/>
+                </a:solidFill>
+                <a:latin typeface="Alegreya Sans"/>
+              </a:rPr>
+              <a:t>Your plan evolves with your progress, lifestyle and goals.</a:t>
+            </a:r>
+          </a:p>
+        </p:txBody>
+      </p:sp>
+      <p:sp>
+        <p:nvSpPr>
+          <p:cNvPr id="13" name="Oval 12"/>
+          <p:cNvSpPr/>
+          <p:nvPr/>
+        </p:nvSpPr>
+        <p:spPr>
+          <a:xfrm>
+            <a:off x="822960" y="4424680"/>
+            <a:ext cx="237744" cy="237744"/>
+          </a:xfrm>
+          <a:prstGeom prst="ellipse">
+            <a:avLst/>
+          </a:prstGeom>
+          <a:solidFill>
+            <a:srgbClr val="D97757"/>
+          </a:solidFill>
+          <a:ln>
+            <a:noFill/>
+          </a:ln>
+          <a:effectLst/>
+        </p:spPr>
+        <p:style>
+          <a:lnRef idx="1">
+            <a:schemeClr val="accent1"/>
+          </a:lnRef>
+          <a:fillRef idx="3">
+            <a:schemeClr val="accent1"/>
+          </a:fillRef>
+          <a:effectRef idx="2">
+            <a:schemeClr val="accent1"/>
+          </a:effectRef>
+          <a:fontRef idx="minor">
+            <a:schemeClr val="lt1"/>
+          </a:fontRef>
+        </p:style>
+        <p:txBody>
+          <a:bodyPr rtlCol="0" anchor="ctr" lIns="0" rIns="0" tIns="0" bIns="0"/>
+          <a:lstStyle/>
+          <a:p>
+            <a:pPr algn="ctr"/>
+            <a:r>
+              <a:rPr sz="1100" b="1">
+                <a:solidFill>
+                  <a:srgbClr val="FFFFFF"/>
+                </a:solidFill>
+                <a:latin typeface="Alegreya Sans"/>
+              </a:rPr>
+              <a:t>✓</a:t>
+            </a:r>
+          </a:p>
+        </p:txBody>
+      </p:sp>
+      <p:sp>
+        <p:nvSpPr>
+          <p:cNvPr id="14" name="TextBox 13"/>
+          <p:cNvSpPr txBox="1"/>
+          <p:nvPr/>
+        </p:nvSpPr>
+        <p:spPr>
+          <a:xfrm>
+            <a:off x="1225296" y="4370832"/>
+            <a:ext cx="4846320" cy="1005840"/>
+          </a:xfrm>
+          <a:prstGeom prst="rect">
+            <a:avLst/>
+          </a:prstGeom>
+          <a:noFill/>
+        </p:spPr>
+        <p:txBody>
+          <a:bodyPr wrap="square" lIns="0" rIns="0" tIns="0" bIns="0" anchor="t">
+            <a:spAutoFit/>
+          </a:bodyPr>
+          <a:lstStyle/>
+          <a:p>
+            <a:pPr algn="l">
+              <a:lnSpc>
+                <a:spcPct val="115000"/>
+              </a:lnSpc>
+              <a:spcAft>
+                <a:spcPts val="200"/>
+              </a:spcAft>
+            </a:pPr>
+            <a:r>
+              <a:rPr sz="1800" b="1" i="0">
+                <a:solidFill>
+                  <a:srgbClr val="0E2746"/>
+                </a:solidFill>
+                <a:latin typeface="Libre Baskerville"/>
+              </a:rPr>
+              <a:t>Laser-Focused Weekly Actions</a:t>
+            </a:r>
+          </a:p>
+          <a:p>
+            <a:pPr algn="l">
+              <a:lnSpc>
+                <a:spcPct val="122000"/>
+              </a:lnSpc>
+            </a:pPr>
+            <a:r>
+              <a:rPr sz="1500" b="0" i="0">
+                <a:solidFill>
+                  <a:srgbClr val="5A6478"/>
+                </a:solidFill>
+                <a:latin typeface="Alegreya Sans"/>
+              </a:rPr>
+              <a:t>Clear priorities each week so you always know your next step.</a:t>
+            </a:r>
+          </a:p>
+        </p:txBody>
+      </p:sp>
+      <p:sp>
+        <p:nvSpPr>
+          <p:cNvPr id="15" name="Oval 14"/>
+          <p:cNvSpPr/>
+          <p:nvPr/>
+        </p:nvSpPr>
+        <p:spPr>
+          <a:xfrm>
+            <a:off x="6309360" y="4424680"/>
+            <a:ext cx="237744" cy="237744"/>
+          </a:xfrm>
+          <a:prstGeom prst="ellipse">
+            <a:avLst/>
+          </a:prstGeom>
+          <a:solidFill>
+            <a:srgbClr val="D97757"/>
+          </a:solidFill>
+          <a:ln>
+            <a:noFill/>
+          </a:ln>
+          <a:effectLst/>
+        </p:spPr>
+        <p:style>
+          <a:lnRef idx="1">
+            <a:schemeClr val="accent1"/>
+          </a:lnRef>
+          <a:fillRef idx="3">
+            <a:schemeClr val="accent1"/>
+          </a:fillRef>
+          <a:effectRef idx="2">
+            <a:schemeClr val="accent1"/>
+          </a:effectRef>
+          <a:fontRef idx="minor">
+            <a:schemeClr val="lt1"/>
+          </a:fontRef>
+        </p:style>
+        <p:txBody>
+          <a:bodyPr rtlCol="0" anchor="ctr" lIns="0" rIns="0" tIns="0" bIns="0"/>
+          <a:lstStyle/>
+          <a:p>
+            <a:pPr algn="ctr"/>
+            <a:r>
+              <a:rPr sz="1100" b="1">
+                <a:solidFill>
+                  <a:srgbClr val="FFFFFF"/>
+                </a:solidFill>
+                <a:latin typeface="Alegreya Sans"/>
+              </a:rPr>
+              <a:t>✓</a:t>
+            </a:r>
+          </a:p>
+        </p:txBody>
+      </p:sp>
+      <p:sp>
+        <p:nvSpPr>
+          <p:cNvPr id="16" name="TextBox 15"/>
+          <p:cNvSpPr txBox="1"/>
+          <p:nvPr/>
+        </p:nvSpPr>
+        <p:spPr>
+          <a:xfrm>
+            <a:off x="6711696" y="4370832"/>
+            <a:ext cx="4846320" cy="1005840"/>
+          </a:xfrm>
+          <a:prstGeom prst="rect">
+            <a:avLst/>
+          </a:prstGeom>
+          <a:noFill/>
+        </p:spPr>
+        <p:txBody>
+          <a:bodyPr wrap="square" lIns="0" rIns="0" tIns="0" bIns="0" anchor="t">
+            <a:spAutoFit/>
+          </a:bodyPr>
+          <a:lstStyle/>
+          <a:p>
+            <a:pPr algn="l">
+              <a:lnSpc>
+                <a:spcPct val="115000"/>
+              </a:lnSpc>
+              <a:spcAft>
+                <a:spcPts val="200"/>
+              </a:spcAft>
+            </a:pPr>
+            <a:r>
+              <a:rPr sz="1800" b="1" i="0">
+                <a:solidFill>
+                  <a:srgbClr val="0E2746"/>
+                </a:solidFill>
+                <a:latin typeface="Libre Baskerville"/>
+              </a:rPr>
+              <a:t>Monthly Progress Tracking &amp; Review</a:t>
+            </a:r>
+          </a:p>
+          <a:p>
+            <a:pPr algn="l">
+              <a:lnSpc>
+                <a:spcPct val="122000"/>
+              </a:lnSpc>
+            </a:pPr>
+            <a:r>
+              <a:rPr sz="1500" b="0" i="0">
+                <a:solidFill>
+                  <a:srgbClr val="5A6478"/>
+                </a:solidFill>
+                <a:latin typeface="Alegreya Sans"/>
+              </a:rPr>
+              <a:t>Structured check-ins to keep you accountable and moving forward.</a:t>
+            </a:r>
+          </a:p>
+        </p:txBody>
+      </p:sp>
+      <p:sp>
+        <p:nvSpPr>
+          <p:cNvPr id="17" name="Oval 16"/>
+          <p:cNvSpPr/>
+          <p:nvPr/>
+        </p:nvSpPr>
+        <p:spPr>
+          <a:xfrm>
+            <a:off x="822960" y="5384800"/>
+            <a:ext cx="237744" cy="237744"/>
+          </a:xfrm>
+          <a:prstGeom prst="ellipse">
+            <a:avLst/>
+          </a:prstGeom>
+          <a:solidFill>
+            <a:srgbClr val="D97757"/>
+          </a:solidFill>
+          <a:ln>
+            <a:noFill/>
+          </a:ln>
+          <a:effectLst/>
+        </p:spPr>
+        <p:style>
+          <a:lnRef idx="1">
+            <a:schemeClr val="accent1"/>
+          </a:lnRef>
+          <a:fillRef idx="3">
+            <a:schemeClr val="accent1"/>
+          </a:fillRef>
+          <a:effectRef idx="2">
+            <a:schemeClr val="accent1"/>
+          </a:effectRef>
+          <a:fontRef idx="minor">
+            <a:schemeClr val="lt1"/>
+          </a:fontRef>
+        </p:style>
+        <p:txBody>
+          <a:bodyPr rtlCol="0" anchor="ctr" lIns="0" rIns="0" tIns="0" bIns="0"/>
+          <a:lstStyle/>
+          <a:p>
+            <a:pPr algn="ctr"/>
+            <a:r>
+              <a:rPr sz="1100" b="1">
+                <a:solidFill>
+                  <a:srgbClr val="FFFFFF"/>
+                </a:solidFill>
+                <a:latin typeface="Alegreya Sans"/>
+              </a:rPr>
+              <a:t>✓</a:t>
+            </a:r>
+          </a:p>
+        </p:txBody>
+      </p:sp>
+      <p:sp>
+        <p:nvSpPr>
+          <p:cNvPr id="18" name="TextBox 17"/>
+          <p:cNvSpPr txBox="1"/>
+          <p:nvPr/>
+        </p:nvSpPr>
+        <p:spPr>
+          <a:xfrm>
+            <a:off x="1225296" y="5330952"/>
+            <a:ext cx="4846320" cy="1005840"/>
+          </a:xfrm>
+          <a:prstGeom prst="rect">
+            <a:avLst/>
+          </a:prstGeom>
+          <a:noFill/>
+        </p:spPr>
+        <p:txBody>
+          <a:bodyPr wrap="square" lIns="0" rIns="0" tIns="0" bIns="0" anchor="t">
+            <a:spAutoFit/>
+          </a:bodyPr>
+          <a:lstStyle/>
+          <a:p>
+            <a:pPr algn="l">
+              <a:lnSpc>
+                <a:spcPct val="115000"/>
+              </a:lnSpc>
+              <a:spcAft>
+                <a:spcPts val="200"/>
+              </a:spcAft>
+            </a:pPr>
+            <a:r>
+              <a:rPr sz="1800" b="1" i="0">
+                <a:solidFill>
+                  <a:srgbClr val="0E2746"/>
+                </a:solidFill>
+                <a:latin typeface="Libre Baskerville"/>
+              </a:rPr>
+              <a:t>Shift &amp; Sustain Members Area</a:t>
+            </a:r>
+          </a:p>
+          <a:p>
+            <a:pPr algn="l">
+              <a:lnSpc>
+                <a:spcPct val="122000"/>
+              </a:lnSpc>
+            </a:pPr>
+            <a:r>
+              <a:rPr sz="1500" b="0" i="0">
+                <a:solidFill>
+                  <a:srgbClr val="5A6478"/>
+                </a:solidFill>
+                <a:latin typeface="Alegreya Sans"/>
+              </a:rPr>
+              <a:t>Full access to meal guides, recipes and the WLA framework.</a:t>
+            </a:r>
+          </a:p>
+        </p:txBody>
+      </p:sp>
+      <p:sp>
+        <p:nvSpPr>
+          <p:cNvPr id="19" name="Oval 18"/>
+          <p:cNvSpPr/>
+          <p:nvPr/>
+        </p:nvSpPr>
+        <p:spPr>
+          <a:xfrm>
+            <a:off x="6309360" y="5384800"/>
+            <a:ext cx="237744" cy="237744"/>
+          </a:xfrm>
+          <a:prstGeom prst="ellipse">
+            <a:avLst/>
+          </a:prstGeom>
+          <a:solidFill>
+            <a:srgbClr val="D97757"/>
+          </a:solidFill>
+          <a:ln>
+            <a:noFill/>
+          </a:ln>
+          <a:effectLst/>
+        </p:spPr>
+        <p:style>
+          <a:lnRef idx="1">
+            <a:schemeClr val="accent1"/>
+          </a:lnRef>
+          <a:fillRef idx="3">
+            <a:schemeClr val="accent1"/>
+          </a:fillRef>
+          <a:effectRef idx="2">
+            <a:schemeClr val="accent1"/>
+          </a:effectRef>
+          <a:fontRef idx="minor">
+            <a:schemeClr val="lt1"/>
+          </a:fontRef>
+        </p:style>
+        <p:txBody>
+          <a:bodyPr rtlCol="0" anchor="ctr" lIns="0" rIns="0" tIns="0" bIns="0"/>
+          <a:lstStyle/>
+          <a:p>
+            <a:pPr algn="ctr"/>
+            <a:r>
+              <a:rPr sz="1100" b="1">
+                <a:solidFill>
+                  <a:srgbClr val="FFFFFF"/>
+                </a:solidFill>
+                <a:latin typeface="Alegreya Sans"/>
+              </a:rPr>
+              <a:t>✓</a:t>
+            </a:r>
+          </a:p>
+        </p:txBody>
+      </p:sp>
+      <p:sp>
+        <p:nvSpPr>
+          <p:cNvPr id="20" name="TextBox 19"/>
+          <p:cNvSpPr txBox="1"/>
+          <p:nvPr/>
+        </p:nvSpPr>
+        <p:spPr>
+          <a:xfrm>
+            <a:off x="6711696" y="5330952"/>
+            <a:ext cx="4846320" cy="1005840"/>
+          </a:xfrm>
+          <a:prstGeom prst="rect">
+            <a:avLst/>
+          </a:prstGeom>
+          <a:noFill/>
+        </p:spPr>
+        <p:txBody>
+          <a:bodyPr wrap="square" lIns="0" rIns="0" tIns="0" bIns="0" anchor="t">
+            <a:spAutoFit/>
+          </a:bodyPr>
+          <a:lstStyle/>
+          <a:p>
+            <a:pPr algn="l">
+              <a:lnSpc>
+                <a:spcPct val="115000"/>
+              </a:lnSpc>
+              <a:spcAft>
+                <a:spcPts val="200"/>
+              </a:spcAft>
+            </a:pPr>
+            <a:r>
+              <a:rPr sz="1800" b="1" i="0">
+                <a:solidFill>
+                  <a:srgbClr val="0E2746"/>
+                </a:solidFill>
+                <a:latin typeface="Libre Baskerville"/>
+              </a:rPr>
+              <a:t>A Strategy Built Around You</a:t>
+            </a:r>
+          </a:p>
+          <a:p>
+            <a:pPr algn="l">
+              <a:lnSpc>
+                <a:spcPct val="122000"/>
+              </a:lnSpc>
+            </a:pPr>
+            <a:r>
+              <a:rPr sz="1500" b="0" i="0">
+                <a:solidFill>
+                  <a:srgbClr val="5A6478"/>
+                </a:solidFill>
+                <a:latin typeface="Alegreya Sans"/>
+              </a:rPr>
+              <a:t>No guesswork, no extremes — just a clear plan that fits your life.</a:t>
+            </a:r>
+          </a:p>
+        </p:txBody>
+      </p:sp>
+    </p:spTree>
+  </p:cSld>
+  <p:clrMapOvr>
+    <a:masterClrMapping/>
+  </p:clrMapOvr>
+</p:sld>
+</file>
+
+<file path=ppt/slides/slide24.xml><?xml version="1.0" encoding="utf-8"?>
+<p:sld xmlns:a="http://schemas.openxmlformats.org/drawingml/2006/main" xmlns:p="http://schemas.openxmlformats.org/presentationml/2006/main" xmlns:r="http://schemas.openxmlformats.org/officeDocument/2006/relationships">
+  <p:cSld>
+    <p:spTree>
+      <p:nvGrpSpPr>
+        <p:cNvPr id="1" name=""/>
+        <p:cNvGrpSpPr/>
+        <p:nvPr/>
+      </p:nvGrpSpPr>
+      <p:grpSpPr/>
+      <p:sp>
+        <p:nvSpPr>
+          <p:cNvPr id="2" name="Rectangle 1"/>
+          <p:cNvSpPr/>
+          <p:nvPr/>
+        </p:nvSpPr>
+        <p:spPr>
+          <a:xfrm>
+            <a:off x="0" y="0"/>
+            <a:ext cx="12191695" cy="6858000"/>
+          </a:xfrm>
+          <a:prstGeom prst="rect">
+            <a:avLst/>
+          </a:prstGeom>
+          <a:solidFill>
+            <a:srgbClr val="F9F7F4"/>
+          </a:solidFill>
+          <a:ln>
+            <a:noFill/>
+          </a:ln>
+          <a:effectLst/>
+        </p:spPr>
+        <p:style>
+          <a:lnRef idx="1">
+            <a:schemeClr val="accent1"/>
+          </a:lnRef>
+          <a:fillRef idx="3">
+            <a:schemeClr val="accent1"/>
+          </a:fillRef>
+          <a:effectRef idx="2">
+            <a:schemeClr val="accent1"/>
+          </a:effectRef>
+          <a:fontRef idx="minor">
+            <a:schemeClr val="lt1"/>
+          </a:fontRef>
+        </p:style>
+        <p:txBody>
+          <a:bodyPr rtlCol="0" anchor="ctr"/>
+          <a:lstStyle/>
+          <a:p>
+            <a:pPr algn="ctr"/>
+          </a:p>
+        </p:txBody>
+      </p:sp>
+      <p:sp>
+        <p:nvSpPr>
+          <p:cNvPr id="3" name="TextBox 2"/>
+          <p:cNvSpPr txBox="1"/>
+          <p:nvPr/>
+        </p:nvSpPr>
+        <p:spPr>
+          <a:xfrm>
+            <a:off x="822960" y="749808"/>
+            <a:ext cx="10515600" cy="457200"/>
+          </a:xfrm>
+          <a:prstGeom prst="rect">
+            <a:avLst/>
+          </a:prstGeom>
+          <a:noFill/>
+        </p:spPr>
+        <p:txBody>
+          <a:bodyPr wrap="square" lIns="0" rIns="0" tIns="0" bIns="0" anchor="t">
+            <a:spAutoFit/>
+          </a:bodyPr>
+          <a:lstStyle/>
+          <a:p>
+            <a:pPr algn="l">
+              <a:lnSpc>
+                <a:spcPct val="120000"/>
+              </a:lnSpc>
+            </a:pPr>
+            <a:r>
+              <a:rPr sz="1800" b="1" i="0" spc="240">
+                <a:solidFill>
+                  <a:srgbClr val="D97757"/>
+                </a:solidFill>
+                <a:latin typeface="Alegreya Sans"/>
+              </a:rPr>
+              <a:t>INVESTMENT VS REALITY</a:t>
+            </a:r>
+          </a:p>
+        </p:txBody>
+      </p:sp>
+      <p:sp>
+        <p:nvSpPr>
+          <p:cNvPr id="4" name="TextBox 3"/>
+          <p:cNvSpPr txBox="1"/>
+          <p:nvPr/>
+        </p:nvSpPr>
+        <p:spPr>
+          <a:xfrm>
+            <a:off x="822960" y="1325880"/>
+            <a:ext cx="10515600" cy="1828800"/>
+          </a:xfrm>
+          <a:prstGeom prst="rect">
+            <a:avLst/>
+          </a:prstGeom>
+          <a:noFill/>
+        </p:spPr>
+        <p:txBody>
+          <a:bodyPr wrap="square" lIns="0" rIns="0" tIns="0" bIns="0" anchor="t">
+            <a:spAutoFit/>
+          </a:bodyPr>
+          <a:lstStyle/>
+          <a:p>
+            <a:pPr algn="l">
+              <a:lnSpc>
+                <a:spcPct val="112000"/>
+              </a:lnSpc>
+            </a:pPr>
+            <a:r>
+              <a:rPr sz="3600" b="1" i="0">
+                <a:solidFill>
+                  <a:srgbClr val="0E2746"/>
+                </a:solidFill>
+                <a:latin typeface="Libre Baskerville"/>
+              </a:rPr>
+              <a:t>This level of support usually costs </a:t>
+            </a:r>
+            <a:r>
+              <a:rPr sz="3600" b="1" i="1">
+                <a:solidFill>
+                  <a:srgbClr val="D97757"/>
+                </a:solidFill>
+                <a:latin typeface="Libre Baskerville"/>
+              </a:rPr>
+              <a:t>thousands</a:t>
+            </a:r>
+            <a:r>
+              <a:rPr sz="3600" b="1" i="0">
+                <a:solidFill>
+                  <a:srgbClr val="0E2746"/>
+                </a:solidFill>
+                <a:latin typeface="Libre Baskerville"/>
+              </a:rPr>
+              <a:t>.</a:t>
+            </a:r>
+          </a:p>
+        </p:txBody>
+      </p:sp>
+      <p:sp>
+        <p:nvSpPr>
+          <p:cNvPr id="5" name="TextBox 4"/>
+          <p:cNvSpPr txBox="1"/>
+          <p:nvPr/>
+        </p:nvSpPr>
+        <p:spPr>
+          <a:xfrm>
+            <a:off x="822960" y="3108960"/>
+            <a:ext cx="10241280" cy="2743200"/>
+          </a:xfrm>
+          <a:prstGeom prst="rect">
+            <a:avLst/>
+          </a:prstGeom>
+          <a:noFill/>
+        </p:spPr>
+        <p:txBody>
+          <a:bodyPr wrap="square" lIns="0" rIns="0" tIns="0" bIns="0" anchor="t">
+            <a:spAutoFit/>
+          </a:bodyPr>
+          <a:lstStyle/>
+          <a:p>
+            <a:pPr algn="l">
+              <a:lnSpc>
+                <a:spcPct val="150000"/>
+              </a:lnSpc>
+              <a:spcAft>
+                <a:spcPts val="1000"/>
+              </a:spcAft>
+            </a:pPr>
+            <a:r>
+              <a:rPr sz="2100" b="0" i="0">
+                <a:solidFill>
+                  <a:srgbClr val="333333"/>
+                </a:solidFill>
+                <a:latin typeface="Alegreya Sans"/>
+              </a:rPr>
+              <a:t>Most degree-qualified Registered Associate Nutritionists charge £300–£700 for consultations and ongoing monthly support.</a:t>
+            </a:r>
+          </a:p>
+          <a:p>
+            <a:pPr algn="l">
+              <a:lnSpc>
+                <a:spcPct val="150000"/>
+              </a:lnSpc>
+              <a:spcAft>
+                <a:spcPts val="1000"/>
+              </a:spcAft>
+            </a:pPr>
+            <a:r>
+              <a:rPr sz="2100" b="0" i="0">
+                <a:solidFill>
+                  <a:srgbClr val="333333"/>
+                </a:solidFill>
+                <a:latin typeface="Alegreya Sans"/>
+              </a:rPr>
+              <a:t>True 1-2-1 coaching — daily support, weekly reviews, a personalised strategy — typically runs £2,000–£5,000+ (take a look around Harley Street).</a:t>
+            </a:r>
+          </a:p>
+          <a:p>
+            <a:pPr algn="l">
+              <a:lnSpc>
+                <a:spcPct val="140000"/>
+              </a:lnSpc>
+            </a:pPr>
+            <a:r>
+              <a:rPr sz="2100" b="0" i="1">
+                <a:solidFill>
+                  <a:srgbClr val="0E2746"/>
+                </a:solidFill>
+                <a:latin typeface="Libre Baskerville"/>
+              </a:rPr>
+              <a:t>For this round, I’ve made it far more accessible.</a:t>
+            </a:r>
+          </a:p>
+        </p:txBody>
+      </p:sp>
+    </p:spTree>
+  </p:cSld>
+  <p:clrMapOvr>
+    <a:masterClrMapping/>
+  </p:clrMapOvr>
+</p:sld>
+</file>
+
+<file path=ppt/slides/slide25.xml><?xml version="1.0" encoding="utf-8"?>
+<p:sld xmlns:a="http://schemas.openxmlformats.org/drawingml/2006/main" xmlns:p="http://schemas.openxmlformats.org/presentationml/2006/main" xmlns:r="http://schemas.openxmlformats.org/officeDocument/2006/relationships">
+  <p:cSld>
+    <p:spTree>
+      <p:nvGrpSpPr>
+        <p:cNvPr id="1" name=""/>
+        <p:cNvGrpSpPr/>
+        <p:nvPr/>
+      </p:nvGrpSpPr>
+      <p:grpSpPr/>
+      <p:sp>
+        <p:nvSpPr>
+          <p:cNvPr id="2" name="Rectangle 1"/>
+          <p:cNvSpPr/>
+          <p:nvPr/>
+        </p:nvSpPr>
+        <p:spPr>
+          <a:xfrm>
+            <a:off x="0" y="0"/>
+            <a:ext cx="12191695" cy="6858000"/>
+          </a:xfrm>
+          <a:prstGeom prst="rect">
+            <a:avLst/>
+          </a:prstGeom>
+          <a:solidFill>
+            <a:srgbClr val="F9F7F4"/>
+          </a:solidFill>
+          <a:ln>
+            <a:noFill/>
+          </a:ln>
+          <a:effectLst/>
+        </p:spPr>
+        <p:style>
+          <a:lnRef idx="1">
+            <a:schemeClr val="accent1"/>
+          </a:lnRef>
+          <a:fillRef idx="3">
+            <a:schemeClr val="accent1"/>
+          </a:fillRef>
+          <a:effectRef idx="2">
+            <a:schemeClr val="accent1"/>
+          </a:effectRef>
+          <a:fontRef idx="minor">
+            <a:schemeClr val="lt1"/>
+          </a:fontRef>
+        </p:style>
+        <p:txBody>
+          <a:bodyPr rtlCol="0" anchor="ctr"/>
+          <a:lstStyle/>
+          <a:p>
+            <a:pPr algn="ctr"/>
+          </a:p>
+        </p:txBody>
+      </p:sp>
+      <p:sp>
+        <p:nvSpPr>
+          <p:cNvPr id="3" name="TextBox 2"/>
+          <p:cNvSpPr txBox="1"/>
+          <p:nvPr/>
+        </p:nvSpPr>
+        <p:spPr>
+          <a:xfrm>
+            <a:off x="822960" y="566928"/>
+            <a:ext cx="10515600" cy="457200"/>
+          </a:xfrm>
+          <a:prstGeom prst="rect">
+            <a:avLst/>
+          </a:prstGeom>
+          <a:noFill/>
+        </p:spPr>
+        <p:txBody>
+          <a:bodyPr wrap="square" lIns="0" rIns="0" tIns="0" bIns="0" anchor="t">
+            <a:spAutoFit/>
+          </a:bodyPr>
+          <a:lstStyle/>
+          <a:p>
+            <a:pPr algn="ctr">
+              <a:lnSpc>
+                <a:spcPct val="120000"/>
+              </a:lnSpc>
+            </a:pPr>
+            <a:r>
+              <a:rPr sz="1800" b="1" i="0" spc="240">
+                <a:solidFill>
+                  <a:srgbClr val="D97757"/>
+                </a:solidFill>
+                <a:latin typeface="Alegreya Sans"/>
+              </a:rPr>
+              <a:t>CHOOSE YOUR VIP JOURNEY</a:t>
+            </a:r>
+          </a:p>
+        </p:txBody>
+      </p:sp>
+      <p:sp>
+        <p:nvSpPr>
+          <p:cNvPr id="4" name="TextBox 3"/>
+          <p:cNvSpPr txBox="1"/>
+          <p:nvPr/>
+        </p:nvSpPr>
+        <p:spPr>
+          <a:xfrm>
+            <a:off x="822960" y="1143000"/>
+            <a:ext cx="10515600" cy="731520"/>
+          </a:xfrm>
+          <a:prstGeom prst="rect">
+            <a:avLst/>
+          </a:prstGeom>
+          <a:noFill/>
+        </p:spPr>
+        <p:txBody>
+          <a:bodyPr wrap="square" lIns="0" rIns="0" tIns="0" bIns="0" anchor="t">
+            <a:spAutoFit/>
+          </a:bodyPr>
+          <a:lstStyle/>
+          <a:p>
+            <a:pPr algn="ctr">
+              <a:lnSpc>
+                <a:spcPct val="120000"/>
+              </a:lnSpc>
+            </a:pPr>
+            <a:r>
+              <a:rPr sz="3000" b="1" i="0">
+                <a:solidFill>
+                  <a:srgbClr val="0E2746"/>
+                </a:solidFill>
+                <a:latin typeface="Libre Baskerville"/>
+              </a:rPr>
+              <a:t>Personal 1-2-1 coaching, built around you.</a:t>
+            </a:r>
+          </a:p>
+        </p:txBody>
+      </p:sp>
+      <p:sp>
+        <p:nvSpPr>
+          <p:cNvPr id="5" name="Rounded Rectangle 4"/>
+          <p:cNvSpPr/>
+          <p:nvPr/>
+        </p:nvSpPr>
+        <p:spPr>
+          <a:xfrm>
+            <a:off x="975207" y="2286000"/>
+            <a:ext cx="4846320" cy="3246120"/>
+          </a:xfrm>
+          <a:prstGeom prst="roundRect">
+            <a:avLst>
+              <a:gd name="adj" fmla="val 5000"/>
+            </a:avLst>
+          </a:prstGeom>
+          <a:solidFill>
+            <a:srgbClr val="FFFFFF"/>
+          </a:solidFill>
+          <a:ln w="15875">
+            <a:solidFill>
+              <a:srgbClr val="E9DFD3"/>
+            </a:solidFill>
+          </a:ln>
+          <a:effectLst/>
+        </p:spPr>
+        <p:style>
+          <a:lnRef idx="1">
+            <a:schemeClr val="accent1"/>
+          </a:lnRef>
+          <a:fillRef idx="3">
+            <a:schemeClr val="accent1"/>
+          </a:fillRef>
+          <a:effectRef idx="2">
+            <a:schemeClr val="accent1"/>
+          </a:effectRef>
+          <a:fontRef idx="minor">
+            <a:schemeClr val="lt1"/>
+          </a:fontRef>
+        </p:style>
+        <p:txBody>
+          <a:bodyPr rtlCol="0" anchor="ctr"/>
+          <a:lstStyle/>
+          <a:p>
+            <a:pPr algn="ctr"/>
+          </a:p>
+        </p:txBody>
+      </p:sp>
+      <p:sp>
+        <p:nvSpPr>
+          <p:cNvPr id="6" name="TextBox 5"/>
+          <p:cNvSpPr txBox="1"/>
+          <p:nvPr/>
+        </p:nvSpPr>
+        <p:spPr>
+          <a:xfrm>
+            <a:off x="975207" y="2606040"/>
+            <a:ext cx="4846320" cy="457200"/>
+          </a:xfrm>
+          <a:prstGeom prst="rect">
+            <a:avLst/>
+          </a:prstGeom>
+          <a:noFill/>
+        </p:spPr>
+        <p:txBody>
+          <a:bodyPr wrap="square" lIns="0" rIns="0" tIns="0" bIns="0" anchor="t">
+            <a:spAutoFit/>
+          </a:bodyPr>
+          <a:lstStyle/>
+          <a:p>
+            <a:pPr algn="ctr">
+              <a:lnSpc>
+                <a:spcPct val="120000"/>
+              </a:lnSpc>
+            </a:pPr>
+            <a:r>
+              <a:rPr sz="1400" b="1" i="0" spc="200">
+                <a:solidFill>
+                  <a:srgbClr val="0E2746"/>
+                </a:solidFill>
+                <a:latin typeface="Alegreya Sans"/>
+              </a:rPr>
+              <a:t>VIP · 3 MONTHS</a:t>
+            </a:r>
+          </a:p>
+        </p:txBody>
+      </p:sp>
+      <p:sp>
+        <p:nvSpPr>
+          <p:cNvPr id="7" name="TextBox 6"/>
+          <p:cNvSpPr txBox="1"/>
+          <p:nvPr/>
+        </p:nvSpPr>
+        <p:spPr>
+          <a:xfrm>
+            <a:off x="975207" y="3108960"/>
+            <a:ext cx="4846320" cy="1097280"/>
+          </a:xfrm>
+          <a:prstGeom prst="rect">
+            <a:avLst/>
+          </a:prstGeom>
+          <a:noFill/>
+        </p:spPr>
+        <p:txBody>
+          <a:bodyPr wrap="square" lIns="0" rIns="0" tIns="0" bIns="0" anchor="t">
+            <a:spAutoFit/>
+          </a:bodyPr>
+          <a:lstStyle/>
+          <a:p>
+            <a:pPr algn="ctr">
+              <a:lnSpc>
+                <a:spcPct val="120000"/>
+              </a:lnSpc>
+            </a:pPr>
+            <a:r>
+              <a:rPr sz="6400" b="1" i="0">
+                <a:solidFill>
+                  <a:srgbClr val="D97757"/>
+                </a:solidFill>
+                <a:latin typeface="Libre Baskerville"/>
+              </a:rPr>
+              <a:t>£597</a:t>
+            </a:r>
+          </a:p>
+        </p:txBody>
+      </p:sp>
+      <p:sp>
+        <p:nvSpPr>
+          <p:cNvPr id="8" name="TextBox 7"/>
+          <p:cNvSpPr txBox="1"/>
+          <p:nvPr/>
+        </p:nvSpPr>
+        <p:spPr>
+          <a:xfrm>
+            <a:off x="1432407" y="4251960"/>
+            <a:ext cx="3931920" cy="640080"/>
+          </a:xfrm>
+          <a:prstGeom prst="rect">
+            <a:avLst/>
+          </a:prstGeom>
+          <a:noFill/>
+        </p:spPr>
+        <p:txBody>
+          <a:bodyPr wrap="square" lIns="0" rIns="0" tIns="0" bIns="0" anchor="t">
+            <a:spAutoFit/>
+          </a:bodyPr>
+          <a:lstStyle/>
+          <a:p>
+            <a:pPr algn="ctr">
+              <a:lnSpc>
+                <a:spcPct val="130000"/>
+              </a:lnSpc>
+            </a:pPr>
+            <a:r>
+              <a:rPr sz="1700" b="0" i="0">
+                <a:solidFill>
+                  <a:srgbClr val="333333"/>
+                </a:solidFill>
+                <a:latin typeface="Alegreya Sans"/>
+              </a:rPr>
+              <a:t>3 months of personalised 1-2-1 coaching</a:t>
+            </a:r>
+          </a:p>
+        </p:txBody>
+      </p:sp>
+      <p:sp>
+        <p:nvSpPr>
+          <p:cNvPr id="9" name="TextBox 8"/>
+          <p:cNvSpPr txBox="1"/>
+          <p:nvPr/>
+        </p:nvSpPr>
+        <p:spPr>
+          <a:xfrm>
+            <a:off x="1432407" y="4983480"/>
+            <a:ext cx="3931920" cy="457200"/>
+          </a:xfrm>
+          <a:prstGeom prst="rect">
+            <a:avLst/>
+          </a:prstGeom>
+          <a:noFill/>
+        </p:spPr>
+        <p:txBody>
+          <a:bodyPr wrap="square" lIns="0" rIns="0" tIns="0" bIns="0" anchor="t">
+            <a:spAutoFit/>
+          </a:bodyPr>
+          <a:lstStyle/>
+          <a:p>
+            <a:pPr algn="ctr">
+              <a:lnSpc>
+                <a:spcPct val="120000"/>
+              </a:lnSpc>
+            </a:pPr>
+            <a:r>
+              <a:rPr sz="1700" b="0" i="1">
+                <a:solidFill>
+                  <a:srgbClr val="0E2746"/>
+                </a:solidFill>
+                <a:latin typeface="Libre Baskerville"/>
+              </a:rPr>
+              <a:t>Monthly plans from £199</a:t>
+            </a:r>
+          </a:p>
+        </p:txBody>
+      </p:sp>
+      <p:sp>
+        <p:nvSpPr>
+          <p:cNvPr id="10" name="Rounded Rectangle 9"/>
+          <p:cNvSpPr/>
+          <p:nvPr/>
+        </p:nvSpPr>
+        <p:spPr>
+          <a:xfrm>
+            <a:off x="6370167" y="2286000"/>
+            <a:ext cx="4846320" cy="3246120"/>
+          </a:xfrm>
+          <a:prstGeom prst="roundRect">
+            <a:avLst>
+              <a:gd name="adj" fmla="val 5000"/>
+            </a:avLst>
+          </a:prstGeom>
+          <a:solidFill>
+            <a:srgbClr val="0E2746"/>
+          </a:solidFill>
+          <a:ln>
+            <a:noFill/>
+          </a:ln>
+          <a:effectLst/>
+        </p:spPr>
+        <p:style>
+          <a:lnRef idx="1">
+            <a:schemeClr val="accent1"/>
+          </a:lnRef>
+          <a:fillRef idx="3">
+            <a:schemeClr val="accent1"/>
+          </a:fillRef>
+          <a:effectRef idx="2">
+            <a:schemeClr val="accent1"/>
+          </a:effectRef>
+          <a:fontRef idx="minor">
+            <a:schemeClr val="lt1"/>
+          </a:fontRef>
+        </p:style>
+        <p:txBody>
+          <a:bodyPr rtlCol="0" anchor="ctr"/>
+          <a:lstStyle/>
+          <a:p>
+            <a:pPr algn="ctr"/>
+          </a:p>
+        </p:txBody>
+      </p:sp>
+      <p:sp>
+        <p:nvSpPr>
+          <p:cNvPr id="11" name="Rounded Rectangle 10"/>
+          <p:cNvSpPr/>
+          <p:nvPr/>
+        </p:nvSpPr>
+        <p:spPr>
+          <a:xfrm>
+            <a:off x="7787487" y="2029968"/>
+            <a:ext cx="2011680" cy="457200"/>
+          </a:xfrm>
+          <a:prstGeom prst="roundRect">
+            <a:avLst>
+              <a:gd name="adj" fmla="val 50000"/>
+            </a:avLst>
+          </a:prstGeom>
+          <a:solidFill>
+            <a:srgbClr val="D97757"/>
+          </a:solidFill>
+          <a:ln>
+            <a:noFill/>
+          </a:ln>
+          <a:effectLst/>
+        </p:spPr>
+        <p:style>
+          <a:lnRef idx="1">
+            <a:schemeClr val="accent1"/>
+          </a:lnRef>
+          <a:fillRef idx="3">
+            <a:schemeClr val="accent1"/>
+          </a:fillRef>
+          <a:effectRef idx="2">
+            <a:schemeClr val="accent1"/>
+          </a:effectRef>
+          <a:fontRef idx="minor">
+            <a:schemeClr val="lt1"/>
+          </a:fontRef>
+        </p:style>
+        <p:txBody>
+          <a:bodyPr rtlCol="0" anchor="ctr" lIns="164592" rIns="164592" tIns="36576" bIns="36576"/>
+          <a:lstStyle/>
+          <a:p>
+            <a:pPr algn="ctr"/>
+            <a:r>
+              <a:rPr sz="1200" b="1" spc="200">
+                <a:solidFill>
+                  <a:srgbClr val="FFFFFF"/>
+                </a:solidFill>
+                <a:latin typeface="Alegreya Sans"/>
+              </a:rPr>
+              <a:t>BEST VALUE</a:t>
+            </a:r>
+          </a:p>
+        </p:txBody>
+      </p:sp>
+      <p:sp>
+        <p:nvSpPr>
+          <p:cNvPr id="12" name="TextBox 11"/>
+          <p:cNvSpPr txBox="1"/>
+          <p:nvPr/>
+        </p:nvSpPr>
+        <p:spPr>
+          <a:xfrm>
+            <a:off x="6370167" y="2606040"/>
+            <a:ext cx="4846320" cy="457200"/>
+          </a:xfrm>
+          <a:prstGeom prst="rect">
+            <a:avLst/>
+          </a:prstGeom>
+          <a:noFill/>
+        </p:spPr>
+        <p:txBody>
+          <a:bodyPr wrap="square" lIns="0" rIns="0" tIns="0" bIns="0" anchor="t">
+            <a:spAutoFit/>
+          </a:bodyPr>
+          <a:lstStyle/>
+          <a:p>
+            <a:pPr algn="ctr">
+              <a:lnSpc>
+                <a:spcPct val="120000"/>
+              </a:lnSpc>
+            </a:pPr>
+            <a:r>
+              <a:rPr sz="1400" b="1" i="0" spc="200">
+                <a:solidFill>
+                  <a:srgbClr val="F4EBDC"/>
+                </a:solidFill>
+                <a:latin typeface="Alegreya Sans"/>
+              </a:rPr>
+              <a:t>VIP · 6 MONTHS</a:t>
+            </a:r>
+          </a:p>
+        </p:txBody>
+      </p:sp>
+      <p:sp>
+        <p:nvSpPr>
+          <p:cNvPr id="13" name="TextBox 12"/>
+          <p:cNvSpPr txBox="1"/>
+          <p:nvPr/>
+        </p:nvSpPr>
+        <p:spPr>
+          <a:xfrm>
+            <a:off x="6370167" y="3108960"/>
+            <a:ext cx="4846320" cy="1097280"/>
+          </a:xfrm>
+          <a:prstGeom prst="rect">
+            <a:avLst/>
+          </a:prstGeom>
+          <a:noFill/>
+        </p:spPr>
+        <p:txBody>
+          <a:bodyPr wrap="square" lIns="0" rIns="0" tIns="0" bIns="0" anchor="t">
+            <a:spAutoFit/>
+          </a:bodyPr>
+          <a:lstStyle/>
+          <a:p>
+            <a:pPr algn="ctr">
+              <a:lnSpc>
+                <a:spcPct val="120000"/>
+              </a:lnSpc>
+            </a:pPr>
+            <a:r>
+              <a:rPr sz="6400" b="1" i="0">
+                <a:solidFill>
+                  <a:srgbClr val="E5917A"/>
+                </a:solidFill>
+                <a:latin typeface="Libre Baskerville"/>
+              </a:rPr>
+              <a:t>£1197</a:t>
+            </a:r>
+          </a:p>
+        </p:txBody>
+      </p:sp>
+      <p:sp>
+        <p:nvSpPr>
+          <p:cNvPr id="14" name="TextBox 13"/>
+          <p:cNvSpPr txBox="1"/>
+          <p:nvPr/>
+        </p:nvSpPr>
+        <p:spPr>
+          <a:xfrm>
+            <a:off x="6827367" y="4251960"/>
+            <a:ext cx="3931920" cy="640080"/>
+          </a:xfrm>
+          <a:prstGeom prst="rect">
+            <a:avLst/>
+          </a:prstGeom>
+          <a:noFill/>
+        </p:spPr>
+        <p:txBody>
+          <a:bodyPr wrap="square" lIns="0" rIns="0" tIns="0" bIns="0" anchor="t">
+            <a:spAutoFit/>
+          </a:bodyPr>
+          <a:lstStyle/>
+          <a:p>
+            <a:pPr algn="ctr">
+              <a:lnSpc>
+                <a:spcPct val="130000"/>
+              </a:lnSpc>
+            </a:pPr>
+            <a:r>
+              <a:rPr sz="1700" b="0" i="0">
+                <a:solidFill>
+                  <a:srgbClr val="F4EBDC"/>
+                </a:solidFill>
+                <a:latin typeface="Alegreya Sans"/>
+              </a:rPr>
+              <a:t>The time to lose it AND keep it off for good</a:t>
+            </a:r>
+          </a:p>
+        </p:txBody>
+      </p:sp>
+      <p:sp>
+        <p:nvSpPr>
+          <p:cNvPr id="15" name="TextBox 14"/>
+          <p:cNvSpPr txBox="1"/>
+          <p:nvPr/>
+        </p:nvSpPr>
+        <p:spPr>
+          <a:xfrm>
+            <a:off x="6827367" y="4983480"/>
+            <a:ext cx="3931920" cy="457200"/>
+          </a:xfrm>
+          <a:prstGeom prst="rect">
+            <a:avLst/>
+          </a:prstGeom>
+          <a:noFill/>
+        </p:spPr>
+        <p:txBody>
+          <a:bodyPr wrap="square" lIns="0" rIns="0" tIns="0" bIns="0" anchor="t">
+            <a:spAutoFit/>
+          </a:bodyPr>
+          <a:lstStyle/>
+          <a:p>
+            <a:pPr algn="ctr">
+              <a:lnSpc>
+                <a:spcPct val="120000"/>
+              </a:lnSpc>
+            </a:pPr>
+            <a:r>
+              <a:rPr sz="1700" b="0" i="1">
+                <a:solidFill>
+                  <a:srgbClr val="FFFFFF"/>
+                </a:solidFill>
+                <a:latin typeface="Libre Baskerville"/>
+              </a:rPr>
+              <a:t>Most of my biggest transformations</a:t>
+            </a:r>
+          </a:p>
+        </p:txBody>
+      </p:sp>
+      <p:sp>
+        <p:nvSpPr>
+          <p:cNvPr id="16" name="TextBox 15"/>
+          <p:cNvSpPr txBox="1"/>
+          <p:nvPr/>
+        </p:nvSpPr>
+        <p:spPr>
+          <a:xfrm>
+            <a:off x="548640" y="5650992"/>
+            <a:ext cx="11091672" cy="1005840"/>
+          </a:xfrm>
+          <a:prstGeom prst="rect">
+            <a:avLst/>
+          </a:prstGeom>
+          <a:noFill/>
+        </p:spPr>
+        <p:txBody>
+          <a:bodyPr wrap="square" lIns="0" rIns="0" tIns="0" bIns="0" anchor="t">
+            <a:spAutoFit/>
+          </a:bodyPr>
+          <a:lstStyle/>
+          <a:p>
+            <a:pPr algn="ctr">
+              <a:lnSpc>
+                <a:spcPct val="125000"/>
+              </a:lnSpc>
+            </a:pPr>
+            <a:r>
+              <a:rPr sz="2400" b="1" i="0" spc="20">
+                <a:solidFill>
+                  <a:srgbClr val="0E2746"/>
+                </a:solidFill>
+                <a:latin typeface="Alegreya Sans"/>
+              </a:rPr>
+              <a:t>Pay with PayPal, Klarna or Clearpay  ·  Limited to 30 women  ·  Doors open [START DATE]</a:t>
+            </a:r>
+          </a:p>
+        </p:txBody>
+      </p:sp>
+    </p:spTree>
+  </p:cSld>
+  <p:clrMapOvr>
+    <a:masterClrMapping/>
+  </p:clrMapOvr>
+</p:sld>
+</file>
+
+<file path=ppt/slides/slide26.xml><?xml version="1.0" encoding="utf-8"?>
+<p:sld xmlns:a="http://schemas.openxmlformats.org/drawingml/2006/main" xmlns:p="http://schemas.openxmlformats.org/presentationml/2006/main" xmlns:r="http://schemas.openxmlformats.org/officeDocument/2006/relationships">
+  <p:cSld>
+    <p:spTree>
+      <p:nvGrpSpPr>
+        <p:cNvPr id="1" name=""/>
+        <p:cNvGrpSpPr/>
+        <p:nvPr/>
+      </p:nvGrpSpPr>
+      <p:grpSpPr/>
+      <p:sp>
+        <p:nvSpPr>
+          <p:cNvPr id="2" name="Rectangle 1"/>
+          <p:cNvSpPr/>
+          <p:nvPr/>
+        </p:nvSpPr>
+        <p:spPr>
+          <a:xfrm>
+            <a:off x="0" y="0"/>
+            <a:ext cx="12191695" cy="6858000"/>
+          </a:xfrm>
+          <a:prstGeom prst="rect">
+            <a:avLst/>
+          </a:prstGeom>
+          <a:solidFill>
+            <a:srgbClr val="F9F7F4"/>
+          </a:solidFill>
+          <a:ln>
+            <a:noFill/>
+          </a:ln>
+          <a:effectLst/>
+        </p:spPr>
+        <p:style>
+          <a:lnRef idx="1">
+            <a:schemeClr val="accent1"/>
+          </a:lnRef>
+          <a:fillRef idx="3">
+            <a:schemeClr val="accent1"/>
+          </a:fillRef>
+          <a:effectRef idx="2">
+            <a:schemeClr val="accent1"/>
+          </a:effectRef>
+          <a:fontRef idx="minor">
+            <a:schemeClr val="lt1"/>
+          </a:fontRef>
+        </p:style>
+        <p:txBody>
+          <a:bodyPr rtlCol="0" anchor="ctr"/>
+          <a:lstStyle/>
+          <a:p>
+            <a:pPr algn="ctr"/>
+          </a:p>
+        </p:txBody>
+      </p:sp>
+      <p:sp>
+        <p:nvSpPr>
+          <p:cNvPr id="3" name="TextBox 2"/>
+          <p:cNvSpPr txBox="1"/>
+          <p:nvPr/>
+        </p:nvSpPr>
+        <p:spPr>
+          <a:xfrm>
+            <a:off x="822960" y="749808"/>
+            <a:ext cx="10515600" cy="457200"/>
+          </a:xfrm>
+          <a:prstGeom prst="rect">
+            <a:avLst/>
+          </a:prstGeom>
+          <a:noFill/>
+        </p:spPr>
+        <p:txBody>
+          <a:bodyPr wrap="square" lIns="0" rIns="0" tIns="0" bIns="0" anchor="t">
+            <a:spAutoFit/>
+          </a:bodyPr>
+          <a:lstStyle/>
+          <a:p>
+            <a:pPr algn="l">
+              <a:lnSpc>
+                <a:spcPct val="120000"/>
+              </a:lnSpc>
+            </a:pPr>
+            <a:r>
+              <a:rPr sz="1800" b="1" i="0" spc="240">
+                <a:solidFill>
+                  <a:srgbClr val="D97757"/>
+                </a:solidFill>
+                <a:latin typeface="Alegreya Sans"/>
+              </a:rPr>
+              <a:t>IS THIS YOU?</a:t>
+            </a:r>
+          </a:p>
+        </p:txBody>
+      </p:sp>
+      <p:sp>
+        <p:nvSpPr>
+          <p:cNvPr id="4" name="TextBox 3"/>
+          <p:cNvSpPr txBox="1"/>
+          <p:nvPr/>
+        </p:nvSpPr>
+        <p:spPr>
+          <a:xfrm>
+            <a:off x="822960" y="1298448"/>
+            <a:ext cx="10515600" cy="1828800"/>
+          </a:xfrm>
+          <a:prstGeom prst="rect">
+            <a:avLst/>
+          </a:prstGeom>
+          <a:noFill/>
+        </p:spPr>
+        <p:txBody>
+          <a:bodyPr wrap="square" lIns="0" rIns="0" tIns="0" bIns="0" anchor="t">
+            <a:spAutoFit/>
+          </a:bodyPr>
+          <a:lstStyle/>
+          <a:p>
+            <a:pPr algn="l">
+              <a:lnSpc>
+                <a:spcPct val="112000"/>
+              </a:lnSpc>
+            </a:pPr>
+            <a:r>
+              <a:rPr sz="3800" b="1" i="0">
+                <a:solidFill>
+                  <a:srgbClr val="0E2746"/>
+                </a:solidFill>
+                <a:latin typeface="Libre Baskerville"/>
+              </a:rPr>
+              <a:t>Who VIP is </a:t>
+            </a:r>
+            <a:r>
+              <a:rPr sz="3800" b="1" i="1">
+                <a:solidFill>
+                  <a:srgbClr val="D97757"/>
+                </a:solidFill>
+                <a:latin typeface="Libre Baskerville"/>
+              </a:rPr>
+              <a:t>for</a:t>
+            </a:r>
+          </a:p>
+        </p:txBody>
+      </p:sp>
+      <p:sp>
+        <p:nvSpPr>
+          <p:cNvPr id="5" name="Oval 4"/>
+          <p:cNvSpPr/>
+          <p:nvPr/>
+        </p:nvSpPr>
+        <p:spPr>
+          <a:xfrm>
+            <a:off x="868680" y="2577465"/>
+            <a:ext cx="118872" cy="118872"/>
+          </a:xfrm>
+          <a:prstGeom prst="ellipse">
+            <a:avLst/>
+          </a:prstGeom>
+          <a:solidFill>
+            <a:srgbClr val="D97757"/>
+          </a:solidFill>
+          <a:ln>
+            <a:noFill/>
+          </a:ln>
+          <a:effectLst/>
+        </p:spPr>
+        <p:style>
+          <a:lnRef idx="1">
+            <a:schemeClr val="accent1"/>
+          </a:lnRef>
+          <a:fillRef idx="3">
+            <a:schemeClr val="accent1"/>
+          </a:fillRef>
+          <a:effectRef idx="2">
+            <a:schemeClr val="accent1"/>
+          </a:effectRef>
+          <a:fontRef idx="minor">
+            <a:schemeClr val="lt1"/>
+          </a:fontRef>
+        </p:style>
+        <p:txBody>
+          <a:bodyPr rtlCol="0" anchor="ctr"/>
+          <a:lstStyle/>
+          <a:p>
+            <a:pPr algn="ctr"/>
+          </a:p>
+        </p:txBody>
+      </p:sp>
+      <p:sp>
+        <p:nvSpPr>
+          <p:cNvPr id="6" name="TextBox 5"/>
+          <p:cNvSpPr txBox="1"/>
+          <p:nvPr/>
+        </p:nvSpPr>
+        <p:spPr>
+          <a:xfrm>
+            <a:off x="1179576" y="2468880"/>
+            <a:ext cx="10332720" cy="548640"/>
+          </a:xfrm>
+          <a:prstGeom prst="rect">
+            <a:avLst/>
+          </a:prstGeom>
+          <a:noFill/>
+        </p:spPr>
+        <p:txBody>
+          <a:bodyPr wrap="square" lIns="0" rIns="0" tIns="0" bIns="0" anchor="t">
+            <a:spAutoFit/>
+          </a:bodyPr>
+          <a:lstStyle/>
+          <a:p>
+            <a:pPr algn="l">
+              <a:lnSpc>
+                <a:spcPct val="120000"/>
+              </a:lnSpc>
+            </a:pPr>
+            <a:r>
+              <a:rPr sz="1900" b="0" i="0">
+                <a:solidFill>
+                  <a:srgbClr val="333333"/>
+                </a:solidFill>
+                <a:latin typeface="Alegreya Sans"/>
+              </a:rPr>
+              <a:t>You know you need support and accountability to stay consistent</a:t>
+            </a:r>
+          </a:p>
+        </p:txBody>
+      </p:sp>
+      <p:sp>
+        <p:nvSpPr>
+          <p:cNvPr id="7" name="Oval 6"/>
+          <p:cNvSpPr/>
+          <p:nvPr/>
+        </p:nvSpPr>
+        <p:spPr>
+          <a:xfrm>
+            <a:off x="868680" y="3180969"/>
+            <a:ext cx="118872" cy="118872"/>
+          </a:xfrm>
+          <a:prstGeom prst="ellipse">
+            <a:avLst/>
+          </a:prstGeom>
+          <a:solidFill>
+            <a:srgbClr val="D97757"/>
+          </a:solidFill>
+          <a:ln>
+            <a:noFill/>
+          </a:ln>
+          <a:effectLst/>
+        </p:spPr>
+        <p:style>
+          <a:lnRef idx="1">
+            <a:schemeClr val="accent1"/>
+          </a:lnRef>
+          <a:fillRef idx="3">
+            <a:schemeClr val="accent1"/>
+          </a:fillRef>
+          <a:effectRef idx="2">
+            <a:schemeClr val="accent1"/>
+          </a:effectRef>
+          <a:fontRef idx="minor">
+            <a:schemeClr val="lt1"/>
+          </a:fontRef>
+        </p:style>
+        <p:txBody>
+          <a:bodyPr rtlCol="0" anchor="ctr"/>
+          <a:lstStyle/>
+          <a:p>
+            <a:pPr algn="ctr"/>
+          </a:p>
+        </p:txBody>
+      </p:sp>
+      <p:sp>
+        <p:nvSpPr>
+          <p:cNvPr id="8" name="TextBox 7"/>
+          <p:cNvSpPr txBox="1"/>
+          <p:nvPr/>
+        </p:nvSpPr>
+        <p:spPr>
+          <a:xfrm>
+            <a:off x="1179576" y="3072384"/>
+            <a:ext cx="10332720" cy="548640"/>
+          </a:xfrm>
+          <a:prstGeom prst="rect">
+            <a:avLst/>
+          </a:prstGeom>
+          <a:noFill/>
+        </p:spPr>
+        <p:txBody>
+          <a:bodyPr wrap="square" lIns="0" rIns="0" tIns="0" bIns="0" anchor="t">
+            <a:spAutoFit/>
+          </a:bodyPr>
+          <a:lstStyle/>
+          <a:p>
+            <a:pPr algn="l">
+              <a:lnSpc>
+                <a:spcPct val="120000"/>
+              </a:lnSpc>
+            </a:pPr>
+            <a:r>
+              <a:rPr sz="1900" b="0" i="0">
+                <a:solidFill>
+                  <a:srgbClr val="333333"/>
+                </a:solidFill>
+                <a:latin typeface="Alegreya Sans"/>
+              </a:rPr>
+              <a:t>You’re tired of figuring it all out alone</a:t>
+            </a:r>
+          </a:p>
+        </p:txBody>
+      </p:sp>
+      <p:sp>
+        <p:nvSpPr>
+          <p:cNvPr id="9" name="Oval 8"/>
+          <p:cNvSpPr/>
+          <p:nvPr/>
+        </p:nvSpPr>
+        <p:spPr>
+          <a:xfrm>
+            <a:off x="868680" y="3784473"/>
+            <a:ext cx="118872" cy="118872"/>
+          </a:xfrm>
+          <a:prstGeom prst="ellipse">
+            <a:avLst/>
+          </a:prstGeom>
+          <a:solidFill>
+            <a:srgbClr val="D97757"/>
+          </a:solidFill>
+          <a:ln>
+            <a:noFill/>
+          </a:ln>
+          <a:effectLst/>
+        </p:spPr>
+        <p:style>
+          <a:lnRef idx="1">
+            <a:schemeClr val="accent1"/>
+          </a:lnRef>
+          <a:fillRef idx="3">
+            <a:schemeClr val="accent1"/>
+          </a:fillRef>
+          <a:effectRef idx="2">
+            <a:schemeClr val="accent1"/>
+          </a:effectRef>
+          <a:fontRef idx="minor">
+            <a:schemeClr val="lt1"/>
+          </a:fontRef>
+        </p:style>
+        <p:txBody>
+          <a:bodyPr rtlCol="0" anchor="ctr"/>
+          <a:lstStyle/>
+          <a:p>
+            <a:pPr algn="ctr"/>
+          </a:p>
+        </p:txBody>
+      </p:sp>
+      <p:sp>
+        <p:nvSpPr>
+          <p:cNvPr id="10" name="TextBox 9"/>
+          <p:cNvSpPr txBox="1"/>
+          <p:nvPr/>
+        </p:nvSpPr>
+        <p:spPr>
+          <a:xfrm>
+            <a:off x="1179576" y="3675888"/>
+            <a:ext cx="10332720" cy="548640"/>
+          </a:xfrm>
+          <a:prstGeom prst="rect">
+            <a:avLst/>
+          </a:prstGeom>
+          <a:noFill/>
+        </p:spPr>
+        <p:txBody>
+          <a:bodyPr wrap="square" lIns="0" rIns="0" tIns="0" bIns="0" anchor="t">
+            <a:spAutoFit/>
+          </a:bodyPr>
+          <a:lstStyle/>
+          <a:p>
+            <a:pPr algn="l">
+              <a:lnSpc>
+                <a:spcPct val="120000"/>
+              </a:lnSpc>
+            </a:pPr>
+            <a:r>
+              <a:rPr sz="1900" b="0" i="0">
+                <a:solidFill>
+                  <a:srgbClr val="333333"/>
+                </a:solidFill>
+                <a:latin typeface="Alegreya Sans"/>
+              </a:rPr>
+              <a:t>You take action when someone’s holding you to it</a:t>
+            </a:r>
+          </a:p>
+        </p:txBody>
+      </p:sp>
+      <p:sp>
+        <p:nvSpPr>
+          <p:cNvPr id="11" name="Oval 10"/>
+          <p:cNvSpPr/>
+          <p:nvPr/>
+        </p:nvSpPr>
+        <p:spPr>
+          <a:xfrm>
+            <a:off x="868680" y="4387977"/>
+            <a:ext cx="118872" cy="118872"/>
+          </a:xfrm>
+          <a:prstGeom prst="ellipse">
+            <a:avLst/>
+          </a:prstGeom>
+          <a:solidFill>
+            <a:srgbClr val="D97757"/>
+          </a:solidFill>
+          <a:ln>
+            <a:noFill/>
+          </a:ln>
+          <a:effectLst/>
+        </p:spPr>
+        <p:style>
+          <a:lnRef idx="1">
+            <a:schemeClr val="accent1"/>
+          </a:lnRef>
+          <a:fillRef idx="3">
+            <a:schemeClr val="accent1"/>
+          </a:fillRef>
+          <a:effectRef idx="2">
+            <a:schemeClr val="accent1"/>
+          </a:effectRef>
+          <a:fontRef idx="minor">
+            <a:schemeClr val="lt1"/>
+          </a:fontRef>
+        </p:style>
+        <p:txBody>
+          <a:bodyPr rtlCol="0" anchor="ctr"/>
+          <a:lstStyle/>
+          <a:p>
+            <a:pPr algn="ctr"/>
+          </a:p>
+        </p:txBody>
+      </p:sp>
+      <p:sp>
+        <p:nvSpPr>
+          <p:cNvPr id="12" name="TextBox 11"/>
+          <p:cNvSpPr txBox="1"/>
+          <p:nvPr/>
+        </p:nvSpPr>
+        <p:spPr>
+          <a:xfrm>
+            <a:off x="1179576" y="4279392"/>
+            <a:ext cx="10332720" cy="548640"/>
+          </a:xfrm>
+          <a:prstGeom prst="rect">
+            <a:avLst/>
+          </a:prstGeom>
+          <a:noFill/>
+        </p:spPr>
+        <p:txBody>
+          <a:bodyPr wrap="square" lIns="0" rIns="0" tIns="0" bIns="0" anchor="t">
+            <a:spAutoFit/>
+          </a:bodyPr>
+          <a:lstStyle/>
+          <a:p>
+            <a:pPr algn="l">
+              <a:lnSpc>
+                <a:spcPct val="120000"/>
+              </a:lnSpc>
+            </a:pPr>
+            <a:r>
+              <a:rPr sz="1900" b="0" i="0">
+                <a:solidFill>
+                  <a:srgbClr val="333333"/>
+                </a:solidFill>
+                <a:latin typeface="Alegreya Sans"/>
+              </a:rPr>
+              <a:t>You want a coach for when motivation dips or life gets busy</a:t>
+            </a:r>
+          </a:p>
+        </p:txBody>
+      </p:sp>
+      <p:sp>
+        <p:nvSpPr>
+          <p:cNvPr id="13" name="Oval 12"/>
+          <p:cNvSpPr/>
+          <p:nvPr/>
+        </p:nvSpPr>
+        <p:spPr>
+          <a:xfrm>
+            <a:off x="868680" y="4991481"/>
+            <a:ext cx="118872" cy="118872"/>
+          </a:xfrm>
+          <a:prstGeom prst="ellipse">
+            <a:avLst/>
+          </a:prstGeom>
+          <a:solidFill>
+            <a:srgbClr val="D97757"/>
+          </a:solidFill>
+          <a:ln>
+            <a:noFill/>
+          </a:ln>
+          <a:effectLst/>
+        </p:spPr>
+        <p:style>
+          <a:lnRef idx="1">
+            <a:schemeClr val="accent1"/>
+          </a:lnRef>
+          <a:fillRef idx="3">
+            <a:schemeClr val="accent1"/>
+          </a:fillRef>
+          <a:effectRef idx="2">
+            <a:schemeClr val="accent1"/>
+          </a:effectRef>
+          <a:fontRef idx="minor">
+            <a:schemeClr val="lt1"/>
+          </a:fontRef>
+        </p:style>
+        <p:txBody>
+          <a:bodyPr rtlCol="0" anchor="ctr"/>
+          <a:lstStyle/>
+          <a:p>
+            <a:pPr algn="ctr"/>
+          </a:p>
+        </p:txBody>
+      </p:sp>
+      <p:sp>
+        <p:nvSpPr>
+          <p:cNvPr id="14" name="TextBox 13"/>
+          <p:cNvSpPr txBox="1"/>
+          <p:nvPr/>
+        </p:nvSpPr>
+        <p:spPr>
+          <a:xfrm>
+            <a:off x="1179576" y="4882896"/>
+            <a:ext cx="10332720" cy="548640"/>
+          </a:xfrm>
+          <a:prstGeom prst="rect">
+            <a:avLst/>
+          </a:prstGeom>
+          <a:noFill/>
+        </p:spPr>
+        <p:txBody>
+          <a:bodyPr wrap="square" lIns="0" rIns="0" tIns="0" bIns="0" anchor="t">
+            <a:spAutoFit/>
+          </a:bodyPr>
+          <a:lstStyle/>
+          <a:p>
+            <a:pPr algn="l">
+              <a:lnSpc>
+                <a:spcPct val="120000"/>
+              </a:lnSpc>
+            </a:pPr>
+            <a:r>
+              <a:rPr sz="1900" b="0" i="0">
+                <a:solidFill>
+                  <a:srgbClr val="333333"/>
+                </a:solidFill>
+                <a:latin typeface="Alegreya Sans"/>
+              </a:rPr>
+              <a:t>You’re ready to follow through on your goals</a:t>
+            </a:r>
+          </a:p>
+        </p:txBody>
+      </p:sp>
+      <p:sp>
+        <p:nvSpPr>
+          <p:cNvPr id="15" name="Oval 14"/>
+          <p:cNvSpPr/>
+          <p:nvPr/>
+        </p:nvSpPr>
+        <p:spPr>
+          <a:xfrm>
+            <a:off x="868680" y="5594985"/>
+            <a:ext cx="118872" cy="118872"/>
+          </a:xfrm>
+          <a:prstGeom prst="ellipse">
+            <a:avLst/>
+          </a:prstGeom>
+          <a:solidFill>
+            <a:srgbClr val="D97757"/>
+          </a:solidFill>
+          <a:ln>
+            <a:noFill/>
+          </a:ln>
+          <a:effectLst/>
+        </p:spPr>
+        <p:style>
+          <a:lnRef idx="1">
+            <a:schemeClr val="accent1"/>
+          </a:lnRef>
+          <a:fillRef idx="3">
+            <a:schemeClr val="accent1"/>
+          </a:fillRef>
+          <a:effectRef idx="2">
+            <a:schemeClr val="accent1"/>
+          </a:effectRef>
+          <a:fontRef idx="minor">
+            <a:schemeClr val="lt1"/>
+          </a:fontRef>
+        </p:style>
+        <p:txBody>
+          <a:bodyPr rtlCol="0" anchor="ctr"/>
+          <a:lstStyle/>
+          <a:p>
+            <a:pPr algn="ctr"/>
+          </a:p>
+        </p:txBody>
+      </p:sp>
+      <p:sp>
+        <p:nvSpPr>
+          <p:cNvPr id="16" name="TextBox 15"/>
+          <p:cNvSpPr txBox="1"/>
+          <p:nvPr/>
+        </p:nvSpPr>
+        <p:spPr>
+          <a:xfrm>
+            <a:off x="1179576" y="5486400"/>
+            <a:ext cx="10332720" cy="548640"/>
+          </a:xfrm>
+          <a:prstGeom prst="rect">
+            <a:avLst/>
+          </a:prstGeom>
+          <a:noFill/>
+        </p:spPr>
+        <p:txBody>
+          <a:bodyPr wrap="square" lIns="0" rIns="0" tIns="0" bIns="0" anchor="t">
+            <a:spAutoFit/>
+          </a:bodyPr>
+          <a:lstStyle/>
+          <a:p>
+            <a:pPr algn="l">
+              <a:lnSpc>
+                <a:spcPct val="120000"/>
+              </a:lnSpc>
+            </a:pPr>
+            <a:r>
+              <a:rPr sz="1900" b="0" i="0">
+                <a:solidFill>
+                  <a:srgbClr val="333333"/>
+                </a:solidFill>
+                <a:latin typeface="Alegreya Sans"/>
+              </a:rPr>
+              <a:t>You want to lose up to 3 stone — sustainably, for good</a:t>
+            </a:r>
+          </a:p>
+        </p:txBody>
+      </p:sp>
+    </p:spTree>
+  </p:cSld>
+  <p:clrMapOvr>
+    <a:masterClrMapping/>
+  </p:clrMapOvr>
+</p:sld>
+</file>
+
+<file path=ppt/slides/slide27.xml><?xml version="1.0" encoding="utf-8"?>
+<p:sld xmlns:a="http://schemas.openxmlformats.org/drawingml/2006/main" xmlns:p="http://schemas.openxmlformats.org/presentationml/2006/main" xmlns:r="http://schemas.openxmlformats.org/officeDocument/2006/relationships">
+  <p:cSld>
+    <p:spTree>
+      <p:nvGrpSpPr>
+        <p:cNvPr id="1" name=""/>
+        <p:cNvGrpSpPr/>
+        <p:nvPr/>
+      </p:nvGrpSpPr>
+      <p:grpSpPr/>
+      <p:sp>
+        <p:nvSpPr>
+          <p:cNvPr id="2" name="Rectangle 1"/>
+          <p:cNvSpPr/>
+          <p:nvPr/>
+        </p:nvSpPr>
+        <p:spPr>
+          <a:xfrm>
+            <a:off x="0" y="0"/>
+            <a:ext cx="12191695" cy="6858000"/>
+          </a:xfrm>
+          <a:prstGeom prst="rect">
+            <a:avLst/>
+          </a:prstGeom>
+          <a:solidFill>
+            <a:srgbClr val="F9F7F4"/>
+          </a:solidFill>
+          <a:ln>
+            <a:noFill/>
+          </a:ln>
+          <a:effectLst/>
+        </p:spPr>
+        <p:style>
+          <a:lnRef idx="1">
+            <a:schemeClr val="accent1"/>
+          </a:lnRef>
+          <a:fillRef idx="3">
+            <a:schemeClr val="accent1"/>
+          </a:fillRef>
+          <a:effectRef idx="2">
+            <a:schemeClr val="accent1"/>
+          </a:effectRef>
+          <a:fontRef idx="minor">
+            <a:schemeClr val="lt1"/>
+          </a:fontRef>
+        </p:style>
+        <p:txBody>
+          <a:bodyPr rtlCol="0" anchor="ctr"/>
+          <a:lstStyle/>
+          <a:p>
+            <a:pPr algn="ctr"/>
+          </a:p>
+        </p:txBody>
+      </p:sp>
+      <p:sp>
+        <p:nvSpPr>
+          <p:cNvPr id="3" name="TextBox 2"/>
+          <p:cNvSpPr txBox="1"/>
+          <p:nvPr/>
+        </p:nvSpPr>
+        <p:spPr>
+          <a:xfrm>
+            <a:off x="822960" y="749808"/>
+            <a:ext cx="10515600" cy="457200"/>
+          </a:xfrm>
+          <a:prstGeom prst="rect">
+            <a:avLst/>
+          </a:prstGeom>
+          <a:noFill/>
+        </p:spPr>
+        <p:txBody>
+          <a:bodyPr wrap="square" lIns="0" rIns="0" tIns="0" bIns="0" anchor="t">
+            <a:spAutoFit/>
+          </a:bodyPr>
+          <a:lstStyle/>
+          <a:p>
+            <a:pPr algn="l">
+              <a:lnSpc>
+                <a:spcPct val="120000"/>
+              </a:lnSpc>
+            </a:pPr>
+            <a:r>
+              <a:rPr sz="1800" b="1" i="0" spc="240">
+                <a:solidFill>
+                  <a:srgbClr val="D97757"/>
+                </a:solidFill>
+                <a:latin typeface="Alegreya Sans"/>
+              </a:rPr>
+              <a:t>HONESTY FIRST</a:t>
+            </a:r>
+          </a:p>
+        </p:txBody>
+      </p:sp>
+      <p:sp>
+        <p:nvSpPr>
+          <p:cNvPr id="4" name="TextBox 3"/>
+          <p:cNvSpPr txBox="1"/>
+          <p:nvPr/>
+        </p:nvSpPr>
+        <p:spPr>
+          <a:xfrm>
+            <a:off x="822960" y="1298448"/>
+            <a:ext cx="10515600" cy="1828800"/>
+          </a:xfrm>
+          <a:prstGeom prst="rect">
+            <a:avLst/>
+          </a:prstGeom>
+          <a:noFill/>
+        </p:spPr>
+        <p:txBody>
+          <a:bodyPr wrap="square" lIns="0" rIns="0" tIns="0" bIns="0" anchor="t">
+            <a:spAutoFit/>
+          </a:bodyPr>
+          <a:lstStyle/>
+          <a:p>
+            <a:pPr algn="l">
+              <a:lnSpc>
+                <a:spcPct val="112000"/>
+              </a:lnSpc>
+            </a:pPr>
+            <a:r>
+              <a:rPr sz="3800" b="1" i="0">
+                <a:solidFill>
+                  <a:srgbClr val="0E2746"/>
+                </a:solidFill>
+                <a:latin typeface="Libre Baskerville"/>
+              </a:rPr>
+              <a:t>Who VIP is </a:t>
+            </a:r>
+            <a:r>
+              <a:rPr sz="3800" b="1" i="1">
+                <a:solidFill>
+                  <a:srgbClr val="D97757"/>
+                </a:solidFill>
+                <a:latin typeface="Libre Baskerville"/>
+              </a:rPr>
+              <a:t>not</a:t>
+            </a:r>
+            <a:r>
+              <a:rPr sz="3800" b="1" i="0">
+                <a:solidFill>
+                  <a:srgbClr val="0E2746"/>
+                </a:solidFill>
+                <a:latin typeface="Libre Baskerville"/>
+              </a:rPr>
+              <a:t> for</a:t>
+            </a:r>
+          </a:p>
+        </p:txBody>
+      </p:sp>
+      <p:sp>
+        <p:nvSpPr>
+          <p:cNvPr id="5" name="Oval 4"/>
+          <p:cNvSpPr/>
+          <p:nvPr/>
+        </p:nvSpPr>
+        <p:spPr>
+          <a:xfrm>
+            <a:off x="868680" y="2577465"/>
+            <a:ext cx="118872" cy="118872"/>
+          </a:xfrm>
+          <a:prstGeom prst="ellipse">
+            <a:avLst/>
+          </a:prstGeom>
+          <a:solidFill>
+            <a:srgbClr val="E9DFD3"/>
+          </a:solidFill>
+          <a:ln>
+            <a:noFill/>
+          </a:ln>
+          <a:effectLst/>
+        </p:spPr>
+        <p:style>
+          <a:lnRef idx="1">
+            <a:schemeClr val="accent1"/>
+          </a:lnRef>
+          <a:fillRef idx="3">
+            <a:schemeClr val="accent1"/>
+          </a:fillRef>
+          <a:effectRef idx="2">
+            <a:schemeClr val="accent1"/>
+          </a:effectRef>
+          <a:fontRef idx="minor">
+            <a:schemeClr val="lt1"/>
+          </a:fontRef>
+        </p:style>
+        <p:txBody>
+          <a:bodyPr rtlCol="0" anchor="ctr"/>
+          <a:lstStyle/>
+          <a:p>
+            <a:pPr algn="ctr"/>
+          </a:p>
+        </p:txBody>
+      </p:sp>
+      <p:sp>
+        <p:nvSpPr>
+          <p:cNvPr id="6" name="TextBox 5"/>
+          <p:cNvSpPr txBox="1"/>
+          <p:nvPr/>
+        </p:nvSpPr>
+        <p:spPr>
+          <a:xfrm>
+            <a:off x="1179576" y="2468880"/>
+            <a:ext cx="10332720" cy="548640"/>
+          </a:xfrm>
+          <a:prstGeom prst="rect">
+            <a:avLst/>
+          </a:prstGeom>
+          <a:noFill/>
+        </p:spPr>
+        <p:txBody>
+          <a:bodyPr wrap="square" lIns="0" rIns="0" tIns="0" bIns="0" anchor="t">
+            <a:spAutoFit/>
+          </a:bodyPr>
+          <a:lstStyle/>
+          <a:p>
+            <a:pPr algn="l">
+              <a:lnSpc>
+                <a:spcPct val="120000"/>
+              </a:lnSpc>
+            </a:pPr>
+            <a:r>
+              <a:rPr sz="1900" b="0" i="0">
+                <a:solidFill>
+                  <a:srgbClr val="5A6478"/>
+                </a:solidFill>
+                <a:latin typeface="Alegreya Sans"/>
+              </a:rPr>
+              <a:t>You’re looking for a quick fix or crash diet</a:t>
+            </a:r>
+          </a:p>
+        </p:txBody>
+      </p:sp>
+      <p:sp>
+        <p:nvSpPr>
+          <p:cNvPr id="7" name="Oval 6"/>
+          <p:cNvSpPr/>
+          <p:nvPr/>
+        </p:nvSpPr>
+        <p:spPr>
+          <a:xfrm>
+            <a:off x="868680" y="3180969"/>
+            <a:ext cx="118872" cy="118872"/>
+          </a:xfrm>
+          <a:prstGeom prst="ellipse">
+            <a:avLst/>
+          </a:prstGeom>
+          <a:solidFill>
+            <a:srgbClr val="E9DFD3"/>
+          </a:solidFill>
+          <a:ln>
+            <a:noFill/>
+          </a:ln>
+          <a:effectLst/>
+        </p:spPr>
+        <p:style>
+          <a:lnRef idx="1">
+            <a:schemeClr val="accent1"/>
+          </a:lnRef>
+          <a:fillRef idx="3">
+            <a:schemeClr val="accent1"/>
+          </a:fillRef>
+          <a:effectRef idx="2">
+            <a:schemeClr val="accent1"/>
+          </a:effectRef>
+          <a:fontRef idx="minor">
+            <a:schemeClr val="lt1"/>
+          </a:fontRef>
+        </p:style>
+        <p:txBody>
+          <a:bodyPr rtlCol="0" anchor="ctr"/>
+          <a:lstStyle/>
+          <a:p>
+            <a:pPr algn="ctr"/>
+          </a:p>
+        </p:txBody>
+      </p:sp>
+      <p:sp>
+        <p:nvSpPr>
+          <p:cNvPr id="8" name="TextBox 7"/>
+          <p:cNvSpPr txBox="1"/>
+          <p:nvPr/>
+        </p:nvSpPr>
+        <p:spPr>
+          <a:xfrm>
+            <a:off x="1179576" y="3072384"/>
+            <a:ext cx="10332720" cy="548640"/>
+          </a:xfrm>
+          <a:prstGeom prst="rect">
+            <a:avLst/>
+          </a:prstGeom>
+          <a:noFill/>
+        </p:spPr>
+        <p:txBody>
+          <a:bodyPr wrap="square" lIns="0" rIns="0" tIns="0" bIns="0" anchor="t">
+            <a:spAutoFit/>
+          </a:bodyPr>
+          <a:lstStyle/>
+          <a:p>
+            <a:pPr algn="l">
+              <a:lnSpc>
+                <a:spcPct val="120000"/>
+              </a:lnSpc>
+            </a:pPr>
+            <a:r>
+              <a:rPr sz="1900" b="0" i="0">
+                <a:solidFill>
+                  <a:srgbClr val="5A6478"/>
+                </a:solidFill>
+                <a:latin typeface="Alegreya Sans"/>
+              </a:rPr>
+              <a:t>You’re not ready to take action or follow through</a:t>
+            </a:r>
+          </a:p>
+        </p:txBody>
+      </p:sp>
+      <p:sp>
+        <p:nvSpPr>
+          <p:cNvPr id="9" name="Oval 8"/>
+          <p:cNvSpPr/>
+          <p:nvPr/>
+        </p:nvSpPr>
+        <p:spPr>
+          <a:xfrm>
+            <a:off x="868680" y="3784473"/>
+            <a:ext cx="118872" cy="118872"/>
+          </a:xfrm>
+          <a:prstGeom prst="ellipse">
+            <a:avLst/>
+          </a:prstGeom>
+          <a:solidFill>
+            <a:srgbClr val="E9DFD3"/>
+          </a:solidFill>
+          <a:ln>
+            <a:noFill/>
+          </a:ln>
+          <a:effectLst/>
+        </p:spPr>
+        <p:style>
+          <a:lnRef idx="1">
+            <a:schemeClr val="accent1"/>
+          </a:lnRef>
+          <a:fillRef idx="3">
+            <a:schemeClr val="accent1"/>
+          </a:fillRef>
+          <a:effectRef idx="2">
+            <a:schemeClr val="accent1"/>
+          </a:effectRef>
+          <a:fontRef idx="minor">
+            <a:schemeClr val="lt1"/>
+          </a:fontRef>
+        </p:style>
+        <p:txBody>
+          <a:bodyPr rtlCol="0" anchor="ctr"/>
+          <a:lstStyle/>
+          <a:p>
+            <a:pPr algn="ctr"/>
+          </a:p>
+        </p:txBody>
+      </p:sp>
+      <p:sp>
+        <p:nvSpPr>
+          <p:cNvPr id="10" name="TextBox 9"/>
+          <p:cNvSpPr txBox="1"/>
+          <p:nvPr/>
+        </p:nvSpPr>
+        <p:spPr>
+          <a:xfrm>
+            <a:off x="1179576" y="3675888"/>
+            <a:ext cx="10332720" cy="548640"/>
+          </a:xfrm>
+          <a:prstGeom prst="rect">
+            <a:avLst/>
+          </a:prstGeom>
+          <a:noFill/>
+        </p:spPr>
+        <p:txBody>
+          <a:bodyPr wrap="square" lIns="0" rIns="0" tIns="0" bIns="0" anchor="t">
+            <a:spAutoFit/>
+          </a:bodyPr>
+          <a:lstStyle/>
+          <a:p>
+            <a:pPr algn="l">
+              <a:lnSpc>
+                <a:spcPct val="120000"/>
+              </a:lnSpc>
+            </a:pPr>
+            <a:r>
+              <a:rPr sz="1900" b="0" i="0">
+                <a:solidFill>
+                  <a:srgbClr val="5A6478"/>
+                </a:solidFill>
+                <a:latin typeface="Alegreya Sans"/>
+              </a:rPr>
+              <a:t>You want results without changing any habits</a:t>
+            </a:r>
+          </a:p>
+        </p:txBody>
+      </p:sp>
+      <p:sp>
+        <p:nvSpPr>
+          <p:cNvPr id="11" name="Oval 10"/>
+          <p:cNvSpPr/>
+          <p:nvPr/>
+        </p:nvSpPr>
+        <p:spPr>
+          <a:xfrm>
+            <a:off x="868680" y="4387977"/>
+            <a:ext cx="118872" cy="118872"/>
+          </a:xfrm>
+          <a:prstGeom prst="ellipse">
+            <a:avLst/>
+          </a:prstGeom>
+          <a:solidFill>
+            <a:srgbClr val="E9DFD3"/>
+          </a:solidFill>
+          <a:ln>
+            <a:noFill/>
+          </a:ln>
+          <a:effectLst/>
+        </p:spPr>
+        <p:style>
+          <a:lnRef idx="1">
+            <a:schemeClr val="accent1"/>
+          </a:lnRef>
+          <a:fillRef idx="3">
+            <a:schemeClr val="accent1"/>
+          </a:fillRef>
+          <a:effectRef idx="2">
+            <a:schemeClr val="accent1"/>
+          </a:effectRef>
+          <a:fontRef idx="minor">
+            <a:schemeClr val="lt1"/>
+          </a:fontRef>
+        </p:style>
+        <p:txBody>
+          <a:bodyPr rtlCol="0" anchor="ctr"/>
+          <a:lstStyle/>
+          <a:p>
+            <a:pPr algn="ctr"/>
+          </a:p>
+        </p:txBody>
+      </p:sp>
+      <p:sp>
+        <p:nvSpPr>
+          <p:cNvPr id="12" name="TextBox 11"/>
+          <p:cNvSpPr txBox="1"/>
+          <p:nvPr/>
+        </p:nvSpPr>
+        <p:spPr>
+          <a:xfrm>
+            <a:off x="1179576" y="4279392"/>
+            <a:ext cx="10332720" cy="548640"/>
+          </a:xfrm>
+          <a:prstGeom prst="rect">
+            <a:avLst/>
+          </a:prstGeom>
+          <a:noFill/>
+        </p:spPr>
+        <p:txBody>
+          <a:bodyPr wrap="square" lIns="0" rIns="0" tIns="0" bIns="0" anchor="t">
+            <a:spAutoFit/>
+          </a:bodyPr>
+          <a:lstStyle/>
+          <a:p>
+            <a:pPr algn="l">
+              <a:lnSpc>
+                <a:spcPct val="120000"/>
+              </a:lnSpc>
+            </a:pPr>
+            <a:r>
+              <a:rPr sz="1900" b="0" i="0">
+                <a:solidFill>
+                  <a:srgbClr val="5A6478"/>
+                </a:solidFill>
+                <a:latin typeface="Alegreya Sans"/>
+              </a:rPr>
+              <a:t>You’d rather do everything alone, without guidance</a:t>
+            </a:r>
+          </a:p>
+        </p:txBody>
+      </p:sp>
+      <p:sp>
+        <p:nvSpPr>
+          <p:cNvPr id="13" name="Oval 12"/>
+          <p:cNvSpPr/>
+          <p:nvPr/>
+        </p:nvSpPr>
+        <p:spPr>
+          <a:xfrm>
+            <a:off x="868680" y="4991481"/>
+            <a:ext cx="118872" cy="118872"/>
+          </a:xfrm>
+          <a:prstGeom prst="ellipse">
+            <a:avLst/>
+          </a:prstGeom>
+          <a:solidFill>
+            <a:srgbClr val="E9DFD3"/>
+          </a:solidFill>
+          <a:ln>
+            <a:noFill/>
+          </a:ln>
+          <a:effectLst/>
+        </p:spPr>
+        <p:style>
+          <a:lnRef idx="1">
+            <a:schemeClr val="accent1"/>
+          </a:lnRef>
+          <a:fillRef idx="3">
+            <a:schemeClr val="accent1"/>
+          </a:fillRef>
+          <a:effectRef idx="2">
+            <a:schemeClr val="accent1"/>
+          </a:effectRef>
+          <a:fontRef idx="minor">
+            <a:schemeClr val="lt1"/>
+          </a:fontRef>
+        </p:style>
+        <p:txBody>
+          <a:bodyPr rtlCol="0" anchor="ctr"/>
+          <a:lstStyle/>
+          <a:p>
+            <a:pPr algn="ctr"/>
+          </a:p>
+        </p:txBody>
+      </p:sp>
+      <p:sp>
+        <p:nvSpPr>
+          <p:cNvPr id="14" name="TextBox 13"/>
+          <p:cNvSpPr txBox="1"/>
+          <p:nvPr/>
+        </p:nvSpPr>
+        <p:spPr>
+          <a:xfrm>
+            <a:off x="1179576" y="4882896"/>
+            <a:ext cx="10332720" cy="548640"/>
+          </a:xfrm>
+          <a:prstGeom prst="rect">
+            <a:avLst/>
+          </a:prstGeom>
+          <a:noFill/>
+        </p:spPr>
+        <p:txBody>
+          <a:bodyPr wrap="square" lIns="0" rIns="0" tIns="0" bIns="0" anchor="t">
+            <a:spAutoFit/>
+          </a:bodyPr>
+          <a:lstStyle/>
+          <a:p>
+            <a:pPr algn="l">
+              <a:lnSpc>
+                <a:spcPct val="120000"/>
+              </a:lnSpc>
+            </a:pPr>
+            <a:r>
+              <a:rPr sz="1900" b="0" i="0">
+                <a:solidFill>
+                  <a:srgbClr val="5A6478"/>
+                </a:solidFill>
+                <a:latin typeface="Alegreya Sans"/>
+              </a:rPr>
+              <a:t>You’re not open to a sustainable approach to nutrition</a:t>
+            </a:r>
+          </a:p>
+        </p:txBody>
+      </p:sp>
+      <p:sp>
+        <p:nvSpPr>
+          <p:cNvPr id="15" name="Oval 14"/>
+          <p:cNvSpPr/>
+          <p:nvPr/>
+        </p:nvSpPr>
+        <p:spPr>
+          <a:xfrm>
+            <a:off x="868680" y="5594985"/>
+            <a:ext cx="118872" cy="118872"/>
+          </a:xfrm>
+          <a:prstGeom prst="ellipse">
+            <a:avLst/>
+          </a:prstGeom>
+          <a:solidFill>
+            <a:srgbClr val="E9DFD3"/>
+          </a:solidFill>
+          <a:ln>
+            <a:noFill/>
+          </a:ln>
+          <a:effectLst/>
+        </p:spPr>
+        <p:style>
+          <a:lnRef idx="1">
+            <a:schemeClr val="accent1"/>
+          </a:lnRef>
+          <a:fillRef idx="3">
+            <a:schemeClr val="accent1"/>
+          </a:fillRef>
+          <a:effectRef idx="2">
+            <a:schemeClr val="accent1"/>
+          </a:effectRef>
+          <a:fontRef idx="minor">
+            <a:schemeClr val="lt1"/>
+          </a:fontRef>
+        </p:style>
+        <p:txBody>
+          <a:bodyPr rtlCol="0" anchor="ctr"/>
+          <a:lstStyle/>
+          <a:p>
+            <a:pPr algn="ctr"/>
+          </a:p>
+        </p:txBody>
+      </p:sp>
+      <p:sp>
+        <p:nvSpPr>
+          <p:cNvPr id="16" name="TextBox 15"/>
+          <p:cNvSpPr txBox="1"/>
+          <p:nvPr/>
+        </p:nvSpPr>
+        <p:spPr>
+          <a:xfrm>
+            <a:off x="1179576" y="5486400"/>
+            <a:ext cx="10332720" cy="548640"/>
+          </a:xfrm>
+          <a:prstGeom prst="rect">
+            <a:avLst/>
+          </a:prstGeom>
+          <a:noFill/>
+        </p:spPr>
+        <p:txBody>
+          <a:bodyPr wrap="square" lIns="0" rIns="0" tIns="0" bIns="0" anchor="t">
+            <a:spAutoFit/>
+          </a:bodyPr>
+          <a:lstStyle/>
+          <a:p>
+            <a:pPr algn="l">
+              <a:lnSpc>
+                <a:spcPct val="120000"/>
+              </a:lnSpc>
+            </a:pPr>
+            <a:r>
+              <a:rPr sz="1900" b="0" i="0">
+                <a:solidFill>
+                  <a:srgbClr val="5A6478"/>
+                </a:solidFill>
+                <a:latin typeface="Alegreya Sans"/>
+              </a:rPr>
+              <a:t>You’re not ready to commit right now</a:t>
+            </a:r>
+          </a:p>
+        </p:txBody>
+      </p:sp>
+    </p:spTree>
+  </p:cSld>
+  <p:clrMapOvr>
+    <a:masterClrMapping/>
+  </p:clrMapOvr>
+</p:sld>
+</file>
+
+<file path=ppt/slides/slide28.xml><?xml version="1.0" encoding="utf-8"?>
+<p:sld xmlns:a="http://schemas.openxmlformats.org/drawingml/2006/main" xmlns:p="http://schemas.openxmlformats.org/presentationml/2006/main" xmlns:r="http://schemas.openxmlformats.org/officeDocument/2006/relationships">
+  <p:cSld>
+    <p:spTree>
+      <p:nvGrpSpPr>
+        <p:cNvPr id="1" name=""/>
+        <p:cNvGrpSpPr/>
+        <p:nvPr/>
+      </p:nvGrpSpPr>
+      <p:grpSpPr/>
+      <p:sp>
+        <p:nvSpPr>
+          <p:cNvPr id="2" name="Rectangle 1"/>
+          <p:cNvSpPr/>
+          <p:nvPr/>
+        </p:nvSpPr>
+        <p:spPr>
+          <a:xfrm>
+            <a:off x="0" y="0"/>
+            <a:ext cx="12191695" cy="6858000"/>
+          </a:xfrm>
+          <a:prstGeom prst="rect">
+            <a:avLst/>
+          </a:prstGeom>
+          <a:solidFill>
+            <a:srgbClr val="0E2746"/>
+          </a:solidFill>
+          <a:ln>
+            <a:noFill/>
+          </a:ln>
+          <a:effectLst/>
+        </p:spPr>
+        <p:style>
+          <a:lnRef idx="1">
+            <a:schemeClr val="accent1"/>
+          </a:lnRef>
+          <a:fillRef idx="3">
+            <a:schemeClr val="accent1"/>
+          </a:fillRef>
+          <a:effectRef idx="2">
+            <a:schemeClr val="accent1"/>
+          </a:effectRef>
+          <a:fontRef idx="minor">
+            <a:schemeClr val="lt1"/>
+          </a:fontRef>
+        </p:style>
+        <p:txBody>
+          <a:bodyPr rtlCol="0" anchor="ctr"/>
+          <a:lstStyle/>
+          <a:p>
+            <a:pPr algn="ctr"/>
+          </a:p>
+        </p:txBody>
+      </p:sp>
+      <p:sp>
+        <p:nvSpPr>
+          <p:cNvPr id="3" name="Rounded Rectangle 2"/>
+          <p:cNvSpPr/>
+          <p:nvPr/>
+        </p:nvSpPr>
+        <p:spPr>
+          <a:xfrm>
+            <a:off x="4727448" y="1188720"/>
+            <a:ext cx="2743200" cy="457200"/>
+          </a:xfrm>
+          <a:prstGeom prst="roundRect">
+            <a:avLst>
+              <a:gd name="adj" fmla="val 50000"/>
+            </a:avLst>
+          </a:prstGeom>
+          <a:solidFill>
+            <a:srgbClr val="D97757"/>
+          </a:solidFill>
+          <a:ln>
+            <a:noFill/>
+          </a:ln>
+          <a:effectLst/>
+        </p:spPr>
+        <p:style>
+          <a:lnRef idx="1">
+            <a:schemeClr val="accent1"/>
+          </a:lnRef>
+          <a:fillRef idx="3">
+            <a:schemeClr val="accent1"/>
+          </a:fillRef>
+          <a:effectRef idx="2">
+            <a:schemeClr val="accent1"/>
+          </a:effectRef>
+          <a:fontRef idx="minor">
+            <a:schemeClr val="lt1"/>
+          </a:fontRef>
+        </p:style>
+        <p:txBody>
+          <a:bodyPr rtlCol="0" anchor="ctr" lIns="164592" rIns="164592" tIns="36576" bIns="36576"/>
+          <a:lstStyle/>
+          <a:p>
+            <a:pPr algn="ctr"/>
+            <a:r>
+              <a:rPr sz="1800" b="1" spc="200">
+                <a:solidFill>
+                  <a:srgbClr val="FFFFFF"/>
+                </a:solidFill>
+                <a:latin typeface="Alegreya Sans"/>
+              </a:rPr>
+              <a:t>TWO OPTIONS</a:t>
+            </a:r>
+          </a:p>
+        </p:txBody>
+      </p:sp>
+      <p:sp>
+        <p:nvSpPr>
+          <p:cNvPr id="4" name="TextBox 3"/>
+          <p:cNvSpPr txBox="1"/>
+          <p:nvPr/>
+        </p:nvSpPr>
+        <p:spPr>
+          <a:xfrm>
+            <a:off x="1005840" y="2194560"/>
+            <a:ext cx="10149840" cy="3657600"/>
+          </a:xfrm>
+          <a:prstGeom prst="rect">
+            <a:avLst/>
+          </a:prstGeom>
+          <a:noFill/>
+        </p:spPr>
+        <p:txBody>
+          <a:bodyPr wrap="square" lIns="0" rIns="0" tIns="0" bIns="0" anchor="t">
+            <a:spAutoFit/>
+          </a:bodyPr>
+          <a:lstStyle/>
+          <a:p>
+            <a:pPr algn="ctr">
+              <a:lnSpc>
+                <a:spcPct val="118000"/>
+              </a:lnSpc>
+              <a:spcAft>
+                <a:spcPts val="2400"/>
+              </a:spcAft>
+            </a:pPr>
+            <a:r>
+              <a:rPr sz="3800" b="1" i="0">
+                <a:solidFill>
+                  <a:srgbClr val="FFFFFF"/>
+                </a:solidFill>
+                <a:latin typeface="Libre Baskerville"/>
+              </a:rPr>
+              <a:t>You can keep doing this </a:t>
+            </a:r>
+            <a:r>
+              <a:rPr sz="3800" b="1" i="1">
+                <a:solidFill>
+                  <a:srgbClr val="E5917A"/>
+                </a:solidFill>
+                <a:latin typeface="Libre Baskerville"/>
+              </a:rPr>
+              <a:t>alone</a:t>
+            </a:r>
+            <a:r>
+              <a:rPr sz="3800" b="1" i="0">
+                <a:solidFill>
+                  <a:srgbClr val="FFFFFF"/>
+                </a:solidFill>
+                <a:latin typeface="Libre Baskerville"/>
+              </a:rPr>
+              <a:t> — and be in the same place in 3–6 months.</a:t>
+            </a:r>
+          </a:p>
+          <a:p>
+            <a:pPr algn="ctr">
+              <a:lnSpc>
+                <a:spcPct val="118000"/>
+              </a:lnSpc>
+            </a:pPr>
+            <a:r>
+              <a:rPr sz="3800" b="1" i="0">
+                <a:solidFill>
+                  <a:srgbClr val="FFFFFF"/>
+                </a:solidFill>
+                <a:latin typeface="Libre Baskerville"/>
+              </a:rPr>
+              <a:t>Or get the support, structure and accountability to </a:t>
+            </a:r>
+            <a:r>
+              <a:rPr sz="3800" b="1" i="1">
+                <a:solidFill>
+                  <a:srgbClr val="E5917A"/>
+                </a:solidFill>
+                <a:latin typeface="Libre Baskerville"/>
+              </a:rPr>
+              <a:t>finally follow through</a:t>
+            </a:r>
+            <a:r>
+              <a:rPr sz="3800" b="1" i="0">
+                <a:solidFill>
+                  <a:srgbClr val="FFFFFF"/>
+                </a:solidFill>
+                <a:latin typeface="Libre Baskerville"/>
+              </a:rPr>
+              <a:t>.</a:t>
+            </a:r>
+          </a:p>
+        </p:txBody>
+      </p:sp>
+    </p:spTree>
+  </p:cSld>
+  <p:clrMapOvr>
+    <a:masterClrMapping/>
+  </p:clrMapOvr>
+</p:sld>
+</file>
+
+<file path=ppt/slides/slide29.xml><?xml version="1.0" encoding="utf-8"?>
+<p:sld xmlns:a="http://schemas.openxmlformats.org/drawingml/2006/main" xmlns:p="http://schemas.openxmlformats.org/presentationml/2006/main" xmlns:r="http://schemas.openxmlformats.org/officeDocument/2006/relationships">
+  <p:cSld>
+    <p:spTree>
+      <p:nvGrpSpPr>
+        <p:cNvPr id="1" name=""/>
+        <p:cNvGrpSpPr/>
+        <p:nvPr/>
+      </p:nvGrpSpPr>
+      <p:grpSpPr/>
+      <p:sp>
+        <p:nvSpPr>
+          <p:cNvPr id="2" name="Rectangle 1"/>
+          <p:cNvSpPr/>
+          <p:nvPr/>
+        </p:nvSpPr>
+        <p:spPr>
+          <a:xfrm>
+            <a:off x="0" y="0"/>
+            <a:ext cx="12191695" cy="6858000"/>
+          </a:xfrm>
+          <a:prstGeom prst="rect">
+            <a:avLst/>
+          </a:prstGeom>
+          <a:solidFill>
+            <a:srgbClr val="0E2746"/>
+          </a:solidFill>
+          <a:ln>
+            <a:noFill/>
+          </a:ln>
+          <a:effectLst/>
+        </p:spPr>
+        <p:style>
+          <a:lnRef idx="1">
+            <a:schemeClr val="accent1"/>
+          </a:lnRef>
+          <a:fillRef idx="3">
+            <a:schemeClr val="accent1"/>
+          </a:fillRef>
+          <a:effectRef idx="2">
+            <a:schemeClr val="accent1"/>
+          </a:effectRef>
+          <a:fontRef idx="minor">
+            <a:schemeClr val="lt1"/>
+          </a:fontRef>
+        </p:style>
+        <p:txBody>
+          <a:bodyPr rtlCol="0" anchor="ctr"/>
+          <a:lstStyle/>
+          <a:p>
+            <a:pPr algn="ctr"/>
+          </a:p>
+        </p:txBody>
+      </p:sp>
+      <p:sp>
+        <p:nvSpPr>
           <p:cNvPr id="3" name="Rounded Rectangle 2"/>
           <p:cNvSpPr/>
           <p:nvPr/>
@@ -10785,16 +12223,73 @@
       </p:sp>
       <p:sp>
         <p:nvSpPr>
-          <p:cNvPr id="4" name="Rectangle 3"/>
+          <p:cNvPr id="4" name="TextBox 3"/>
+          <p:cNvSpPr txBox="1"/>
+          <p:nvPr/>
+        </p:nvSpPr>
+        <p:spPr>
+          <a:xfrm>
+            <a:off x="822960" y="1325880"/>
+            <a:ext cx="10515600" cy="1828800"/>
+          </a:xfrm>
+          <a:prstGeom prst="rect">
+            <a:avLst/>
+          </a:prstGeom>
+          <a:noFill/>
+        </p:spPr>
+        <p:txBody>
+          <a:bodyPr wrap="square" lIns="0" rIns="0" tIns="0" bIns="0" anchor="t">
+            <a:spAutoFit/>
+          </a:bodyPr>
+          <a:lstStyle/>
+          <a:p>
+            <a:pPr algn="l">
+              <a:lnSpc>
+                <a:spcPct val="112000"/>
+              </a:lnSpc>
+            </a:pPr>
+            <a:r>
+              <a:rPr sz="4200" b="1" i="0">
+                <a:solidFill>
+                  <a:srgbClr val="0E2746"/>
+                </a:solidFill>
+                <a:latin typeface="Libre Baskerville"/>
+              </a:rPr>
+              <a:t>Lose the weight — and </a:t>
+            </a:r>
+            <a:r>
+              <a:rPr sz="4200" b="1" i="1">
+                <a:solidFill>
+                  <a:srgbClr val="D97757"/>
+                </a:solidFill>
+                <a:latin typeface="Libre Baskerville"/>
+              </a:rPr>
+              <a:t>feel like you again</a:t>
+            </a:r>
+            <a:r>
+              <a:rPr sz="4200" b="1" i="0">
+                <a:solidFill>
+                  <a:srgbClr val="0E2746"/>
+                </a:solidFill>
+                <a:latin typeface="Libre Baskerville"/>
+              </a:rPr>
+              <a:t>.</a:t>
+            </a:r>
+          </a:p>
+        </p:txBody>
+      </p:sp>
+      <p:sp>
+        <p:nvSpPr>
+          <p:cNvPr id="5" name="Oval 4"/>
           <p:cNvSpPr/>
           <p:nvPr/>
         </p:nvSpPr>
         <p:spPr>
           <a:xfrm>
-            <a:off x="822960" y="1207008"/>
-            <a:ext cx="1463040" cy="50292"/>
-          </a:xfrm>
-          <a:prstGeom prst="rect">
+            <a:off x="868680" y="3314700"/>
+            <a:ext cx="118872" cy="118872"/>
+          </a:xfrm>
+          <a:prstGeom prst="ellipse">
             <a:avLst/>
           </a:prstGeom>
           <a:solidFill>
@@ -10829,14 +12324,14 @@
       </p:sp>
       <p:sp>
         <p:nvSpPr>
-          <p:cNvPr id="5" name="TextBox 4"/>
+          <p:cNvPr id="6" name="TextBox 5"/>
           <p:cNvSpPr txBox="1"/>
           <p:nvPr/>
         </p:nvSpPr>
         <p:spPr>
           <a:xfrm>
-            <a:off x="822960" y="1325880"/>
-            <a:ext cx="10515600" cy="1828800"/>
+            <a:off x="1179576" y="3200400"/>
+            <a:ext cx="5120640" cy="548640"/>
           </a:xfrm>
           <a:prstGeom prst="rect">
             <a:avLst/>
@@ -10851,48 +12346,30 @@
           <a:p>
             <a:pPr algn="l">
               <a:lnSpc>
-                <a:spcPct val="112000"/>
-              </a:lnSpc>
-            </a:pPr>
-            <a:r>
-              <a:rPr sz="4200" b="1" i="0">
+                <a:spcPct val="120000"/>
+              </a:lnSpc>
+            </a:pPr>
+            <a:r>
+              <a:rPr sz="2000" b="0" i="0">
                 <a:solidFill>
                   <a:srgbClr val="0E2746"/>
                 </a:solidFill>
                 <a:latin typeface="Libre Baskerville"/>
               </a:rPr>
-              <a:t>Lose the weight — and </a:t>
-            </a:r>
-            <a:r>
-              <a:rPr sz="4200" b="1" i="1">
-                <a:solidFill>
-                  <a:srgbClr val="D97757"/>
-                </a:solidFill>
-                <a:latin typeface="Libre Baskerville"/>
-              </a:rPr>
-              <a:t>feel like you again</a:t>
-            </a:r>
-            <a:r>
-              <a:rPr sz="4200" b="1" i="0">
-                <a:solidFill>
-                  <a:srgbClr val="0E2746"/>
-                </a:solidFill>
-                <a:latin typeface="Libre Baskerville"/>
-              </a:rPr>
-              <a:t>.</a:t>
-            </a:r>
-          </a:p>
-        </p:txBody>
-      </p:sp>
-      <p:sp>
-        <p:nvSpPr>
-          <p:cNvPr id="6" name="Oval 5"/>
+              <a:t>Lose up to 1–3 stone</a:t>
+            </a:r>
+          </a:p>
+        </p:txBody>
+      </p:sp>
+      <p:sp>
+        <p:nvSpPr>
+          <p:cNvPr id="7" name="Oval 6"/>
           <p:cNvSpPr/>
           <p:nvPr/>
         </p:nvSpPr>
         <p:spPr>
           <a:xfrm>
-            <a:off x="868680" y="3314700"/>
+            <a:off x="6263640" y="3314700"/>
             <a:ext cx="118872" cy="118872"/>
           </a:xfrm>
           <a:prstGeom prst="ellipse">
@@ -10930,13 +12407,13 @@
       </p:sp>
       <p:sp>
         <p:nvSpPr>
-          <p:cNvPr id="7" name="TextBox 6"/>
+          <p:cNvPr id="8" name="TextBox 7"/>
           <p:cNvSpPr txBox="1"/>
           <p:nvPr/>
         </p:nvSpPr>
         <p:spPr>
           <a:xfrm>
-            <a:off x="1179576" y="3200400"/>
+            <a:off x="6574536" y="3200400"/>
             <a:ext cx="5120640" cy="548640"/>
           </a:xfrm>
           <a:prstGeom prst="rect">
@@ -10962,20 +12439,20 @@
                 </a:solidFill>
                 <a:latin typeface="Libre Baskerville"/>
               </a:rPr>
-              <a:t>Lose up to 1–3 stone</a:t>
-            </a:r>
-          </a:p>
-        </p:txBody>
-      </p:sp>
-      <p:sp>
-        <p:nvSpPr>
-          <p:cNvPr id="8" name="Oval 7"/>
+              <a:t>Build real, lasting confidence</a:t>
+            </a:r>
+          </a:p>
+        </p:txBody>
+      </p:sp>
+      <p:sp>
+        <p:nvSpPr>
+          <p:cNvPr id="9" name="Oval 8"/>
           <p:cNvSpPr/>
           <p:nvPr/>
         </p:nvSpPr>
         <p:spPr>
           <a:xfrm>
-            <a:off x="6263640" y="3314700"/>
+            <a:off x="868680" y="4027932"/>
             <a:ext cx="118872" cy="118872"/>
           </a:xfrm>
           <a:prstGeom prst="ellipse">
@@ -11013,13 +12490,13 @@
       </p:sp>
       <p:sp>
         <p:nvSpPr>
-          <p:cNvPr id="9" name="TextBox 8"/>
+          <p:cNvPr id="10" name="TextBox 9"/>
           <p:cNvSpPr txBox="1"/>
           <p:nvPr/>
         </p:nvSpPr>
         <p:spPr>
           <a:xfrm>
-            <a:off x="6574536" y="3200400"/>
+            <a:off x="1179576" y="3913632"/>
             <a:ext cx="5120640" cy="548640"/>
           </a:xfrm>
           <a:prstGeom prst="rect">
@@ -11045,20 +12522,20 @@
                 </a:solidFill>
                 <a:latin typeface="Libre Baskerville"/>
               </a:rPr>
-              <a:t>Build real, lasting confidence</a:t>
-            </a:r>
-          </a:p>
-        </p:txBody>
-      </p:sp>
-      <p:sp>
-        <p:nvSpPr>
-          <p:cNvPr id="10" name="Oval 9"/>
+              <a:t>Calm your sugar cravings</a:t>
+            </a:r>
+          </a:p>
+        </p:txBody>
+      </p:sp>
+      <p:sp>
+        <p:nvSpPr>
+          <p:cNvPr id="11" name="Oval 10"/>
           <p:cNvSpPr/>
           <p:nvPr/>
         </p:nvSpPr>
         <p:spPr>
           <a:xfrm>
-            <a:off x="868680" y="4027932"/>
+            <a:off x="6263640" y="4027932"/>
             <a:ext cx="118872" cy="118872"/>
           </a:xfrm>
           <a:prstGeom prst="ellipse">
@@ -11096,13 +12573,13 @@
       </p:sp>
       <p:sp>
         <p:nvSpPr>
-          <p:cNvPr id="11" name="TextBox 10"/>
+          <p:cNvPr id="12" name="TextBox 11"/>
           <p:cNvSpPr txBox="1"/>
           <p:nvPr/>
         </p:nvSpPr>
         <p:spPr>
           <a:xfrm>
-            <a:off x="1179576" y="3913632"/>
+            <a:off x="6574536" y="3913632"/>
             <a:ext cx="5120640" cy="548640"/>
           </a:xfrm>
           <a:prstGeom prst="rect">
@@ -11128,20 +12605,20 @@
                 </a:solidFill>
                 <a:latin typeface="Libre Baskerville"/>
               </a:rPr>
-              <a:t>Calm your sugar cravings</a:t>
-            </a:r>
-          </a:p>
-        </p:txBody>
-      </p:sp>
-      <p:sp>
-        <p:nvSpPr>
-          <p:cNvPr id="12" name="Oval 11"/>
+              <a:t>Skyrocket your energy</a:t>
+            </a:r>
+          </a:p>
+        </p:txBody>
+      </p:sp>
+      <p:sp>
+        <p:nvSpPr>
+          <p:cNvPr id="13" name="Oval 12"/>
           <p:cNvSpPr/>
           <p:nvPr/>
         </p:nvSpPr>
         <p:spPr>
           <a:xfrm>
-            <a:off x="6263640" y="4027932"/>
+            <a:off x="868680" y="4741164"/>
             <a:ext cx="118872" cy="118872"/>
           </a:xfrm>
           <a:prstGeom prst="ellipse">
@@ -11179,13 +12656,13 @@
       </p:sp>
       <p:sp>
         <p:nvSpPr>
-          <p:cNvPr id="13" name="TextBox 12"/>
+          <p:cNvPr id="14" name="TextBox 13"/>
           <p:cNvSpPr txBox="1"/>
           <p:nvPr/>
         </p:nvSpPr>
         <p:spPr>
           <a:xfrm>
-            <a:off x="6574536" y="3913632"/>
+            <a:off x="1179576" y="4626864"/>
             <a:ext cx="5120640" cy="548640"/>
           </a:xfrm>
           <a:prstGeom prst="rect">
@@ -11211,20 +12688,20 @@
                 </a:solidFill>
                 <a:latin typeface="Libre Baskerville"/>
               </a:rPr>
-              <a:t>Skyrocket your energy</a:t>
-            </a:r>
-          </a:p>
-        </p:txBody>
-      </p:sp>
-      <p:sp>
-        <p:nvSpPr>
-          <p:cNvPr id="14" name="Oval 13"/>
+              <a:t>Look and feel amazing by summer</a:t>
+            </a:r>
+          </a:p>
+        </p:txBody>
+      </p:sp>
+      <p:sp>
+        <p:nvSpPr>
+          <p:cNvPr id="15" name="Oval 14"/>
           <p:cNvSpPr/>
           <p:nvPr/>
         </p:nvSpPr>
         <p:spPr>
           <a:xfrm>
-            <a:off x="868680" y="4741164"/>
+            <a:off x="6263640" y="4741164"/>
             <a:ext cx="118872" cy="118872"/>
           </a:xfrm>
           <a:prstGeom prst="ellipse">
@@ -11262,90 +12739,7 @@
       </p:sp>
       <p:sp>
         <p:nvSpPr>
-          <p:cNvPr id="15" name="TextBox 14"/>
-          <p:cNvSpPr txBox="1"/>
-          <p:nvPr/>
-        </p:nvSpPr>
-        <p:spPr>
-          <a:xfrm>
-            <a:off x="1179576" y="4626864"/>
-            <a:ext cx="5120640" cy="548640"/>
-          </a:xfrm>
-          <a:prstGeom prst="rect">
-            <a:avLst/>
-          </a:prstGeom>
-          <a:noFill/>
-        </p:spPr>
-        <p:txBody>
-          <a:bodyPr wrap="square" lIns="0" rIns="0" tIns="0" bIns="0" anchor="t">
-            <a:spAutoFit/>
-          </a:bodyPr>
-          <a:lstStyle/>
-          <a:p>
-            <a:pPr algn="l">
-              <a:lnSpc>
-                <a:spcPct val="120000"/>
-              </a:lnSpc>
-            </a:pPr>
-            <a:r>
-              <a:rPr sz="2000" b="0" i="0">
-                <a:solidFill>
-                  <a:srgbClr val="0E2746"/>
-                </a:solidFill>
-                <a:latin typeface="Libre Baskerville"/>
-              </a:rPr>
-              <a:t>Look and feel amazing by summer</a:t>
-            </a:r>
-          </a:p>
-        </p:txBody>
-      </p:sp>
-      <p:sp>
-        <p:nvSpPr>
-          <p:cNvPr id="16" name="Oval 15"/>
-          <p:cNvSpPr/>
-          <p:nvPr/>
-        </p:nvSpPr>
-        <p:spPr>
-          <a:xfrm>
-            <a:off x="6263640" y="4741164"/>
-            <a:ext cx="118872" cy="118872"/>
-          </a:xfrm>
-          <a:prstGeom prst="ellipse">
-            <a:avLst/>
-          </a:prstGeom>
-          <a:solidFill>
-            <a:srgbClr val="D97757"/>
-          </a:solidFill>
-          <a:ln>
-            <a:noFill/>
-          </a:ln>
-          <a:effectLst/>
-        </p:spPr>
-        <p:style>
-          <a:lnRef idx="1">
-            <a:schemeClr val="accent1"/>
-          </a:lnRef>
-          <a:fillRef idx="3">
-            <a:schemeClr val="accent1"/>
-          </a:fillRef>
-          <a:effectRef idx="2">
-            <a:schemeClr val="accent1"/>
-          </a:effectRef>
-          <a:fontRef idx="minor">
-            <a:schemeClr val="lt1"/>
-          </a:fontRef>
-        </p:style>
-        <p:txBody>
-          <a:bodyPr rtlCol="0" anchor="ctr"/>
-          <a:lstStyle/>
-          <a:p>
-            <a:pPr algn="ctr"/>
-          </a:p>
-        </p:txBody>
-      </p:sp>
-      <p:sp>
-        <p:nvSpPr>
-          <p:cNvPr id="17" name="TextBox 16"/>
+          <p:cNvPr id="16" name="TextBox 15"/>
           <p:cNvSpPr txBox="1"/>
           <p:nvPr/>
         </p:nvSpPr>
@@ -11485,51 +12879,7 @@
       </p:sp>
       <p:sp>
         <p:nvSpPr>
-          <p:cNvPr id="4" name="Rectangle 3"/>
-          <p:cNvSpPr/>
-          <p:nvPr/>
-        </p:nvSpPr>
-        <p:spPr>
-          <a:xfrm>
-            <a:off x="822960" y="1207008"/>
-            <a:ext cx="1463040" cy="50292"/>
-          </a:xfrm>
-          <a:prstGeom prst="rect">
-            <a:avLst/>
-          </a:prstGeom>
-          <a:solidFill>
-            <a:srgbClr val="D97757"/>
-          </a:solidFill>
-          <a:ln>
-            <a:noFill/>
-          </a:ln>
-          <a:effectLst/>
-        </p:spPr>
-        <p:style>
-          <a:lnRef idx="1">
-            <a:schemeClr val="accent1"/>
-          </a:lnRef>
-          <a:fillRef idx="3">
-            <a:schemeClr val="accent1"/>
-          </a:fillRef>
-          <a:effectRef idx="2">
-            <a:schemeClr val="accent1"/>
-          </a:effectRef>
-          <a:fontRef idx="minor">
-            <a:schemeClr val="lt1"/>
-          </a:fontRef>
-        </p:style>
-        <p:txBody>
-          <a:bodyPr rtlCol="0" anchor="ctr"/>
-          <a:lstStyle/>
-          <a:p>
-            <a:pPr algn="ctr"/>
-          </a:p>
-        </p:txBody>
-      </p:sp>
-      <p:sp>
-        <p:nvSpPr>
-          <p:cNvPr id="5" name="TextBox 4"/>
+          <p:cNvPr id="4" name="TextBox 3"/>
           <p:cNvSpPr txBox="1"/>
           <p:nvPr/>
         </p:nvSpPr>
@@ -11586,7 +12936,7 @@
       </p:sp>
       <p:sp>
         <p:nvSpPr>
-          <p:cNvPr id="6" name="TextBox 5"/>
+          <p:cNvPr id="5" name="TextBox 4"/>
           <p:cNvSpPr txBox="1"/>
           <p:nvPr/>
         </p:nvSpPr>
@@ -12345,51 +13695,7 @@
       </p:sp>
       <p:sp>
         <p:nvSpPr>
-          <p:cNvPr id="5" name="Rectangle 4"/>
-          <p:cNvSpPr/>
-          <p:nvPr/>
-        </p:nvSpPr>
-        <p:spPr>
-          <a:xfrm>
-            <a:off x="822960" y="1207008"/>
-            <a:ext cx="1463040" cy="50292"/>
-          </a:xfrm>
-          <a:prstGeom prst="rect">
-            <a:avLst/>
-          </a:prstGeom>
-          <a:solidFill>
-            <a:srgbClr val="D97757"/>
-          </a:solidFill>
-          <a:ln>
-            <a:noFill/>
-          </a:ln>
-          <a:effectLst/>
-        </p:spPr>
-        <p:style>
-          <a:lnRef idx="1">
-            <a:schemeClr val="accent1"/>
-          </a:lnRef>
-          <a:fillRef idx="3">
-            <a:schemeClr val="accent1"/>
-          </a:fillRef>
-          <a:effectRef idx="2">
-            <a:schemeClr val="accent1"/>
-          </a:effectRef>
-          <a:fontRef idx="minor">
-            <a:schemeClr val="lt1"/>
-          </a:fontRef>
-        </p:style>
-        <p:txBody>
-          <a:bodyPr rtlCol="0" anchor="ctr"/>
-          <a:lstStyle/>
-          <a:p>
-            <a:pPr algn="ctr"/>
-          </a:p>
-        </p:txBody>
-      </p:sp>
-      <p:sp>
-        <p:nvSpPr>
-          <p:cNvPr id="6" name="TextBox 5"/>
+          <p:cNvPr id="5" name="TextBox 4"/>
           <p:cNvSpPr txBox="1"/>
           <p:nvPr/>
         </p:nvSpPr>
@@ -12428,7 +13734,7 @@
       </p:sp>
       <p:sp>
         <p:nvSpPr>
-          <p:cNvPr id="7" name="TextBox 6"/>
+          <p:cNvPr id="6" name="TextBox 5"/>
           <p:cNvSpPr txBox="1"/>
           <p:nvPr/>
         </p:nvSpPr>
@@ -12467,7 +13773,7 @@
       </p:sp>
       <p:sp>
         <p:nvSpPr>
-          <p:cNvPr id="8" name="TextBox 7"/>
+          <p:cNvPr id="7" name="TextBox 6"/>
           <p:cNvSpPr txBox="1"/>
           <p:nvPr/>
         </p:nvSpPr>
@@ -12668,51 +13974,7 @@
       </p:sp>
       <p:sp>
         <p:nvSpPr>
-          <p:cNvPr id="5" name="Rectangle 4"/>
-          <p:cNvSpPr/>
-          <p:nvPr/>
-        </p:nvSpPr>
-        <p:spPr>
-          <a:xfrm>
-            <a:off x="822960" y="1207008"/>
-            <a:ext cx="1463040" cy="50292"/>
-          </a:xfrm>
-          <a:prstGeom prst="rect">
-            <a:avLst/>
-          </a:prstGeom>
-          <a:solidFill>
-            <a:srgbClr val="D97757"/>
-          </a:solidFill>
-          <a:ln>
-            <a:noFill/>
-          </a:ln>
-          <a:effectLst/>
-        </p:spPr>
-        <p:style>
-          <a:lnRef idx="1">
-            <a:schemeClr val="accent1"/>
-          </a:lnRef>
-          <a:fillRef idx="3">
-            <a:schemeClr val="accent1"/>
-          </a:fillRef>
-          <a:effectRef idx="2">
-            <a:schemeClr val="accent1"/>
-          </a:effectRef>
-          <a:fontRef idx="minor">
-            <a:schemeClr val="lt1"/>
-          </a:fontRef>
-        </p:style>
-        <p:txBody>
-          <a:bodyPr rtlCol="0" anchor="ctr"/>
-          <a:lstStyle/>
-          <a:p>
-            <a:pPr algn="ctr"/>
-          </a:p>
-        </p:txBody>
-      </p:sp>
-      <p:sp>
-        <p:nvSpPr>
-          <p:cNvPr id="6" name="TextBox 5"/>
+          <p:cNvPr id="5" name="TextBox 4"/>
           <p:cNvSpPr txBox="1"/>
           <p:nvPr/>
         </p:nvSpPr>
@@ -12751,7 +14013,7 @@
       </p:sp>
       <p:sp>
         <p:nvSpPr>
-          <p:cNvPr id="7" name="TextBox 6"/>
+          <p:cNvPr id="6" name="TextBox 5"/>
           <p:cNvSpPr txBox="1"/>
           <p:nvPr/>
         </p:nvSpPr>
@@ -12790,7 +14052,7 @@
       </p:sp>
       <p:sp>
         <p:nvSpPr>
-          <p:cNvPr id="8" name="TextBox 7"/>
+          <p:cNvPr id="7" name="TextBox 6"/>
           <p:cNvSpPr txBox="1"/>
           <p:nvPr/>
         </p:nvSpPr>
@@ -12991,51 +14253,7 @@
       </p:sp>
       <p:sp>
         <p:nvSpPr>
-          <p:cNvPr id="5" name="Rectangle 4"/>
-          <p:cNvSpPr/>
-          <p:nvPr/>
-        </p:nvSpPr>
-        <p:spPr>
-          <a:xfrm>
-            <a:off x="822960" y="1207008"/>
-            <a:ext cx="1463040" cy="50292"/>
-          </a:xfrm>
-          <a:prstGeom prst="rect">
-            <a:avLst/>
-          </a:prstGeom>
-          <a:solidFill>
-            <a:srgbClr val="D97757"/>
-          </a:solidFill>
-          <a:ln>
-            <a:noFill/>
-          </a:ln>
-          <a:effectLst/>
-        </p:spPr>
-        <p:style>
-          <a:lnRef idx="1">
-            <a:schemeClr val="accent1"/>
-          </a:lnRef>
-          <a:fillRef idx="3">
-            <a:schemeClr val="accent1"/>
-          </a:fillRef>
-          <a:effectRef idx="2">
-            <a:schemeClr val="accent1"/>
-          </a:effectRef>
-          <a:fontRef idx="minor">
-            <a:schemeClr val="lt1"/>
-          </a:fontRef>
-        </p:style>
-        <p:txBody>
-          <a:bodyPr rtlCol="0" anchor="ctr"/>
-          <a:lstStyle/>
-          <a:p>
-            <a:pPr algn="ctr"/>
-          </a:p>
-        </p:txBody>
-      </p:sp>
-      <p:sp>
-        <p:nvSpPr>
-          <p:cNvPr id="6" name="TextBox 5"/>
+          <p:cNvPr id="5" name="TextBox 4"/>
           <p:cNvSpPr txBox="1"/>
           <p:nvPr/>
         </p:nvSpPr>
@@ -13074,7 +14292,7 @@
       </p:sp>
       <p:sp>
         <p:nvSpPr>
-          <p:cNvPr id="7" name="TextBox 6"/>
+          <p:cNvPr id="6" name="TextBox 5"/>
           <p:cNvSpPr txBox="1"/>
           <p:nvPr/>
         </p:nvSpPr>
@@ -13113,7 +14331,7 @@
       </p:sp>
       <p:sp>
         <p:nvSpPr>
-          <p:cNvPr id="8" name="TextBox 7"/>
+          <p:cNvPr id="7" name="TextBox 6"/>
           <p:cNvSpPr txBox="1"/>
           <p:nvPr/>
         </p:nvSpPr>
